--- a/cursos/recursos/formacion-ajedrez/07-talleres-y-simulacros-de-arbitraje.pptx
+++ b/cursos/recursos/formacion-ajedrez/07-talleres-y-simulacros-de-arbitraje.pptx
@@ -10,6 +10,20 @@
     <p:sldId id="258" r:id="rId9"/>
     <p:sldId id="259" r:id="rId10"/>
     <p:sldId id="260" r:id="rId11"/>
+    <p:sldId id="261" r:id="rId12"/>
+    <p:sldId id="262" r:id="rId13"/>
+    <p:sldId id="263" r:id="rId14"/>
+    <p:sldId id="264" r:id="rId15"/>
+    <p:sldId id="265" r:id="rId16"/>
+    <p:sldId id="266" r:id="rId17"/>
+    <p:sldId id="267" r:id="rId18"/>
+    <p:sldId id="268" r:id="rId19"/>
+    <p:sldId id="269" r:id="rId20"/>
+    <p:sldId id="270" r:id="rId21"/>
+    <p:sldId id="271" r:id="rId22"/>
+    <p:sldId id="272" r:id="rId23"/>
+    <p:sldId id="273" r:id="rId24"/>
+    <p:sldId id="274" r:id="rId25"/>
   </p:sldIdLst>
   <p:sldSz cx="12191695" cy="6858000" type="screen4x3"/>
   <p:notesSz cx="6858000" cy="9144000"/>
@@ -3481,6 +3495,2254 @@
 </p:sld>
 </file>
 
+<file path=ppt/slides/slide10.xml><?xml version="1.0" encoding="utf-8"?>
+<p:sld xmlns:a="http://schemas.openxmlformats.org/drawingml/2006/main" xmlns:p="http://schemas.openxmlformats.org/presentationml/2006/main" xmlns:r="http://schemas.openxmlformats.org/officeDocument/2006/relationships">
+  <p:cSld>
+    <p:spTree>
+      <p:nvGrpSpPr>
+        <p:cNvPr id="1" name=""/>
+        <p:cNvGrpSpPr/>
+        <p:nvPr/>
+      </p:nvGrpSpPr>
+      <p:grpSpPr/>
+      <p:sp>
+        <p:nvSpPr>
+          <p:cNvPr id="2" name="Rectangle 1"/>
+          <p:cNvSpPr/>
+          <p:nvPr/>
+        </p:nvSpPr>
+        <p:spPr>
+          <a:xfrm>
+            <a:off x="0" y="0"/>
+            <a:ext cx="12191695" cy="6858000"/>
+          </a:xfrm>
+          <a:prstGeom prst="rect">
+            <a:avLst/>
+          </a:prstGeom>
+          <a:solidFill>
+            <a:srgbClr val="102A43"/>
+          </a:solidFill>
+          <a:ln>
+            <a:noFill/>
+          </a:ln>
+          <a:effectLst/>
+        </p:spPr>
+        <p:style>
+          <a:lnRef idx="1">
+            <a:schemeClr val="accent1"/>
+          </a:lnRef>
+          <a:fillRef idx="3">
+            <a:schemeClr val="accent1"/>
+          </a:fillRef>
+          <a:effectRef idx="2">
+            <a:schemeClr val="accent1"/>
+          </a:effectRef>
+          <a:fontRef idx="minor">
+            <a:schemeClr val="lt1"/>
+          </a:fontRef>
+        </p:style>
+        <p:txBody>
+          <a:bodyPr rtlCol="0" anchor="ctr"/>
+          <a:lstStyle/>
+          <a:p>
+            <a:pPr algn="ctr"/>
+          </a:p>
+        </p:txBody>
+      </p:sp>
+      <p:sp>
+        <p:nvSpPr>
+          <p:cNvPr id="3" name="TextBox 2"/>
+          <p:cNvSpPr txBox="1"/>
+          <p:nvPr/>
+        </p:nvSpPr>
+        <p:spPr>
+          <a:xfrm>
+            <a:off x="548640" y="548640"/>
+            <a:ext cx="11064240" cy="457200"/>
+          </a:xfrm>
+          <a:prstGeom prst="rect">
+            <a:avLst/>
+          </a:prstGeom>
+          <a:noFill/>
+        </p:spPr>
+        <p:txBody>
+          <a:bodyPr wrap="square">
+            <a:spAutoFit/>
+          </a:bodyPr>
+          <a:lstStyle/>
+          <a:p>
+            <a:r>
+              <a:rPr sz="1400" b="1">
+                <a:solidFill>
+                  <a:srgbClr val="F0B429"/>
+                </a:solidFill>
+                <a:latin typeface="Calibri"/>
+              </a:rPr>
+              <a:t>CASO 2 · DECISIÓN</a:t>
+            </a:r>
+          </a:p>
+        </p:txBody>
+      </p:sp>
+      <p:sp>
+        <p:nvSpPr>
+          <p:cNvPr id="4" name="TextBox 3"/>
+          <p:cNvSpPr txBox="1"/>
+          <p:nvPr/>
+        </p:nvSpPr>
+        <p:spPr>
+          <a:xfrm>
+            <a:off x="548640" y="1051560"/>
+            <a:ext cx="11064240" cy="822960"/>
+          </a:xfrm>
+          <a:prstGeom prst="rect">
+            <a:avLst/>
+          </a:prstGeom>
+          <a:noFill/>
+        </p:spPr>
+        <p:txBody>
+          <a:bodyPr wrap="square">
+            <a:spAutoFit/>
+          </a:bodyPr>
+          <a:lstStyle/>
+          <a:p>
+            <a:r>
+              <a:rPr sz="2600" b="1">
+                <a:solidFill>
+                  <a:srgbClr val="FFFFFF"/>
+                </a:solidFill>
+                <a:latin typeface="Cambria"/>
+              </a:rPr>
+              <a:t>Guion B: reclamo de triple repetición</a:t>
+            </a:r>
+          </a:p>
+        </p:txBody>
+      </p:sp>
+      <p:sp>
+        <p:nvSpPr>
+          <p:cNvPr id="5" name="TextBox 4"/>
+          <p:cNvSpPr txBox="1"/>
+          <p:nvPr/>
+        </p:nvSpPr>
+        <p:spPr>
+          <a:xfrm>
+            <a:off x="548640" y="2103120"/>
+            <a:ext cx="11064240" cy="3931920"/>
+          </a:xfrm>
+          <a:prstGeom prst="rect">
+            <a:avLst/>
+          </a:prstGeom>
+          <a:noFill/>
+        </p:spPr>
+        <p:txBody>
+          <a:bodyPr wrap="square">
+            <a:spAutoFit/>
+          </a:bodyPr>
+          <a:lstStyle/>
+          <a:p>
+            <a:r>
+              <a:rPr sz="2000" b="0">
+                <a:solidFill>
+                  <a:srgbClr val="CADCFC"/>
+                </a:solidFill>
+                <a:latin typeface="Calibri"/>
+              </a:rPr>
+              <a:t>Correcto si anotó la jugada sin hacerla y llamó al árbitro sin tocar ninguna pieza. Se verifica con las planillas; si el reclamo es correcto, son tablas de inmediato. Si no lo es, el reclamo cuenta como oferta de tablas y, en ritmo clásico, el rival recibe dos minutos.</a:t>
+            </a:r>
+          </a:p>
+        </p:txBody>
+      </p:sp>
+      <p:sp>
+        <p:nvSpPr>
+          <p:cNvPr id="6" name="TextBox 5"/>
+          <p:cNvSpPr txBox="1"/>
+          <p:nvPr/>
+        </p:nvSpPr>
+        <p:spPr>
+          <a:xfrm>
+            <a:off x="548640" y="6263640"/>
+            <a:ext cx="11064240" cy="365760"/>
+          </a:xfrm>
+          <a:prstGeom prst="rect">
+            <a:avLst/>
+          </a:prstGeom>
+          <a:noFill/>
+        </p:spPr>
+        <p:txBody>
+          <a:bodyPr wrap="square">
+            <a:spAutoFit/>
+          </a:bodyPr>
+          <a:lstStyle/>
+          <a:p>
+            <a:r>
+              <a:rPr sz="1100" b="0">
+                <a:solidFill>
+                  <a:srgbClr val="9FB3C8"/>
+                </a:solidFill>
+                <a:latin typeface="Calibri"/>
+              </a:rPr>
+              <a:t>Fuente: Leyes del Ajedrez 2023 (Handbook E.I.01), art. 9.1, 9.2, 9.4 y 9.5</a:t>
+            </a:r>
+          </a:p>
+        </p:txBody>
+      </p:sp>
+    </p:spTree>
+  </p:cSld>
+  <p:clrMapOvr>
+    <a:masterClrMapping/>
+  </p:clrMapOvr>
+</p:sld>
+</file>
+
+<file path=ppt/slides/slide11.xml><?xml version="1.0" encoding="utf-8"?>
+<p:sld xmlns:a="http://schemas.openxmlformats.org/drawingml/2006/main" xmlns:p="http://schemas.openxmlformats.org/presentationml/2006/main" xmlns:r="http://schemas.openxmlformats.org/officeDocument/2006/relationships">
+  <p:cSld>
+    <p:spTree>
+      <p:nvGrpSpPr>
+        <p:cNvPr id="1" name=""/>
+        <p:cNvGrpSpPr/>
+        <p:nvPr/>
+      </p:nvGrpSpPr>
+      <p:grpSpPr/>
+      <p:sp>
+        <p:nvSpPr>
+          <p:cNvPr id="2" name="Oval 1"/>
+          <p:cNvSpPr/>
+          <p:nvPr/>
+        </p:nvSpPr>
+        <p:spPr>
+          <a:xfrm>
+            <a:off x="548640" y="502920"/>
+            <a:ext cx="502920" cy="502920"/>
+          </a:xfrm>
+          <a:prstGeom prst="ellipse">
+            <a:avLst/>
+          </a:prstGeom>
+          <a:solidFill>
+            <a:srgbClr val="DE911D"/>
+          </a:solidFill>
+          <a:ln>
+            <a:noFill/>
+          </a:ln>
+          <a:effectLst/>
+        </p:spPr>
+        <p:style>
+          <a:lnRef idx="1">
+            <a:schemeClr val="accent1"/>
+          </a:lnRef>
+          <a:fillRef idx="3">
+            <a:schemeClr val="accent1"/>
+          </a:fillRef>
+          <a:effectRef idx="2">
+            <a:schemeClr val="accent1"/>
+          </a:effectRef>
+          <a:fontRef idx="minor">
+            <a:schemeClr val="lt1"/>
+          </a:fontRef>
+        </p:style>
+        <p:txBody>
+          <a:bodyPr rtlCol="0" anchor="ctr"/>
+          <a:lstStyle/>
+          <a:p>
+            <a:pPr algn="ctr"/>
+          </a:p>
+        </p:txBody>
+      </p:sp>
+      <p:sp>
+        <p:nvSpPr>
+          <p:cNvPr id="3" name="TextBox 2"/>
+          <p:cNvSpPr txBox="1"/>
+          <p:nvPr/>
+        </p:nvSpPr>
+        <p:spPr>
+          <a:xfrm>
+            <a:off x="548640" y="502920"/>
+            <a:ext cx="502920" cy="502920"/>
+          </a:xfrm>
+          <a:prstGeom prst="rect">
+            <a:avLst/>
+          </a:prstGeom>
+          <a:noFill/>
+        </p:spPr>
+        <p:txBody>
+          <a:bodyPr wrap="square">
+            <a:spAutoFit/>
+          </a:bodyPr>
+          <a:lstStyle/>
+          <a:p>
+            <a:pPr algn="ctr"/>
+            <a:r>
+              <a:rPr sz="2000" b="0">
+                <a:solidFill>
+                  <a:srgbClr val="0A1F33"/>
+                </a:solidFill>
+                <a:latin typeface="Calibri"/>
+              </a:rPr>
+              <a:t>?</a:t>
+            </a:r>
+          </a:p>
+        </p:txBody>
+      </p:sp>
+      <p:sp>
+        <p:nvSpPr>
+          <p:cNvPr id="4" name="TextBox 3"/>
+          <p:cNvSpPr txBox="1"/>
+          <p:nvPr/>
+        </p:nvSpPr>
+        <p:spPr>
+          <a:xfrm>
+            <a:off x="1234440" y="530352"/>
+            <a:ext cx="9144000" cy="457200"/>
+          </a:xfrm>
+          <a:prstGeom prst="rect">
+            <a:avLst/>
+          </a:prstGeom>
+          <a:noFill/>
+        </p:spPr>
+        <p:txBody>
+          <a:bodyPr wrap="square">
+            <a:spAutoFit/>
+          </a:bodyPr>
+          <a:lstStyle/>
+          <a:p>
+            <a:r>
+              <a:rPr sz="1400" b="1">
+                <a:solidFill>
+                  <a:srgbClr val="DE911D"/>
+                </a:solidFill>
+                <a:latin typeface="Calibri"/>
+              </a:rPr>
+              <a:t>CASO 3 · ¿QUÉ DECIDE LA PERSONA ÁRBITRA?</a:t>
+            </a:r>
+          </a:p>
+        </p:txBody>
+      </p:sp>
+      <p:sp>
+        <p:nvSpPr>
+          <p:cNvPr id="5" name="TextBox 4"/>
+          <p:cNvSpPr txBox="1"/>
+          <p:nvPr/>
+        </p:nvSpPr>
+        <p:spPr>
+          <a:xfrm>
+            <a:off x="548640" y="1051560"/>
+            <a:ext cx="11064240" cy="822960"/>
+          </a:xfrm>
+          <a:prstGeom prst="rect">
+            <a:avLst/>
+          </a:prstGeom>
+          <a:noFill/>
+        </p:spPr>
+        <p:txBody>
+          <a:bodyPr wrap="square">
+            <a:spAutoFit/>
+          </a:bodyPr>
+          <a:lstStyle/>
+          <a:p>
+            <a:r>
+              <a:rPr sz="2600" b="1">
+                <a:solidFill>
+                  <a:srgbClr val="0A1F33"/>
+                </a:solidFill>
+                <a:latin typeface="Cambria"/>
+              </a:rPr>
+              <a:t>Guion C: la oferta de tablas en el turno del rival</a:t>
+            </a:r>
+          </a:p>
+        </p:txBody>
+      </p:sp>
+      <p:sp>
+        <p:nvSpPr>
+          <p:cNvPr id="6" name="Rectangle 5"/>
+          <p:cNvSpPr/>
+          <p:nvPr/>
+        </p:nvSpPr>
+        <p:spPr>
+          <a:xfrm>
+            <a:off x="548640" y="1965960"/>
+            <a:ext cx="11064240" cy="4206240"/>
+          </a:xfrm>
+          <a:prstGeom prst="rect">
+            <a:avLst/>
+          </a:prstGeom>
+          <a:solidFill>
+            <a:srgbClr val="F0F4F8"/>
+          </a:solidFill>
+          <a:ln>
+            <a:noFill/>
+          </a:ln>
+          <a:effectLst/>
+        </p:spPr>
+        <p:style>
+          <a:lnRef idx="1">
+            <a:schemeClr val="accent1"/>
+          </a:lnRef>
+          <a:fillRef idx="3">
+            <a:schemeClr val="accent1"/>
+          </a:fillRef>
+          <a:effectRef idx="2">
+            <a:schemeClr val="accent1"/>
+          </a:effectRef>
+          <a:fontRef idx="minor">
+            <a:schemeClr val="lt1"/>
+          </a:fontRef>
+        </p:style>
+        <p:txBody>
+          <a:bodyPr rtlCol="0" anchor="ctr"/>
+          <a:lstStyle/>
+          <a:p>
+            <a:pPr algn="ctr"/>
+          </a:p>
+        </p:txBody>
+      </p:sp>
+      <p:sp>
+        <p:nvSpPr>
+          <p:cNvPr id="7" name="TextBox 6"/>
+          <p:cNvSpPr txBox="1"/>
+          <p:nvPr/>
+        </p:nvSpPr>
+        <p:spPr>
+          <a:xfrm>
+            <a:off x="914400" y="2240280"/>
+            <a:ext cx="10332720" cy="3749039"/>
+          </a:xfrm>
+          <a:prstGeom prst="rect">
+            <a:avLst/>
+          </a:prstGeom>
+          <a:noFill/>
+        </p:spPr>
+        <p:txBody>
+          <a:bodyPr wrap="square">
+            <a:spAutoFit/>
+          </a:bodyPr>
+          <a:lstStyle/>
+          <a:p>
+            <a:r>
+              <a:rPr sz="2000" b="0">
+                <a:solidFill>
+                  <a:srgbClr val="334E68"/>
+                </a:solidFill>
+                <a:latin typeface="Calibri"/>
+              </a:rPr>
+              <a:t>Un jugador ofrece tablas mientras corre el reloj de su rival.</a:t>
+            </a:r>
+          </a:p>
+        </p:txBody>
+      </p:sp>
+    </p:spTree>
+  </p:cSld>
+  <p:clrMapOvr>
+    <a:masterClrMapping/>
+  </p:clrMapOvr>
+</p:sld>
+</file>
+
+<file path=ppt/slides/slide12.xml><?xml version="1.0" encoding="utf-8"?>
+<p:sld xmlns:a="http://schemas.openxmlformats.org/drawingml/2006/main" xmlns:p="http://schemas.openxmlformats.org/presentationml/2006/main" xmlns:r="http://schemas.openxmlformats.org/officeDocument/2006/relationships">
+  <p:cSld>
+    <p:spTree>
+      <p:nvGrpSpPr>
+        <p:cNvPr id="1" name=""/>
+        <p:cNvGrpSpPr/>
+        <p:nvPr/>
+      </p:nvGrpSpPr>
+      <p:grpSpPr/>
+      <p:sp>
+        <p:nvSpPr>
+          <p:cNvPr id="2" name="Rectangle 1"/>
+          <p:cNvSpPr/>
+          <p:nvPr/>
+        </p:nvSpPr>
+        <p:spPr>
+          <a:xfrm>
+            <a:off x="0" y="0"/>
+            <a:ext cx="12191695" cy="6858000"/>
+          </a:xfrm>
+          <a:prstGeom prst="rect">
+            <a:avLst/>
+          </a:prstGeom>
+          <a:solidFill>
+            <a:srgbClr val="102A43"/>
+          </a:solidFill>
+          <a:ln>
+            <a:noFill/>
+          </a:ln>
+          <a:effectLst/>
+        </p:spPr>
+        <p:style>
+          <a:lnRef idx="1">
+            <a:schemeClr val="accent1"/>
+          </a:lnRef>
+          <a:fillRef idx="3">
+            <a:schemeClr val="accent1"/>
+          </a:fillRef>
+          <a:effectRef idx="2">
+            <a:schemeClr val="accent1"/>
+          </a:effectRef>
+          <a:fontRef idx="minor">
+            <a:schemeClr val="lt1"/>
+          </a:fontRef>
+        </p:style>
+        <p:txBody>
+          <a:bodyPr rtlCol="0" anchor="ctr"/>
+          <a:lstStyle/>
+          <a:p>
+            <a:pPr algn="ctr"/>
+          </a:p>
+        </p:txBody>
+      </p:sp>
+      <p:sp>
+        <p:nvSpPr>
+          <p:cNvPr id="3" name="TextBox 2"/>
+          <p:cNvSpPr txBox="1"/>
+          <p:nvPr/>
+        </p:nvSpPr>
+        <p:spPr>
+          <a:xfrm>
+            <a:off x="548640" y="548640"/>
+            <a:ext cx="11064240" cy="457200"/>
+          </a:xfrm>
+          <a:prstGeom prst="rect">
+            <a:avLst/>
+          </a:prstGeom>
+          <a:noFill/>
+        </p:spPr>
+        <p:txBody>
+          <a:bodyPr wrap="square">
+            <a:spAutoFit/>
+          </a:bodyPr>
+          <a:lstStyle/>
+          <a:p>
+            <a:r>
+              <a:rPr sz="1400" b="1">
+                <a:solidFill>
+                  <a:srgbClr val="F0B429"/>
+                </a:solidFill>
+                <a:latin typeface="Calibri"/>
+              </a:rPr>
+              <a:t>CASO 3 · DECISIÓN</a:t>
+            </a:r>
+          </a:p>
+        </p:txBody>
+      </p:sp>
+      <p:sp>
+        <p:nvSpPr>
+          <p:cNvPr id="4" name="TextBox 3"/>
+          <p:cNvSpPr txBox="1"/>
+          <p:nvPr/>
+        </p:nvSpPr>
+        <p:spPr>
+          <a:xfrm>
+            <a:off x="548640" y="1051560"/>
+            <a:ext cx="11064240" cy="822960"/>
+          </a:xfrm>
+          <a:prstGeom prst="rect">
+            <a:avLst/>
+          </a:prstGeom>
+          <a:noFill/>
+        </p:spPr>
+        <p:txBody>
+          <a:bodyPr wrap="square">
+            <a:spAutoFit/>
+          </a:bodyPr>
+          <a:lstStyle/>
+          <a:p>
+            <a:r>
+              <a:rPr sz="2600" b="1">
+                <a:solidFill>
+                  <a:srgbClr val="FFFFFF"/>
+                </a:solidFill>
+                <a:latin typeface="Cambria"/>
+              </a:rPr>
+              <a:t>Guion C: la oferta de tablas en el turno del rival</a:t>
+            </a:r>
+          </a:p>
+        </p:txBody>
+      </p:sp>
+      <p:sp>
+        <p:nvSpPr>
+          <p:cNvPr id="5" name="TextBox 4"/>
+          <p:cNvSpPr txBox="1"/>
+          <p:nvPr/>
+        </p:nvSpPr>
+        <p:spPr>
+          <a:xfrm>
+            <a:off x="548640" y="2103120"/>
+            <a:ext cx="11064240" cy="3931920"/>
+          </a:xfrm>
+          <a:prstGeom prst="rect">
+            <a:avLst/>
+          </a:prstGeom>
+          <a:noFill/>
+        </p:spPr>
+        <p:txBody>
+          <a:bodyPr wrap="square">
+            <a:spAutoFit/>
+          </a:bodyPr>
+          <a:lstStyle/>
+          <a:p>
+            <a:r>
+              <a:rPr sz="2000" b="0">
+                <a:solidFill>
+                  <a:srgbClr val="CADCFC"/>
+                </a:solidFill>
+                <a:latin typeface="Calibri"/>
+              </a:rPr>
+              <a:t>La oferta es válida, pero hacerla en el turno del rival es una molestia: se le recuerda el procedimiento correcto (jugada, oferta y reloj) y, si se repite, se sanciona según el art. 12.9.</a:t>
+            </a:r>
+          </a:p>
+        </p:txBody>
+      </p:sp>
+      <p:sp>
+        <p:nvSpPr>
+          <p:cNvPr id="6" name="TextBox 5"/>
+          <p:cNvSpPr txBox="1"/>
+          <p:nvPr/>
+        </p:nvSpPr>
+        <p:spPr>
+          <a:xfrm>
+            <a:off x="548640" y="6263640"/>
+            <a:ext cx="11064240" cy="365760"/>
+          </a:xfrm>
+          <a:prstGeom prst="rect">
+            <a:avLst/>
+          </a:prstGeom>
+          <a:noFill/>
+        </p:spPr>
+        <p:txBody>
+          <a:bodyPr wrap="square">
+            <a:spAutoFit/>
+          </a:bodyPr>
+          <a:lstStyle/>
+          <a:p>
+            <a:r>
+              <a:rPr sz="1100" b="0">
+                <a:solidFill>
+                  <a:srgbClr val="9FB3C8"/>
+                </a:solidFill>
+                <a:latin typeface="Calibri"/>
+              </a:rPr>
+              <a:t>Fuente: Leyes del Ajedrez 2023 (Handbook E.I.01), art. 9.1.2 y 11.5</a:t>
+            </a:r>
+          </a:p>
+        </p:txBody>
+      </p:sp>
+    </p:spTree>
+  </p:cSld>
+  <p:clrMapOvr>
+    <a:masterClrMapping/>
+  </p:clrMapOvr>
+</p:sld>
+</file>
+
+<file path=ppt/slides/slide13.xml><?xml version="1.0" encoding="utf-8"?>
+<p:sld xmlns:a="http://schemas.openxmlformats.org/drawingml/2006/main" xmlns:p="http://schemas.openxmlformats.org/presentationml/2006/main" xmlns:r="http://schemas.openxmlformats.org/officeDocument/2006/relationships">
+  <p:cSld>
+    <p:spTree>
+      <p:nvGrpSpPr>
+        <p:cNvPr id="1" name=""/>
+        <p:cNvGrpSpPr/>
+        <p:nvPr/>
+      </p:nvGrpSpPr>
+      <p:grpSpPr/>
+      <p:sp>
+        <p:nvSpPr>
+          <p:cNvPr id="2" name="Oval 1"/>
+          <p:cNvSpPr/>
+          <p:nvPr/>
+        </p:nvSpPr>
+        <p:spPr>
+          <a:xfrm>
+            <a:off x="548640" y="502920"/>
+            <a:ext cx="502920" cy="502920"/>
+          </a:xfrm>
+          <a:prstGeom prst="ellipse">
+            <a:avLst/>
+          </a:prstGeom>
+          <a:solidFill>
+            <a:srgbClr val="DE911D"/>
+          </a:solidFill>
+          <a:ln>
+            <a:noFill/>
+          </a:ln>
+          <a:effectLst/>
+        </p:spPr>
+        <p:style>
+          <a:lnRef idx="1">
+            <a:schemeClr val="accent1"/>
+          </a:lnRef>
+          <a:fillRef idx="3">
+            <a:schemeClr val="accent1"/>
+          </a:fillRef>
+          <a:effectRef idx="2">
+            <a:schemeClr val="accent1"/>
+          </a:effectRef>
+          <a:fontRef idx="minor">
+            <a:schemeClr val="lt1"/>
+          </a:fontRef>
+        </p:style>
+        <p:txBody>
+          <a:bodyPr rtlCol="0" anchor="ctr"/>
+          <a:lstStyle/>
+          <a:p>
+            <a:pPr algn="ctr"/>
+          </a:p>
+        </p:txBody>
+      </p:sp>
+      <p:sp>
+        <p:nvSpPr>
+          <p:cNvPr id="3" name="TextBox 2"/>
+          <p:cNvSpPr txBox="1"/>
+          <p:nvPr/>
+        </p:nvSpPr>
+        <p:spPr>
+          <a:xfrm>
+            <a:off x="548640" y="502920"/>
+            <a:ext cx="502920" cy="502920"/>
+          </a:xfrm>
+          <a:prstGeom prst="rect">
+            <a:avLst/>
+          </a:prstGeom>
+          <a:noFill/>
+        </p:spPr>
+        <p:txBody>
+          <a:bodyPr wrap="square">
+            <a:spAutoFit/>
+          </a:bodyPr>
+          <a:lstStyle/>
+          <a:p>
+            <a:pPr algn="ctr"/>
+            <a:r>
+              <a:rPr sz="2000" b="0">
+                <a:solidFill>
+                  <a:srgbClr val="0A1F33"/>
+                </a:solidFill>
+                <a:latin typeface="Calibri"/>
+              </a:rPr>
+              <a:t>?</a:t>
+            </a:r>
+          </a:p>
+        </p:txBody>
+      </p:sp>
+      <p:sp>
+        <p:nvSpPr>
+          <p:cNvPr id="4" name="TextBox 3"/>
+          <p:cNvSpPr txBox="1"/>
+          <p:nvPr/>
+        </p:nvSpPr>
+        <p:spPr>
+          <a:xfrm>
+            <a:off x="1234440" y="530352"/>
+            <a:ext cx="9144000" cy="457200"/>
+          </a:xfrm>
+          <a:prstGeom prst="rect">
+            <a:avLst/>
+          </a:prstGeom>
+          <a:noFill/>
+        </p:spPr>
+        <p:txBody>
+          <a:bodyPr wrap="square">
+            <a:spAutoFit/>
+          </a:bodyPr>
+          <a:lstStyle/>
+          <a:p>
+            <a:r>
+              <a:rPr sz="1400" b="1">
+                <a:solidFill>
+                  <a:srgbClr val="DE911D"/>
+                </a:solidFill>
+                <a:latin typeface="Calibri"/>
+              </a:rPr>
+              <a:t>CASO 4 · ¿QUÉ DECIDE LA PERSONA ÁRBITRA?</a:t>
+            </a:r>
+          </a:p>
+        </p:txBody>
+      </p:sp>
+      <p:sp>
+        <p:nvSpPr>
+          <p:cNvPr id="5" name="TextBox 4"/>
+          <p:cNvSpPr txBox="1"/>
+          <p:nvPr/>
+        </p:nvSpPr>
+        <p:spPr>
+          <a:xfrm>
+            <a:off x="548640" y="1051560"/>
+            <a:ext cx="11064240" cy="822960"/>
+          </a:xfrm>
+          <a:prstGeom prst="rect">
+            <a:avLst/>
+          </a:prstGeom>
+          <a:noFill/>
+        </p:spPr>
+        <p:txBody>
+          <a:bodyPr wrap="square">
+            <a:spAutoFit/>
+          </a:bodyPr>
+          <a:lstStyle/>
+          <a:p>
+            <a:r>
+              <a:rPr sz="2600" b="1">
+                <a:solidFill>
+                  <a:srgbClr val="0A1F33"/>
+                </a:solidFill>
+                <a:latin typeface="Cambria"/>
+              </a:rPr>
+              <a:t>Guion D: el público que ayuda</a:t>
+            </a:r>
+          </a:p>
+        </p:txBody>
+      </p:sp>
+      <p:sp>
+        <p:nvSpPr>
+          <p:cNvPr id="6" name="Rectangle 5"/>
+          <p:cNvSpPr/>
+          <p:nvPr/>
+        </p:nvSpPr>
+        <p:spPr>
+          <a:xfrm>
+            <a:off x="548640" y="1965960"/>
+            <a:ext cx="11064240" cy="4206240"/>
+          </a:xfrm>
+          <a:prstGeom prst="rect">
+            <a:avLst/>
+          </a:prstGeom>
+          <a:solidFill>
+            <a:srgbClr val="F0F4F8"/>
+          </a:solidFill>
+          <a:ln>
+            <a:noFill/>
+          </a:ln>
+          <a:effectLst/>
+        </p:spPr>
+        <p:style>
+          <a:lnRef idx="1">
+            <a:schemeClr val="accent1"/>
+          </a:lnRef>
+          <a:fillRef idx="3">
+            <a:schemeClr val="accent1"/>
+          </a:fillRef>
+          <a:effectRef idx="2">
+            <a:schemeClr val="accent1"/>
+          </a:effectRef>
+          <a:fontRef idx="minor">
+            <a:schemeClr val="lt1"/>
+          </a:fontRef>
+        </p:style>
+        <p:txBody>
+          <a:bodyPr rtlCol="0" anchor="ctr"/>
+          <a:lstStyle/>
+          <a:p>
+            <a:pPr algn="ctr"/>
+          </a:p>
+        </p:txBody>
+      </p:sp>
+      <p:sp>
+        <p:nvSpPr>
+          <p:cNvPr id="7" name="TextBox 6"/>
+          <p:cNvSpPr txBox="1"/>
+          <p:nvPr/>
+        </p:nvSpPr>
+        <p:spPr>
+          <a:xfrm>
+            <a:off x="914400" y="2240280"/>
+            <a:ext cx="10332720" cy="3749039"/>
+          </a:xfrm>
+          <a:prstGeom prst="rect">
+            <a:avLst/>
+          </a:prstGeom>
+          <a:noFill/>
+        </p:spPr>
+        <p:txBody>
+          <a:bodyPr wrap="square">
+            <a:spAutoFit/>
+          </a:bodyPr>
+          <a:lstStyle/>
+          <a:p>
+            <a:r>
+              <a:rPr sz="2000" b="0">
+                <a:solidFill>
+                  <a:srgbClr val="334E68"/>
+                </a:solidFill>
+                <a:latin typeface="Calibri"/>
+              </a:rPr>
+              <a:t>Un docente acompañante comenta en voz baja con su estudiante una partida en curso.</a:t>
+            </a:r>
+          </a:p>
+        </p:txBody>
+      </p:sp>
+    </p:spTree>
+  </p:cSld>
+  <p:clrMapOvr>
+    <a:masterClrMapping/>
+  </p:clrMapOvr>
+</p:sld>
+</file>
+
+<file path=ppt/slides/slide14.xml><?xml version="1.0" encoding="utf-8"?>
+<p:sld xmlns:a="http://schemas.openxmlformats.org/drawingml/2006/main" xmlns:p="http://schemas.openxmlformats.org/presentationml/2006/main" xmlns:r="http://schemas.openxmlformats.org/officeDocument/2006/relationships">
+  <p:cSld>
+    <p:spTree>
+      <p:nvGrpSpPr>
+        <p:cNvPr id="1" name=""/>
+        <p:cNvGrpSpPr/>
+        <p:nvPr/>
+      </p:nvGrpSpPr>
+      <p:grpSpPr/>
+      <p:sp>
+        <p:nvSpPr>
+          <p:cNvPr id="2" name="Rectangle 1"/>
+          <p:cNvSpPr/>
+          <p:nvPr/>
+        </p:nvSpPr>
+        <p:spPr>
+          <a:xfrm>
+            <a:off x="0" y="0"/>
+            <a:ext cx="12191695" cy="6858000"/>
+          </a:xfrm>
+          <a:prstGeom prst="rect">
+            <a:avLst/>
+          </a:prstGeom>
+          <a:solidFill>
+            <a:srgbClr val="102A43"/>
+          </a:solidFill>
+          <a:ln>
+            <a:noFill/>
+          </a:ln>
+          <a:effectLst/>
+        </p:spPr>
+        <p:style>
+          <a:lnRef idx="1">
+            <a:schemeClr val="accent1"/>
+          </a:lnRef>
+          <a:fillRef idx="3">
+            <a:schemeClr val="accent1"/>
+          </a:fillRef>
+          <a:effectRef idx="2">
+            <a:schemeClr val="accent1"/>
+          </a:effectRef>
+          <a:fontRef idx="minor">
+            <a:schemeClr val="lt1"/>
+          </a:fontRef>
+        </p:style>
+        <p:txBody>
+          <a:bodyPr rtlCol="0" anchor="ctr"/>
+          <a:lstStyle/>
+          <a:p>
+            <a:pPr algn="ctr"/>
+          </a:p>
+        </p:txBody>
+      </p:sp>
+      <p:sp>
+        <p:nvSpPr>
+          <p:cNvPr id="3" name="TextBox 2"/>
+          <p:cNvSpPr txBox="1"/>
+          <p:nvPr/>
+        </p:nvSpPr>
+        <p:spPr>
+          <a:xfrm>
+            <a:off x="548640" y="548640"/>
+            <a:ext cx="11064240" cy="457200"/>
+          </a:xfrm>
+          <a:prstGeom prst="rect">
+            <a:avLst/>
+          </a:prstGeom>
+          <a:noFill/>
+        </p:spPr>
+        <p:txBody>
+          <a:bodyPr wrap="square">
+            <a:spAutoFit/>
+          </a:bodyPr>
+          <a:lstStyle/>
+          <a:p>
+            <a:r>
+              <a:rPr sz="1400" b="1">
+                <a:solidFill>
+                  <a:srgbClr val="F0B429"/>
+                </a:solidFill>
+                <a:latin typeface="Calibri"/>
+              </a:rPr>
+              <a:t>CASO 4 · DECISIÓN</a:t>
+            </a:r>
+          </a:p>
+        </p:txBody>
+      </p:sp>
+      <p:sp>
+        <p:nvSpPr>
+          <p:cNvPr id="4" name="TextBox 3"/>
+          <p:cNvSpPr txBox="1"/>
+          <p:nvPr/>
+        </p:nvSpPr>
+        <p:spPr>
+          <a:xfrm>
+            <a:off x="548640" y="1051560"/>
+            <a:ext cx="11064240" cy="822960"/>
+          </a:xfrm>
+          <a:prstGeom prst="rect">
+            <a:avLst/>
+          </a:prstGeom>
+          <a:noFill/>
+        </p:spPr>
+        <p:txBody>
+          <a:bodyPr wrap="square">
+            <a:spAutoFit/>
+          </a:bodyPr>
+          <a:lstStyle/>
+          <a:p>
+            <a:r>
+              <a:rPr sz="2600" b="1">
+                <a:solidFill>
+                  <a:srgbClr val="FFFFFF"/>
+                </a:solidFill>
+                <a:latin typeface="Cambria"/>
+              </a:rPr>
+              <a:t>Guion D: el público que ayuda</a:t>
+            </a:r>
+          </a:p>
+        </p:txBody>
+      </p:sp>
+      <p:sp>
+        <p:nvSpPr>
+          <p:cNvPr id="5" name="TextBox 4"/>
+          <p:cNvSpPr txBox="1"/>
+          <p:nvPr/>
+        </p:nvSpPr>
+        <p:spPr>
+          <a:xfrm>
+            <a:off x="548640" y="2103120"/>
+            <a:ext cx="11064240" cy="3931920"/>
+          </a:xfrm>
+          <a:prstGeom prst="rect">
+            <a:avLst/>
+          </a:prstGeom>
+          <a:noFill/>
+        </p:spPr>
+        <p:txBody>
+          <a:bodyPr wrap="square">
+            <a:spAutoFit/>
+          </a:bodyPr>
+          <a:lstStyle/>
+          <a:p>
+            <a:r>
+              <a:rPr sz="2000" b="0">
+                <a:solidFill>
+                  <a:srgbClr val="CADCFC"/>
+                </a:solidFill>
+                <a:latin typeface="Calibri"/>
+              </a:rPr>
+              <a:t>Se retira al docente de la zona de juego; si hubo ayuda, se sanciona al estudiante según el art. 12.9. Se registra la incidencia.</a:t>
+            </a:r>
+          </a:p>
+        </p:txBody>
+      </p:sp>
+      <p:sp>
+        <p:nvSpPr>
+          <p:cNvPr id="6" name="TextBox 5"/>
+          <p:cNvSpPr txBox="1"/>
+          <p:nvPr/>
+        </p:nvSpPr>
+        <p:spPr>
+          <a:xfrm>
+            <a:off x="548640" y="6263640"/>
+            <a:ext cx="11064240" cy="365760"/>
+          </a:xfrm>
+          <a:prstGeom prst="rect">
+            <a:avLst/>
+          </a:prstGeom>
+          <a:noFill/>
+        </p:spPr>
+        <p:txBody>
+          <a:bodyPr wrap="square">
+            <a:spAutoFit/>
+          </a:bodyPr>
+          <a:lstStyle/>
+          <a:p>
+            <a:r>
+              <a:rPr sz="1100" b="0">
+                <a:solidFill>
+                  <a:srgbClr val="9FB3C8"/>
+                </a:solidFill>
+                <a:latin typeface="Calibri"/>
+              </a:rPr>
+              <a:t>Fuente: Leyes del Ajedrez 2023 (Handbook E.I.01), art. 11.3.1 y 12.7</a:t>
+            </a:r>
+          </a:p>
+        </p:txBody>
+      </p:sp>
+    </p:spTree>
+  </p:cSld>
+  <p:clrMapOvr>
+    <a:masterClrMapping/>
+  </p:clrMapOvr>
+</p:sld>
+</file>
+
+<file path=ppt/slides/slide15.xml><?xml version="1.0" encoding="utf-8"?>
+<p:sld xmlns:a="http://schemas.openxmlformats.org/drawingml/2006/main" xmlns:p="http://schemas.openxmlformats.org/presentationml/2006/main" xmlns:r="http://schemas.openxmlformats.org/officeDocument/2006/relationships">
+  <p:cSld>
+    <p:spTree>
+      <p:nvGrpSpPr>
+        <p:cNvPr id="1" name=""/>
+        <p:cNvGrpSpPr/>
+        <p:nvPr/>
+      </p:nvGrpSpPr>
+      <p:grpSpPr/>
+      <p:sp>
+        <p:nvSpPr>
+          <p:cNvPr id="2" name="Rectangle 1"/>
+          <p:cNvSpPr/>
+          <p:nvPr/>
+        </p:nvSpPr>
+        <p:spPr>
+          <a:xfrm>
+            <a:off x="0" y="0"/>
+            <a:ext cx="12191695" cy="6858000"/>
+          </a:xfrm>
+          <a:prstGeom prst="rect">
+            <a:avLst/>
+          </a:prstGeom>
+          <a:solidFill>
+            <a:srgbClr val="102A43"/>
+          </a:solidFill>
+          <a:ln>
+            <a:noFill/>
+          </a:ln>
+          <a:effectLst/>
+        </p:spPr>
+        <p:style>
+          <a:lnRef idx="1">
+            <a:schemeClr val="accent1"/>
+          </a:lnRef>
+          <a:fillRef idx="3">
+            <a:schemeClr val="accent1"/>
+          </a:fillRef>
+          <a:effectRef idx="2">
+            <a:schemeClr val="accent1"/>
+          </a:effectRef>
+          <a:fontRef idx="minor">
+            <a:schemeClr val="lt1"/>
+          </a:fontRef>
+        </p:style>
+        <p:txBody>
+          <a:bodyPr rtlCol="0" anchor="ctr"/>
+          <a:lstStyle/>
+          <a:p>
+            <a:pPr algn="ctr"/>
+          </a:p>
+        </p:txBody>
+      </p:sp>
+      <p:sp>
+        <p:nvSpPr>
+          <p:cNvPr id="3" name="Oval 2"/>
+          <p:cNvSpPr/>
+          <p:nvPr/>
+        </p:nvSpPr>
+        <p:spPr>
+          <a:xfrm>
+            <a:off x="-1280160" y="-1463040"/>
+            <a:ext cx="4114800" cy="4114800"/>
+          </a:xfrm>
+          <a:prstGeom prst="ellipse">
+            <a:avLst/>
+          </a:prstGeom>
+          <a:solidFill>
+            <a:srgbClr val="0A1F33"/>
+          </a:solidFill>
+          <a:ln>
+            <a:noFill/>
+          </a:ln>
+          <a:effectLst/>
+        </p:spPr>
+        <p:style>
+          <a:lnRef idx="1">
+            <a:schemeClr val="accent1"/>
+          </a:lnRef>
+          <a:fillRef idx="3">
+            <a:schemeClr val="accent1"/>
+          </a:fillRef>
+          <a:effectRef idx="2">
+            <a:schemeClr val="accent1"/>
+          </a:effectRef>
+          <a:fontRef idx="minor">
+            <a:schemeClr val="lt1"/>
+          </a:fontRef>
+        </p:style>
+        <p:txBody>
+          <a:bodyPr rtlCol="0" anchor="ctr"/>
+          <a:lstStyle/>
+          <a:p>
+            <a:pPr algn="ctr"/>
+          </a:p>
+        </p:txBody>
+      </p:sp>
+      <p:sp>
+        <p:nvSpPr>
+          <p:cNvPr id="4" name="Oval 3"/>
+          <p:cNvSpPr/>
+          <p:nvPr/>
+        </p:nvSpPr>
+        <p:spPr>
+          <a:xfrm>
+            <a:off x="5175504" y="822960"/>
+            <a:ext cx="1828800" cy="1828800"/>
+          </a:xfrm>
+          <a:prstGeom prst="ellipse">
+            <a:avLst/>
+          </a:prstGeom>
+          <a:solidFill>
+            <a:srgbClr val="DE911D"/>
+          </a:solidFill>
+          <a:ln>
+            <a:noFill/>
+          </a:ln>
+          <a:effectLst/>
+        </p:spPr>
+        <p:style>
+          <a:lnRef idx="1">
+            <a:schemeClr val="accent1"/>
+          </a:lnRef>
+          <a:fillRef idx="3">
+            <a:schemeClr val="accent1"/>
+          </a:fillRef>
+          <a:effectRef idx="2">
+            <a:schemeClr val="accent1"/>
+          </a:effectRef>
+          <a:fontRef idx="minor">
+            <a:schemeClr val="lt1"/>
+          </a:fontRef>
+        </p:style>
+        <p:txBody>
+          <a:bodyPr rtlCol="0" anchor="ctr"/>
+          <a:lstStyle/>
+          <a:p>
+            <a:pPr algn="ctr"/>
+          </a:p>
+        </p:txBody>
+      </p:sp>
+      <p:sp>
+        <p:nvSpPr>
+          <p:cNvPr id="5" name="TextBox 4"/>
+          <p:cNvSpPr txBox="1"/>
+          <p:nvPr/>
+        </p:nvSpPr>
+        <p:spPr>
+          <a:xfrm>
+            <a:off x="5175504" y="822960"/>
+            <a:ext cx="1828800" cy="1828800"/>
+          </a:xfrm>
+          <a:prstGeom prst="rect">
+            <a:avLst/>
+          </a:prstGeom>
+          <a:noFill/>
+        </p:spPr>
+        <p:txBody>
+          <a:bodyPr wrap="square">
+            <a:spAutoFit/>
+          </a:bodyPr>
+          <a:lstStyle/>
+          <a:p>
+            <a:pPr algn="ctr"/>
+            <a:r>
+              <a:rPr sz="4400" b="1">
+                <a:solidFill>
+                  <a:srgbClr val="0A1F33"/>
+                </a:solidFill>
+                <a:latin typeface="Calibri"/>
+              </a:rPr>
+              <a:t>✔</a:t>
+            </a:r>
+          </a:p>
+        </p:txBody>
+      </p:sp>
+      <p:sp>
+        <p:nvSpPr>
+          <p:cNvPr id="6" name="TextBox 5"/>
+          <p:cNvSpPr txBox="1"/>
+          <p:nvPr/>
+        </p:nvSpPr>
+        <p:spPr>
+          <a:xfrm>
+            <a:off x="548640" y="2880360"/>
+            <a:ext cx="11064240" cy="457200"/>
+          </a:xfrm>
+          <a:prstGeom prst="rect">
+            <a:avLst/>
+          </a:prstGeom>
+          <a:noFill/>
+        </p:spPr>
+        <p:txBody>
+          <a:bodyPr wrap="square">
+            <a:spAutoFit/>
+          </a:bodyPr>
+          <a:lstStyle/>
+          <a:p>
+            <a:pPr algn="ctr"/>
+            <a:r>
+              <a:rPr sz="1400" b="1">
+                <a:solidFill>
+                  <a:srgbClr val="F0B429"/>
+                </a:solidFill>
+                <a:latin typeface="Calibri"/>
+              </a:rPr>
+              <a:t>PRÁCTICA — SIMULACRO DE ARBITRAJE CON OBSERVACIÓN ENTRE PARES</a:t>
+            </a:r>
+          </a:p>
+        </p:txBody>
+      </p:sp>
+      <p:sp>
+        <p:nvSpPr>
+          <p:cNvPr id="7" name="TextBox 6"/>
+          <p:cNvSpPr txBox="1"/>
+          <p:nvPr/>
+        </p:nvSpPr>
+        <p:spPr>
+          <a:xfrm>
+            <a:off x="1280160" y="3383280"/>
+            <a:ext cx="9601200" cy="2377440"/>
+          </a:xfrm>
+          <a:prstGeom prst="rect">
+            <a:avLst/>
+          </a:prstGeom>
+          <a:noFill/>
+        </p:spPr>
+        <p:txBody>
+          <a:bodyPr wrap="square">
+            <a:spAutoFit/>
+          </a:bodyPr>
+          <a:lstStyle/>
+          <a:p>
+            <a:pPr algn="ctr"/>
+            <a:r>
+              <a:rPr sz="2000" b="0">
+                <a:solidFill>
+                  <a:srgbClr val="FFFFFF"/>
+                </a:solidFill>
+                <a:latin typeface="Cambria"/>
+              </a:rPr>
+              <a:t>Cada participante arbitra una partida simulada mientras otra persona observa y completa la lista de cotejo; luego se intercambian los roles.</a:t>
+            </a:r>
+          </a:p>
+        </p:txBody>
+      </p:sp>
+      <p:sp>
+        <p:nvSpPr>
+          <p:cNvPr id="8" name="TextBox 7"/>
+          <p:cNvSpPr txBox="1"/>
+          <p:nvPr/>
+        </p:nvSpPr>
+        <p:spPr>
+          <a:xfrm>
+            <a:off x="548640" y="6263640"/>
+            <a:ext cx="11064240" cy="365760"/>
+          </a:xfrm>
+          <a:prstGeom prst="rect">
+            <a:avLst/>
+          </a:prstGeom>
+          <a:noFill/>
+        </p:spPr>
+        <p:txBody>
+          <a:bodyPr wrap="square">
+            <a:spAutoFit/>
+          </a:bodyPr>
+          <a:lstStyle/>
+          <a:p>
+            <a:pPr algn="ctr"/>
+            <a:r>
+              <a:rPr sz="1200" b="0">
+                <a:solidFill>
+                  <a:srgbClr val="9FB3C8"/>
+                </a:solidFill>
+                <a:latin typeface="Calibri"/>
+              </a:rPr>
+              <a:t>Formación Ajedrez · Sesión 7</a:t>
+            </a:r>
+          </a:p>
+        </p:txBody>
+      </p:sp>
+    </p:spTree>
+  </p:cSld>
+  <p:clrMapOvr>
+    <a:masterClrMapping/>
+  </p:clrMapOvr>
+</p:sld>
+</file>
+
+<file path=ppt/slides/slide16.xml><?xml version="1.0" encoding="utf-8"?>
+<p:sld xmlns:a="http://schemas.openxmlformats.org/drawingml/2006/main" xmlns:p="http://schemas.openxmlformats.org/presentationml/2006/main" xmlns:r="http://schemas.openxmlformats.org/officeDocument/2006/relationships">
+  <p:cSld>
+    <p:spTree>
+      <p:nvGrpSpPr>
+        <p:cNvPr id="1" name=""/>
+        <p:cNvGrpSpPr/>
+        <p:nvPr/>
+      </p:nvGrpSpPr>
+      <p:grpSpPr/>
+      <p:sp>
+        <p:nvSpPr>
+          <p:cNvPr id="2" name="Oval 1"/>
+          <p:cNvSpPr/>
+          <p:nvPr/>
+        </p:nvSpPr>
+        <p:spPr>
+          <a:xfrm>
+            <a:off x="548640" y="502920"/>
+            <a:ext cx="502920" cy="502920"/>
+          </a:xfrm>
+          <a:prstGeom prst="ellipse">
+            <a:avLst/>
+          </a:prstGeom>
+          <a:solidFill>
+            <a:srgbClr val="DE911D"/>
+          </a:solidFill>
+          <a:ln>
+            <a:noFill/>
+          </a:ln>
+          <a:effectLst/>
+        </p:spPr>
+        <p:style>
+          <a:lnRef idx="1">
+            <a:schemeClr val="accent1"/>
+          </a:lnRef>
+          <a:fillRef idx="3">
+            <a:schemeClr val="accent1"/>
+          </a:fillRef>
+          <a:effectRef idx="2">
+            <a:schemeClr val="accent1"/>
+          </a:effectRef>
+          <a:fontRef idx="minor">
+            <a:schemeClr val="lt1"/>
+          </a:fontRef>
+        </p:style>
+        <p:txBody>
+          <a:bodyPr rtlCol="0" anchor="ctr"/>
+          <a:lstStyle/>
+          <a:p>
+            <a:pPr algn="ctr"/>
+          </a:p>
+        </p:txBody>
+      </p:sp>
+      <p:sp>
+        <p:nvSpPr>
+          <p:cNvPr id="3" name="TextBox 2"/>
+          <p:cNvSpPr txBox="1"/>
+          <p:nvPr/>
+        </p:nvSpPr>
+        <p:spPr>
+          <a:xfrm>
+            <a:off x="548640" y="502920"/>
+            <a:ext cx="502920" cy="502920"/>
+          </a:xfrm>
+          <a:prstGeom prst="rect">
+            <a:avLst/>
+          </a:prstGeom>
+          <a:noFill/>
+        </p:spPr>
+        <p:txBody>
+          <a:bodyPr wrap="square">
+            <a:spAutoFit/>
+          </a:bodyPr>
+          <a:lstStyle/>
+          <a:p>
+            <a:pPr algn="ctr"/>
+            <a:r>
+              <a:rPr sz="2000" b="0">
+                <a:solidFill>
+                  <a:srgbClr val="0A1F33"/>
+                </a:solidFill>
+                <a:latin typeface="Calibri"/>
+              </a:rPr>
+              <a:t>✎</a:t>
+            </a:r>
+          </a:p>
+        </p:txBody>
+      </p:sp>
+      <p:sp>
+        <p:nvSpPr>
+          <p:cNvPr id="4" name="TextBox 3"/>
+          <p:cNvSpPr txBox="1"/>
+          <p:nvPr/>
+        </p:nvSpPr>
+        <p:spPr>
+          <a:xfrm>
+            <a:off x="1234440" y="530352"/>
+            <a:ext cx="9144000" cy="457200"/>
+          </a:xfrm>
+          <a:prstGeom prst="rect">
+            <a:avLst/>
+          </a:prstGeom>
+          <a:noFill/>
+        </p:spPr>
+        <p:txBody>
+          <a:bodyPr wrap="square">
+            <a:spAutoFit/>
+          </a:bodyPr>
+          <a:lstStyle/>
+          <a:p>
+            <a:r>
+              <a:rPr sz="1400" b="1">
+                <a:solidFill>
+                  <a:srgbClr val="DE911D"/>
+                </a:solidFill>
+                <a:latin typeface="Calibri"/>
+              </a:rPr>
+              <a:t>EJERCICIO 1 DE 2</a:t>
+            </a:r>
+          </a:p>
+        </p:txBody>
+      </p:sp>
+      <p:sp>
+        <p:nvSpPr>
+          <p:cNvPr id="5" name="Rectangle 4"/>
+          <p:cNvSpPr/>
+          <p:nvPr/>
+        </p:nvSpPr>
+        <p:spPr>
+          <a:xfrm>
+            <a:off x="548640" y="1188720"/>
+            <a:ext cx="11064240" cy="5029200"/>
+          </a:xfrm>
+          <a:prstGeom prst="rect">
+            <a:avLst/>
+          </a:prstGeom>
+          <a:solidFill>
+            <a:srgbClr val="F0F4F8"/>
+          </a:solidFill>
+          <a:ln>
+            <a:noFill/>
+          </a:ln>
+          <a:effectLst/>
+        </p:spPr>
+        <p:style>
+          <a:lnRef idx="1">
+            <a:schemeClr val="accent1"/>
+          </a:lnRef>
+          <a:fillRef idx="3">
+            <a:schemeClr val="accent1"/>
+          </a:fillRef>
+          <a:effectRef idx="2">
+            <a:schemeClr val="accent1"/>
+          </a:effectRef>
+          <a:fontRef idx="minor">
+            <a:schemeClr val="lt1"/>
+          </a:fontRef>
+        </p:style>
+        <p:txBody>
+          <a:bodyPr rtlCol="0" anchor="ctr"/>
+          <a:lstStyle/>
+          <a:p>
+            <a:pPr algn="ctr"/>
+          </a:p>
+        </p:txBody>
+      </p:sp>
+      <p:sp>
+        <p:nvSpPr>
+          <p:cNvPr id="6" name="TextBox 5"/>
+          <p:cNvSpPr txBox="1"/>
+          <p:nvPr/>
+        </p:nvSpPr>
+        <p:spPr>
+          <a:xfrm>
+            <a:off x="914400" y="1554480"/>
+            <a:ext cx="10332720" cy="4480560"/>
+          </a:xfrm>
+          <a:prstGeom prst="rect">
+            <a:avLst/>
+          </a:prstGeom>
+          <a:noFill/>
+        </p:spPr>
+        <p:txBody>
+          <a:bodyPr wrap="square">
+            <a:spAutoFit/>
+          </a:bodyPr>
+          <a:lstStyle/>
+          <a:p>
+            <a:r>
+              <a:rPr sz="2200" b="0">
+                <a:solidFill>
+                  <a:srgbClr val="0A1F33"/>
+                </a:solidFill>
+                <a:latin typeface="Calibri"/>
+              </a:rPr>
+              <a:t>Durante el simulacro, la persona árbitra resolvió bien un reclamo, pero no lo anotó en el acta. ¿Cómo lo marcas en la lista de cotejo?</a:t>
+            </a:r>
+          </a:p>
+        </p:txBody>
+      </p:sp>
+    </p:spTree>
+  </p:cSld>
+  <p:clrMapOvr>
+    <a:masterClrMapping/>
+  </p:clrMapOvr>
+</p:sld>
+</file>
+
+<file path=ppt/slides/slide17.xml><?xml version="1.0" encoding="utf-8"?>
+<p:sld xmlns:a="http://schemas.openxmlformats.org/drawingml/2006/main" xmlns:p="http://schemas.openxmlformats.org/presentationml/2006/main" xmlns:r="http://schemas.openxmlformats.org/officeDocument/2006/relationships">
+  <p:cSld>
+    <p:spTree>
+      <p:nvGrpSpPr>
+        <p:cNvPr id="1" name=""/>
+        <p:cNvGrpSpPr/>
+        <p:nvPr/>
+      </p:nvGrpSpPr>
+      <p:grpSpPr/>
+      <p:sp>
+        <p:nvSpPr>
+          <p:cNvPr id="2" name="Oval 1"/>
+          <p:cNvSpPr/>
+          <p:nvPr/>
+        </p:nvSpPr>
+        <p:spPr>
+          <a:xfrm>
+            <a:off x="548640" y="502920"/>
+            <a:ext cx="502920" cy="502920"/>
+          </a:xfrm>
+          <a:prstGeom prst="ellipse">
+            <a:avLst/>
+          </a:prstGeom>
+          <a:solidFill>
+            <a:srgbClr val="DE911D"/>
+          </a:solidFill>
+          <a:ln>
+            <a:noFill/>
+          </a:ln>
+          <a:effectLst/>
+        </p:spPr>
+        <p:style>
+          <a:lnRef idx="1">
+            <a:schemeClr val="accent1"/>
+          </a:lnRef>
+          <a:fillRef idx="3">
+            <a:schemeClr val="accent1"/>
+          </a:fillRef>
+          <a:effectRef idx="2">
+            <a:schemeClr val="accent1"/>
+          </a:effectRef>
+          <a:fontRef idx="minor">
+            <a:schemeClr val="lt1"/>
+          </a:fontRef>
+        </p:style>
+        <p:txBody>
+          <a:bodyPr rtlCol="0" anchor="ctr"/>
+          <a:lstStyle/>
+          <a:p>
+            <a:pPr algn="ctr"/>
+          </a:p>
+        </p:txBody>
+      </p:sp>
+      <p:sp>
+        <p:nvSpPr>
+          <p:cNvPr id="3" name="TextBox 2"/>
+          <p:cNvSpPr txBox="1"/>
+          <p:nvPr/>
+        </p:nvSpPr>
+        <p:spPr>
+          <a:xfrm>
+            <a:off x="548640" y="502920"/>
+            <a:ext cx="502920" cy="502920"/>
+          </a:xfrm>
+          <a:prstGeom prst="rect">
+            <a:avLst/>
+          </a:prstGeom>
+          <a:noFill/>
+        </p:spPr>
+        <p:txBody>
+          <a:bodyPr wrap="square">
+            <a:spAutoFit/>
+          </a:bodyPr>
+          <a:lstStyle/>
+          <a:p>
+            <a:pPr algn="ctr"/>
+            <a:r>
+              <a:rPr sz="2000" b="0">
+                <a:solidFill>
+                  <a:srgbClr val="0A1F33"/>
+                </a:solidFill>
+                <a:latin typeface="Calibri"/>
+              </a:rPr>
+              <a:t>✎</a:t>
+            </a:r>
+          </a:p>
+        </p:txBody>
+      </p:sp>
+      <p:sp>
+        <p:nvSpPr>
+          <p:cNvPr id="4" name="TextBox 3"/>
+          <p:cNvSpPr txBox="1"/>
+          <p:nvPr/>
+        </p:nvSpPr>
+        <p:spPr>
+          <a:xfrm>
+            <a:off x="1234440" y="530352"/>
+            <a:ext cx="9144000" cy="457200"/>
+          </a:xfrm>
+          <a:prstGeom prst="rect">
+            <a:avLst/>
+          </a:prstGeom>
+          <a:noFill/>
+        </p:spPr>
+        <p:txBody>
+          <a:bodyPr wrap="square">
+            <a:spAutoFit/>
+          </a:bodyPr>
+          <a:lstStyle/>
+          <a:p>
+            <a:r>
+              <a:rPr sz="1400" b="1">
+                <a:solidFill>
+                  <a:srgbClr val="DE911D"/>
+                </a:solidFill>
+                <a:latin typeface="Calibri"/>
+              </a:rPr>
+              <a:t>EJERCICIO 2 DE 2</a:t>
+            </a:r>
+          </a:p>
+        </p:txBody>
+      </p:sp>
+      <p:sp>
+        <p:nvSpPr>
+          <p:cNvPr id="5" name="Rectangle 4"/>
+          <p:cNvSpPr/>
+          <p:nvPr/>
+        </p:nvSpPr>
+        <p:spPr>
+          <a:xfrm>
+            <a:off x="548640" y="1188720"/>
+            <a:ext cx="11064240" cy="5029200"/>
+          </a:xfrm>
+          <a:prstGeom prst="rect">
+            <a:avLst/>
+          </a:prstGeom>
+          <a:solidFill>
+            <a:srgbClr val="F0F4F8"/>
+          </a:solidFill>
+          <a:ln>
+            <a:noFill/>
+          </a:ln>
+          <a:effectLst/>
+        </p:spPr>
+        <p:style>
+          <a:lnRef idx="1">
+            <a:schemeClr val="accent1"/>
+          </a:lnRef>
+          <a:fillRef idx="3">
+            <a:schemeClr val="accent1"/>
+          </a:fillRef>
+          <a:effectRef idx="2">
+            <a:schemeClr val="accent1"/>
+          </a:effectRef>
+          <a:fontRef idx="minor">
+            <a:schemeClr val="lt1"/>
+          </a:fontRef>
+        </p:style>
+        <p:txBody>
+          <a:bodyPr rtlCol="0" anchor="ctr"/>
+          <a:lstStyle/>
+          <a:p>
+            <a:pPr algn="ctr"/>
+          </a:p>
+        </p:txBody>
+      </p:sp>
+      <p:sp>
+        <p:nvSpPr>
+          <p:cNvPr id="6" name="TextBox 5"/>
+          <p:cNvSpPr txBox="1"/>
+          <p:nvPr/>
+        </p:nvSpPr>
+        <p:spPr>
+          <a:xfrm>
+            <a:off x="914400" y="1554480"/>
+            <a:ext cx="10332720" cy="4480560"/>
+          </a:xfrm>
+          <a:prstGeom prst="rect">
+            <a:avLst/>
+          </a:prstGeom>
+          <a:noFill/>
+        </p:spPr>
+        <p:txBody>
+          <a:bodyPr wrap="square">
+            <a:spAutoFit/>
+          </a:bodyPr>
+          <a:lstStyle/>
+          <a:p>
+            <a:r>
+              <a:rPr sz="2200" b="0">
+                <a:solidFill>
+                  <a:srgbClr val="0A1F33"/>
+                </a:solidFill>
+                <a:latin typeface="Calibri"/>
+              </a:rPr>
+              <a:t>Escribe una retroalimentación útil para una persona que aplicó la sanción máxima a una primera falta leve.</a:t>
+            </a:r>
+          </a:p>
+        </p:txBody>
+      </p:sp>
+    </p:spTree>
+  </p:cSld>
+  <p:clrMapOvr>
+    <a:masterClrMapping/>
+  </p:clrMapOvr>
+</p:sld>
+</file>
+
+<file path=ppt/slides/slide18.xml><?xml version="1.0" encoding="utf-8"?>
+<p:sld xmlns:a="http://schemas.openxmlformats.org/drawingml/2006/main" xmlns:p="http://schemas.openxmlformats.org/presentationml/2006/main" xmlns:r="http://schemas.openxmlformats.org/officeDocument/2006/relationships">
+  <p:cSld>
+    <p:spTree>
+      <p:nvGrpSpPr>
+        <p:cNvPr id="1" name=""/>
+        <p:cNvGrpSpPr/>
+        <p:nvPr/>
+      </p:nvGrpSpPr>
+      <p:grpSpPr/>
+      <p:sp>
+        <p:nvSpPr>
+          <p:cNvPr id="2" name="Oval 1"/>
+          <p:cNvSpPr/>
+          <p:nvPr/>
+        </p:nvSpPr>
+        <p:spPr>
+          <a:xfrm>
+            <a:off x="548640" y="502920"/>
+            <a:ext cx="502920" cy="502920"/>
+          </a:xfrm>
+          <a:prstGeom prst="ellipse">
+            <a:avLst/>
+          </a:prstGeom>
+          <a:solidFill>
+            <a:srgbClr val="DE911D"/>
+          </a:solidFill>
+          <a:ln>
+            <a:noFill/>
+          </a:ln>
+          <a:effectLst/>
+        </p:spPr>
+        <p:style>
+          <a:lnRef idx="1">
+            <a:schemeClr val="accent1"/>
+          </a:lnRef>
+          <a:fillRef idx="3">
+            <a:schemeClr val="accent1"/>
+          </a:fillRef>
+          <a:effectRef idx="2">
+            <a:schemeClr val="accent1"/>
+          </a:effectRef>
+          <a:fontRef idx="minor">
+            <a:schemeClr val="lt1"/>
+          </a:fontRef>
+        </p:style>
+        <p:txBody>
+          <a:bodyPr rtlCol="0" anchor="ctr"/>
+          <a:lstStyle/>
+          <a:p>
+            <a:pPr algn="ctr"/>
+          </a:p>
+        </p:txBody>
+      </p:sp>
+      <p:sp>
+        <p:nvSpPr>
+          <p:cNvPr id="3" name="TextBox 2"/>
+          <p:cNvSpPr txBox="1"/>
+          <p:nvPr/>
+        </p:nvSpPr>
+        <p:spPr>
+          <a:xfrm>
+            <a:off x="548640" y="502920"/>
+            <a:ext cx="502920" cy="502920"/>
+          </a:xfrm>
+          <a:prstGeom prst="rect">
+            <a:avLst/>
+          </a:prstGeom>
+          <a:noFill/>
+        </p:spPr>
+        <p:txBody>
+          <a:bodyPr wrap="square">
+            <a:spAutoFit/>
+          </a:bodyPr>
+          <a:lstStyle/>
+          <a:p>
+            <a:pPr algn="ctr"/>
+            <a:r>
+              <a:rPr sz="2000" b="0">
+                <a:solidFill>
+                  <a:srgbClr val="0A1F33"/>
+                </a:solidFill>
+                <a:latin typeface="Calibri"/>
+              </a:rPr>
+              <a:t>?</a:t>
+            </a:r>
+          </a:p>
+        </p:txBody>
+      </p:sp>
+      <p:sp>
+        <p:nvSpPr>
+          <p:cNvPr id="4" name="TextBox 3"/>
+          <p:cNvSpPr txBox="1"/>
+          <p:nvPr/>
+        </p:nvSpPr>
+        <p:spPr>
+          <a:xfrm>
+            <a:off x="1234440" y="530352"/>
+            <a:ext cx="9144000" cy="457200"/>
+          </a:xfrm>
+          <a:prstGeom prst="rect">
+            <a:avLst/>
+          </a:prstGeom>
+          <a:noFill/>
+        </p:spPr>
+        <p:txBody>
+          <a:bodyPr wrap="square">
+            <a:spAutoFit/>
+          </a:bodyPr>
+          <a:lstStyle/>
+          <a:p>
+            <a:r>
+              <a:rPr sz="1400" b="1">
+                <a:solidFill>
+                  <a:srgbClr val="DE911D"/>
+                </a:solidFill>
+                <a:latin typeface="Calibri"/>
+              </a:rPr>
+              <a:t>QUIZ DE LA SESIÓN</a:t>
+            </a:r>
+          </a:p>
+        </p:txBody>
+      </p:sp>
+      <p:sp>
+        <p:nvSpPr>
+          <p:cNvPr id="5" name="Rectangle 4"/>
+          <p:cNvSpPr/>
+          <p:nvPr/>
+        </p:nvSpPr>
+        <p:spPr>
+          <a:xfrm>
+            <a:off x="548640" y="1188720"/>
+            <a:ext cx="11064240" cy="5029200"/>
+          </a:xfrm>
+          <a:prstGeom prst="rect">
+            <a:avLst/>
+          </a:prstGeom>
+          <a:solidFill>
+            <a:srgbClr val="F0F4F8"/>
+          </a:solidFill>
+          <a:ln>
+            <a:noFill/>
+          </a:ln>
+          <a:effectLst/>
+        </p:spPr>
+        <p:style>
+          <a:lnRef idx="1">
+            <a:schemeClr val="accent1"/>
+          </a:lnRef>
+          <a:fillRef idx="3">
+            <a:schemeClr val="accent1"/>
+          </a:fillRef>
+          <a:effectRef idx="2">
+            <a:schemeClr val="accent1"/>
+          </a:effectRef>
+          <a:fontRef idx="minor">
+            <a:schemeClr val="lt1"/>
+          </a:fontRef>
+        </p:style>
+        <p:txBody>
+          <a:bodyPr rtlCol="0" anchor="ctr"/>
+          <a:lstStyle/>
+          <a:p>
+            <a:pPr algn="ctr"/>
+          </a:p>
+        </p:txBody>
+      </p:sp>
+      <p:sp>
+        <p:nvSpPr>
+          <p:cNvPr id="6" name="TextBox 5"/>
+          <p:cNvSpPr txBox="1"/>
+          <p:nvPr/>
+        </p:nvSpPr>
+        <p:spPr>
+          <a:xfrm>
+            <a:off x="914400" y="1371600"/>
+            <a:ext cx="10332720" cy="4754880"/>
+          </a:xfrm>
+          <a:prstGeom prst="rect">
+            <a:avLst/>
+          </a:prstGeom>
+          <a:noFill/>
+        </p:spPr>
+        <p:txBody>
+          <a:bodyPr wrap="square">
+            <a:spAutoFit/>
+          </a:bodyPr>
+          <a:lstStyle/>
+          <a:p>
+            <a:pPr>
+              <a:spcAft>
+                <a:spcPts val="600"/>
+              </a:spcAft>
+            </a:pPr>
+            <a:r>
+              <a:rPr sz="1600">
+                <a:solidFill>
+                  <a:srgbClr val="334E68"/>
+                </a:solidFill>
+                <a:latin typeface="Calibri"/>
+              </a:rPr>
+              <a:t>1. Durante un simulacro, no se aplicó la sanción por uso de dispositivo electrónico. ¿Qué instrumento documenta esa observación?</a:t>
+            </a:r>
+          </a:p>
+          <a:p>
+            <a:pPr>
+              <a:spcAft>
+                <a:spcPts val="600"/>
+              </a:spcAft>
+            </a:pPr>
+            <a:r>
+              <a:rPr sz="1600">
+                <a:solidFill>
+                  <a:srgbClr val="334E68"/>
+                </a:solidFill>
+                <a:latin typeface="Calibri"/>
+              </a:rPr>
+              <a:t>2. ¿Cuál es el propósito principal de asignar roles antes de la sesión presencial?</a:t>
+            </a:r>
+          </a:p>
+          <a:p>
+            <a:pPr>
+              <a:spcAft>
+                <a:spcPts val="600"/>
+              </a:spcAft>
+            </a:pPr>
+            <a:r>
+              <a:rPr sz="1600">
+                <a:solidFill>
+                  <a:srgbClr val="334E68"/>
+                </a:solidFill>
+                <a:latin typeface="Calibri"/>
+              </a:rPr>
+              <a:t>3. Un reclamo de triple repetición resulta incorrecto. ¿Qué efecto tiene además?</a:t>
+            </a:r>
+          </a:p>
+          <a:p>
+            <a:pPr>
+              <a:spcAft>
+                <a:spcPts val="600"/>
+              </a:spcAft>
+            </a:pPr>
+            <a:r>
+              <a:rPr sz="1600">
+                <a:solidFill>
+                  <a:srgbClr val="334E68"/>
+                </a:solidFill>
+                <a:latin typeface="Calibri"/>
+              </a:rPr>
+              <a:t>4. ¿En qué orden se ofrecen tablas correctamente?</a:t>
+            </a:r>
+          </a:p>
+        </p:txBody>
+      </p:sp>
+    </p:spTree>
+  </p:cSld>
+  <p:clrMapOvr>
+    <a:masterClrMapping/>
+  </p:clrMapOvr>
+</p:sld>
+</file>
+
+<file path=ppt/slides/slide19.xml><?xml version="1.0" encoding="utf-8"?>
+<p:sld xmlns:a="http://schemas.openxmlformats.org/drawingml/2006/main" xmlns:p="http://schemas.openxmlformats.org/presentationml/2006/main" xmlns:r="http://schemas.openxmlformats.org/officeDocument/2006/relationships">
+  <p:cSld>
+    <p:spTree>
+      <p:nvGrpSpPr>
+        <p:cNvPr id="1" name=""/>
+        <p:cNvGrpSpPr/>
+        <p:nvPr/>
+      </p:nvGrpSpPr>
+      <p:grpSpPr/>
+      <p:sp>
+        <p:nvSpPr>
+          <p:cNvPr id="2" name="Rectangle 1"/>
+          <p:cNvSpPr/>
+          <p:nvPr/>
+        </p:nvSpPr>
+        <p:spPr>
+          <a:xfrm>
+            <a:off x="0" y="0"/>
+            <a:ext cx="12191695" cy="6858000"/>
+          </a:xfrm>
+          <a:prstGeom prst="rect">
+            <a:avLst/>
+          </a:prstGeom>
+          <a:solidFill>
+            <a:srgbClr val="0A1F33"/>
+          </a:solidFill>
+          <a:ln>
+            <a:noFill/>
+          </a:ln>
+          <a:effectLst/>
+        </p:spPr>
+        <p:style>
+          <a:lnRef idx="1">
+            <a:schemeClr val="accent1"/>
+          </a:lnRef>
+          <a:fillRef idx="3">
+            <a:schemeClr val="accent1"/>
+          </a:fillRef>
+          <a:effectRef idx="2">
+            <a:schemeClr val="accent1"/>
+          </a:effectRef>
+          <a:fontRef idx="minor">
+            <a:schemeClr val="lt1"/>
+          </a:fontRef>
+        </p:style>
+        <p:txBody>
+          <a:bodyPr rtlCol="0" anchor="ctr"/>
+          <a:lstStyle/>
+          <a:p>
+            <a:pPr algn="ctr"/>
+          </a:p>
+        </p:txBody>
+      </p:sp>
+      <p:sp>
+        <p:nvSpPr>
+          <p:cNvPr id="3" name="TextBox 2"/>
+          <p:cNvSpPr txBox="1"/>
+          <p:nvPr/>
+        </p:nvSpPr>
+        <p:spPr>
+          <a:xfrm>
+            <a:off x="548640" y="731520"/>
+            <a:ext cx="11064240" cy="457200"/>
+          </a:xfrm>
+          <a:prstGeom prst="rect">
+            <a:avLst/>
+          </a:prstGeom>
+          <a:noFill/>
+        </p:spPr>
+        <p:txBody>
+          <a:bodyPr wrap="square">
+            <a:spAutoFit/>
+          </a:bodyPr>
+          <a:lstStyle/>
+          <a:p>
+            <a:r>
+              <a:rPr sz="1400" b="1">
+                <a:solidFill>
+                  <a:srgbClr val="F0B429"/>
+                </a:solidFill>
+                <a:latin typeface="Calibri"/>
+              </a:rPr>
+              <a:t>TAREA PARA LA PRÓXIMA SESIÓN</a:t>
+            </a:r>
+          </a:p>
+        </p:txBody>
+      </p:sp>
+      <p:sp>
+        <p:nvSpPr>
+          <p:cNvPr id="4" name="TextBox 3"/>
+          <p:cNvSpPr txBox="1"/>
+          <p:nvPr/>
+        </p:nvSpPr>
+        <p:spPr>
+          <a:xfrm>
+            <a:off x="548640" y="1371600"/>
+            <a:ext cx="11064240" cy="2926080"/>
+          </a:xfrm>
+          <a:prstGeom prst="rect">
+            <a:avLst/>
+          </a:prstGeom>
+          <a:noFill/>
+        </p:spPr>
+        <p:txBody>
+          <a:bodyPr wrap="square">
+            <a:spAutoFit/>
+          </a:bodyPr>
+          <a:lstStyle/>
+          <a:p>
+            <a:r>
+              <a:rPr sz="2400" b="0">
+                <a:solidFill>
+                  <a:srgbClr val="FFFFFF"/>
+                </a:solidFill>
+                <a:latin typeface="Cambria"/>
+              </a:rPr>
+              <a:t>Confirmar el rol asignado, revisar la lista de cotejo y reunir los materiales solicitados para el día presencial.</a:t>
+            </a:r>
+          </a:p>
+        </p:txBody>
+      </p:sp>
+      <p:sp>
+        <p:nvSpPr>
+          <p:cNvPr id="5" name="TextBox 4"/>
+          <p:cNvSpPr txBox="1"/>
+          <p:nvPr/>
+        </p:nvSpPr>
+        <p:spPr>
+          <a:xfrm>
+            <a:off x="548640" y="4754880"/>
+            <a:ext cx="11064240" cy="914400"/>
+          </a:xfrm>
+          <a:prstGeom prst="rect">
+            <a:avLst/>
+          </a:prstGeom>
+          <a:noFill/>
+        </p:spPr>
+        <p:txBody>
+          <a:bodyPr wrap="square">
+            <a:spAutoFit/>
+          </a:bodyPr>
+          <a:lstStyle/>
+          <a:p>
+            <a:r>
+              <a:rPr sz="1800" b="0">
+                <a:solidFill>
+                  <a:srgbClr val="CADCFC"/>
+                </a:solidFill>
+                <a:latin typeface="Calibri"/>
+              </a:rPr>
+              <a:t>¿Dudas? Este es el momento. Gracias por tu participación.</a:t>
+            </a:r>
+          </a:p>
+        </p:txBody>
+      </p:sp>
+      <p:sp>
+        <p:nvSpPr>
+          <p:cNvPr id="6" name="TextBox 5"/>
+          <p:cNvSpPr txBox="1"/>
+          <p:nvPr/>
+        </p:nvSpPr>
+        <p:spPr>
+          <a:xfrm>
+            <a:off x="548640" y="6263640"/>
+            <a:ext cx="11064240" cy="365760"/>
+          </a:xfrm>
+          <a:prstGeom prst="rect">
+            <a:avLst/>
+          </a:prstGeom>
+          <a:noFill/>
+        </p:spPr>
+        <p:txBody>
+          <a:bodyPr wrap="square">
+            <a:spAutoFit/>
+          </a:bodyPr>
+          <a:lstStyle/>
+          <a:p>
+            <a:r>
+              <a:rPr sz="1200" b="0">
+                <a:solidFill>
+                  <a:srgbClr val="9FB3C8"/>
+                </a:solidFill>
+                <a:latin typeface="Calibri"/>
+              </a:rPr>
+              <a:t>Formación Ajedrez · Sesión 7 · ajedrez-integral.com</a:t>
+            </a:r>
+          </a:p>
+        </p:txBody>
+      </p:sp>
+    </p:spTree>
+  </p:cSld>
+  <p:clrMapOvr>
+    <a:masterClrMapping/>
+  </p:clrMapOvr>
+</p:sld>
+</file>
+
 <file path=ppt/slides/slide2.xml><?xml version="1.0" encoding="utf-8"?>
 <p:sld xmlns:a="http://schemas.openxmlformats.org/drawingml/2006/main" xmlns:p="http://schemas.openxmlformats.org/presentationml/2006/main" xmlns:r="http://schemas.openxmlformats.org/officeDocument/2006/relationships">
   <p:cSld>
@@ -3565,7 +5827,7 @@
                 </a:solidFill>
                 <a:latin typeface="Calibri"/>
               </a:rPr>
-              <a:t>⚖</a:t>
+              <a:t>◎</a:t>
             </a:r>
           </a:p>
         </p:txBody>
@@ -3579,7 +5841,7 @@
         <p:spPr>
           <a:xfrm>
             <a:off x="1234440" y="530352"/>
-            <a:ext cx="7315200" cy="457200"/>
+            <a:ext cx="9144000" cy="457200"/>
           </a:xfrm>
           <a:prstGeom prst="rect">
             <a:avLst/>
@@ -3599,7 +5861,7 @@
                 </a:solidFill>
                 <a:latin typeface="Calibri"/>
               </a:rPr>
-              <a:t>CONTENIDO DE LA SESIÓN</a:t>
+              <a:t>OBJETIVOS DE LA SESIÓN</a:t>
             </a:r>
           </a:p>
         </p:txBody>
@@ -3690,8 +5952,8 @@
         </p:nvSpPr>
         <p:spPr>
           <a:xfrm>
-            <a:off x="1005840" y="2331720"/>
-            <a:ext cx="10241280" cy="3566160"/>
+            <a:off x="914400" y="2194560"/>
+            <a:ext cx="10332720" cy="3931920"/>
           </a:xfrm>
           <a:prstGeom prst="rect">
             <a:avLst/>
@@ -3704,14 +5966,67 @@
           </a:bodyPr>
           <a:lstStyle/>
           <a:p>
-            <a:r>
-              <a:rPr sz="1600" b="0">
+            <a:pPr>
+              <a:spcAft>
+                <a:spcPts val="800"/>
+              </a:spcAft>
+            </a:pPr>
+            <a:r>
+              <a:rPr sz="1800">
                 <a:solidFill>
                   <a:srgbClr val="334E68"/>
                 </a:solidFill>
                 <a:latin typeface="Calibri"/>
               </a:rPr>
-              <a:t>Simulacros de arbitraje en vivo mediante salas de trabajo colaborativo.</a:t>
+              <a:t>•  Arbitrar una ronda simulada aplicando todo lo visto en el curso.</a:t>
+            </a:r>
+          </a:p>
+          <a:p>
+            <a:pPr>
+              <a:spcAft>
+                <a:spcPts val="800"/>
+              </a:spcAft>
+            </a:pPr>
+            <a:r>
+              <a:rPr sz="1800">
+                <a:solidFill>
+                  <a:srgbClr val="334E68"/>
+                </a:solidFill>
+                <a:latin typeface="Calibri"/>
+              </a:rPr>
+              <a:t>•  Observar a otra persona con la lista de cotejo y dar retroalimentación útil.</a:t>
+            </a:r>
+          </a:p>
+          <a:p>
+            <a:pPr>
+              <a:spcAft>
+                <a:spcPts val="800"/>
+              </a:spcAft>
+            </a:pPr>
+            <a:r>
+              <a:rPr sz="1800">
+                <a:solidFill>
+                  <a:srgbClr val="334E68"/>
+                </a:solidFill>
+                <a:latin typeface="Calibri"/>
+              </a:rPr>
+              <a:t>•  Conocer los formularios que se usarán en la sesión presencial.</a:t>
+            </a:r>
+          </a:p>
+          <a:p>
+            <a:pPr>
+              <a:spcAft>
+                <a:spcPts val="800"/>
+              </a:spcAft>
+            </a:pPr>
+            <a:r>
+              <a:rPr sz="1800">
+                <a:solidFill>
+                  <a:srgbClr val="334E68"/>
+                </a:solidFill>
+                <a:latin typeface="Calibri"/>
+              </a:rPr>
+              <a:t>•  Confirmar los roles y los materiales para el torneo real.</a:t>
             </a:r>
           </a:p>
         </p:txBody>
@@ -3808,7 +6123,7 @@
                 </a:solidFill>
                 <a:latin typeface="Calibri"/>
               </a:rPr>
-              <a:t>⚖</a:t>
+              <a:t>◷</a:t>
             </a:r>
           </a:p>
         </p:txBody>
@@ -3822,7 +6137,7 @@
         <p:spPr>
           <a:xfrm>
             <a:off x="1234440" y="530352"/>
-            <a:ext cx="7315200" cy="457200"/>
+            <a:ext cx="9144000" cy="457200"/>
           </a:xfrm>
           <a:prstGeom prst="rect">
             <a:avLst/>
@@ -3842,123 +6157,753 @@
                 </a:solidFill>
                 <a:latin typeface="Calibri"/>
               </a:rPr>
-              <a:t>CONTENIDO DE LA SESIÓN</a:t>
-            </a:r>
-          </a:p>
-        </p:txBody>
-      </p:sp>
-      <p:sp>
-        <p:nvSpPr>
-          <p:cNvPr id="5" name="TextBox 4"/>
-          <p:cNvSpPr txBox="1"/>
-          <p:nvPr/>
-        </p:nvSpPr>
-        <p:spPr>
-          <a:xfrm>
-            <a:off x="548640" y="1051560"/>
-            <a:ext cx="11064240" cy="822960"/>
-          </a:xfrm>
-          <a:prstGeom prst="rect">
-            <a:avLst/>
-          </a:prstGeom>
-          <a:noFill/>
-        </p:spPr>
-        <p:txBody>
-          <a:bodyPr wrap="square">
-            <a:spAutoFit/>
-          </a:bodyPr>
-          <a:lstStyle/>
-          <a:p>
-            <a:r>
-              <a:rPr sz="2400" b="1">
-                <a:solidFill>
-                  <a:srgbClr val="0A1F33"/>
-                </a:solidFill>
-                <a:latin typeface="Cambria"/>
-              </a:rPr>
-              <a:t>Talleres prácticos y simulacros de arbitraje</a:t>
-            </a:r>
-          </a:p>
-        </p:txBody>
-      </p:sp>
-      <p:sp>
-        <p:nvSpPr>
-          <p:cNvPr id="6" name="Rectangle 5"/>
-          <p:cNvSpPr/>
-          <p:nvPr/>
-        </p:nvSpPr>
-        <p:spPr>
-          <a:xfrm>
-            <a:off x="548640" y="1965960"/>
-            <a:ext cx="11064240" cy="4297680"/>
-          </a:xfrm>
-          <a:prstGeom prst="rect">
-            <a:avLst/>
-          </a:prstGeom>
-          <a:solidFill>
-            <a:srgbClr val="F0F4F8"/>
-          </a:solidFill>
-          <a:ln>
-            <a:noFill/>
-          </a:ln>
-          <a:effectLst/>
-        </p:spPr>
-        <p:style>
-          <a:lnRef idx="1">
-            <a:schemeClr val="accent1"/>
-          </a:lnRef>
-          <a:fillRef idx="3">
-            <a:schemeClr val="accent1"/>
-          </a:fillRef>
-          <a:effectRef idx="2">
-            <a:schemeClr val="accent1"/>
-          </a:effectRef>
-          <a:fontRef idx="minor">
-            <a:schemeClr val="lt1"/>
-          </a:fontRef>
-        </p:style>
-        <p:txBody>
-          <a:bodyPr rtlCol="0" anchor="ctr"/>
-          <a:lstStyle/>
-          <a:p>
-            <a:pPr algn="ctr"/>
-          </a:p>
-        </p:txBody>
-      </p:sp>
-      <p:sp>
-        <p:nvSpPr>
-          <p:cNvPr id="7" name="TextBox 6"/>
-          <p:cNvSpPr txBox="1"/>
-          <p:nvPr/>
-        </p:nvSpPr>
-        <p:spPr>
-          <a:xfrm>
-            <a:off x="1005840" y="2331720"/>
-            <a:ext cx="10241280" cy="3566160"/>
-          </a:xfrm>
-          <a:prstGeom prst="rect">
-            <a:avLst/>
-          </a:prstGeom>
-          <a:noFill/>
-        </p:spPr>
-        <p:txBody>
-          <a:bodyPr wrap="square">
-            <a:spAutoFit/>
-          </a:bodyPr>
-          <a:lstStyle/>
-          <a:p>
-            <a:r>
-              <a:rPr sz="1600" b="0">
-                <a:solidFill>
-                  <a:srgbClr val="334E68"/>
-                </a:solidFill>
-                <a:latin typeface="Calibri"/>
-              </a:rPr>
-              <a:t>Revisión de los formularios y de la lista de cotejo oficial que se usará en la sesión presencial.</a:t>
-            </a:r>
-          </a:p>
-        </p:txBody>
-      </p:sp>
+              <a:t>CRONOGRAMA DE LA SESIÓN · 5 HORAS</a:t>
+            </a:r>
+          </a:p>
+        </p:txBody>
+      </p:sp>
+      <p:graphicFrame>
+        <p:nvGraphicFramePr>
+          <p:cNvPr id="5" name="Table 4"/>
+          <p:cNvGraphicFramePr>
+            <a:graphicFrameLocks noGrp="1"/>
+          </p:cNvGraphicFramePr>
+          <p:nvPr/>
+        </p:nvGraphicFramePr>
+        <p:xfrm>
+          <a:off x="548640" y="1143000"/>
+          <a:ext cx="11064240" cy="5029200"/>
+        </p:xfrm>
+        <a:graphic>
+          <a:graphicData uri="http://schemas.openxmlformats.org/drawingml/2006/table">
+            <a:tbl>
+              <a:tblPr firstRow="1" bandRow="1">
+                <a:tableStyleId>{5C22544A-7EE6-4342-B048-85BDC9FD1C3A}</a:tableStyleId>
+              </a:tblPr>
+              <a:tblGrid>
+                <a:gridCol w="1737360"/>
+                <a:gridCol w="1188720"/>
+                <a:gridCol w="8138160"/>
+              </a:tblGrid>
+              <a:tr h="457200">
+                <a:tc>
+                  <a:txBody>
+                    <a:bodyPr/>
+                    <a:lstStyle/>
+                    <a:p>
+                      <a:r>
+                        <a:rPr sz="1300" b="1">
+                          <a:solidFill>
+                            <a:srgbClr val="FFFFFF"/>
+                          </a:solidFill>
+                        </a:rPr>
+                        <a:t>Tiempo</a:t>
+                      </a:r>
+                    </a:p>
+                  </a:txBody>
+                  <a:tcPr>
+                    <a:solidFill>
+                      <a:srgbClr val="102A43"/>
+                    </a:solidFill>
+                  </a:tcPr>
+                </a:tc>
+                <a:tc>
+                  <a:txBody>
+                    <a:bodyPr/>
+                    <a:lstStyle/>
+                    <a:p>
+                      <a:r>
+                        <a:rPr sz="1300" b="1">
+                          <a:solidFill>
+                            <a:srgbClr val="FFFFFF"/>
+                          </a:solidFill>
+                        </a:rPr>
+                        <a:t>Duración</a:t>
+                      </a:r>
+                    </a:p>
+                  </a:txBody>
+                  <a:tcPr>
+                    <a:solidFill>
+                      <a:srgbClr val="102A43"/>
+                    </a:solidFill>
+                  </a:tcPr>
+                </a:tc>
+                <a:tc>
+                  <a:txBody>
+                    <a:bodyPr/>
+                    <a:lstStyle/>
+                    <a:p>
+                      <a:r>
+                        <a:rPr sz="1300" b="1">
+                          <a:solidFill>
+                            <a:srgbClr val="FFFFFF"/>
+                          </a:solidFill>
+                        </a:rPr>
+                        <a:t>Actividad</a:t>
+                      </a:r>
+                    </a:p>
+                  </a:txBody>
+                  <a:tcPr>
+                    <a:solidFill>
+                      <a:srgbClr val="102A43"/>
+                    </a:solidFill>
+                  </a:tcPr>
+                </a:tc>
+              </a:tr>
+              <a:tr h="457200">
+                <a:tc>
+                  <a:txBody>
+                    <a:bodyPr/>
+                    <a:lstStyle/>
+                    <a:p>
+                      <a:r>
+                        <a:rPr sz="1200" b="0">
+                          <a:solidFill>
+                            <a:srgbClr val="334E68"/>
+                          </a:solidFill>
+                        </a:rPr>
+                        <a:t>0:00 – 0:15</a:t>
+                      </a:r>
+                    </a:p>
+                  </a:txBody>
+                  <a:tcPr>
+                    <a:solidFill>
+                      <a:srgbClr val="F0F4F8"/>
+                    </a:solidFill>
+                  </a:tcPr>
+                </a:tc>
+                <a:tc>
+                  <a:txBody>
+                    <a:bodyPr/>
+                    <a:lstStyle/>
+                    <a:p>
+                      <a:r>
+                        <a:rPr sz="1200" b="0">
+                          <a:solidFill>
+                            <a:srgbClr val="334E68"/>
+                          </a:solidFill>
+                        </a:rPr>
+                        <a:t>15 min</a:t>
+                      </a:r>
+                    </a:p>
+                  </a:txBody>
+                  <a:tcPr>
+                    <a:solidFill>
+                      <a:srgbClr val="F0F4F8"/>
+                    </a:solidFill>
+                  </a:tcPr>
+                </a:tc>
+                <a:tc>
+                  <a:txBody>
+                    <a:bodyPr/>
+                    <a:lstStyle/>
+                    <a:p>
+                      <a:r>
+                        <a:rPr sz="1200" b="0">
+                          <a:solidFill>
+                            <a:srgbClr val="334E68"/>
+                          </a:solidFill>
+                        </a:rPr>
+                        <a:t>Repaso y revisión de la tarea</a:t>
+                      </a:r>
+                    </a:p>
+                  </a:txBody>
+                  <a:tcPr>
+                    <a:solidFill>
+                      <a:srgbClr val="F0F4F8"/>
+                    </a:solidFill>
+                  </a:tcPr>
+                </a:tc>
+              </a:tr>
+              <a:tr h="457200">
+                <a:tc>
+                  <a:txBody>
+                    <a:bodyPr/>
+                    <a:lstStyle/>
+                    <a:p>
+                      <a:r>
+                        <a:rPr sz="1200" b="0">
+                          <a:solidFill>
+                            <a:srgbClr val="334E68"/>
+                          </a:solidFill>
+                        </a:rPr>
+                        <a:t>0:15 – 0:45</a:t>
+                      </a:r>
+                    </a:p>
+                  </a:txBody>
+                  <a:tcPr>
+                    <a:solidFill>
+                      <a:srgbClr val="FFFFFF"/>
+                    </a:solidFill>
+                  </a:tcPr>
+                </a:tc>
+                <a:tc>
+                  <a:txBody>
+                    <a:bodyPr/>
+                    <a:lstStyle/>
+                    <a:p>
+                      <a:r>
+                        <a:rPr sz="1200" b="0">
+                          <a:solidFill>
+                            <a:srgbClr val="334E68"/>
+                          </a:solidFill>
+                        </a:rPr>
+                        <a:t>30 min</a:t>
+                      </a:r>
+                    </a:p>
+                  </a:txBody>
+                  <a:tcPr>
+                    <a:solidFill>
+                      <a:srgbClr val="FFFFFF"/>
+                    </a:solidFill>
+                  </a:tcPr>
+                </a:tc>
+                <a:tc>
+                  <a:txBody>
+                    <a:bodyPr/>
+                    <a:lstStyle/>
+                    <a:p>
+                      <a:r>
+                        <a:rPr sz="1200" b="0">
+                          <a:solidFill>
+                            <a:srgbClr val="334E68"/>
+                          </a:solidFill>
+                        </a:rPr>
+                        <a:t>Guía del simulacro y roles</a:t>
+                      </a:r>
+                    </a:p>
+                  </a:txBody>
+                  <a:tcPr>
+                    <a:solidFill>
+                      <a:srgbClr val="FFFFFF"/>
+                    </a:solidFill>
+                  </a:tcPr>
+                </a:tc>
+              </a:tr>
+              <a:tr h="457200">
+                <a:tc>
+                  <a:txBody>
+                    <a:bodyPr/>
+                    <a:lstStyle/>
+                    <a:p>
+                      <a:r>
+                        <a:rPr sz="1200" b="0">
+                          <a:solidFill>
+                            <a:srgbClr val="334E68"/>
+                          </a:solidFill>
+                        </a:rPr>
+                        <a:t>0:45 – 1:15</a:t>
+                      </a:r>
+                    </a:p>
+                  </a:txBody>
+                  <a:tcPr>
+                    <a:solidFill>
+                      <a:srgbClr val="F0F4F8"/>
+                    </a:solidFill>
+                  </a:tcPr>
+                </a:tc>
+                <a:tc>
+                  <a:txBody>
+                    <a:bodyPr/>
+                    <a:lstStyle/>
+                    <a:p>
+                      <a:r>
+                        <a:rPr sz="1200" b="0">
+                          <a:solidFill>
+                            <a:srgbClr val="334E68"/>
+                          </a:solidFill>
+                        </a:rPr>
+                        <a:t>30 min</a:t>
+                      </a:r>
+                    </a:p>
+                  </a:txBody>
+                  <a:tcPr>
+                    <a:solidFill>
+                      <a:srgbClr val="F0F4F8"/>
+                    </a:solidFill>
+                  </a:tcPr>
+                </a:tc>
+                <a:tc>
+                  <a:txBody>
+                    <a:bodyPr/>
+                    <a:lstStyle/>
+                    <a:p>
+                      <a:r>
+                        <a:rPr sz="1200" b="0">
+                          <a:solidFill>
+                            <a:srgbClr val="334E68"/>
+                          </a:solidFill>
+                        </a:rPr>
+                        <a:t>La lista de cotejo y los formularios</a:t>
+                      </a:r>
+                    </a:p>
+                  </a:txBody>
+                  <a:tcPr>
+                    <a:solidFill>
+                      <a:srgbClr val="F0F4F8"/>
+                    </a:solidFill>
+                  </a:tcPr>
+                </a:tc>
+              </a:tr>
+              <a:tr h="457200">
+                <a:tc>
+                  <a:txBody>
+                    <a:bodyPr/>
+                    <a:lstStyle/>
+                    <a:p>
+                      <a:r>
+                        <a:rPr sz="1200" b="1">
+                          <a:solidFill>
+                            <a:srgbClr val="DE911D"/>
+                          </a:solidFill>
+                        </a:rPr>
+                        <a:t>1:15 – 1:30</a:t>
+                      </a:r>
+                    </a:p>
+                  </a:txBody>
+                  <a:tcPr>
+                    <a:solidFill>
+                      <a:srgbClr val="FFFFFF"/>
+                    </a:solidFill>
+                  </a:tcPr>
+                </a:tc>
+                <a:tc>
+                  <a:txBody>
+                    <a:bodyPr/>
+                    <a:lstStyle/>
+                    <a:p>
+                      <a:r>
+                        <a:rPr sz="1200" b="1">
+                          <a:solidFill>
+                            <a:srgbClr val="DE911D"/>
+                          </a:solidFill>
+                        </a:rPr>
+                        <a:t>15 min</a:t>
+                      </a:r>
+                    </a:p>
+                  </a:txBody>
+                  <a:tcPr>
+                    <a:solidFill>
+                      <a:srgbClr val="FFFFFF"/>
+                    </a:solidFill>
+                  </a:tcPr>
+                </a:tc>
+                <a:tc>
+                  <a:txBody>
+                    <a:bodyPr/>
+                    <a:lstStyle/>
+                    <a:p>
+                      <a:r>
+                        <a:rPr sz="1200" b="1">
+                          <a:solidFill>
+                            <a:srgbClr val="DE911D"/>
+                          </a:solidFill>
+                        </a:rPr>
+                        <a:t>Receso</a:t>
+                      </a:r>
+                    </a:p>
+                  </a:txBody>
+                  <a:tcPr>
+                    <a:solidFill>
+                      <a:srgbClr val="FFFFFF"/>
+                    </a:solidFill>
+                  </a:tcPr>
+                </a:tc>
+              </a:tr>
+              <a:tr h="457200">
+                <a:tc>
+                  <a:txBody>
+                    <a:bodyPr/>
+                    <a:lstStyle/>
+                    <a:p>
+                      <a:r>
+                        <a:rPr sz="1200" b="0">
+                          <a:solidFill>
+                            <a:srgbClr val="334E68"/>
+                          </a:solidFill>
+                        </a:rPr>
+                        <a:t>1:30 – 2:30</a:t>
+                      </a:r>
+                    </a:p>
+                  </a:txBody>
+                  <a:tcPr>
+                    <a:solidFill>
+                      <a:srgbClr val="F0F4F8"/>
+                    </a:solidFill>
+                  </a:tcPr>
+                </a:tc>
+                <a:tc>
+                  <a:txBody>
+                    <a:bodyPr/>
+                    <a:lstStyle/>
+                    <a:p>
+                      <a:r>
+                        <a:rPr sz="1200" b="0">
+                          <a:solidFill>
+                            <a:srgbClr val="334E68"/>
+                          </a:solidFill>
+                        </a:rPr>
+                        <a:t>60 min</a:t>
+                      </a:r>
+                    </a:p>
+                  </a:txBody>
+                  <a:tcPr>
+                    <a:solidFill>
+                      <a:srgbClr val="F0F4F8"/>
+                    </a:solidFill>
+                  </a:tcPr>
+                </a:tc>
+                <a:tc>
+                  <a:txBody>
+                    <a:bodyPr/>
+                    <a:lstStyle/>
+                    <a:p>
+                      <a:r>
+                        <a:rPr sz="1200" b="0">
+                          <a:solidFill>
+                            <a:srgbClr val="334E68"/>
+                          </a:solidFill>
+                        </a:rPr>
+                        <a:t>Simulacro 1 en salas de trabajo</a:t>
+                      </a:r>
+                    </a:p>
+                  </a:txBody>
+                  <a:tcPr>
+                    <a:solidFill>
+                      <a:srgbClr val="F0F4F8"/>
+                    </a:solidFill>
+                  </a:tcPr>
+                </a:tc>
+              </a:tr>
+              <a:tr h="457200">
+                <a:tc>
+                  <a:txBody>
+                    <a:bodyPr/>
+                    <a:lstStyle/>
+                    <a:p>
+                      <a:r>
+                        <a:rPr sz="1200" b="0">
+                          <a:solidFill>
+                            <a:srgbClr val="334E68"/>
+                          </a:solidFill>
+                        </a:rPr>
+                        <a:t>2:30 – 3:00</a:t>
+                      </a:r>
+                    </a:p>
+                  </a:txBody>
+                  <a:tcPr>
+                    <a:solidFill>
+                      <a:srgbClr val="FFFFFF"/>
+                    </a:solidFill>
+                  </a:tcPr>
+                </a:tc>
+                <a:tc>
+                  <a:txBody>
+                    <a:bodyPr/>
+                    <a:lstStyle/>
+                    <a:p>
+                      <a:r>
+                        <a:rPr sz="1200" b="0">
+                          <a:solidFill>
+                            <a:srgbClr val="334E68"/>
+                          </a:solidFill>
+                        </a:rPr>
+                        <a:t>30 min</a:t>
+                      </a:r>
+                    </a:p>
+                  </a:txBody>
+                  <a:tcPr>
+                    <a:solidFill>
+                      <a:srgbClr val="FFFFFF"/>
+                    </a:solidFill>
+                  </a:tcPr>
+                </a:tc>
+                <a:tc>
+                  <a:txBody>
+                    <a:bodyPr/>
+                    <a:lstStyle/>
+                    <a:p>
+                      <a:r>
+                        <a:rPr sz="1200" b="0">
+                          <a:solidFill>
+                            <a:srgbClr val="334E68"/>
+                          </a:solidFill>
+                        </a:rPr>
+                        <a:t>Retroalimentación del simulacro 1</a:t>
+                      </a:r>
+                    </a:p>
+                  </a:txBody>
+                  <a:tcPr>
+                    <a:solidFill>
+                      <a:srgbClr val="FFFFFF"/>
+                    </a:solidFill>
+                  </a:tcPr>
+                </a:tc>
+              </a:tr>
+              <a:tr h="457200">
+                <a:tc>
+                  <a:txBody>
+                    <a:bodyPr/>
+                    <a:lstStyle/>
+                    <a:p>
+                      <a:r>
+                        <a:rPr sz="1200" b="1">
+                          <a:solidFill>
+                            <a:srgbClr val="DE911D"/>
+                          </a:solidFill>
+                        </a:rPr>
+                        <a:t>3:00 – 3:15</a:t>
+                      </a:r>
+                    </a:p>
+                  </a:txBody>
+                  <a:tcPr>
+                    <a:solidFill>
+                      <a:srgbClr val="F0F4F8"/>
+                    </a:solidFill>
+                  </a:tcPr>
+                </a:tc>
+                <a:tc>
+                  <a:txBody>
+                    <a:bodyPr/>
+                    <a:lstStyle/>
+                    <a:p>
+                      <a:r>
+                        <a:rPr sz="1200" b="1">
+                          <a:solidFill>
+                            <a:srgbClr val="DE911D"/>
+                          </a:solidFill>
+                        </a:rPr>
+                        <a:t>15 min</a:t>
+                      </a:r>
+                    </a:p>
+                  </a:txBody>
+                  <a:tcPr>
+                    <a:solidFill>
+                      <a:srgbClr val="F0F4F8"/>
+                    </a:solidFill>
+                  </a:tcPr>
+                </a:tc>
+                <a:tc>
+                  <a:txBody>
+                    <a:bodyPr/>
+                    <a:lstStyle/>
+                    <a:p>
+                      <a:r>
+                        <a:rPr sz="1200" b="1">
+                          <a:solidFill>
+                            <a:srgbClr val="DE911D"/>
+                          </a:solidFill>
+                        </a:rPr>
+                        <a:t>Receso</a:t>
+                      </a:r>
+                    </a:p>
+                  </a:txBody>
+                  <a:tcPr>
+                    <a:solidFill>
+                      <a:srgbClr val="F0F4F8"/>
+                    </a:solidFill>
+                  </a:tcPr>
+                </a:tc>
+              </a:tr>
+              <a:tr h="457200">
+                <a:tc>
+                  <a:txBody>
+                    <a:bodyPr/>
+                    <a:lstStyle/>
+                    <a:p>
+                      <a:r>
+                        <a:rPr sz="1200" b="0">
+                          <a:solidFill>
+                            <a:srgbClr val="334E68"/>
+                          </a:solidFill>
+                        </a:rPr>
+                        <a:t>3:15 – 4:15</a:t>
+                      </a:r>
+                    </a:p>
+                  </a:txBody>
+                  <a:tcPr>
+                    <a:solidFill>
+                      <a:srgbClr val="FFFFFF"/>
+                    </a:solidFill>
+                  </a:tcPr>
+                </a:tc>
+                <a:tc>
+                  <a:txBody>
+                    <a:bodyPr/>
+                    <a:lstStyle/>
+                    <a:p>
+                      <a:r>
+                        <a:rPr sz="1200" b="0">
+                          <a:solidFill>
+                            <a:srgbClr val="334E68"/>
+                          </a:solidFill>
+                        </a:rPr>
+                        <a:t>60 min</a:t>
+                      </a:r>
+                    </a:p>
+                  </a:txBody>
+                  <a:tcPr>
+                    <a:solidFill>
+                      <a:srgbClr val="FFFFFF"/>
+                    </a:solidFill>
+                  </a:tcPr>
+                </a:tc>
+                <a:tc>
+                  <a:txBody>
+                    <a:bodyPr/>
+                    <a:lstStyle/>
+                    <a:p>
+                      <a:r>
+                        <a:rPr sz="1200" b="0">
+                          <a:solidFill>
+                            <a:srgbClr val="334E68"/>
+                          </a:solidFill>
+                        </a:rPr>
+                        <a:t>Simulacro 2 con rotación de roles</a:t>
+                      </a:r>
+                    </a:p>
+                  </a:txBody>
+                  <a:tcPr>
+                    <a:solidFill>
+                      <a:srgbClr val="FFFFFF"/>
+                    </a:solidFill>
+                  </a:tcPr>
+                </a:tc>
+              </a:tr>
+              <a:tr h="457200">
+                <a:tc>
+                  <a:txBody>
+                    <a:bodyPr/>
+                    <a:lstStyle/>
+                    <a:p>
+                      <a:r>
+                        <a:rPr sz="1200" b="0">
+                          <a:solidFill>
+                            <a:srgbClr val="334E68"/>
+                          </a:solidFill>
+                        </a:rPr>
+                        <a:t>4:15 – 4:40</a:t>
+                      </a:r>
+                    </a:p>
+                  </a:txBody>
+                  <a:tcPr>
+                    <a:solidFill>
+                      <a:srgbClr val="F0F4F8"/>
+                    </a:solidFill>
+                  </a:tcPr>
+                </a:tc>
+                <a:tc>
+                  <a:txBody>
+                    <a:bodyPr/>
+                    <a:lstStyle/>
+                    <a:p>
+                      <a:r>
+                        <a:rPr sz="1200" b="0">
+                          <a:solidFill>
+                            <a:srgbClr val="334E68"/>
+                          </a:solidFill>
+                        </a:rPr>
+                        <a:t>25 min</a:t>
+                      </a:r>
+                    </a:p>
+                  </a:txBody>
+                  <a:tcPr>
+                    <a:solidFill>
+                      <a:srgbClr val="F0F4F8"/>
+                    </a:solidFill>
+                  </a:tcPr>
+                </a:tc>
+                <a:tc>
+                  <a:txBody>
+                    <a:bodyPr/>
+                    <a:lstStyle/>
+                    <a:p>
+                      <a:r>
+                        <a:rPr sz="1200" b="0">
+                          <a:solidFill>
+                            <a:srgbClr val="334E68"/>
+                          </a:solidFill>
+                        </a:rPr>
+                        <a:t>Asignación de roles para la sesión presencial</a:t>
+                      </a:r>
+                    </a:p>
+                  </a:txBody>
+                  <a:tcPr>
+                    <a:solidFill>
+                      <a:srgbClr val="F0F4F8"/>
+                    </a:solidFill>
+                  </a:tcPr>
+                </a:tc>
+              </a:tr>
+              <a:tr h="457200">
+                <a:tc>
+                  <a:txBody>
+                    <a:bodyPr/>
+                    <a:lstStyle/>
+                    <a:p>
+                      <a:r>
+                        <a:rPr sz="1200" b="0">
+                          <a:solidFill>
+                            <a:srgbClr val="334E68"/>
+                          </a:solidFill>
+                        </a:rPr>
+                        <a:t>4:40 – 5:00</a:t>
+                      </a:r>
+                    </a:p>
+                  </a:txBody>
+                  <a:tcPr>
+                    <a:solidFill>
+                      <a:srgbClr val="FFFFFF"/>
+                    </a:solidFill>
+                  </a:tcPr>
+                </a:tc>
+                <a:tc>
+                  <a:txBody>
+                    <a:bodyPr/>
+                    <a:lstStyle/>
+                    <a:p>
+                      <a:r>
+                        <a:rPr sz="1200" b="0">
+                          <a:solidFill>
+                            <a:srgbClr val="334E68"/>
+                          </a:solidFill>
+                        </a:rPr>
+                        <a:t>20 min</a:t>
+                      </a:r>
+                    </a:p>
+                  </a:txBody>
+                  <a:tcPr>
+                    <a:solidFill>
+                      <a:srgbClr val="FFFFFF"/>
+                    </a:solidFill>
+                  </a:tcPr>
+                </a:tc>
+                <a:tc>
+                  <a:txBody>
+                    <a:bodyPr/>
+                    <a:lstStyle/>
+                    <a:p>
+                      <a:r>
+                        <a:rPr sz="1200" b="0">
+                          <a:solidFill>
+                            <a:srgbClr val="334E68"/>
+                          </a:solidFill>
+                        </a:rPr>
+                        <a:t>Cierre</a:t>
+                      </a:r>
+                    </a:p>
+                  </a:txBody>
+                  <a:tcPr>
+                    <a:solidFill>
+                      <a:srgbClr val="FFFFFF"/>
+                    </a:solidFill>
+                  </a:tcPr>
+                </a:tc>
+              </a:tr>
+            </a:tbl>
+          </a:graphicData>
+        </a:graphic>
+      </p:graphicFrame>
     </p:spTree>
   </p:cSld>
   <p:clrMapOvr>
@@ -4065,7 +7010,7 @@
         <p:spPr>
           <a:xfrm>
             <a:off x="1234440" y="530352"/>
-            <a:ext cx="7315200" cy="457200"/>
+            <a:ext cx="9144000" cy="457200"/>
           </a:xfrm>
           <a:prstGeom prst="rect">
             <a:avLst/>
@@ -4085,7 +7030,7 @@
                 </a:solidFill>
                 <a:latin typeface="Calibri"/>
               </a:rPr>
-              <a:t>CONTENIDO DE LA SESIÓN</a:t>
+              <a:t>CONTENIDO PARA VER EN CLASE</a:t>
             </a:r>
           </a:p>
         </p:txBody>
@@ -4113,13 +7058,13 @@
           <a:lstStyle/>
           <a:p>
             <a:r>
-              <a:rPr sz="2400" b="1">
+              <a:rPr sz="2600" b="1">
                 <a:solidFill>
                   <a:srgbClr val="0A1F33"/>
                 </a:solidFill>
                 <a:latin typeface="Cambria"/>
               </a:rPr>
-              <a:t>Talleres prácticos y simulacros de arbitraje</a:t>
+              <a:t>Cómo funciona el simulacro</a:t>
             </a:r>
           </a:p>
         </p:txBody>
@@ -4132,8 +7077,8 @@
         </p:nvSpPr>
         <p:spPr>
           <a:xfrm>
-            <a:off x="548640" y="1965960"/>
-            <a:ext cx="11064240" cy="4297680"/>
+            <a:off x="548640" y="1874519"/>
+            <a:ext cx="11064240" cy="4389120"/>
           </a:xfrm>
           <a:prstGeom prst="rect">
             <a:avLst/>
@@ -4176,8 +7121,8 @@
         </p:nvSpPr>
         <p:spPr>
           <a:xfrm>
-            <a:off x="1005840" y="2331720"/>
-            <a:ext cx="10241280" cy="3566160"/>
+            <a:off x="914400" y="2011680"/>
+            <a:ext cx="10332720" cy="1371600"/>
           </a:xfrm>
           <a:prstGeom prst="rect">
             <a:avLst/>
@@ -4191,13 +7136,134 @@
           <a:lstStyle/>
           <a:p>
             <a:r>
-              <a:rPr sz="1600" b="0">
+              <a:rPr sz="1500" b="0">
+                <a:solidFill>
+                  <a:srgbClr val="0A1F33"/>
+                </a:solidFill>
+                <a:latin typeface="Calibri"/>
+              </a:rPr>
+              <a:t>En cada sala de trabajo hay tres roles: la persona árbitra, dos personas que representan a los jugadores y actúan una incidencia de la guía, y una persona observadora con la lista de cotejo. La persona árbitra no conoce la incidencia de antemano.</a:t>
+            </a:r>
+          </a:p>
+        </p:txBody>
+      </p:sp>
+      <p:sp>
+        <p:nvSpPr>
+          <p:cNvPr id="8" name="TextBox 7"/>
+          <p:cNvSpPr txBox="1"/>
+          <p:nvPr/>
+        </p:nvSpPr>
+        <p:spPr>
+          <a:xfrm>
+            <a:off x="914400" y="3429000"/>
+            <a:ext cx="10332720" cy="2743200"/>
+          </a:xfrm>
+          <a:prstGeom prst="rect">
+            <a:avLst/>
+          </a:prstGeom>
+          <a:noFill/>
+        </p:spPr>
+        <p:txBody>
+          <a:bodyPr wrap="square">
+            <a:spAutoFit/>
+          </a:bodyPr>
+          <a:lstStyle/>
+          <a:p>
+            <a:pPr>
+              <a:spcAft>
+                <a:spcPts val="800"/>
+              </a:spcAft>
+            </a:pPr>
+            <a:r>
+              <a:rPr sz="1500">
                 <a:solidFill>
                   <a:srgbClr val="334E68"/>
                 </a:solidFill>
                 <a:latin typeface="Calibri"/>
               </a:rPr>
-              <a:t>Asignación de roles para el torneo presencial (árbitro principal, árbitro auxiliar, mesa de control).</a:t>
+              <a:t>•  La incidencia se actúa con un tablero y un reloj reales o con un simulador en pantalla.</a:t>
+            </a:r>
+          </a:p>
+          <a:p>
+            <a:pPr>
+              <a:spcAft>
+                <a:spcPts val="800"/>
+              </a:spcAft>
+            </a:pPr>
+            <a:r>
+              <a:rPr sz="1500">
+                <a:solidFill>
+                  <a:srgbClr val="334E68"/>
+                </a:solidFill>
+                <a:latin typeface="Calibri"/>
+              </a:rPr>
+              <a:t>•  La persona árbitra aplica el método de cuatro pasos y comunica su decisión en voz alta.</a:t>
+            </a:r>
+          </a:p>
+          <a:p>
+            <a:pPr>
+              <a:spcAft>
+                <a:spcPts val="800"/>
+              </a:spcAft>
+            </a:pPr>
+            <a:r>
+              <a:rPr sz="1500">
+                <a:solidFill>
+                  <a:srgbClr val="334E68"/>
+                </a:solidFill>
+                <a:latin typeface="Calibri"/>
+              </a:rPr>
+              <a:t>•  La persona observadora marca Sí o No en cada ítem y anota observaciones concretas.</a:t>
+            </a:r>
+          </a:p>
+          <a:p>
+            <a:pPr>
+              <a:spcAft>
+                <a:spcPts val="800"/>
+              </a:spcAft>
+            </a:pPr>
+            <a:r>
+              <a:rPr sz="1500">
+                <a:solidFill>
+                  <a:srgbClr val="334E68"/>
+                </a:solidFill>
+                <a:latin typeface="Calibri"/>
+              </a:rPr>
+              <a:t>•  Al final de cada incidencia se rotan los roles.</a:t>
+            </a:r>
+          </a:p>
+        </p:txBody>
+      </p:sp>
+      <p:sp>
+        <p:nvSpPr>
+          <p:cNvPr id="9" name="TextBox 8"/>
+          <p:cNvSpPr txBox="1"/>
+          <p:nvPr/>
+        </p:nvSpPr>
+        <p:spPr>
+          <a:xfrm>
+            <a:off x="548640" y="6355080"/>
+            <a:ext cx="11064240" cy="365760"/>
+          </a:xfrm>
+          <a:prstGeom prst="rect">
+            <a:avLst/>
+          </a:prstGeom>
+          <a:noFill/>
+        </p:spPr>
+        <p:txBody>
+          <a:bodyPr wrap="square">
+            <a:spAutoFit/>
+          </a:bodyPr>
+          <a:lstStyle/>
+          <a:p>
+            <a:r>
+              <a:rPr sz="1100" b="0">
+                <a:solidFill>
+                  <a:srgbClr val="627D98"/>
+                </a:solidFill>
+                <a:latin typeface="Calibri"/>
+              </a:rPr>
+              <a:t>Fuente: Metodología del curso</a:t>
             </a:r>
           </a:p>
         </p:txBody>
@@ -4222,6 +7288,1009 @@
       <p:grpSpPr/>
       <p:sp>
         <p:nvSpPr>
+          <p:cNvPr id="2" name="Oval 1"/>
+          <p:cNvSpPr/>
+          <p:nvPr/>
+        </p:nvSpPr>
+        <p:spPr>
+          <a:xfrm>
+            <a:off x="548640" y="502920"/>
+            <a:ext cx="502920" cy="502920"/>
+          </a:xfrm>
+          <a:prstGeom prst="ellipse">
+            <a:avLst/>
+          </a:prstGeom>
+          <a:solidFill>
+            <a:srgbClr val="DE911D"/>
+          </a:solidFill>
+          <a:ln>
+            <a:noFill/>
+          </a:ln>
+          <a:effectLst/>
+        </p:spPr>
+        <p:style>
+          <a:lnRef idx="1">
+            <a:schemeClr val="accent1"/>
+          </a:lnRef>
+          <a:fillRef idx="3">
+            <a:schemeClr val="accent1"/>
+          </a:fillRef>
+          <a:effectRef idx="2">
+            <a:schemeClr val="accent1"/>
+          </a:effectRef>
+          <a:fontRef idx="minor">
+            <a:schemeClr val="lt1"/>
+          </a:fontRef>
+        </p:style>
+        <p:txBody>
+          <a:bodyPr rtlCol="0" anchor="ctr"/>
+          <a:lstStyle/>
+          <a:p>
+            <a:pPr algn="ctr"/>
+          </a:p>
+        </p:txBody>
+      </p:sp>
+      <p:sp>
+        <p:nvSpPr>
+          <p:cNvPr id="3" name="TextBox 2"/>
+          <p:cNvSpPr txBox="1"/>
+          <p:nvPr/>
+        </p:nvSpPr>
+        <p:spPr>
+          <a:xfrm>
+            <a:off x="548640" y="502920"/>
+            <a:ext cx="502920" cy="502920"/>
+          </a:xfrm>
+          <a:prstGeom prst="rect">
+            <a:avLst/>
+          </a:prstGeom>
+          <a:noFill/>
+        </p:spPr>
+        <p:txBody>
+          <a:bodyPr wrap="square">
+            <a:spAutoFit/>
+          </a:bodyPr>
+          <a:lstStyle/>
+          <a:p>
+            <a:pPr algn="ctr"/>
+            <a:r>
+              <a:rPr sz="2000" b="0">
+                <a:solidFill>
+                  <a:srgbClr val="0A1F33"/>
+                </a:solidFill>
+                <a:latin typeface="Calibri"/>
+              </a:rPr>
+              <a:t>⚖</a:t>
+            </a:r>
+          </a:p>
+        </p:txBody>
+      </p:sp>
+      <p:sp>
+        <p:nvSpPr>
+          <p:cNvPr id="4" name="TextBox 3"/>
+          <p:cNvSpPr txBox="1"/>
+          <p:nvPr/>
+        </p:nvSpPr>
+        <p:spPr>
+          <a:xfrm>
+            <a:off x="1234440" y="530352"/>
+            <a:ext cx="9144000" cy="457200"/>
+          </a:xfrm>
+          <a:prstGeom prst="rect">
+            <a:avLst/>
+          </a:prstGeom>
+          <a:noFill/>
+        </p:spPr>
+        <p:txBody>
+          <a:bodyPr wrap="square">
+            <a:spAutoFit/>
+          </a:bodyPr>
+          <a:lstStyle/>
+          <a:p>
+            <a:r>
+              <a:rPr sz="1400" b="1">
+                <a:solidFill>
+                  <a:srgbClr val="DE911D"/>
+                </a:solidFill>
+                <a:latin typeface="Calibri"/>
+              </a:rPr>
+              <a:t>CONTENIDO PARA VER EN CLASE</a:t>
+            </a:r>
+          </a:p>
+        </p:txBody>
+      </p:sp>
+      <p:sp>
+        <p:nvSpPr>
+          <p:cNvPr id="5" name="TextBox 4"/>
+          <p:cNvSpPr txBox="1"/>
+          <p:nvPr/>
+        </p:nvSpPr>
+        <p:spPr>
+          <a:xfrm>
+            <a:off x="548640" y="1051560"/>
+            <a:ext cx="11064240" cy="822960"/>
+          </a:xfrm>
+          <a:prstGeom prst="rect">
+            <a:avLst/>
+          </a:prstGeom>
+          <a:noFill/>
+        </p:spPr>
+        <p:txBody>
+          <a:bodyPr wrap="square">
+            <a:spAutoFit/>
+          </a:bodyPr>
+          <a:lstStyle/>
+          <a:p>
+            <a:r>
+              <a:rPr sz="2600" b="1">
+                <a:solidFill>
+                  <a:srgbClr val="0A1F33"/>
+                </a:solidFill>
+                <a:latin typeface="Cambria"/>
+              </a:rPr>
+              <a:t>La lista de cotejo de desempeño arbitral</a:t>
+            </a:r>
+          </a:p>
+        </p:txBody>
+      </p:sp>
+      <p:sp>
+        <p:nvSpPr>
+          <p:cNvPr id="6" name="Rectangle 5"/>
+          <p:cNvSpPr/>
+          <p:nvPr/>
+        </p:nvSpPr>
+        <p:spPr>
+          <a:xfrm>
+            <a:off x="548640" y="1874519"/>
+            <a:ext cx="11064240" cy="4389120"/>
+          </a:xfrm>
+          <a:prstGeom prst="rect">
+            <a:avLst/>
+          </a:prstGeom>
+          <a:solidFill>
+            <a:srgbClr val="F0F4F8"/>
+          </a:solidFill>
+          <a:ln>
+            <a:noFill/>
+          </a:ln>
+          <a:effectLst/>
+        </p:spPr>
+        <p:style>
+          <a:lnRef idx="1">
+            <a:schemeClr val="accent1"/>
+          </a:lnRef>
+          <a:fillRef idx="3">
+            <a:schemeClr val="accent1"/>
+          </a:fillRef>
+          <a:effectRef idx="2">
+            <a:schemeClr val="accent1"/>
+          </a:effectRef>
+          <a:fontRef idx="minor">
+            <a:schemeClr val="lt1"/>
+          </a:fontRef>
+        </p:style>
+        <p:txBody>
+          <a:bodyPr rtlCol="0" anchor="ctr"/>
+          <a:lstStyle/>
+          <a:p>
+            <a:pPr algn="ctr"/>
+          </a:p>
+        </p:txBody>
+      </p:sp>
+      <p:sp>
+        <p:nvSpPr>
+          <p:cNvPr id="7" name="TextBox 6"/>
+          <p:cNvSpPr txBox="1"/>
+          <p:nvPr/>
+        </p:nvSpPr>
+        <p:spPr>
+          <a:xfrm>
+            <a:off x="914400" y="2011680"/>
+            <a:ext cx="10332720" cy="1371600"/>
+          </a:xfrm>
+          <a:prstGeom prst="rect">
+            <a:avLst/>
+          </a:prstGeom>
+          <a:noFill/>
+        </p:spPr>
+        <p:txBody>
+          <a:bodyPr wrap="square">
+            <a:spAutoFit/>
+          </a:bodyPr>
+          <a:lstStyle/>
+          <a:p>
+            <a:r>
+              <a:rPr sz="1500" b="0">
+                <a:solidFill>
+                  <a:srgbClr val="0A1F33"/>
+                </a:solidFill>
+                <a:latin typeface="Calibri"/>
+              </a:rPr>
+              <a:t>La lista de cotejo es el instrumento con el que se evalúa el desempeño en el torneo real de la sesión presencial. Conocerla de antemano permite prepararse para cada ítem.</a:t>
+            </a:r>
+          </a:p>
+        </p:txBody>
+      </p:sp>
+      <p:sp>
+        <p:nvSpPr>
+          <p:cNvPr id="8" name="TextBox 7"/>
+          <p:cNvSpPr txBox="1"/>
+          <p:nvPr/>
+        </p:nvSpPr>
+        <p:spPr>
+          <a:xfrm>
+            <a:off x="914400" y="3429000"/>
+            <a:ext cx="10332720" cy="2743200"/>
+          </a:xfrm>
+          <a:prstGeom prst="rect">
+            <a:avLst/>
+          </a:prstGeom>
+          <a:noFill/>
+        </p:spPr>
+        <p:txBody>
+          <a:bodyPr wrap="square">
+            <a:spAutoFit/>
+          </a:bodyPr>
+          <a:lstStyle/>
+          <a:p>
+            <a:pPr>
+              <a:spcAft>
+                <a:spcPts val="800"/>
+              </a:spcAft>
+            </a:pPr>
+            <a:r>
+              <a:rPr sz="1300">
+                <a:solidFill>
+                  <a:srgbClr val="334E68"/>
+                </a:solidFill>
+                <a:latin typeface="Calibri"/>
+              </a:rPr>
+              <a:t>•  Verifica la acreditación y el emparejamiento antes de iniciar la ronda.</a:t>
+            </a:r>
+          </a:p>
+          <a:p>
+            <a:pPr>
+              <a:spcAft>
+                <a:spcPts val="800"/>
+              </a:spcAft>
+            </a:pPr>
+            <a:r>
+              <a:rPr sz="1300">
+                <a:solidFill>
+                  <a:srgbClr val="334E68"/>
+                </a:solidFill>
+                <a:latin typeface="Calibri"/>
+              </a:rPr>
+              <a:t>•  Aplica correctamente las reglas básicas y resuelve reclamos con el procedimiento del reglamento.</a:t>
+            </a:r>
+          </a:p>
+          <a:p>
+            <a:pPr>
+              <a:spcAft>
+                <a:spcPts val="800"/>
+              </a:spcAft>
+            </a:pPr>
+            <a:r>
+              <a:rPr sz="1300">
+                <a:solidFill>
+                  <a:srgbClr val="334E68"/>
+                </a:solidFill>
+                <a:latin typeface="Calibri"/>
+              </a:rPr>
+              <a:t>•  Gestiona con criterio las incidencias con el reloj.</a:t>
+            </a:r>
+          </a:p>
+          <a:p>
+            <a:pPr>
+              <a:spcAft>
+                <a:spcPts val="800"/>
+              </a:spcAft>
+            </a:pPr>
+            <a:r>
+              <a:rPr sz="1300">
+                <a:solidFill>
+                  <a:srgbClr val="334E68"/>
+                </a:solidFill>
+                <a:latin typeface="Calibri"/>
+              </a:rPr>
+              <a:t>•  Aplica las sanciones correspondientes ante faltas o dispositivos no autorizados.</a:t>
+            </a:r>
+          </a:p>
+          <a:p>
+            <a:pPr>
+              <a:spcAft>
+                <a:spcPts val="800"/>
+              </a:spcAft>
+            </a:pPr>
+            <a:r>
+              <a:rPr sz="1300">
+                <a:solidFill>
+                  <a:srgbClr val="334E68"/>
+                </a:solidFill>
+                <a:latin typeface="Calibri"/>
+              </a:rPr>
+              <a:t>•  Calcula correctamente los desempates.</a:t>
+            </a:r>
+          </a:p>
+          <a:p>
+            <a:pPr>
+              <a:spcAft>
+                <a:spcPts val="800"/>
+              </a:spcAft>
+            </a:pPr>
+            <a:r>
+              <a:rPr sz="1300">
+                <a:solidFill>
+                  <a:srgbClr val="334E68"/>
+                </a:solidFill>
+                <a:latin typeface="Calibri"/>
+              </a:rPr>
+              <a:t>•  Mantiene un trato respetuoso e imparcial y documenta cada incidencia.</a:t>
+            </a:r>
+          </a:p>
+        </p:txBody>
+      </p:sp>
+      <p:sp>
+        <p:nvSpPr>
+          <p:cNvPr id="9" name="TextBox 8"/>
+          <p:cNvSpPr txBox="1"/>
+          <p:nvPr/>
+        </p:nvSpPr>
+        <p:spPr>
+          <a:xfrm>
+            <a:off x="548640" y="6355080"/>
+            <a:ext cx="11064240" cy="365760"/>
+          </a:xfrm>
+          <a:prstGeom prst="rect">
+            <a:avLst/>
+          </a:prstGeom>
+          <a:noFill/>
+        </p:spPr>
+        <p:txBody>
+          <a:bodyPr wrap="square">
+            <a:spAutoFit/>
+          </a:bodyPr>
+          <a:lstStyle/>
+          <a:p>
+            <a:r>
+              <a:rPr sz="1100" b="0">
+                <a:solidFill>
+                  <a:srgbClr val="627D98"/>
+                </a:solidFill>
+                <a:latin typeface="Calibri"/>
+              </a:rPr>
+              <a:t>Fuente: Lista de cotejo oficial del curso (formularios de la Sesión 8)</a:t>
+            </a:r>
+          </a:p>
+        </p:txBody>
+      </p:sp>
+    </p:spTree>
+  </p:cSld>
+  <p:clrMapOvr>
+    <a:masterClrMapping/>
+  </p:clrMapOvr>
+</p:sld>
+</file>
+
+<file path=ppt/slides/slide6.xml><?xml version="1.0" encoding="utf-8"?>
+<p:sld xmlns:a="http://schemas.openxmlformats.org/drawingml/2006/main" xmlns:p="http://schemas.openxmlformats.org/presentationml/2006/main" xmlns:r="http://schemas.openxmlformats.org/officeDocument/2006/relationships">
+  <p:cSld>
+    <p:spTree>
+      <p:nvGrpSpPr>
+        <p:cNvPr id="1" name=""/>
+        <p:cNvGrpSpPr/>
+        <p:nvPr/>
+      </p:nvGrpSpPr>
+      <p:grpSpPr/>
+      <p:sp>
+        <p:nvSpPr>
+          <p:cNvPr id="2" name="Oval 1"/>
+          <p:cNvSpPr/>
+          <p:nvPr/>
+        </p:nvSpPr>
+        <p:spPr>
+          <a:xfrm>
+            <a:off x="548640" y="502920"/>
+            <a:ext cx="502920" cy="502920"/>
+          </a:xfrm>
+          <a:prstGeom prst="ellipse">
+            <a:avLst/>
+          </a:prstGeom>
+          <a:solidFill>
+            <a:srgbClr val="DE911D"/>
+          </a:solidFill>
+          <a:ln>
+            <a:noFill/>
+          </a:ln>
+          <a:effectLst/>
+        </p:spPr>
+        <p:style>
+          <a:lnRef idx="1">
+            <a:schemeClr val="accent1"/>
+          </a:lnRef>
+          <a:fillRef idx="3">
+            <a:schemeClr val="accent1"/>
+          </a:fillRef>
+          <a:effectRef idx="2">
+            <a:schemeClr val="accent1"/>
+          </a:effectRef>
+          <a:fontRef idx="minor">
+            <a:schemeClr val="lt1"/>
+          </a:fontRef>
+        </p:style>
+        <p:txBody>
+          <a:bodyPr rtlCol="0" anchor="ctr"/>
+          <a:lstStyle/>
+          <a:p>
+            <a:pPr algn="ctr"/>
+          </a:p>
+        </p:txBody>
+      </p:sp>
+      <p:sp>
+        <p:nvSpPr>
+          <p:cNvPr id="3" name="TextBox 2"/>
+          <p:cNvSpPr txBox="1"/>
+          <p:nvPr/>
+        </p:nvSpPr>
+        <p:spPr>
+          <a:xfrm>
+            <a:off x="548640" y="502920"/>
+            <a:ext cx="502920" cy="502920"/>
+          </a:xfrm>
+          <a:prstGeom prst="rect">
+            <a:avLst/>
+          </a:prstGeom>
+          <a:noFill/>
+        </p:spPr>
+        <p:txBody>
+          <a:bodyPr wrap="square">
+            <a:spAutoFit/>
+          </a:bodyPr>
+          <a:lstStyle/>
+          <a:p>
+            <a:pPr algn="ctr"/>
+            <a:r>
+              <a:rPr sz="2000" b="0">
+                <a:solidFill>
+                  <a:srgbClr val="0A1F33"/>
+                </a:solidFill>
+                <a:latin typeface="Calibri"/>
+              </a:rPr>
+              <a:t>⚖</a:t>
+            </a:r>
+          </a:p>
+        </p:txBody>
+      </p:sp>
+      <p:sp>
+        <p:nvSpPr>
+          <p:cNvPr id="4" name="TextBox 3"/>
+          <p:cNvSpPr txBox="1"/>
+          <p:nvPr/>
+        </p:nvSpPr>
+        <p:spPr>
+          <a:xfrm>
+            <a:off x="1234440" y="530352"/>
+            <a:ext cx="9144000" cy="457200"/>
+          </a:xfrm>
+          <a:prstGeom prst="rect">
+            <a:avLst/>
+          </a:prstGeom>
+          <a:noFill/>
+        </p:spPr>
+        <p:txBody>
+          <a:bodyPr wrap="square">
+            <a:spAutoFit/>
+          </a:bodyPr>
+          <a:lstStyle/>
+          <a:p>
+            <a:r>
+              <a:rPr sz="1400" b="1">
+                <a:solidFill>
+                  <a:srgbClr val="DE911D"/>
+                </a:solidFill>
+                <a:latin typeface="Calibri"/>
+              </a:rPr>
+              <a:t>CONTENIDO PARA VER EN CLASE</a:t>
+            </a:r>
+          </a:p>
+        </p:txBody>
+      </p:sp>
+      <p:sp>
+        <p:nvSpPr>
+          <p:cNvPr id="5" name="TextBox 4"/>
+          <p:cNvSpPr txBox="1"/>
+          <p:nvPr/>
+        </p:nvSpPr>
+        <p:spPr>
+          <a:xfrm>
+            <a:off x="548640" y="1051560"/>
+            <a:ext cx="11064240" cy="822960"/>
+          </a:xfrm>
+          <a:prstGeom prst="rect">
+            <a:avLst/>
+          </a:prstGeom>
+          <a:noFill/>
+        </p:spPr>
+        <p:txBody>
+          <a:bodyPr wrap="square">
+            <a:spAutoFit/>
+          </a:bodyPr>
+          <a:lstStyle/>
+          <a:p>
+            <a:r>
+              <a:rPr sz="2600" b="1">
+                <a:solidFill>
+                  <a:srgbClr val="0A1F33"/>
+                </a:solidFill>
+                <a:latin typeface="Cambria"/>
+              </a:rPr>
+              <a:t>Roles en el torneo presencial</a:t>
+            </a:r>
+          </a:p>
+        </p:txBody>
+      </p:sp>
+      <p:sp>
+        <p:nvSpPr>
+          <p:cNvPr id="6" name="Rectangle 5"/>
+          <p:cNvSpPr/>
+          <p:nvPr/>
+        </p:nvSpPr>
+        <p:spPr>
+          <a:xfrm>
+            <a:off x="548640" y="1874519"/>
+            <a:ext cx="11064240" cy="4389120"/>
+          </a:xfrm>
+          <a:prstGeom prst="rect">
+            <a:avLst/>
+          </a:prstGeom>
+          <a:solidFill>
+            <a:srgbClr val="F0F4F8"/>
+          </a:solidFill>
+          <a:ln>
+            <a:noFill/>
+          </a:ln>
+          <a:effectLst/>
+        </p:spPr>
+        <p:style>
+          <a:lnRef idx="1">
+            <a:schemeClr val="accent1"/>
+          </a:lnRef>
+          <a:fillRef idx="3">
+            <a:schemeClr val="accent1"/>
+          </a:fillRef>
+          <a:effectRef idx="2">
+            <a:schemeClr val="accent1"/>
+          </a:effectRef>
+          <a:fontRef idx="minor">
+            <a:schemeClr val="lt1"/>
+          </a:fontRef>
+        </p:style>
+        <p:txBody>
+          <a:bodyPr rtlCol="0" anchor="ctr"/>
+          <a:lstStyle/>
+          <a:p>
+            <a:pPr algn="ctr"/>
+          </a:p>
+        </p:txBody>
+      </p:sp>
+      <p:sp>
+        <p:nvSpPr>
+          <p:cNvPr id="7" name="TextBox 6"/>
+          <p:cNvSpPr txBox="1"/>
+          <p:nvPr/>
+        </p:nvSpPr>
+        <p:spPr>
+          <a:xfrm>
+            <a:off x="914400" y="2011680"/>
+            <a:ext cx="10332720" cy="1371600"/>
+          </a:xfrm>
+          <a:prstGeom prst="rect">
+            <a:avLst/>
+          </a:prstGeom>
+          <a:noFill/>
+        </p:spPr>
+        <p:txBody>
+          <a:bodyPr wrap="square">
+            <a:spAutoFit/>
+          </a:bodyPr>
+          <a:lstStyle/>
+          <a:p>
+            <a:r>
+              <a:rPr sz="1500" b="0">
+                <a:solidFill>
+                  <a:srgbClr val="0A1F33"/>
+                </a:solidFill>
+                <a:latin typeface="Calibri"/>
+              </a:rPr>
+              <a:t>En la sesión presencial se organiza y arbitra un torneo real. Cada participante tiene un rol asignado y rota durante las rondas.</a:t>
+            </a:r>
+          </a:p>
+        </p:txBody>
+      </p:sp>
+      <p:sp>
+        <p:nvSpPr>
+          <p:cNvPr id="8" name="TextBox 7"/>
+          <p:cNvSpPr txBox="1"/>
+          <p:nvPr/>
+        </p:nvSpPr>
+        <p:spPr>
+          <a:xfrm>
+            <a:off x="914400" y="3429000"/>
+            <a:ext cx="10332720" cy="2743200"/>
+          </a:xfrm>
+          <a:prstGeom prst="rect">
+            <a:avLst/>
+          </a:prstGeom>
+          <a:noFill/>
+        </p:spPr>
+        <p:txBody>
+          <a:bodyPr wrap="square">
+            <a:spAutoFit/>
+          </a:bodyPr>
+          <a:lstStyle/>
+          <a:p>
+            <a:pPr>
+              <a:spcAft>
+                <a:spcPts val="800"/>
+              </a:spcAft>
+            </a:pPr>
+            <a:r>
+              <a:rPr sz="1500">
+                <a:solidFill>
+                  <a:srgbClr val="334E68"/>
+                </a:solidFill>
+                <a:latin typeface="Calibri"/>
+              </a:rPr>
+              <a:t>•  Árbitro principal: decide las incidencias y coordina al equipo.</a:t>
+            </a:r>
+          </a:p>
+          <a:p>
+            <a:pPr>
+              <a:spcAft>
+                <a:spcPts val="800"/>
+              </a:spcAft>
+            </a:pPr>
+            <a:r>
+              <a:rPr sz="1500">
+                <a:solidFill>
+                  <a:srgbClr val="334E68"/>
+                </a:solidFill>
+                <a:latin typeface="Calibri"/>
+              </a:rPr>
+              <a:t>•  Árbitros auxiliares: supervisan un grupo de mesas, informan y aplican lo acordado.</a:t>
+            </a:r>
+          </a:p>
+          <a:p>
+            <a:pPr>
+              <a:spcAft>
+                <a:spcPts val="800"/>
+              </a:spcAft>
+            </a:pPr>
+            <a:r>
+              <a:rPr sz="1500">
+                <a:solidFill>
+                  <a:srgbClr val="334E68"/>
+                </a:solidFill>
+                <a:latin typeface="Calibri"/>
+              </a:rPr>
+              <a:t>•  Mesa de control: inscripción, emparejamientos, resultados y desempates.</a:t>
+            </a:r>
+          </a:p>
+          <a:p>
+            <a:pPr>
+              <a:spcAft>
+                <a:spcPts val="800"/>
+              </a:spcAft>
+            </a:pPr>
+            <a:r>
+              <a:rPr sz="1500">
+                <a:solidFill>
+                  <a:srgbClr val="334E68"/>
+                </a:solidFill>
+                <a:latin typeface="Calibri"/>
+              </a:rPr>
+              <a:t>•  Todas las personas completan la lista de cotejo de otra en al menos una ronda.</a:t>
+            </a:r>
+          </a:p>
+        </p:txBody>
+      </p:sp>
+      <p:sp>
+        <p:nvSpPr>
+          <p:cNvPr id="9" name="TextBox 8"/>
+          <p:cNvSpPr txBox="1"/>
+          <p:nvPr/>
+        </p:nvSpPr>
+        <p:spPr>
+          <a:xfrm>
+            <a:off x="548640" y="6355080"/>
+            <a:ext cx="11064240" cy="365760"/>
+          </a:xfrm>
+          <a:prstGeom prst="rect">
+            <a:avLst/>
+          </a:prstGeom>
+          <a:noFill/>
+        </p:spPr>
+        <p:txBody>
+          <a:bodyPr wrap="square">
+            <a:spAutoFit/>
+          </a:bodyPr>
+          <a:lstStyle/>
+          <a:p>
+            <a:r>
+              <a:rPr sz="1100" b="0">
+                <a:solidFill>
+                  <a:srgbClr val="627D98"/>
+                </a:solidFill>
+                <a:latin typeface="Calibri"/>
+              </a:rPr>
+              <a:t>Fuente: Leyes del Ajedrez 2023 (Handbook E.I.01), art. 12.4; Manual del árbitro de la FIDE</a:t>
+            </a:r>
+          </a:p>
+        </p:txBody>
+      </p:sp>
+    </p:spTree>
+  </p:cSld>
+  <p:clrMapOvr>
+    <a:masterClrMapping/>
+  </p:clrMapOvr>
+</p:sld>
+</file>
+
+<file path=ppt/slides/slide7.xml><?xml version="1.0" encoding="utf-8"?>
+<p:sld xmlns:a="http://schemas.openxmlformats.org/drawingml/2006/main" xmlns:p="http://schemas.openxmlformats.org/presentationml/2006/main" xmlns:r="http://schemas.openxmlformats.org/officeDocument/2006/relationships">
+  <p:cSld>
+    <p:spTree>
+      <p:nvGrpSpPr>
+        <p:cNvPr id="1" name=""/>
+        <p:cNvGrpSpPr/>
+        <p:nvPr/>
+      </p:nvGrpSpPr>
+      <p:grpSpPr/>
+      <p:sp>
+        <p:nvSpPr>
+          <p:cNvPr id="2" name="Oval 1"/>
+          <p:cNvSpPr/>
+          <p:nvPr/>
+        </p:nvSpPr>
+        <p:spPr>
+          <a:xfrm>
+            <a:off x="548640" y="502920"/>
+            <a:ext cx="502920" cy="502920"/>
+          </a:xfrm>
+          <a:prstGeom prst="ellipse">
+            <a:avLst/>
+          </a:prstGeom>
+          <a:solidFill>
+            <a:srgbClr val="DE911D"/>
+          </a:solidFill>
+          <a:ln>
+            <a:noFill/>
+          </a:ln>
+          <a:effectLst/>
+        </p:spPr>
+        <p:style>
+          <a:lnRef idx="1">
+            <a:schemeClr val="accent1"/>
+          </a:lnRef>
+          <a:fillRef idx="3">
+            <a:schemeClr val="accent1"/>
+          </a:fillRef>
+          <a:effectRef idx="2">
+            <a:schemeClr val="accent1"/>
+          </a:effectRef>
+          <a:fontRef idx="minor">
+            <a:schemeClr val="lt1"/>
+          </a:fontRef>
+        </p:style>
+        <p:txBody>
+          <a:bodyPr rtlCol="0" anchor="ctr"/>
+          <a:lstStyle/>
+          <a:p>
+            <a:pPr algn="ctr"/>
+          </a:p>
+        </p:txBody>
+      </p:sp>
+      <p:sp>
+        <p:nvSpPr>
+          <p:cNvPr id="3" name="TextBox 2"/>
+          <p:cNvSpPr txBox="1"/>
+          <p:nvPr/>
+        </p:nvSpPr>
+        <p:spPr>
+          <a:xfrm>
+            <a:off x="548640" y="502920"/>
+            <a:ext cx="502920" cy="502920"/>
+          </a:xfrm>
+          <a:prstGeom prst="rect">
+            <a:avLst/>
+          </a:prstGeom>
+          <a:noFill/>
+        </p:spPr>
+        <p:txBody>
+          <a:bodyPr wrap="square">
+            <a:spAutoFit/>
+          </a:bodyPr>
+          <a:lstStyle/>
+          <a:p>
+            <a:pPr algn="ctr"/>
+            <a:r>
+              <a:rPr sz="2000" b="0">
+                <a:solidFill>
+                  <a:srgbClr val="0A1F33"/>
+                </a:solidFill>
+                <a:latin typeface="Calibri"/>
+              </a:rPr>
+              <a:t>?</a:t>
+            </a:r>
+          </a:p>
+        </p:txBody>
+      </p:sp>
+      <p:sp>
+        <p:nvSpPr>
+          <p:cNvPr id="4" name="TextBox 3"/>
+          <p:cNvSpPr txBox="1"/>
+          <p:nvPr/>
+        </p:nvSpPr>
+        <p:spPr>
+          <a:xfrm>
+            <a:off x="1234440" y="530352"/>
+            <a:ext cx="9144000" cy="457200"/>
+          </a:xfrm>
+          <a:prstGeom prst="rect">
+            <a:avLst/>
+          </a:prstGeom>
+          <a:noFill/>
+        </p:spPr>
+        <p:txBody>
+          <a:bodyPr wrap="square">
+            <a:spAutoFit/>
+          </a:bodyPr>
+          <a:lstStyle/>
+          <a:p>
+            <a:r>
+              <a:rPr sz="1400" b="1">
+                <a:solidFill>
+                  <a:srgbClr val="DE911D"/>
+                </a:solidFill>
+                <a:latin typeface="Calibri"/>
+              </a:rPr>
+              <a:t>CASO 1 · ¿QUÉ DECIDE LA PERSONA ÁRBITRA?</a:t>
+            </a:r>
+          </a:p>
+        </p:txBody>
+      </p:sp>
+      <p:sp>
+        <p:nvSpPr>
+          <p:cNvPr id="5" name="TextBox 4"/>
+          <p:cNvSpPr txBox="1"/>
+          <p:nvPr/>
+        </p:nvSpPr>
+        <p:spPr>
+          <a:xfrm>
+            <a:off x="548640" y="1051560"/>
+            <a:ext cx="11064240" cy="822960"/>
+          </a:xfrm>
+          <a:prstGeom prst="rect">
+            <a:avLst/>
+          </a:prstGeom>
+          <a:noFill/>
+        </p:spPr>
+        <p:txBody>
+          <a:bodyPr wrap="square">
+            <a:spAutoFit/>
+          </a:bodyPr>
+          <a:lstStyle/>
+          <a:p>
+            <a:r>
+              <a:rPr sz="2600" b="1">
+                <a:solidFill>
+                  <a:srgbClr val="0A1F33"/>
+                </a:solidFill>
+                <a:latin typeface="Cambria"/>
+              </a:rPr>
+              <a:t>Guion A: el enroque dudoso</a:t>
+            </a:r>
+          </a:p>
+        </p:txBody>
+      </p:sp>
+      <p:sp>
+        <p:nvSpPr>
+          <p:cNvPr id="6" name="Rectangle 5"/>
+          <p:cNvSpPr/>
+          <p:nvPr/>
+        </p:nvSpPr>
+        <p:spPr>
+          <a:xfrm>
+            <a:off x="548640" y="1965960"/>
+            <a:ext cx="11064240" cy="4206240"/>
+          </a:xfrm>
+          <a:prstGeom prst="rect">
+            <a:avLst/>
+          </a:prstGeom>
+          <a:solidFill>
+            <a:srgbClr val="F0F4F8"/>
+          </a:solidFill>
+          <a:ln>
+            <a:noFill/>
+          </a:ln>
+          <a:effectLst/>
+        </p:spPr>
+        <p:style>
+          <a:lnRef idx="1">
+            <a:schemeClr val="accent1"/>
+          </a:lnRef>
+          <a:fillRef idx="3">
+            <a:schemeClr val="accent1"/>
+          </a:fillRef>
+          <a:effectRef idx="2">
+            <a:schemeClr val="accent1"/>
+          </a:effectRef>
+          <a:fontRef idx="minor">
+            <a:schemeClr val="lt1"/>
+          </a:fontRef>
+        </p:style>
+        <p:txBody>
+          <a:bodyPr rtlCol="0" anchor="ctr"/>
+          <a:lstStyle/>
+          <a:p>
+            <a:pPr algn="ctr"/>
+          </a:p>
+        </p:txBody>
+      </p:sp>
+      <p:sp>
+        <p:nvSpPr>
+          <p:cNvPr id="7" name="TextBox 6"/>
+          <p:cNvSpPr txBox="1"/>
+          <p:nvPr/>
+        </p:nvSpPr>
+        <p:spPr>
+          <a:xfrm>
+            <a:off x="914400" y="2240280"/>
+            <a:ext cx="10332720" cy="3749039"/>
+          </a:xfrm>
+          <a:prstGeom prst="rect">
+            <a:avLst/>
+          </a:prstGeom>
+          <a:noFill/>
+        </p:spPr>
+        <p:txBody>
+          <a:bodyPr wrap="square">
+            <a:spAutoFit/>
+          </a:bodyPr>
+          <a:lstStyle/>
+          <a:p>
+            <a:r>
+              <a:rPr sz="2000" b="0">
+                <a:solidFill>
+                  <a:srgbClr val="334E68"/>
+                </a:solidFill>
+                <a:latin typeface="Calibri"/>
+              </a:rPr>
+              <a:t>El jugador de negras enroca largo; el de blancas reclama que el rey ya se había movido en la jugada 9 y había vuelto.</a:t>
+            </a:r>
+          </a:p>
+        </p:txBody>
+      </p:sp>
+    </p:spTree>
+  </p:cSld>
+  <p:clrMapOvr>
+    <a:masterClrMapping/>
+  </p:clrMapOvr>
+</p:sld>
+</file>
+
+<file path=ppt/slides/slide8.xml><?xml version="1.0" encoding="utf-8"?>
+<p:sld xmlns:a="http://schemas.openxmlformats.org/drawingml/2006/main" xmlns:p="http://schemas.openxmlformats.org/presentationml/2006/main" xmlns:r="http://schemas.openxmlformats.org/officeDocument/2006/relationships">
+  <p:cSld>
+    <p:spTree>
+      <p:nvGrpSpPr>
+        <p:cNvPr id="1" name=""/>
+        <p:cNvGrpSpPr/>
+        <p:nvPr/>
+      </p:nvGrpSpPr>
+      <p:grpSpPr/>
+      <p:sp>
+        <p:nvSpPr>
           <p:cNvPr id="2" name="Rectangle 1"/>
           <p:cNvSpPr/>
           <p:nvPr/>
@@ -4266,58 +8335,168 @@
       </p:sp>
       <p:sp>
         <p:nvSpPr>
-          <p:cNvPr id="3" name="Oval 2"/>
+          <p:cNvPr id="3" name="TextBox 2"/>
+          <p:cNvSpPr txBox="1"/>
+          <p:nvPr/>
+        </p:nvSpPr>
+        <p:spPr>
+          <a:xfrm>
+            <a:off x="548640" y="548640"/>
+            <a:ext cx="11064240" cy="457200"/>
+          </a:xfrm>
+          <a:prstGeom prst="rect">
+            <a:avLst/>
+          </a:prstGeom>
+          <a:noFill/>
+        </p:spPr>
+        <p:txBody>
+          <a:bodyPr wrap="square">
+            <a:spAutoFit/>
+          </a:bodyPr>
+          <a:lstStyle/>
+          <a:p>
+            <a:r>
+              <a:rPr sz="1400" b="1">
+                <a:solidFill>
+                  <a:srgbClr val="F0B429"/>
+                </a:solidFill>
+                <a:latin typeface="Calibri"/>
+              </a:rPr>
+              <a:t>CASO 1 · DECISIÓN</a:t>
+            </a:r>
+          </a:p>
+        </p:txBody>
+      </p:sp>
+      <p:sp>
+        <p:nvSpPr>
+          <p:cNvPr id="4" name="TextBox 3"/>
+          <p:cNvSpPr txBox="1"/>
+          <p:nvPr/>
+        </p:nvSpPr>
+        <p:spPr>
+          <a:xfrm>
+            <a:off x="548640" y="1051560"/>
+            <a:ext cx="11064240" cy="822960"/>
+          </a:xfrm>
+          <a:prstGeom prst="rect">
+            <a:avLst/>
+          </a:prstGeom>
+          <a:noFill/>
+        </p:spPr>
+        <p:txBody>
+          <a:bodyPr wrap="square">
+            <a:spAutoFit/>
+          </a:bodyPr>
+          <a:lstStyle/>
+          <a:p>
+            <a:r>
+              <a:rPr sz="2600" b="1">
+                <a:solidFill>
+                  <a:srgbClr val="FFFFFF"/>
+                </a:solidFill>
+                <a:latin typeface="Cambria"/>
+              </a:rPr>
+              <a:t>Guion A: el enroque dudoso</a:t>
+            </a:r>
+          </a:p>
+        </p:txBody>
+      </p:sp>
+      <p:sp>
+        <p:nvSpPr>
+          <p:cNvPr id="5" name="TextBox 4"/>
+          <p:cNvSpPr txBox="1"/>
+          <p:nvPr/>
+        </p:nvSpPr>
+        <p:spPr>
+          <a:xfrm>
+            <a:off x="548640" y="2103120"/>
+            <a:ext cx="11064240" cy="3931920"/>
+          </a:xfrm>
+          <a:prstGeom prst="rect">
+            <a:avLst/>
+          </a:prstGeom>
+          <a:noFill/>
+        </p:spPr>
+        <p:txBody>
+          <a:bodyPr wrap="square">
+            <a:spAutoFit/>
+          </a:bodyPr>
+          <a:lstStyle/>
+          <a:p>
+            <a:r>
+              <a:rPr sz="2000" b="0">
+                <a:solidFill>
+                  <a:srgbClr val="CADCFC"/>
+                </a:solidFill>
+                <a:latin typeface="Calibri"/>
+              </a:rPr>
+              <a:t>Se revisan las planillas. Si el rey se movió, el enroque fue una jugada ilegal: se repone la posición, el jugador debe mover el rey (pieza tocada) y el rival recibe la compensación de tiempo que corresponde al ritmo.</a:t>
+            </a:r>
+          </a:p>
+        </p:txBody>
+      </p:sp>
+      <p:sp>
+        <p:nvSpPr>
+          <p:cNvPr id="6" name="TextBox 5"/>
+          <p:cNvSpPr txBox="1"/>
+          <p:nvPr/>
+        </p:nvSpPr>
+        <p:spPr>
+          <a:xfrm>
+            <a:off x="548640" y="6263640"/>
+            <a:ext cx="11064240" cy="365760"/>
+          </a:xfrm>
+          <a:prstGeom prst="rect">
+            <a:avLst/>
+          </a:prstGeom>
+          <a:noFill/>
+        </p:spPr>
+        <p:txBody>
+          <a:bodyPr wrap="square">
+            <a:spAutoFit/>
+          </a:bodyPr>
+          <a:lstStyle/>
+          <a:p>
+            <a:r>
+              <a:rPr sz="1100" b="0">
+                <a:solidFill>
+                  <a:srgbClr val="9FB3C8"/>
+                </a:solidFill>
+                <a:latin typeface="Calibri"/>
+              </a:rPr>
+              <a:t>Fuente: Leyes del Ajedrez 2023 (Handbook E.I.01), art. 3.8.2.1, 4.3 y 7.5</a:t>
+            </a:r>
+          </a:p>
+        </p:txBody>
+      </p:sp>
+    </p:spTree>
+  </p:cSld>
+  <p:clrMapOvr>
+    <a:masterClrMapping/>
+  </p:clrMapOvr>
+</p:sld>
+</file>
+
+<file path=ppt/slides/slide9.xml><?xml version="1.0" encoding="utf-8"?>
+<p:sld xmlns:a="http://schemas.openxmlformats.org/drawingml/2006/main" xmlns:p="http://schemas.openxmlformats.org/presentationml/2006/main" xmlns:r="http://schemas.openxmlformats.org/officeDocument/2006/relationships">
+  <p:cSld>
+    <p:spTree>
+      <p:nvGrpSpPr>
+        <p:cNvPr id="1" name=""/>
+        <p:cNvGrpSpPr/>
+        <p:nvPr/>
+      </p:nvGrpSpPr>
+      <p:grpSpPr/>
+      <p:sp>
+        <p:nvSpPr>
+          <p:cNvPr id="2" name="Oval 1"/>
           <p:cNvSpPr/>
           <p:nvPr/>
         </p:nvSpPr>
         <p:spPr>
           <a:xfrm>
-            <a:off x="-1280160" y="-1463040"/>
-            <a:ext cx="4114800" cy="4114800"/>
-          </a:xfrm>
-          <a:prstGeom prst="ellipse">
-            <a:avLst/>
-          </a:prstGeom>
-          <a:solidFill>
-            <a:srgbClr val="0A1F33"/>
-          </a:solidFill>
-          <a:ln>
-            <a:noFill/>
-          </a:ln>
-          <a:effectLst/>
-        </p:spPr>
-        <p:style>
-          <a:lnRef idx="1">
-            <a:schemeClr val="accent1"/>
-          </a:lnRef>
-          <a:fillRef idx="3">
-            <a:schemeClr val="accent1"/>
-          </a:fillRef>
-          <a:effectRef idx="2">
-            <a:schemeClr val="accent1"/>
-          </a:effectRef>
-          <a:fontRef idx="minor">
-            <a:schemeClr val="lt1"/>
-          </a:fontRef>
-        </p:style>
-        <p:txBody>
-          <a:bodyPr rtlCol="0" anchor="ctr"/>
-          <a:lstStyle/>
-          <a:p>
-            <a:pPr algn="ctr"/>
-          </a:p>
-        </p:txBody>
-      </p:sp>
-      <p:sp>
-        <p:nvSpPr>
-          <p:cNvPr id="4" name="Oval 3"/>
-          <p:cNvSpPr/>
-          <p:nvPr/>
-        </p:nvSpPr>
-        <p:spPr>
-          <a:xfrm>
-            <a:off x="5175504" y="822960"/>
-            <a:ext cx="1828800" cy="1828800"/>
+            <a:off x="548640" y="502920"/>
+            <a:ext cx="502920" cy="502920"/>
           </a:xfrm>
           <a:prstGeom prst="ellipse">
             <a:avLst/>
@@ -4354,14 +8533,14 @@
       </p:sp>
       <p:sp>
         <p:nvSpPr>
-          <p:cNvPr id="5" name="TextBox 4"/>
+          <p:cNvPr id="3" name="TextBox 2"/>
           <p:cNvSpPr txBox="1"/>
           <p:nvPr/>
         </p:nvSpPr>
         <p:spPr>
           <a:xfrm>
-            <a:off x="5175504" y="822960"/>
-            <a:ext cx="1828800" cy="1828800"/>
+            <a:off x="548640" y="502920"/>
+            <a:ext cx="502920" cy="502920"/>
           </a:xfrm>
           <a:prstGeom prst="rect">
             <a:avLst/>
@@ -4376,27 +8555,27 @@
           <a:p>
             <a:pPr algn="ctr"/>
             <a:r>
-              <a:rPr sz="4400" b="1">
+              <a:rPr sz="2000" b="0">
                 <a:solidFill>
                   <a:srgbClr val="0A1F33"/>
                 </a:solidFill>
                 <a:latin typeface="Calibri"/>
               </a:rPr>
-              <a:t>✔</a:t>
-            </a:r>
-          </a:p>
-        </p:txBody>
-      </p:sp>
-      <p:sp>
-        <p:nvSpPr>
-          <p:cNvPr id="6" name="TextBox 5"/>
+              <a:t>?</a:t>
+            </a:r>
+          </a:p>
+        </p:txBody>
+      </p:sp>
+      <p:sp>
+        <p:nvSpPr>
+          <p:cNvPr id="4" name="TextBox 3"/>
           <p:cNvSpPr txBox="1"/>
           <p:nvPr/>
         </p:nvSpPr>
         <p:spPr>
           <a:xfrm>
-            <a:off x="548640" y="2880360"/>
-            <a:ext cx="11064240" cy="457200"/>
+            <a:off x="1234440" y="530352"/>
+            <a:ext cx="9144000" cy="457200"/>
           </a:xfrm>
           <a:prstGeom prst="rect">
             <a:avLst/>
@@ -4409,29 +8588,28 @@
           </a:bodyPr>
           <a:lstStyle/>
           <a:p>
-            <a:pPr algn="ctr"/>
             <a:r>
               <a:rPr sz="1400" b="1">
                 <a:solidFill>
-                  <a:srgbClr val="F0B429"/>
+                  <a:srgbClr val="DE911D"/>
                 </a:solidFill>
                 <a:latin typeface="Calibri"/>
               </a:rPr>
-              <a:t>PRÁCTICA — SIMULACRO DE ARBITRAJE CON OBSERVACIÓN ENTRE PARES</a:t>
-            </a:r>
-          </a:p>
-        </p:txBody>
-      </p:sp>
-      <p:sp>
-        <p:nvSpPr>
-          <p:cNvPr id="7" name="TextBox 6"/>
+              <a:t>CASO 2 · ¿QUÉ DECIDE LA PERSONA ÁRBITRA?</a:t>
+            </a:r>
+          </a:p>
+        </p:txBody>
+      </p:sp>
+      <p:sp>
+        <p:nvSpPr>
+          <p:cNvPr id="5" name="TextBox 4"/>
           <p:cNvSpPr txBox="1"/>
           <p:nvPr/>
         </p:nvSpPr>
         <p:spPr>
           <a:xfrm>
-            <a:off x="1280160" y="3383280"/>
-            <a:ext cx="9601200" cy="2377440"/>
+            <a:off x="548640" y="1051560"/>
+            <a:ext cx="11064240" cy="822960"/>
           </a:xfrm>
           <a:prstGeom prst="rect">
             <a:avLst/>
@@ -4444,29 +8622,72 @@
           </a:bodyPr>
           <a:lstStyle/>
           <a:p>
+            <a:r>
+              <a:rPr sz="2600" b="1">
+                <a:solidFill>
+                  <a:srgbClr val="0A1F33"/>
+                </a:solidFill>
+                <a:latin typeface="Cambria"/>
+              </a:rPr>
+              <a:t>Guion B: reclamo de triple repetición</a:t>
+            </a:r>
+          </a:p>
+        </p:txBody>
+      </p:sp>
+      <p:sp>
+        <p:nvSpPr>
+          <p:cNvPr id="6" name="Rectangle 5"/>
+          <p:cNvSpPr/>
+          <p:nvPr/>
+        </p:nvSpPr>
+        <p:spPr>
+          <a:xfrm>
+            <a:off x="548640" y="1965960"/>
+            <a:ext cx="11064240" cy="4206240"/>
+          </a:xfrm>
+          <a:prstGeom prst="rect">
+            <a:avLst/>
+          </a:prstGeom>
+          <a:solidFill>
+            <a:srgbClr val="F0F4F8"/>
+          </a:solidFill>
+          <a:ln>
+            <a:noFill/>
+          </a:ln>
+          <a:effectLst/>
+        </p:spPr>
+        <p:style>
+          <a:lnRef idx="1">
+            <a:schemeClr val="accent1"/>
+          </a:lnRef>
+          <a:fillRef idx="3">
+            <a:schemeClr val="accent1"/>
+          </a:fillRef>
+          <a:effectRef idx="2">
+            <a:schemeClr val="accent1"/>
+          </a:effectRef>
+          <a:fontRef idx="minor">
+            <a:schemeClr val="lt1"/>
+          </a:fontRef>
+        </p:style>
+        <p:txBody>
+          <a:bodyPr rtlCol="0" anchor="ctr"/>
+          <a:lstStyle/>
+          <a:p>
             <a:pPr algn="ctr"/>
-            <a:r>
-              <a:rPr sz="2000" b="0">
-                <a:solidFill>
-                  <a:srgbClr val="FFFFFF"/>
-                </a:solidFill>
-                <a:latin typeface="Cambria"/>
-              </a:rPr>
-              <a:t>Cada participante arbitra una partida simulada mientras otra persona observa y completa la lista de cotejo; luego se intercambian los roles.</a:t>
-            </a:r>
-          </a:p>
-        </p:txBody>
-      </p:sp>
-      <p:sp>
-        <p:nvSpPr>
-          <p:cNvPr id="8" name="TextBox 7"/>
+          </a:p>
+        </p:txBody>
+      </p:sp>
+      <p:sp>
+        <p:nvSpPr>
+          <p:cNvPr id="7" name="TextBox 6"/>
           <p:cNvSpPr txBox="1"/>
           <p:nvPr/>
         </p:nvSpPr>
         <p:spPr>
           <a:xfrm>
-            <a:off x="548640" y="6263640"/>
-            <a:ext cx="11064240" cy="365760"/>
+            <a:off x="914400" y="2240280"/>
+            <a:ext cx="10332720" cy="3749039"/>
           </a:xfrm>
           <a:prstGeom prst="rect">
             <a:avLst/>
@@ -4479,15 +8700,14 @@
           </a:bodyPr>
           <a:lstStyle/>
           <a:p>
-            <a:pPr algn="ctr"/>
-            <a:r>
-              <a:rPr sz="1200" b="0">
-                <a:solidFill>
-                  <a:srgbClr val="9FB3C8"/>
+            <a:r>
+              <a:rPr sz="2000" b="0">
+                <a:solidFill>
+                  <a:srgbClr val="334E68"/>
                 </a:solidFill>
                 <a:latin typeface="Calibri"/>
               </a:rPr>
-              <a:t>Formación Ajedrez · Sesión 7</a:t>
+              <a:t>Un jugador detiene el reloj y dice que la posición se repitió tres veces. Todavía no hizo la jugada que produciría la tercera repetición.</a:t>
             </a:r>
           </a:p>
         </p:txBody>

--- a/cursos/recursos/formacion-ajedrez/07-talleres-y-simulacros-de-arbitraje.pptx
+++ b/cursos/recursos/formacion-ajedrez/07-talleres-y-simulacros-de-arbitraje.pptx
@@ -5478,7 +5478,7 @@
               </a:spcAft>
             </a:pPr>
             <a:r>
-              <a:rPr sz="1600">
+              <a:rPr sz="1200">
                 <a:solidFill>
                   <a:srgbClr val="334E68"/>
                 </a:solidFill>
@@ -5494,7 +5494,7 @@
               </a:spcAft>
             </a:pPr>
             <a:r>
-              <a:rPr sz="1600">
+              <a:rPr sz="1200">
                 <a:solidFill>
                   <a:srgbClr val="334E68"/>
                 </a:solidFill>
@@ -5510,7 +5510,7 @@
               </a:spcAft>
             </a:pPr>
             <a:r>
-              <a:rPr sz="1600">
+              <a:rPr sz="1200">
                 <a:solidFill>
                   <a:srgbClr val="334E68"/>
                 </a:solidFill>
@@ -5526,13 +5526,77 @@
               </a:spcAft>
             </a:pPr>
             <a:r>
-              <a:rPr sz="1600">
+              <a:rPr sz="1200">
                 <a:solidFill>
                   <a:srgbClr val="334E68"/>
                 </a:solidFill>
                 <a:latin typeface="Calibri"/>
               </a:rPr>
               <a:t>4. ¿En qué orden se ofrecen tablas correctamente?</a:t>
+            </a:r>
+          </a:p>
+          <a:p>
+            <a:pPr>
+              <a:spcAft>
+                <a:spcPts val="600"/>
+              </a:spcAft>
+            </a:pPr>
+            <a:r>
+              <a:rPr sz="1200">
+                <a:solidFill>
+                  <a:srgbClr val="334E68"/>
+                </a:solidFill>
+                <a:latin typeface="Calibri"/>
+              </a:rPr>
+              <a:t>5. En el simulacro, ¿conoce la persona árbitra de antemano la incidencia que va a arbitrar?</a:t>
+            </a:r>
+          </a:p>
+          <a:p>
+            <a:pPr>
+              <a:spcAft>
+                <a:spcPts val="600"/>
+              </a:spcAft>
+            </a:pPr>
+            <a:r>
+              <a:rPr sz="1200">
+                <a:solidFill>
+                  <a:srgbClr val="334E68"/>
+                </a:solidFill>
+                <a:latin typeface="Calibri"/>
+              </a:rPr>
+              <a:t>6. Según la lista de cotejo, ¿qué debe verificar la persona árbitra antes de iniciar la ronda?</a:t>
+            </a:r>
+          </a:p>
+          <a:p>
+            <a:pPr>
+              <a:spcAft>
+                <a:spcPts val="600"/>
+              </a:spcAft>
+            </a:pPr>
+            <a:r>
+              <a:rPr sz="1200">
+                <a:solidFill>
+                  <a:srgbClr val="334E68"/>
+                </a:solidFill>
+                <a:latin typeface="Calibri"/>
+              </a:rPr>
+              <a:t>7. ¿Qué función cumple la mesa de control en el torneo presencial?</a:t>
+            </a:r>
+          </a:p>
+          <a:p>
+            <a:pPr>
+              <a:spcAft>
+                <a:spcPts val="600"/>
+              </a:spcAft>
+            </a:pPr>
+            <a:r>
+              <a:rPr sz="1200">
+                <a:solidFill>
+                  <a:srgbClr val="334E68"/>
+                </a:solidFill>
+                <a:latin typeface="Calibri"/>
+              </a:rPr>
+              <a:t>8. ¿Qué hace un árbitro auxiliar cuando no puede resolver una incidencia?</a:t>
             </a:r>
           </a:p>
         </p:txBody>

--- a/cursos/recursos/formacion-ajedrez/07-talleres-y-simulacros-de-arbitraje.pptx
+++ b/cursos/recursos/formacion-ajedrez/07-talleres-y-simulacros-de-arbitraje.pptx
@@ -13,17 +13,21 @@
     <p:sldId id="261" r:id="rId12"/>
     <p:sldId id="262" r:id="rId13"/>
     <p:sldId id="263" r:id="rId14"/>
-    <p:sldId id="264" r:id="rId15"/>
-    <p:sldId id="265" r:id="rId16"/>
-    <p:sldId id="266" r:id="rId17"/>
-    <p:sldId id="267" r:id="rId18"/>
-    <p:sldId id="268" r:id="rId19"/>
-    <p:sldId id="269" r:id="rId20"/>
-    <p:sldId id="270" r:id="rId21"/>
-    <p:sldId id="271" r:id="rId22"/>
-    <p:sldId id="272" r:id="rId23"/>
-    <p:sldId id="273" r:id="rId24"/>
-    <p:sldId id="274" r:id="rId25"/>
+    <p:sldId id="264" r:id="rId16"/>
+    <p:sldId id="265" r:id="rId17"/>
+    <p:sldId id="266" r:id="rId18"/>
+    <p:sldId id="267" r:id="rId19"/>
+    <p:sldId id="268" r:id="rId20"/>
+    <p:sldId id="269" r:id="rId21"/>
+    <p:sldId id="270" r:id="rId22"/>
+    <p:sldId id="271" r:id="rId23"/>
+    <p:sldId id="272" r:id="rId24"/>
+    <p:sldId id="273" r:id="rId25"/>
+    <p:sldId id="274" r:id="rId26"/>
+    <p:sldId id="275" r:id="rId27"/>
+    <p:sldId id="276" r:id="rId28"/>
+    <p:sldId id="277" r:id="rId29"/>
+    <p:sldId id="278" r:id="rId30"/>
   </p:sldIdLst>
   <p:sldSz cx="12191695" cy="6858000" type="screen4x3"/>
   <p:notesSz cx="6858000" cy="9144000"/>
@@ -123,6 +127,776 @@
     </a:lvl9pPr>
   </p:defaultTextStyle>
 </p:presentation>
+</file>
+
+<file path=ppt/notesMasters/notesMaster1.xml><?xml version="1.0" encoding="utf-8"?>
+<p:notesMaster xmlns:a="http://schemas.openxmlformats.org/drawingml/2006/main" xmlns:p="http://schemas.openxmlformats.org/presentationml/2006/main" xmlns:r="http://schemas.openxmlformats.org/officeDocument/2006/relationships">
+  <p:cSld>
+    <p:bg>
+      <p:bgRef idx="1001">
+        <a:schemeClr val="bg1"/>
+      </p:bgRef>
+    </p:bg>
+    <p:spTree>
+      <p:nvGrpSpPr>
+        <p:cNvPr id="1" name=""/>
+        <p:cNvGrpSpPr/>
+        <p:nvPr/>
+      </p:nvGrpSpPr>
+      <p:grpSpPr>
+        <a:xfrm>
+          <a:off x="0" y="0"/>
+          <a:ext cx="0" cy="0"/>
+          <a:chOff x="0" y="0"/>
+          <a:chExt cx="0" cy="0"/>
+        </a:xfrm>
+      </p:grpSpPr>
+      <p:sp>
+        <p:nvSpPr>
+          <p:cNvPr id="2" name="Header Placeholder 1"/>
+          <p:cNvSpPr>
+            <a:spLocks noGrp="1"/>
+          </p:cNvSpPr>
+          <p:nvPr>
+            <p:ph type="hdr" sz="quarter"/>
+          </p:nvPr>
+        </p:nvSpPr>
+        <p:spPr>
+          <a:xfrm>
+            <a:off x="0" y="0"/>
+            <a:ext cx="2971800" cy="457200"/>
+          </a:xfrm>
+          <a:prstGeom prst="rect">
+            <a:avLst/>
+          </a:prstGeom>
+        </p:spPr>
+        <p:txBody>
+          <a:bodyPr vert="horz" lIns="91440" tIns="45720" rIns="91440" bIns="45720" rtlCol="0"/>
+          <a:lstStyle>
+            <a:lvl1pPr algn="l">
+              <a:defRPr sz="1200"/>
+            </a:lvl1pPr>
+          </a:lstStyle>
+          <a:p>
+            <a:endParaRPr lang="en-US"/>
+          </a:p>
+        </p:txBody>
+      </p:sp>
+      <p:sp>
+        <p:nvSpPr>
+          <p:cNvPr id="3" name="Date Placeholder 2"/>
+          <p:cNvSpPr>
+            <a:spLocks noGrp="1"/>
+          </p:cNvSpPr>
+          <p:nvPr>
+            <p:ph type="dt" idx="1"/>
+          </p:nvPr>
+        </p:nvSpPr>
+        <p:spPr>
+          <a:xfrm>
+            <a:off x="3884613" y="0"/>
+            <a:ext cx="2971800" cy="457200"/>
+          </a:xfrm>
+          <a:prstGeom prst="rect">
+            <a:avLst/>
+          </a:prstGeom>
+        </p:spPr>
+        <p:txBody>
+          <a:bodyPr vert="horz" lIns="91440" tIns="45720" rIns="91440" bIns="45720" rtlCol="0"/>
+          <a:lstStyle>
+            <a:lvl1pPr algn="r">
+              <a:defRPr sz="1200"/>
+            </a:lvl1pPr>
+          </a:lstStyle>
+          <a:p>
+            <a:fld id="{0F89C1C7-3DCD-1040-A9CF-14679D8B5DDD}" type="datetimeFigureOut">
+              <a:rPr lang="en-US" smtClean="0"/>
+              <a:t>10/17/16</a:t>
+            </a:fld>
+            <a:endParaRPr lang="en-US"/>
+          </a:p>
+        </p:txBody>
+      </p:sp>
+      <p:sp>
+        <p:nvSpPr>
+          <p:cNvPr id="4" name="Slide Image Placeholder 3"/>
+          <p:cNvSpPr>
+            <a:spLocks noGrp="1" noRot="1" noChangeAspect="1"/>
+          </p:cNvSpPr>
+          <p:nvPr>
+            <p:ph type="sldImg" idx="2"/>
+          </p:nvPr>
+        </p:nvSpPr>
+        <p:spPr>
+          <a:xfrm>
+            <a:off x="1143000" y="685800"/>
+            <a:ext cx="4572000" cy="3429000"/>
+          </a:xfrm>
+          <a:prstGeom prst="rect">
+            <a:avLst/>
+          </a:prstGeom>
+          <a:noFill/>
+          <a:ln w="12700">
+            <a:solidFill>
+              <a:prstClr val="black"/>
+            </a:solidFill>
+          </a:ln>
+        </p:spPr>
+        <p:txBody>
+          <a:bodyPr vert="horz" lIns="91440" tIns="45720" rIns="91440" bIns="45720" rtlCol="0" anchor="ctr"/>
+          <a:lstStyle/>
+          <a:p>
+            <a:endParaRPr lang="en-US"/>
+          </a:p>
+        </p:txBody>
+      </p:sp>
+      <p:sp>
+        <p:nvSpPr>
+          <p:cNvPr id="5" name="Notes Placeholder 4"/>
+          <p:cNvSpPr>
+            <a:spLocks noGrp="1"/>
+          </p:cNvSpPr>
+          <p:nvPr>
+            <p:ph type="body" sz="quarter" idx="3"/>
+          </p:nvPr>
+        </p:nvSpPr>
+        <p:spPr>
+          <a:xfrm>
+            <a:off x="685800" y="4343400"/>
+            <a:ext cx="5486400" cy="4114800"/>
+          </a:xfrm>
+          <a:prstGeom prst="rect">
+            <a:avLst/>
+          </a:prstGeom>
+        </p:spPr>
+        <p:txBody>
+          <a:bodyPr vert="horz" lIns="91440" tIns="45720" rIns="91440" bIns="45720" rtlCol="0"/>
+          <a:lstStyle/>
+          <a:p>
+            <a:pPr lvl="0"/>
+            <a:r>
+              <a:rPr lang="en-US" smtClean="0"/>
+              <a:t>Click to edit Master text styles</a:t>
+            </a:r>
+          </a:p>
+          <a:p>
+            <a:pPr lvl="1"/>
+            <a:r>
+              <a:rPr lang="en-US" smtClean="0"/>
+              <a:t>Second level</a:t>
+            </a:r>
+          </a:p>
+          <a:p>
+            <a:pPr lvl="2"/>
+            <a:r>
+              <a:rPr lang="en-US" smtClean="0"/>
+              <a:t>Third level</a:t>
+            </a:r>
+          </a:p>
+          <a:p>
+            <a:pPr lvl="3"/>
+            <a:r>
+              <a:rPr lang="en-US" smtClean="0"/>
+              <a:t>Fourth level</a:t>
+            </a:r>
+          </a:p>
+          <a:p>
+            <a:pPr lvl="4"/>
+            <a:r>
+              <a:rPr lang="en-US" smtClean="0"/>
+              <a:t>Fifth level</a:t>
+            </a:r>
+            <a:endParaRPr lang="en-US"/>
+          </a:p>
+        </p:txBody>
+      </p:sp>
+      <p:sp>
+        <p:nvSpPr>
+          <p:cNvPr id="6" name="Footer Placeholder 5"/>
+          <p:cNvSpPr>
+            <a:spLocks noGrp="1"/>
+          </p:cNvSpPr>
+          <p:nvPr>
+            <p:ph type="ftr" sz="quarter" idx="4"/>
+          </p:nvPr>
+        </p:nvSpPr>
+        <p:spPr>
+          <a:xfrm>
+            <a:off x="0" y="8685213"/>
+            <a:ext cx="2971800" cy="457200"/>
+          </a:xfrm>
+          <a:prstGeom prst="rect">
+            <a:avLst/>
+          </a:prstGeom>
+        </p:spPr>
+        <p:txBody>
+          <a:bodyPr vert="horz" lIns="91440" tIns="45720" rIns="91440" bIns="45720" rtlCol="0" anchor="b"/>
+          <a:lstStyle>
+            <a:lvl1pPr algn="l">
+              <a:defRPr sz="1200"/>
+            </a:lvl1pPr>
+          </a:lstStyle>
+          <a:p>
+            <a:endParaRPr lang="en-US"/>
+          </a:p>
+        </p:txBody>
+      </p:sp>
+      <p:sp>
+        <p:nvSpPr>
+          <p:cNvPr id="7" name="Slide Number Placeholder 6"/>
+          <p:cNvSpPr>
+            <a:spLocks noGrp="1"/>
+          </p:cNvSpPr>
+          <p:nvPr>
+            <p:ph type="sldNum" sz="quarter" idx="5"/>
+          </p:nvPr>
+        </p:nvSpPr>
+        <p:spPr>
+          <a:xfrm>
+            <a:off x="3884613" y="8685213"/>
+            <a:ext cx="2971800" cy="457200"/>
+          </a:xfrm>
+          <a:prstGeom prst="rect">
+            <a:avLst/>
+          </a:prstGeom>
+        </p:spPr>
+        <p:txBody>
+          <a:bodyPr vert="horz" lIns="91440" tIns="45720" rIns="91440" bIns="45720" rtlCol="0" anchor="b"/>
+          <a:lstStyle>
+            <a:lvl1pPr algn="r">
+              <a:defRPr sz="1200"/>
+            </a:lvl1pPr>
+          </a:lstStyle>
+          <a:p>
+            <a:fld id="{BB5E49A5-4136-284D-997B-48E1D791AD67}" type="slidenum">
+              <a:rPr lang="en-US" smtClean="0"/>
+              <a:t>‹#›</a:t>
+            </a:fld>
+            <a:endParaRPr lang="en-US"/>
+          </a:p>
+        </p:txBody>
+      </p:sp>
+    </p:spTree>
+    <p:extLst>
+      <p:ext uri="{BB962C8B-B14F-4D97-AF65-F5344CB8AC3E}">
+        <p14:creationId xmlns:p14="http://schemas.microsoft.com/office/powerpoint/2010/main" val="2623252185"/>
+      </p:ext>
+    </p:extLst>
+  </p:cSld>
+  <p:clrMap bg1="lt1" tx1="dk1" bg2="lt2" tx2="dk2" accent1="accent1" accent2="accent2" accent3="accent3" accent4="accent4" accent5="accent5" accent6="accent6" hlink="hlink" folHlink="folHlink"/>
+  <p:notesStyle>
+    <a:lvl1pPr marL="0" algn="l" defTabSz="457200" rtl="0" eaLnBrk="1" latinLnBrk="0" hangingPunct="1">
+      <a:defRPr sz="1200" kern="1200">
+        <a:solidFill>
+          <a:schemeClr val="tx1"/>
+        </a:solidFill>
+        <a:latin typeface="+mn-lt"/>
+        <a:ea typeface="+mn-ea"/>
+        <a:cs typeface="+mn-cs"/>
+      </a:defRPr>
+    </a:lvl1pPr>
+    <a:lvl2pPr marL="457200" algn="l" defTabSz="457200" rtl="0" eaLnBrk="1" latinLnBrk="0" hangingPunct="1">
+      <a:defRPr sz="1200" kern="1200">
+        <a:solidFill>
+          <a:schemeClr val="tx1"/>
+        </a:solidFill>
+        <a:latin typeface="+mn-lt"/>
+        <a:ea typeface="+mn-ea"/>
+        <a:cs typeface="+mn-cs"/>
+      </a:defRPr>
+    </a:lvl2pPr>
+    <a:lvl3pPr marL="914400" algn="l" defTabSz="457200" rtl="0" eaLnBrk="1" latinLnBrk="0" hangingPunct="1">
+      <a:defRPr sz="1200" kern="1200">
+        <a:solidFill>
+          <a:schemeClr val="tx1"/>
+        </a:solidFill>
+        <a:latin typeface="+mn-lt"/>
+        <a:ea typeface="+mn-ea"/>
+        <a:cs typeface="+mn-cs"/>
+      </a:defRPr>
+    </a:lvl3pPr>
+    <a:lvl4pPr marL="1371600" algn="l" defTabSz="457200" rtl="0" eaLnBrk="1" latinLnBrk="0" hangingPunct="1">
+      <a:defRPr sz="1200" kern="1200">
+        <a:solidFill>
+          <a:schemeClr val="tx1"/>
+        </a:solidFill>
+        <a:latin typeface="+mn-lt"/>
+        <a:ea typeface="+mn-ea"/>
+        <a:cs typeface="+mn-cs"/>
+      </a:defRPr>
+    </a:lvl4pPr>
+    <a:lvl5pPr marL="1828800" algn="l" defTabSz="457200" rtl="0" eaLnBrk="1" latinLnBrk="0" hangingPunct="1">
+      <a:defRPr sz="1200" kern="1200">
+        <a:solidFill>
+          <a:schemeClr val="tx1"/>
+        </a:solidFill>
+        <a:latin typeface="+mn-lt"/>
+        <a:ea typeface="+mn-ea"/>
+        <a:cs typeface="+mn-cs"/>
+      </a:defRPr>
+    </a:lvl5pPr>
+    <a:lvl6pPr marL="2286000" algn="l" defTabSz="457200" rtl="0" eaLnBrk="1" latinLnBrk="0" hangingPunct="1">
+      <a:defRPr sz="1200" kern="1200">
+        <a:solidFill>
+          <a:schemeClr val="tx1"/>
+        </a:solidFill>
+        <a:latin typeface="+mn-lt"/>
+        <a:ea typeface="+mn-ea"/>
+        <a:cs typeface="+mn-cs"/>
+      </a:defRPr>
+    </a:lvl6pPr>
+    <a:lvl7pPr marL="2743200" algn="l" defTabSz="457200" rtl="0" eaLnBrk="1" latinLnBrk="0" hangingPunct="1">
+      <a:defRPr sz="1200" kern="1200">
+        <a:solidFill>
+          <a:schemeClr val="tx1"/>
+        </a:solidFill>
+        <a:latin typeface="+mn-lt"/>
+        <a:ea typeface="+mn-ea"/>
+        <a:cs typeface="+mn-cs"/>
+      </a:defRPr>
+    </a:lvl7pPr>
+    <a:lvl8pPr marL="3200400" algn="l" defTabSz="457200" rtl="0" eaLnBrk="1" latinLnBrk="0" hangingPunct="1">
+      <a:defRPr sz="1200" kern="1200">
+        <a:solidFill>
+          <a:schemeClr val="tx1"/>
+        </a:solidFill>
+        <a:latin typeface="+mn-lt"/>
+        <a:ea typeface="+mn-ea"/>
+        <a:cs typeface="+mn-cs"/>
+      </a:defRPr>
+    </a:lvl8pPr>
+    <a:lvl9pPr marL="3657600" algn="l" defTabSz="457200" rtl="0" eaLnBrk="1" latinLnBrk="0" hangingPunct="1">
+      <a:defRPr sz="1200" kern="1200">
+        <a:solidFill>
+          <a:schemeClr val="tx1"/>
+        </a:solidFill>
+        <a:latin typeface="+mn-lt"/>
+        <a:ea typeface="+mn-ea"/>
+        <a:cs typeface="+mn-cs"/>
+      </a:defRPr>
+    </a:lvl9pPr>
+  </p:notesStyle>
+</p:notesMaster>
+</file>
+
+<file path=ppt/notesSlides/notesSlide1.xml><?xml version="1.0" encoding="utf-8"?>
+<p:notes xmlns:a="http://schemas.openxmlformats.org/drawingml/2006/main" xmlns:p="http://schemas.openxmlformats.org/presentationml/2006/main" xmlns:r="http://schemas.openxmlformats.org/officeDocument/2006/relationships">
+  <p:cSld>
+    <p:spTree>
+      <p:nvGrpSpPr>
+        <p:cNvPr id="1" name=""/>
+        <p:cNvGrpSpPr/>
+        <p:nvPr/>
+      </p:nvGrpSpPr>
+      <p:grpSpPr>
+        <a:xfrm>
+          <a:off x="0" y="0"/>
+          <a:ext cx="0" cy="0"/>
+          <a:chOff x="0" y="0"/>
+          <a:chExt cx="0" cy="0"/>
+        </a:xfrm>
+      </p:grpSpPr>
+      <p:sp>
+        <p:nvSpPr>
+          <p:cNvPr id="2" name="Slide Image Placeholder 1"/>
+          <p:cNvSpPr>
+            <a:spLocks noGrp="1"/>
+          </p:cNvSpPr>
+          <p:nvPr>
+            <p:ph type="sldImg" idx="2"/>
+          </p:nvPr>
+        </p:nvSpPr>
+        <p:spPr/>
+      </p:sp>
+      <p:sp>
+        <p:nvSpPr>
+          <p:cNvPr id="3" name="Notes Placeholder 2"/>
+          <p:cNvSpPr>
+            <a:spLocks noGrp="1"/>
+          </p:cNvSpPr>
+          <p:nvPr>
+            <p:ph type="body" idx="3" sz="quarter"/>
+          </p:nvPr>
+        </p:nvSpPr>
+        <p:spPr/>
+        <p:txBody>
+          <a:bodyPr/>
+          <a:lstStyle/>
+          <a:p>
+            <a:r>
+              <a:t>Dejar que el grupo decida antes de pasar a la siguiente diapositiva.</a:t>
+            </a:r>
+          </a:p>
+        </p:txBody>
+      </p:sp>
+      <p:sp>
+        <p:nvSpPr>
+          <p:cNvPr id="4" name="Slide Number Placeholder 3"/>
+          <p:cNvSpPr>
+            <a:spLocks noGrp="1"/>
+          </p:cNvSpPr>
+          <p:nvPr>
+            <p:ph type="sldNum" idx="5" sz="quarter"/>
+          </p:nvPr>
+        </p:nvSpPr>
+        <p:spPr/>
+      </p:sp>
+    </p:spTree>
+  </p:cSld>
+  <p:clrMapOvr>
+    <a:masterClrMapping/>
+  </p:clrMapOvr>
+</p:notes>
+</file>
+
+<file path=ppt/notesSlides/notesSlide2.xml><?xml version="1.0" encoding="utf-8"?>
+<p:notes xmlns:a="http://schemas.openxmlformats.org/drawingml/2006/main" xmlns:p="http://schemas.openxmlformats.org/presentationml/2006/main" xmlns:r="http://schemas.openxmlformats.org/officeDocument/2006/relationships">
+  <p:cSld>
+    <p:spTree>
+      <p:nvGrpSpPr>
+        <p:cNvPr id="1" name=""/>
+        <p:cNvGrpSpPr/>
+        <p:nvPr/>
+      </p:nvGrpSpPr>
+      <p:grpSpPr>
+        <a:xfrm>
+          <a:off x="0" y="0"/>
+          <a:ext cx="0" cy="0"/>
+          <a:chOff x="0" y="0"/>
+          <a:chExt cx="0" cy="0"/>
+        </a:xfrm>
+      </p:grpSpPr>
+      <p:sp>
+        <p:nvSpPr>
+          <p:cNvPr id="2" name="Slide Image Placeholder 1"/>
+          <p:cNvSpPr>
+            <a:spLocks noGrp="1"/>
+          </p:cNvSpPr>
+          <p:nvPr>
+            <p:ph type="sldImg" idx="2"/>
+          </p:nvPr>
+        </p:nvSpPr>
+        <p:spPr/>
+      </p:sp>
+      <p:sp>
+        <p:nvSpPr>
+          <p:cNvPr id="3" name="Notes Placeholder 2"/>
+          <p:cNvSpPr>
+            <a:spLocks noGrp="1"/>
+          </p:cNvSpPr>
+          <p:nvPr>
+            <p:ph type="body" idx="3" sz="quarter"/>
+          </p:nvPr>
+        </p:nvSpPr>
+        <p:spPr/>
+        <p:txBody>
+          <a:bodyPr/>
+          <a:lstStyle/>
+          <a:p>
+            <a:r>
+              <a:t>Dejar que el grupo decida antes de pasar a la siguiente diapositiva.</a:t>
+            </a:r>
+          </a:p>
+        </p:txBody>
+      </p:sp>
+      <p:sp>
+        <p:nvSpPr>
+          <p:cNvPr id="4" name="Slide Number Placeholder 3"/>
+          <p:cNvSpPr>
+            <a:spLocks noGrp="1"/>
+          </p:cNvSpPr>
+          <p:nvPr>
+            <p:ph type="sldNum" idx="5" sz="quarter"/>
+          </p:nvPr>
+        </p:nvSpPr>
+        <p:spPr/>
+      </p:sp>
+    </p:spTree>
+  </p:cSld>
+  <p:clrMapOvr>
+    <a:masterClrMapping/>
+  </p:clrMapOvr>
+</p:notes>
+</file>
+
+<file path=ppt/notesSlides/notesSlide3.xml><?xml version="1.0" encoding="utf-8"?>
+<p:notes xmlns:a="http://schemas.openxmlformats.org/drawingml/2006/main" xmlns:p="http://schemas.openxmlformats.org/presentationml/2006/main" xmlns:r="http://schemas.openxmlformats.org/officeDocument/2006/relationships">
+  <p:cSld>
+    <p:spTree>
+      <p:nvGrpSpPr>
+        <p:cNvPr id="1" name=""/>
+        <p:cNvGrpSpPr/>
+        <p:nvPr/>
+      </p:nvGrpSpPr>
+      <p:grpSpPr>
+        <a:xfrm>
+          <a:off x="0" y="0"/>
+          <a:ext cx="0" cy="0"/>
+          <a:chOff x="0" y="0"/>
+          <a:chExt cx="0" cy="0"/>
+        </a:xfrm>
+      </p:grpSpPr>
+      <p:sp>
+        <p:nvSpPr>
+          <p:cNvPr id="2" name="Slide Image Placeholder 1"/>
+          <p:cNvSpPr>
+            <a:spLocks noGrp="1"/>
+          </p:cNvSpPr>
+          <p:nvPr>
+            <p:ph type="sldImg" idx="2"/>
+          </p:nvPr>
+        </p:nvSpPr>
+        <p:spPr/>
+      </p:sp>
+      <p:sp>
+        <p:nvSpPr>
+          <p:cNvPr id="3" name="Notes Placeholder 2"/>
+          <p:cNvSpPr>
+            <a:spLocks noGrp="1"/>
+          </p:cNvSpPr>
+          <p:nvPr>
+            <p:ph type="body" idx="3" sz="quarter"/>
+          </p:nvPr>
+        </p:nvSpPr>
+        <p:spPr/>
+        <p:txBody>
+          <a:bodyPr/>
+          <a:lstStyle/>
+          <a:p>
+            <a:r>
+              <a:t>Dejar que el grupo decida antes de pasar a la siguiente diapositiva.</a:t>
+            </a:r>
+          </a:p>
+        </p:txBody>
+      </p:sp>
+      <p:sp>
+        <p:nvSpPr>
+          <p:cNvPr id="4" name="Slide Number Placeholder 3"/>
+          <p:cNvSpPr>
+            <a:spLocks noGrp="1"/>
+          </p:cNvSpPr>
+          <p:nvPr>
+            <p:ph type="sldNum" idx="5" sz="quarter"/>
+          </p:nvPr>
+        </p:nvSpPr>
+        <p:spPr/>
+      </p:sp>
+    </p:spTree>
+  </p:cSld>
+  <p:clrMapOvr>
+    <a:masterClrMapping/>
+  </p:clrMapOvr>
+</p:notes>
+</file>
+
+<file path=ppt/notesSlides/notesSlide4.xml><?xml version="1.0" encoding="utf-8"?>
+<p:notes xmlns:a="http://schemas.openxmlformats.org/drawingml/2006/main" xmlns:p="http://schemas.openxmlformats.org/presentationml/2006/main" xmlns:r="http://schemas.openxmlformats.org/officeDocument/2006/relationships">
+  <p:cSld>
+    <p:spTree>
+      <p:nvGrpSpPr>
+        <p:cNvPr id="1" name=""/>
+        <p:cNvGrpSpPr/>
+        <p:nvPr/>
+      </p:nvGrpSpPr>
+      <p:grpSpPr>
+        <a:xfrm>
+          <a:off x="0" y="0"/>
+          <a:ext cx="0" cy="0"/>
+          <a:chOff x="0" y="0"/>
+          <a:chExt cx="0" cy="0"/>
+        </a:xfrm>
+      </p:grpSpPr>
+      <p:sp>
+        <p:nvSpPr>
+          <p:cNvPr id="2" name="Slide Image Placeholder 1"/>
+          <p:cNvSpPr>
+            <a:spLocks noGrp="1"/>
+          </p:cNvSpPr>
+          <p:nvPr>
+            <p:ph type="sldImg" idx="2"/>
+          </p:nvPr>
+        </p:nvSpPr>
+        <p:spPr/>
+      </p:sp>
+      <p:sp>
+        <p:nvSpPr>
+          <p:cNvPr id="3" name="Notes Placeholder 2"/>
+          <p:cNvSpPr>
+            <a:spLocks noGrp="1"/>
+          </p:cNvSpPr>
+          <p:nvPr>
+            <p:ph type="body" idx="3" sz="quarter"/>
+          </p:nvPr>
+        </p:nvSpPr>
+        <p:spPr/>
+        <p:txBody>
+          <a:bodyPr/>
+          <a:lstStyle/>
+          <a:p>
+            <a:r>
+              <a:t>Dejar que el grupo decida antes de pasar a la siguiente diapositiva.</a:t>
+            </a:r>
+          </a:p>
+        </p:txBody>
+      </p:sp>
+      <p:sp>
+        <p:nvSpPr>
+          <p:cNvPr id="4" name="Slide Number Placeholder 3"/>
+          <p:cNvSpPr>
+            <a:spLocks noGrp="1"/>
+          </p:cNvSpPr>
+          <p:nvPr>
+            <p:ph type="sldNum" idx="5" sz="quarter"/>
+          </p:nvPr>
+        </p:nvSpPr>
+        <p:spPr/>
+      </p:sp>
+    </p:spTree>
+  </p:cSld>
+  <p:clrMapOvr>
+    <a:masterClrMapping/>
+  </p:clrMapOvr>
+</p:notes>
+</file>
+
+<file path=ppt/notesSlides/notesSlide5.xml><?xml version="1.0" encoding="utf-8"?>
+<p:notes xmlns:a="http://schemas.openxmlformats.org/drawingml/2006/main" xmlns:p="http://schemas.openxmlformats.org/presentationml/2006/main" xmlns:r="http://schemas.openxmlformats.org/officeDocument/2006/relationships">
+  <p:cSld>
+    <p:spTree>
+      <p:nvGrpSpPr>
+        <p:cNvPr id="1" name=""/>
+        <p:cNvGrpSpPr/>
+        <p:nvPr/>
+      </p:nvGrpSpPr>
+      <p:grpSpPr>
+        <a:xfrm>
+          <a:off x="0" y="0"/>
+          <a:ext cx="0" cy="0"/>
+          <a:chOff x="0" y="0"/>
+          <a:chExt cx="0" cy="0"/>
+        </a:xfrm>
+      </p:grpSpPr>
+      <p:sp>
+        <p:nvSpPr>
+          <p:cNvPr id="2" name="Slide Image Placeholder 1"/>
+          <p:cNvSpPr>
+            <a:spLocks noGrp="1"/>
+          </p:cNvSpPr>
+          <p:nvPr>
+            <p:ph type="sldImg" idx="2"/>
+          </p:nvPr>
+        </p:nvSpPr>
+        <p:spPr/>
+      </p:sp>
+      <p:sp>
+        <p:nvSpPr>
+          <p:cNvPr id="3" name="Notes Placeholder 2"/>
+          <p:cNvSpPr>
+            <a:spLocks noGrp="1"/>
+          </p:cNvSpPr>
+          <p:nvPr>
+            <p:ph type="body" idx="3" sz="quarter"/>
+          </p:nvPr>
+        </p:nvSpPr>
+        <p:spPr/>
+        <p:txBody>
+          <a:bodyPr/>
+          <a:lstStyle/>
+          <a:p>
+            <a:r>
+              <a:t>Repasar en plenaria; cada respuesta con su artículo.</a:t>
+            </a:r>
+          </a:p>
+        </p:txBody>
+      </p:sp>
+      <p:sp>
+        <p:nvSpPr>
+          <p:cNvPr id="4" name="Slide Number Placeholder 3"/>
+          <p:cNvSpPr>
+            <a:spLocks noGrp="1"/>
+          </p:cNvSpPr>
+          <p:nvPr>
+            <p:ph type="sldNum" idx="5" sz="quarter"/>
+          </p:nvPr>
+        </p:nvSpPr>
+        <p:spPr/>
+      </p:sp>
+    </p:spTree>
+  </p:cSld>
+  <p:clrMapOvr>
+    <a:masterClrMapping/>
+  </p:clrMapOvr>
+</p:notes>
+</file>
+
+<file path=ppt/notesSlides/notesSlide6.xml><?xml version="1.0" encoding="utf-8"?>
+<p:notes xmlns:a="http://schemas.openxmlformats.org/drawingml/2006/main" xmlns:p="http://schemas.openxmlformats.org/presentationml/2006/main" xmlns:r="http://schemas.openxmlformats.org/officeDocument/2006/relationships">
+  <p:cSld>
+    <p:spTree>
+      <p:nvGrpSpPr>
+        <p:cNvPr id="1" name=""/>
+        <p:cNvGrpSpPr/>
+        <p:nvPr/>
+      </p:nvGrpSpPr>
+      <p:grpSpPr>
+        <a:xfrm>
+          <a:off x="0" y="0"/>
+          <a:ext cx="0" cy="0"/>
+          <a:chOff x="0" y="0"/>
+          <a:chExt cx="0" cy="0"/>
+        </a:xfrm>
+      </p:grpSpPr>
+      <p:sp>
+        <p:nvSpPr>
+          <p:cNvPr id="2" name="Slide Image Placeholder 1"/>
+          <p:cNvSpPr>
+            <a:spLocks noGrp="1"/>
+          </p:cNvSpPr>
+          <p:nvPr>
+            <p:ph type="sldImg" idx="2"/>
+          </p:nvPr>
+        </p:nvSpPr>
+        <p:spPr/>
+      </p:sp>
+      <p:sp>
+        <p:nvSpPr>
+          <p:cNvPr id="3" name="Notes Placeholder 2"/>
+          <p:cNvSpPr>
+            <a:spLocks noGrp="1"/>
+          </p:cNvSpPr>
+          <p:nvPr>
+            <p:ph type="body" idx="3" sz="quarter"/>
+          </p:nvPr>
+        </p:nvSpPr>
+        <p:spPr/>
+        <p:txBody>
+          <a:bodyPr/>
+          <a:lstStyle/>
+          <a:p>
+            <a:r>
+              <a:t>Un minuto por pregunta, y después las respuestas.</a:t>
+            </a:r>
+          </a:p>
+        </p:txBody>
+      </p:sp>
+      <p:sp>
+        <p:nvSpPr>
+          <p:cNvPr id="4" name="Slide Number Placeholder 3"/>
+          <p:cNvSpPr>
+            <a:spLocks noGrp="1"/>
+          </p:cNvSpPr>
+          <p:nvPr>
+            <p:ph type="sldNum" idx="5" sz="quarter"/>
+          </p:nvPr>
+        </p:nvSpPr>
+        <p:spPr/>
+      </p:sp>
+    </p:spTree>
+  </p:cSld>
+  <p:clrMapOvr>
+    <a:masterClrMapping/>
+  </p:clrMapOvr>
+</p:notes>
 </file>
 
 <file path=ppt/slideLayouts/slideLayout1.xml><?xml version="1.0" encoding="utf-8"?>
@@ -3121,50 +3895,6 @@
             <a:avLst/>
           </a:prstGeom>
           <a:solidFill>
-            <a:srgbClr val="0A1F33"/>
-          </a:solidFill>
-          <a:ln>
-            <a:noFill/>
-          </a:ln>
-          <a:effectLst/>
-        </p:spPr>
-        <p:style>
-          <a:lnRef idx="1">
-            <a:schemeClr val="accent1"/>
-          </a:lnRef>
-          <a:fillRef idx="3">
-            <a:schemeClr val="accent1"/>
-          </a:fillRef>
-          <a:effectRef idx="2">
-            <a:schemeClr val="accent1"/>
-          </a:effectRef>
-          <a:fontRef idx="minor">
-            <a:schemeClr val="lt1"/>
-          </a:fontRef>
-        </p:style>
-        <p:txBody>
-          <a:bodyPr rtlCol="0" anchor="ctr"/>
-          <a:lstStyle/>
-          <a:p>
-            <a:pPr algn="ctr"/>
-          </a:p>
-        </p:txBody>
-      </p:sp>
-      <p:sp>
-        <p:nvSpPr>
-          <p:cNvPr id="3" name="Oval 2"/>
-          <p:cNvSpPr/>
-          <p:nvPr/>
-        </p:nvSpPr>
-        <p:spPr>
-          <a:xfrm>
-            <a:off x="9692640" y="-1463040"/>
-            <a:ext cx="4572000" cy="4572000"/>
-          </a:xfrm>
-          <a:prstGeom prst="ellipse">
-            <a:avLst/>
-          </a:prstGeom>
-          <a:solidFill>
             <a:srgbClr val="102A43"/>
           </a:solidFill>
           <a:ln>
@@ -3196,20 +3926,59 @@
       </p:sp>
       <p:sp>
         <p:nvSpPr>
-          <p:cNvPr id="4" name="Oval 3"/>
+          <p:cNvPr id="3" name="TextBox 2"/>
+          <p:cNvSpPr txBox="1"/>
+          <p:nvPr/>
+        </p:nvSpPr>
+        <p:spPr>
+          <a:xfrm>
+            <a:off x="10728655" y="6419088"/>
+            <a:ext cx="1097280" cy="365760"/>
+          </a:xfrm>
+          <a:prstGeom prst="rect">
+            <a:avLst/>
+          </a:prstGeom>
+          <a:noFill/>
+        </p:spPr>
+        <p:txBody>
+          <a:bodyPr wrap="square" lIns="45720" rIns="45720">
+            <a:spAutoFit/>
+          </a:bodyPr>
+          <a:lstStyle/>
+          <a:p>
+            <a:pPr algn="ctr">
+              <a:spcAft>
+                <a:spcPts val="540"/>
+              </a:spcAft>
+            </a:pPr>
+            <a:r>
+              <a:rPr sz="1200" b="0">
+                <a:solidFill>
+                  <a:srgbClr val="9FB3C8"/>
+                </a:solidFill>
+                <a:latin typeface="Calibri"/>
+              </a:rPr>
+              <a:t>1</a:t>
+            </a:r>
+          </a:p>
+        </p:txBody>
+      </p:sp>
+      <p:sp>
+        <p:nvSpPr>
+          <p:cNvPr id="4" name="Rectangle 3"/>
           <p:cNvSpPr/>
           <p:nvPr/>
         </p:nvSpPr>
         <p:spPr>
           <a:xfrm>
-            <a:off x="-1645920" y="4937760"/>
-            <a:ext cx="3840480" cy="3840480"/>
-          </a:xfrm>
-          <a:prstGeom prst="ellipse">
+            <a:off x="731520" y="2011680"/>
+            <a:ext cx="109728" cy="2377440"/>
+          </a:xfrm>
+          <a:prstGeom prst="rect">
             <a:avLst/>
           </a:prstGeom>
           <a:solidFill>
-            <a:srgbClr val="102A43"/>
+            <a:srgbClr val="F4C430"/>
           </a:solidFill>
           <a:ln>
             <a:noFill/>
@@ -3240,45 +4009,40 @@
       </p:sp>
       <p:sp>
         <p:nvSpPr>
-          <p:cNvPr id="5" name="Oval 4"/>
-          <p:cNvSpPr/>
-          <p:nvPr/>
-        </p:nvSpPr>
-        <p:spPr>
-          <a:xfrm>
-            <a:off x="640080" y="594360"/>
-            <a:ext cx="1005840" cy="1005840"/>
-          </a:xfrm>
-          <a:prstGeom prst="ellipse">
-            <a:avLst/>
-          </a:prstGeom>
-          <a:solidFill>
-            <a:srgbClr val="DE911D"/>
-          </a:solidFill>
-          <a:ln>
-            <a:noFill/>
-          </a:ln>
-          <a:effectLst/>
-        </p:spPr>
-        <p:style>
-          <a:lnRef idx="1">
-            <a:schemeClr val="accent1"/>
-          </a:lnRef>
-          <a:fillRef idx="3">
-            <a:schemeClr val="accent1"/>
-          </a:fillRef>
-          <a:effectRef idx="2">
-            <a:schemeClr val="accent1"/>
-          </a:effectRef>
-          <a:fontRef idx="minor">
-            <a:schemeClr val="lt1"/>
-          </a:fontRef>
-        </p:style>
-        <p:txBody>
-          <a:bodyPr rtlCol="0" anchor="ctr"/>
-          <a:lstStyle/>
-          <a:p>
-            <a:pPr algn="ctr"/>
+          <p:cNvPr id="5" name="TextBox 4"/>
+          <p:cNvSpPr txBox="1"/>
+          <p:nvPr/>
+        </p:nvSpPr>
+        <p:spPr>
+          <a:xfrm>
+            <a:off x="1051560" y="1097280"/>
+            <a:ext cx="10058400" cy="548640"/>
+          </a:xfrm>
+          <a:prstGeom prst="rect">
+            <a:avLst/>
+          </a:prstGeom>
+          <a:noFill/>
+        </p:spPr>
+        <p:txBody>
+          <a:bodyPr wrap="square" lIns="45720" rIns="45720">
+            <a:spAutoFit/>
+          </a:bodyPr>
+          <a:lstStyle/>
+          <a:p>
+            <a:pPr>
+              <a:spcAft>
+                <a:spcPts val="900"/>
+              </a:spcAft>
+            </a:pPr>
+            <a:r>
+              <a:rPr sz="2000" b="1">
+                <a:solidFill>
+                  <a:srgbClr val="F4C430"/>
+                </a:solidFill>
+                <a:latin typeface="Calibri"/>
+              </a:rPr>
+              <a:t>SESIÓN 7  ·  FORMACIÓN AJEDREZ</a:t>
+            </a:r>
           </a:p>
         </p:txBody>
       </p:sp>
@@ -3290,8 +4054,8 @@
         </p:nvSpPr>
         <p:spPr>
           <a:xfrm>
-            <a:off x="640080" y="594360"/>
-            <a:ext cx="1005840" cy="1005840"/>
+            <a:off x="1051560" y="1920240"/>
+            <a:ext cx="10332720" cy="1828800"/>
           </a:xfrm>
           <a:prstGeom prst="rect">
             <a:avLst/>
@@ -3299,20 +4063,24 @@
           <a:noFill/>
         </p:spPr>
         <p:txBody>
-          <a:bodyPr wrap="square">
+          <a:bodyPr wrap="square" lIns="45720" rIns="45720">
             <a:spAutoFit/>
           </a:bodyPr>
           <a:lstStyle/>
           <a:p>
-            <a:pPr algn="ctr"/>
-            <a:r>
-              <a:rPr sz="3200" b="1">
-                <a:solidFill>
-                  <a:srgbClr val="0A1F33"/>
-                </a:solidFill>
-                <a:latin typeface="Calibri"/>
-              </a:rPr>
-              <a:t>7</a:t>
+            <a:pPr>
+              <a:spcAft>
+                <a:spcPts val="1980"/>
+              </a:spcAft>
+            </a:pPr>
+            <a:r>
+              <a:rPr sz="4400" b="1">
+                <a:solidFill>
+                  <a:srgbClr val="FFFFFF"/>
+                </a:solidFill>
+                <a:latin typeface="Calibri"/>
+              </a:rPr>
+              <a:t>Talleres prácticos y simulacros de arbitraje</a:t>
             </a:r>
           </a:p>
         </p:txBody>
@@ -3325,8 +4093,8 @@
         </p:nvSpPr>
         <p:spPr>
           <a:xfrm>
-            <a:off x="1920240" y="685800"/>
-            <a:ext cx="9509760" cy="457200"/>
+            <a:off x="1051560" y="3886200"/>
+            <a:ext cx="10332720" cy="1280160"/>
           </a:xfrm>
           <a:prstGeom prst="rect">
             <a:avLst/>
@@ -3334,19 +4102,24 @@
           <a:noFill/>
         </p:spPr>
         <p:txBody>
-          <a:bodyPr wrap="square">
+          <a:bodyPr wrap="square" lIns="45720" rIns="45720">
             <a:spAutoFit/>
           </a:bodyPr>
           <a:lstStyle/>
           <a:p>
-            <a:r>
-              <a:rPr sz="1300" b="1">
-                <a:solidFill>
-                  <a:srgbClr val="F0B429"/>
-                </a:solidFill>
-                <a:latin typeface="Calibri"/>
-              </a:rPr>
-              <a:t>AJEDREZ INTEGRAL  ·  FORMACIÓN AJEDREZ</a:t>
+            <a:pPr>
+              <a:spcAft>
+                <a:spcPts val="990"/>
+              </a:spcAft>
+            </a:pPr>
+            <a:r>
+              <a:rPr sz="2200" b="0">
+                <a:solidFill>
+                  <a:srgbClr val="CADCFC"/>
+                </a:solidFill>
+                <a:latin typeface="Calibri"/>
+              </a:rPr>
+              <a:t>Simulacros de arbitraje entre pares y preparación de roles para la sesión presencial.</a:t>
             </a:r>
           </a:p>
         </p:txBody>
@@ -3359,8 +4132,8 @@
         </p:nvSpPr>
         <p:spPr>
           <a:xfrm>
-            <a:off x="1920240" y="1097280"/>
-            <a:ext cx="9509760" cy="365760"/>
+            <a:off x="1051560" y="5760720"/>
+            <a:ext cx="10332720" cy="457200"/>
           </a:xfrm>
           <a:prstGeom prst="rect">
             <a:avLst/>
@@ -3368,121 +4141,24 @@
           <a:noFill/>
         </p:spPr>
         <p:txBody>
-          <a:bodyPr wrap="square">
+          <a:bodyPr wrap="square" lIns="45720" rIns="45720">
             <a:spAutoFit/>
           </a:bodyPr>
           <a:lstStyle/>
           <a:p>
-            <a:r>
-              <a:rPr sz="1300" b="0">
+            <a:pPr>
+              <a:spcAft>
+                <a:spcPts val="720"/>
+              </a:spcAft>
+            </a:pPr>
+            <a:r>
+              <a:rPr sz="1600" b="0">
                 <a:solidFill>
                   <a:srgbClr val="9FB3C8"/>
                 </a:solidFill>
                 <a:latin typeface="Calibri"/>
               </a:rPr>
-              <a:t>Bloque 3 · Integración práctica y cierre presencial</a:t>
-            </a:r>
-          </a:p>
-        </p:txBody>
-      </p:sp>
-      <p:sp>
-        <p:nvSpPr>
-          <p:cNvPr id="9" name="TextBox 8"/>
-          <p:cNvSpPr txBox="1"/>
-          <p:nvPr/>
-        </p:nvSpPr>
-        <p:spPr>
-          <a:xfrm>
-            <a:off x="640080" y="2651760"/>
-            <a:ext cx="10881360" cy="2011680"/>
-          </a:xfrm>
-          <a:prstGeom prst="rect">
-            <a:avLst/>
-          </a:prstGeom>
-          <a:noFill/>
-        </p:spPr>
-        <p:txBody>
-          <a:bodyPr wrap="square">
-            <a:spAutoFit/>
-          </a:bodyPr>
-          <a:lstStyle/>
-          <a:p>
-            <a:r>
-              <a:rPr sz="3400" b="1">
-                <a:solidFill>
-                  <a:srgbClr val="FFFFFF"/>
-                </a:solidFill>
-                <a:latin typeface="Cambria"/>
-              </a:rPr>
-              <a:t>Talleres prácticos y simulacros de arbitraje</a:t>
-            </a:r>
-          </a:p>
-        </p:txBody>
-      </p:sp>
-      <p:sp>
-        <p:nvSpPr>
-          <p:cNvPr id="10" name="TextBox 9"/>
-          <p:cNvSpPr txBox="1"/>
-          <p:nvPr/>
-        </p:nvSpPr>
-        <p:spPr>
-          <a:xfrm>
-            <a:off x="640080" y="4617720"/>
-            <a:ext cx="9601200" cy="914400"/>
-          </a:xfrm>
-          <a:prstGeom prst="rect">
-            <a:avLst/>
-          </a:prstGeom>
-          <a:noFill/>
-        </p:spPr>
-        <p:txBody>
-          <a:bodyPr wrap="square">
-            <a:spAutoFit/>
-          </a:bodyPr>
-          <a:lstStyle/>
-          <a:p>
-            <a:r>
-              <a:rPr sz="1800" b="0">
-                <a:solidFill>
-                  <a:srgbClr val="CADCFC"/>
-                </a:solidFill>
-                <a:latin typeface="Calibri"/>
-              </a:rPr>
-              <a:t>Simulacros de arbitraje entre pares y preparación de roles para la sesión presencial.</a:t>
-            </a:r>
-          </a:p>
-        </p:txBody>
-      </p:sp>
-      <p:sp>
-        <p:nvSpPr>
-          <p:cNvPr id="11" name="TextBox 10"/>
-          <p:cNvSpPr txBox="1"/>
-          <p:nvPr/>
-        </p:nvSpPr>
-        <p:spPr>
-          <a:xfrm>
-            <a:off x="640080" y="6309360"/>
-            <a:ext cx="5486400" cy="365760"/>
-          </a:xfrm>
-          <a:prstGeom prst="rect">
-            <a:avLst/>
-          </a:prstGeom>
-          <a:noFill/>
-        </p:spPr>
-        <p:txBody>
-          <a:bodyPr wrap="square">
-            <a:spAutoFit/>
-          </a:bodyPr>
-          <a:lstStyle/>
-          <a:p>
-            <a:r>
-              <a:rPr sz="1100" b="0">
-                <a:solidFill>
-                  <a:srgbClr val="627D98"/>
-                </a:solidFill>
-                <a:latin typeface="Calibri"/>
-              </a:rPr>
-              <a:t>ajedrez-integral.com</a:t>
+              <a:t>Programa de Formación para Personas Árbitras y Asesoras  ·  Juegos Deportivos Estudiantiles</a:t>
             </a:r>
           </a:p>
         </p:txBody>
@@ -3514,13 +4190,13 @@
         <p:spPr>
           <a:xfrm>
             <a:off x="0" y="0"/>
-            <a:ext cx="12191695" cy="6858000"/>
+            <a:ext cx="12191695" cy="960120"/>
           </a:xfrm>
           <a:prstGeom prst="rect">
             <a:avLst/>
           </a:prstGeom>
           <a:solidFill>
-            <a:srgbClr val="102A43"/>
+            <a:srgbClr val="3172AC"/>
           </a:solidFill>
           <a:ln>
             <a:noFill/>
@@ -3557,8 +4233,8 @@
         </p:nvSpPr>
         <p:spPr>
           <a:xfrm>
-            <a:off x="548640" y="548640"/>
-            <a:ext cx="11064240" cy="457200"/>
+            <a:off x="457200" y="109728"/>
+            <a:ext cx="11277295" cy="777240"/>
           </a:xfrm>
           <a:prstGeom prst="rect">
             <a:avLst/>
@@ -3566,33 +4242,82 @@
           <a:noFill/>
         </p:spPr>
         <p:txBody>
-          <a:bodyPr wrap="square">
+          <a:bodyPr wrap="square" lIns="45720" rIns="45720" anchor="ctr">
             <a:spAutoFit/>
           </a:bodyPr>
           <a:lstStyle/>
           <a:p>
-            <a:r>
-              <a:rPr sz="1400" b="1">
-                <a:solidFill>
-                  <a:srgbClr val="F0B429"/>
-                </a:solidFill>
-                <a:latin typeface="Calibri"/>
-              </a:rPr>
-              <a:t>CASO 2 · DECISIÓN</a:t>
-            </a:r>
-          </a:p>
-        </p:txBody>
-      </p:sp>
-      <p:sp>
-        <p:nvSpPr>
-          <p:cNvPr id="4" name="TextBox 3"/>
+            <a:pPr algn="ctr">
+              <a:spcAft>
+                <a:spcPts val="1530"/>
+              </a:spcAft>
+            </a:pPr>
+            <a:r>
+              <a:rPr sz="3400" b="1">
+                <a:solidFill>
+                  <a:srgbClr val="FFFFFF"/>
+                </a:solidFill>
+                <a:latin typeface="Calibri"/>
+              </a:rPr>
+              <a:t>Caso 2 · ¿Qué decide la persona árbitra?</a:t>
+            </a:r>
+          </a:p>
+        </p:txBody>
+      </p:sp>
+      <p:sp>
+        <p:nvSpPr>
+          <p:cNvPr id="4" name="Rectangle 3"/>
+          <p:cNvSpPr/>
+          <p:nvPr/>
+        </p:nvSpPr>
+        <p:spPr>
+          <a:xfrm>
+            <a:off x="0" y="960120"/>
+            <a:ext cx="12191695" cy="548640"/>
+          </a:xfrm>
+          <a:prstGeom prst="rect">
+            <a:avLst/>
+          </a:prstGeom>
+          <a:solidFill>
+            <a:srgbClr val="4E6178"/>
+          </a:solidFill>
+          <a:ln>
+            <a:noFill/>
+          </a:ln>
+          <a:effectLst/>
+        </p:spPr>
+        <p:style>
+          <a:lnRef idx="1">
+            <a:schemeClr val="accent1"/>
+          </a:lnRef>
+          <a:fillRef idx="3">
+            <a:schemeClr val="accent1"/>
+          </a:fillRef>
+          <a:effectRef idx="2">
+            <a:schemeClr val="accent1"/>
+          </a:effectRef>
+          <a:fontRef idx="minor">
+            <a:schemeClr val="lt1"/>
+          </a:fontRef>
+        </p:style>
+        <p:txBody>
+          <a:bodyPr rtlCol="0" anchor="ctr"/>
+          <a:lstStyle/>
+          <a:p>
+            <a:pPr algn="ctr"/>
+          </a:p>
+        </p:txBody>
+      </p:sp>
+      <p:sp>
+        <p:nvSpPr>
+          <p:cNvPr id="5" name="TextBox 4"/>
           <p:cNvSpPr txBox="1"/>
           <p:nvPr/>
         </p:nvSpPr>
         <p:spPr>
           <a:xfrm>
-            <a:off x="548640" y="1051560"/>
-            <a:ext cx="11064240" cy="822960"/>
+            <a:off x="457200" y="987552"/>
+            <a:ext cx="11277295" cy="502920"/>
           </a:xfrm>
           <a:prstGeom prst="rect">
             <a:avLst/>
@@ -3600,17 +4325,22 @@
           <a:noFill/>
         </p:spPr>
         <p:txBody>
-          <a:bodyPr wrap="square">
+          <a:bodyPr wrap="square" lIns="45720" rIns="45720" anchor="ctr">
             <a:spAutoFit/>
           </a:bodyPr>
           <a:lstStyle/>
           <a:p>
-            <a:r>
-              <a:rPr sz="2600" b="1">
+            <a:pPr algn="ctr">
+              <a:spcAft>
+                <a:spcPts val="945"/>
+              </a:spcAft>
+            </a:pPr>
+            <a:r>
+              <a:rPr sz="2100" b="0">
                 <a:solidFill>
                   <a:srgbClr val="FFFFFF"/>
                 </a:solidFill>
-                <a:latin typeface="Cambria"/>
+                <a:latin typeface="Calibri"/>
               </a:rPr>
               <a:t>Guion B: reclamo de triple repetición</a:t>
             </a:r>
@@ -3619,14 +4349,14 @@
       </p:sp>
       <p:sp>
         <p:nvSpPr>
-          <p:cNvPr id="5" name="TextBox 4"/>
+          <p:cNvPr id="6" name="TextBox 5"/>
           <p:cNvSpPr txBox="1"/>
           <p:nvPr/>
         </p:nvSpPr>
         <p:spPr>
           <a:xfrm>
-            <a:off x="548640" y="2103120"/>
-            <a:ext cx="11064240" cy="3931920"/>
+            <a:off x="10728655" y="6419088"/>
+            <a:ext cx="1097280" cy="365760"/>
           </a:xfrm>
           <a:prstGeom prst="rect">
             <a:avLst/>
@@ -3634,33 +4364,82 @@
           <a:noFill/>
         </p:spPr>
         <p:txBody>
-          <a:bodyPr wrap="square">
+          <a:bodyPr wrap="square" lIns="45720" rIns="45720">
             <a:spAutoFit/>
           </a:bodyPr>
           <a:lstStyle/>
           <a:p>
-            <a:r>
-              <a:rPr sz="2000" b="0">
-                <a:solidFill>
-                  <a:srgbClr val="CADCFC"/>
-                </a:solidFill>
-                <a:latin typeface="Calibri"/>
-              </a:rPr>
-              <a:t>Correcto si anotó la jugada sin hacerla y llamó al árbitro sin tocar ninguna pieza. Se verifica con las planillas; si el reclamo es correcto, son tablas de inmediato. Si no lo es, el reclamo cuenta como oferta de tablas y, en ritmo clásico, el rival recibe dos minutos.</a:t>
-            </a:r>
-          </a:p>
-        </p:txBody>
-      </p:sp>
-      <p:sp>
-        <p:nvSpPr>
-          <p:cNvPr id="6" name="TextBox 5"/>
+            <a:pPr algn="ctr">
+              <a:spcAft>
+                <a:spcPts val="540"/>
+              </a:spcAft>
+            </a:pPr>
+            <a:r>
+              <a:rPr sz="1200" b="0">
+                <a:solidFill>
+                  <a:srgbClr val="627D98"/>
+                </a:solidFill>
+                <a:latin typeface="Calibri"/>
+              </a:rPr>
+              <a:t>10</a:t>
+            </a:r>
+          </a:p>
+        </p:txBody>
+      </p:sp>
+      <p:sp>
+        <p:nvSpPr>
+          <p:cNvPr id="7" name="Rectangle 6"/>
+          <p:cNvSpPr/>
+          <p:nvPr/>
+        </p:nvSpPr>
+        <p:spPr>
+          <a:xfrm>
+            <a:off x="457200" y="1783080"/>
+            <a:ext cx="11277295" cy="4389120"/>
+          </a:xfrm>
+          <a:prstGeom prst="rect">
+            <a:avLst/>
+          </a:prstGeom>
+          <a:solidFill>
+            <a:srgbClr val="F0F4F8"/>
+          </a:solidFill>
+          <a:ln>
+            <a:noFill/>
+          </a:ln>
+          <a:effectLst/>
+        </p:spPr>
+        <p:style>
+          <a:lnRef idx="1">
+            <a:schemeClr val="accent1"/>
+          </a:lnRef>
+          <a:fillRef idx="3">
+            <a:schemeClr val="accent1"/>
+          </a:fillRef>
+          <a:effectRef idx="2">
+            <a:schemeClr val="accent1"/>
+          </a:effectRef>
+          <a:fontRef idx="minor">
+            <a:schemeClr val="lt1"/>
+          </a:fontRef>
+        </p:style>
+        <p:txBody>
+          <a:bodyPr rtlCol="0" anchor="ctr"/>
+          <a:lstStyle/>
+          <a:p>
+            <a:pPr algn="ctr"/>
+          </a:p>
+        </p:txBody>
+      </p:sp>
+      <p:sp>
+        <p:nvSpPr>
+          <p:cNvPr id="8" name="TextBox 7"/>
           <p:cNvSpPr txBox="1"/>
           <p:nvPr/>
         </p:nvSpPr>
         <p:spPr>
           <a:xfrm>
-            <a:off x="548640" y="6263640"/>
-            <a:ext cx="11064240" cy="365760"/>
+            <a:off x="822960" y="2011680"/>
+            <a:ext cx="10545775" cy="3931920"/>
           </a:xfrm>
           <a:prstGeom prst="rect">
             <a:avLst/>
@@ -3668,19 +4447,24 @@
           <a:noFill/>
         </p:spPr>
         <p:txBody>
-          <a:bodyPr wrap="square">
+          <a:bodyPr wrap="square" lIns="45720" rIns="45720" anchor="ctr">
             <a:spAutoFit/>
           </a:bodyPr>
           <a:lstStyle/>
           <a:p>
-            <a:r>
-              <a:rPr sz="1100" b="0">
-                <a:solidFill>
-                  <a:srgbClr val="9FB3C8"/>
-                </a:solidFill>
-                <a:latin typeface="Calibri"/>
-              </a:rPr>
-              <a:t>Fuente: Leyes del Ajedrez 2023 (Handbook E.I.01), art. 9.1, 9.2, 9.4 y 9.5</a:t>
+            <a:pPr>
+              <a:spcAft>
+                <a:spcPts val="1530"/>
+              </a:spcAft>
+            </a:pPr>
+            <a:r>
+              <a:rPr sz="3400" b="0">
+                <a:solidFill>
+                  <a:srgbClr val="102A43"/>
+                </a:solidFill>
+                <a:latin typeface="Calibri"/>
+              </a:rPr>
+              <a:t>Un jugador detiene el reloj y dice que la posición se repitió tres veces. Todavía no hizo la jugada que produciría la tercera repetición.</a:t>
             </a:r>
           </a:p>
         </p:txBody>
@@ -3705,20 +4489,20 @@
       <p:grpSpPr/>
       <p:sp>
         <p:nvSpPr>
-          <p:cNvPr id="2" name="Oval 1"/>
+          <p:cNvPr id="2" name="Rectangle 1"/>
           <p:cNvSpPr/>
           <p:nvPr/>
         </p:nvSpPr>
         <p:spPr>
           <a:xfrm>
-            <a:off x="548640" y="502920"/>
-            <a:ext cx="502920" cy="502920"/>
-          </a:xfrm>
-          <a:prstGeom prst="ellipse">
+            <a:off x="0" y="0"/>
+            <a:ext cx="12191695" cy="960120"/>
+          </a:xfrm>
+          <a:prstGeom prst="rect">
             <a:avLst/>
           </a:prstGeom>
           <a:solidFill>
-            <a:srgbClr val="DE911D"/>
+            <a:srgbClr val="3172AC"/>
           </a:solidFill>
           <a:ln>
             <a:noFill/>
@@ -3755,8 +4539,8 @@
         </p:nvSpPr>
         <p:spPr>
           <a:xfrm>
-            <a:off x="548640" y="502920"/>
-            <a:ext cx="502920" cy="502920"/>
+            <a:off x="457200" y="109728"/>
+            <a:ext cx="11277295" cy="777240"/>
           </a:xfrm>
           <a:prstGeom prst="rect">
             <a:avLst/>
@@ -3764,108 +4548,44 @@
           <a:noFill/>
         </p:spPr>
         <p:txBody>
-          <a:bodyPr wrap="square">
+          <a:bodyPr wrap="square" lIns="45720" rIns="45720" anchor="ctr">
             <a:spAutoFit/>
           </a:bodyPr>
           <a:lstStyle/>
           <a:p>
-            <a:pPr algn="ctr"/>
-            <a:r>
-              <a:rPr sz="2000" b="0">
-                <a:solidFill>
-                  <a:srgbClr val="0A1F33"/>
-                </a:solidFill>
-                <a:latin typeface="Calibri"/>
-              </a:rPr>
-              <a:t>?</a:t>
-            </a:r>
-          </a:p>
-        </p:txBody>
-      </p:sp>
-      <p:sp>
-        <p:nvSpPr>
-          <p:cNvPr id="4" name="TextBox 3"/>
-          <p:cNvSpPr txBox="1"/>
-          <p:nvPr/>
-        </p:nvSpPr>
-        <p:spPr>
-          <a:xfrm>
-            <a:off x="1234440" y="530352"/>
-            <a:ext cx="9144000" cy="457200"/>
-          </a:xfrm>
-          <a:prstGeom prst="rect">
-            <a:avLst/>
-          </a:prstGeom>
-          <a:noFill/>
-        </p:spPr>
-        <p:txBody>
-          <a:bodyPr wrap="square">
-            <a:spAutoFit/>
-          </a:bodyPr>
-          <a:lstStyle/>
-          <a:p>
-            <a:r>
-              <a:rPr sz="1400" b="1">
-                <a:solidFill>
-                  <a:srgbClr val="DE911D"/>
-                </a:solidFill>
-                <a:latin typeface="Calibri"/>
-              </a:rPr>
-              <a:t>CASO 3 · ¿QUÉ DECIDE LA PERSONA ÁRBITRA?</a:t>
-            </a:r>
-          </a:p>
-        </p:txBody>
-      </p:sp>
-      <p:sp>
-        <p:nvSpPr>
-          <p:cNvPr id="5" name="TextBox 4"/>
-          <p:cNvSpPr txBox="1"/>
-          <p:nvPr/>
-        </p:nvSpPr>
-        <p:spPr>
-          <a:xfrm>
-            <a:off x="548640" y="1051560"/>
-            <a:ext cx="11064240" cy="822960"/>
-          </a:xfrm>
-          <a:prstGeom prst="rect">
-            <a:avLst/>
-          </a:prstGeom>
-          <a:noFill/>
-        </p:spPr>
-        <p:txBody>
-          <a:bodyPr wrap="square">
-            <a:spAutoFit/>
-          </a:bodyPr>
-          <a:lstStyle/>
-          <a:p>
-            <a:r>
-              <a:rPr sz="2600" b="1">
-                <a:solidFill>
-                  <a:srgbClr val="0A1F33"/>
-                </a:solidFill>
-                <a:latin typeface="Cambria"/>
-              </a:rPr>
-              <a:t>Guion C: la oferta de tablas en el turno del rival</a:t>
-            </a:r>
-          </a:p>
-        </p:txBody>
-      </p:sp>
-      <p:sp>
-        <p:nvSpPr>
-          <p:cNvPr id="6" name="Rectangle 5"/>
+            <a:pPr algn="ctr">
+              <a:spcAft>
+                <a:spcPts val="1530"/>
+              </a:spcAft>
+            </a:pPr>
+            <a:r>
+              <a:rPr sz="3400" b="1">
+                <a:solidFill>
+                  <a:srgbClr val="FFFFFF"/>
+                </a:solidFill>
+                <a:latin typeface="Calibri"/>
+              </a:rPr>
+              <a:t>Caso 2 · Decisión</a:t>
+            </a:r>
+          </a:p>
+        </p:txBody>
+      </p:sp>
+      <p:sp>
+        <p:nvSpPr>
+          <p:cNvPr id="4" name="Rectangle 3"/>
           <p:cNvSpPr/>
           <p:nvPr/>
         </p:nvSpPr>
         <p:spPr>
           <a:xfrm>
-            <a:off x="548640" y="1965960"/>
-            <a:ext cx="11064240" cy="4206240"/>
+            <a:off x="0" y="960120"/>
+            <a:ext cx="12191695" cy="548640"/>
           </a:xfrm>
           <a:prstGeom prst="rect">
             <a:avLst/>
           </a:prstGeom>
           <a:solidFill>
-            <a:srgbClr val="F0F4F8"/>
+            <a:srgbClr val="4E6178"/>
           </a:solidFill>
           <a:ln>
             <a:noFill/>
@@ -3896,14 +4616,92 @@
       </p:sp>
       <p:sp>
         <p:nvSpPr>
+          <p:cNvPr id="5" name="TextBox 4"/>
+          <p:cNvSpPr txBox="1"/>
+          <p:nvPr/>
+        </p:nvSpPr>
+        <p:spPr>
+          <a:xfrm>
+            <a:off x="457200" y="987552"/>
+            <a:ext cx="11277295" cy="502920"/>
+          </a:xfrm>
+          <a:prstGeom prst="rect">
+            <a:avLst/>
+          </a:prstGeom>
+          <a:noFill/>
+        </p:spPr>
+        <p:txBody>
+          <a:bodyPr wrap="square" lIns="45720" rIns="45720" anchor="ctr">
+            <a:spAutoFit/>
+          </a:bodyPr>
+          <a:lstStyle/>
+          <a:p>
+            <a:pPr algn="ctr">
+              <a:spcAft>
+                <a:spcPts val="945"/>
+              </a:spcAft>
+            </a:pPr>
+            <a:r>
+              <a:rPr sz="2100" b="0">
+                <a:solidFill>
+                  <a:srgbClr val="FFFFFF"/>
+                </a:solidFill>
+                <a:latin typeface="Calibri"/>
+              </a:rPr>
+              <a:t>Guion B: reclamo de triple repetición</a:t>
+            </a:r>
+          </a:p>
+        </p:txBody>
+      </p:sp>
+      <p:sp>
+        <p:nvSpPr>
+          <p:cNvPr id="6" name="TextBox 5"/>
+          <p:cNvSpPr txBox="1"/>
+          <p:nvPr/>
+        </p:nvSpPr>
+        <p:spPr>
+          <a:xfrm>
+            <a:off x="457200" y="6419088"/>
+            <a:ext cx="10180015" cy="365760"/>
+          </a:xfrm>
+          <a:prstGeom prst="rect">
+            <a:avLst/>
+          </a:prstGeom>
+          <a:noFill/>
+        </p:spPr>
+        <p:txBody>
+          <a:bodyPr wrap="square" lIns="45720" rIns="45720">
+            <a:spAutoFit/>
+          </a:bodyPr>
+          <a:lstStyle/>
+          <a:p>
+            <a:pPr>
+              <a:spcAft>
+                <a:spcPts val="540"/>
+              </a:spcAft>
+            </a:pPr>
+            <a:r>
+              <a:rPr sz="1200" b="0">
+                <a:solidFill>
+                  <a:srgbClr val="627D98"/>
+                </a:solidFill>
+                <a:latin typeface="Calibri"/>
+              </a:rPr>
+              <a:t>Fuente: Leyes del Ajedrez 2023 (Handbook E.I.01), art. 9.1, 9.2, 9.4 y 9.5</a:t>
+            </a:r>
+          </a:p>
+        </p:txBody>
+      </p:sp>
+      <p:sp>
+        <p:nvSpPr>
           <p:cNvPr id="7" name="TextBox 6"/>
           <p:cNvSpPr txBox="1"/>
           <p:nvPr/>
         </p:nvSpPr>
         <p:spPr>
           <a:xfrm>
-            <a:off x="914400" y="2240280"/>
-            <a:ext cx="10332720" cy="3749039"/>
+            <a:off x="10728655" y="6419088"/>
+            <a:ext cx="1097280" cy="365760"/>
           </a:xfrm>
           <a:prstGeom prst="rect">
             <a:avLst/>
@@ -3911,19 +4709,109 @@
           <a:noFill/>
         </p:spPr>
         <p:txBody>
-          <a:bodyPr wrap="square">
+          <a:bodyPr wrap="square" lIns="45720" rIns="45720">
             <a:spAutoFit/>
           </a:bodyPr>
           <a:lstStyle/>
           <a:p>
-            <a:r>
-              <a:rPr sz="2000" b="0">
-                <a:solidFill>
-                  <a:srgbClr val="334E68"/>
-                </a:solidFill>
-                <a:latin typeface="Calibri"/>
-              </a:rPr>
-              <a:t>Un jugador ofrece tablas mientras corre el reloj de su rival.</a:t>
+            <a:pPr algn="ctr">
+              <a:spcAft>
+                <a:spcPts val="540"/>
+              </a:spcAft>
+            </a:pPr>
+            <a:r>
+              <a:rPr sz="1200" b="0">
+                <a:solidFill>
+                  <a:srgbClr val="627D98"/>
+                </a:solidFill>
+                <a:latin typeface="Calibri"/>
+              </a:rPr>
+              <a:t>11</a:t>
+            </a:r>
+          </a:p>
+        </p:txBody>
+      </p:sp>
+      <p:sp>
+        <p:nvSpPr>
+          <p:cNvPr id="8" name="Rectangle 7"/>
+          <p:cNvSpPr/>
+          <p:nvPr/>
+        </p:nvSpPr>
+        <p:spPr>
+          <a:xfrm>
+            <a:off x="457200" y="1783080"/>
+            <a:ext cx="11277295" cy="4389120"/>
+          </a:xfrm>
+          <a:prstGeom prst="rect">
+            <a:avLst/>
+          </a:prstGeom>
+          <a:solidFill>
+            <a:srgbClr val="EEF7EE"/>
+          </a:solidFill>
+          <a:ln w="19050">
+            <a:solidFill>
+              <a:srgbClr val="15803D"/>
+            </a:solidFill>
+          </a:ln>
+          <a:effectLst/>
+        </p:spPr>
+        <p:style>
+          <a:lnRef idx="1">
+            <a:schemeClr val="accent1"/>
+          </a:lnRef>
+          <a:fillRef idx="3">
+            <a:schemeClr val="accent1"/>
+          </a:fillRef>
+          <a:effectRef idx="2">
+            <a:schemeClr val="accent1"/>
+          </a:effectRef>
+          <a:fontRef idx="minor">
+            <a:schemeClr val="lt1"/>
+          </a:fontRef>
+        </p:style>
+        <p:txBody>
+          <a:bodyPr rtlCol="0" anchor="ctr"/>
+          <a:lstStyle/>
+          <a:p>
+            <a:pPr algn="ctr"/>
+          </a:p>
+        </p:txBody>
+      </p:sp>
+      <p:sp>
+        <p:nvSpPr>
+          <p:cNvPr id="9" name="TextBox 8"/>
+          <p:cNvSpPr txBox="1"/>
+          <p:nvPr/>
+        </p:nvSpPr>
+        <p:spPr>
+          <a:xfrm>
+            <a:off x="822960" y="2011680"/>
+            <a:ext cx="10545775" cy="3931920"/>
+          </a:xfrm>
+          <a:prstGeom prst="rect">
+            <a:avLst/>
+          </a:prstGeom>
+          <a:noFill/>
+        </p:spPr>
+        <p:txBody>
+          <a:bodyPr wrap="square" lIns="45720" rIns="45720" anchor="ctr">
+            <a:spAutoFit/>
+          </a:bodyPr>
+          <a:lstStyle/>
+          <a:p>
+            <a:pPr>
+              <a:spcAft>
+                <a:spcPts val="1350"/>
+              </a:spcAft>
+            </a:pPr>
+            <a:r>
+              <a:rPr sz="3000" b="0">
+                <a:solidFill>
+                  <a:srgbClr val="102A43"/>
+                </a:solidFill>
+                <a:latin typeface="Calibri"/>
+              </a:rPr>
+              <a:t>Correcto si anotó la jugada sin hacerla y llamó al árbitro sin tocar ninguna pieza. Se verifica con las planillas; si el reclamo es correcto, son tablas de inmediato. Si no lo es, el reclamo cuenta como oferta de tablas y, en ritmo clásico, el rival recibe dos minutos.</a:t>
             </a:r>
           </a:p>
         </p:txBody>
@@ -3955,13 +4843,13 @@
         <p:spPr>
           <a:xfrm>
             <a:off x="0" y="0"/>
-            <a:ext cx="12191695" cy="6858000"/>
+            <a:ext cx="12191695" cy="960120"/>
           </a:xfrm>
           <a:prstGeom prst="rect">
             <a:avLst/>
           </a:prstGeom>
           <a:solidFill>
-            <a:srgbClr val="102A43"/>
+            <a:srgbClr val="3172AC"/>
           </a:solidFill>
           <a:ln>
             <a:noFill/>
@@ -3998,8 +4886,8 @@
         </p:nvSpPr>
         <p:spPr>
           <a:xfrm>
-            <a:off x="548640" y="548640"/>
-            <a:ext cx="11064240" cy="457200"/>
+            <a:off x="457200" y="109728"/>
+            <a:ext cx="11277295" cy="777240"/>
           </a:xfrm>
           <a:prstGeom prst="rect">
             <a:avLst/>
@@ -4007,33 +4895,82 @@
           <a:noFill/>
         </p:spPr>
         <p:txBody>
-          <a:bodyPr wrap="square">
+          <a:bodyPr wrap="square" lIns="45720" rIns="45720" anchor="ctr">
             <a:spAutoFit/>
           </a:bodyPr>
           <a:lstStyle/>
           <a:p>
-            <a:r>
-              <a:rPr sz="1400" b="1">
-                <a:solidFill>
-                  <a:srgbClr val="F0B429"/>
-                </a:solidFill>
-                <a:latin typeface="Calibri"/>
-              </a:rPr>
-              <a:t>CASO 3 · DECISIÓN</a:t>
-            </a:r>
-          </a:p>
-        </p:txBody>
-      </p:sp>
-      <p:sp>
-        <p:nvSpPr>
-          <p:cNvPr id="4" name="TextBox 3"/>
+            <a:pPr algn="ctr">
+              <a:spcAft>
+                <a:spcPts val="1530"/>
+              </a:spcAft>
+            </a:pPr>
+            <a:r>
+              <a:rPr sz="3400" b="1">
+                <a:solidFill>
+                  <a:srgbClr val="FFFFFF"/>
+                </a:solidFill>
+                <a:latin typeface="Calibri"/>
+              </a:rPr>
+              <a:t>Caso 3 · ¿Qué decide la persona árbitra?</a:t>
+            </a:r>
+          </a:p>
+        </p:txBody>
+      </p:sp>
+      <p:sp>
+        <p:nvSpPr>
+          <p:cNvPr id="4" name="Rectangle 3"/>
+          <p:cNvSpPr/>
+          <p:nvPr/>
+        </p:nvSpPr>
+        <p:spPr>
+          <a:xfrm>
+            <a:off x="0" y="960120"/>
+            <a:ext cx="12191695" cy="548640"/>
+          </a:xfrm>
+          <a:prstGeom prst="rect">
+            <a:avLst/>
+          </a:prstGeom>
+          <a:solidFill>
+            <a:srgbClr val="4E6178"/>
+          </a:solidFill>
+          <a:ln>
+            <a:noFill/>
+          </a:ln>
+          <a:effectLst/>
+        </p:spPr>
+        <p:style>
+          <a:lnRef idx="1">
+            <a:schemeClr val="accent1"/>
+          </a:lnRef>
+          <a:fillRef idx="3">
+            <a:schemeClr val="accent1"/>
+          </a:fillRef>
+          <a:effectRef idx="2">
+            <a:schemeClr val="accent1"/>
+          </a:effectRef>
+          <a:fontRef idx="minor">
+            <a:schemeClr val="lt1"/>
+          </a:fontRef>
+        </p:style>
+        <p:txBody>
+          <a:bodyPr rtlCol="0" anchor="ctr"/>
+          <a:lstStyle/>
+          <a:p>
+            <a:pPr algn="ctr"/>
+          </a:p>
+        </p:txBody>
+      </p:sp>
+      <p:sp>
+        <p:nvSpPr>
+          <p:cNvPr id="5" name="TextBox 4"/>
           <p:cNvSpPr txBox="1"/>
           <p:nvPr/>
         </p:nvSpPr>
         <p:spPr>
           <a:xfrm>
-            <a:off x="548640" y="1051560"/>
-            <a:ext cx="11064240" cy="822960"/>
+            <a:off x="457200" y="987552"/>
+            <a:ext cx="11277295" cy="502920"/>
           </a:xfrm>
           <a:prstGeom prst="rect">
             <a:avLst/>
@@ -4041,17 +4978,22 @@
           <a:noFill/>
         </p:spPr>
         <p:txBody>
-          <a:bodyPr wrap="square">
+          <a:bodyPr wrap="square" lIns="45720" rIns="45720" anchor="ctr">
             <a:spAutoFit/>
           </a:bodyPr>
           <a:lstStyle/>
           <a:p>
-            <a:r>
-              <a:rPr sz="2600" b="1">
+            <a:pPr algn="ctr">
+              <a:spcAft>
+                <a:spcPts val="945"/>
+              </a:spcAft>
+            </a:pPr>
+            <a:r>
+              <a:rPr sz="2100" b="0">
                 <a:solidFill>
                   <a:srgbClr val="FFFFFF"/>
                 </a:solidFill>
-                <a:latin typeface="Cambria"/>
+                <a:latin typeface="Calibri"/>
               </a:rPr>
               <a:t>Guion C: la oferta de tablas en el turno del rival</a:t>
             </a:r>
@@ -4060,14 +5002,14 @@
       </p:sp>
       <p:sp>
         <p:nvSpPr>
-          <p:cNvPr id="5" name="TextBox 4"/>
+          <p:cNvPr id="6" name="TextBox 5"/>
           <p:cNvSpPr txBox="1"/>
           <p:nvPr/>
         </p:nvSpPr>
         <p:spPr>
           <a:xfrm>
-            <a:off x="548640" y="2103120"/>
-            <a:ext cx="11064240" cy="3931920"/>
+            <a:off x="10728655" y="6419088"/>
+            <a:ext cx="1097280" cy="365760"/>
           </a:xfrm>
           <a:prstGeom prst="rect">
             <a:avLst/>
@@ -4075,33 +5017,82 @@
           <a:noFill/>
         </p:spPr>
         <p:txBody>
-          <a:bodyPr wrap="square">
+          <a:bodyPr wrap="square" lIns="45720" rIns="45720">
             <a:spAutoFit/>
           </a:bodyPr>
           <a:lstStyle/>
           <a:p>
-            <a:r>
-              <a:rPr sz="2000" b="0">
-                <a:solidFill>
-                  <a:srgbClr val="CADCFC"/>
-                </a:solidFill>
-                <a:latin typeface="Calibri"/>
-              </a:rPr>
-              <a:t>La oferta es válida, pero hacerla en el turno del rival es una molestia: se le recuerda el procedimiento correcto (jugada, oferta y reloj) y, si se repite, se sanciona según el art. 12.9.</a:t>
-            </a:r>
-          </a:p>
-        </p:txBody>
-      </p:sp>
-      <p:sp>
-        <p:nvSpPr>
-          <p:cNvPr id="6" name="TextBox 5"/>
+            <a:pPr algn="ctr">
+              <a:spcAft>
+                <a:spcPts val="540"/>
+              </a:spcAft>
+            </a:pPr>
+            <a:r>
+              <a:rPr sz="1200" b="0">
+                <a:solidFill>
+                  <a:srgbClr val="627D98"/>
+                </a:solidFill>
+                <a:latin typeface="Calibri"/>
+              </a:rPr>
+              <a:t>12</a:t>
+            </a:r>
+          </a:p>
+        </p:txBody>
+      </p:sp>
+      <p:sp>
+        <p:nvSpPr>
+          <p:cNvPr id="7" name="Rectangle 6"/>
+          <p:cNvSpPr/>
+          <p:nvPr/>
+        </p:nvSpPr>
+        <p:spPr>
+          <a:xfrm>
+            <a:off x="457200" y="1783080"/>
+            <a:ext cx="11277295" cy="4389120"/>
+          </a:xfrm>
+          <a:prstGeom prst="rect">
+            <a:avLst/>
+          </a:prstGeom>
+          <a:solidFill>
+            <a:srgbClr val="F0F4F8"/>
+          </a:solidFill>
+          <a:ln>
+            <a:noFill/>
+          </a:ln>
+          <a:effectLst/>
+        </p:spPr>
+        <p:style>
+          <a:lnRef idx="1">
+            <a:schemeClr val="accent1"/>
+          </a:lnRef>
+          <a:fillRef idx="3">
+            <a:schemeClr val="accent1"/>
+          </a:fillRef>
+          <a:effectRef idx="2">
+            <a:schemeClr val="accent1"/>
+          </a:effectRef>
+          <a:fontRef idx="minor">
+            <a:schemeClr val="lt1"/>
+          </a:fontRef>
+        </p:style>
+        <p:txBody>
+          <a:bodyPr rtlCol="0" anchor="ctr"/>
+          <a:lstStyle/>
+          <a:p>
+            <a:pPr algn="ctr"/>
+          </a:p>
+        </p:txBody>
+      </p:sp>
+      <p:sp>
+        <p:nvSpPr>
+          <p:cNvPr id="8" name="TextBox 7"/>
           <p:cNvSpPr txBox="1"/>
           <p:nvPr/>
         </p:nvSpPr>
         <p:spPr>
           <a:xfrm>
-            <a:off x="548640" y="6263640"/>
-            <a:ext cx="11064240" cy="365760"/>
+            <a:off x="822960" y="2011680"/>
+            <a:ext cx="10545775" cy="3931920"/>
           </a:xfrm>
           <a:prstGeom prst="rect">
             <a:avLst/>
@@ -4109,19 +5100,24 @@
           <a:noFill/>
         </p:spPr>
         <p:txBody>
-          <a:bodyPr wrap="square">
+          <a:bodyPr wrap="square" lIns="45720" rIns="45720" anchor="ctr">
             <a:spAutoFit/>
           </a:bodyPr>
           <a:lstStyle/>
           <a:p>
-            <a:r>
-              <a:rPr sz="1100" b="0">
-                <a:solidFill>
-                  <a:srgbClr val="9FB3C8"/>
-                </a:solidFill>
-                <a:latin typeface="Calibri"/>
-              </a:rPr>
-              <a:t>Fuente: Leyes del Ajedrez 2023 (Handbook E.I.01), art. 9.1.2 y 11.5</a:t>
+            <a:pPr>
+              <a:spcAft>
+                <a:spcPts val="1530"/>
+              </a:spcAft>
+            </a:pPr>
+            <a:r>
+              <a:rPr sz="3400" b="0">
+                <a:solidFill>
+                  <a:srgbClr val="102A43"/>
+                </a:solidFill>
+                <a:latin typeface="Calibri"/>
+              </a:rPr>
+              <a:t>Un jugador ofrece tablas mientras corre el reloj de su rival.</a:t>
             </a:r>
           </a:p>
         </p:txBody>
@@ -4146,20 +5142,20 @@
       <p:grpSpPr/>
       <p:sp>
         <p:nvSpPr>
-          <p:cNvPr id="2" name="Oval 1"/>
+          <p:cNvPr id="2" name="Rectangle 1"/>
           <p:cNvSpPr/>
           <p:nvPr/>
         </p:nvSpPr>
         <p:spPr>
           <a:xfrm>
-            <a:off x="548640" y="502920"/>
-            <a:ext cx="502920" cy="502920"/>
-          </a:xfrm>
-          <a:prstGeom prst="ellipse">
+            <a:off x="0" y="0"/>
+            <a:ext cx="12191695" cy="960120"/>
+          </a:xfrm>
+          <a:prstGeom prst="rect">
             <a:avLst/>
           </a:prstGeom>
           <a:solidFill>
-            <a:srgbClr val="DE911D"/>
+            <a:srgbClr val="3172AC"/>
           </a:solidFill>
           <a:ln>
             <a:noFill/>
@@ -4196,8 +5192,8 @@
         </p:nvSpPr>
         <p:spPr>
           <a:xfrm>
-            <a:off x="548640" y="502920"/>
-            <a:ext cx="502920" cy="502920"/>
+            <a:off x="457200" y="109728"/>
+            <a:ext cx="11277295" cy="777240"/>
           </a:xfrm>
           <a:prstGeom prst="rect">
             <a:avLst/>
@@ -4205,108 +5201,44 @@
           <a:noFill/>
         </p:spPr>
         <p:txBody>
-          <a:bodyPr wrap="square">
+          <a:bodyPr wrap="square" lIns="45720" rIns="45720" anchor="ctr">
             <a:spAutoFit/>
           </a:bodyPr>
           <a:lstStyle/>
           <a:p>
-            <a:pPr algn="ctr"/>
-            <a:r>
-              <a:rPr sz="2000" b="0">
-                <a:solidFill>
-                  <a:srgbClr val="0A1F33"/>
-                </a:solidFill>
-                <a:latin typeface="Calibri"/>
-              </a:rPr>
-              <a:t>?</a:t>
-            </a:r>
-          </a:p>
-        </p:txBody>
-      </p:sp>
-      <p:sp>
-        <p:nvSpPr>
-          <p:cNvPr id="4" name="TextBox 3"/>
-          <p:cNvSpPr txBox="1"/>
-          <p:nvPr/>
-        </p:nvSpPr>
-        <p:spPr>
-          <a:xfrm>
-            <a:off x="1234440" y="530352"/>
-            <a:ext cx="9144000" cy="457200"/>
-          </a:xfrm>
-          <a:prstGeom prst="rect">
-            <a:avLst/>
-          </a:prstGeom>
-          <a:noFill/>
-        </p:spPr>
-        <p:txBody>
-          <a:bodyPr wrap="square">
-            <a:spAutoFit/>
-          </a:bodyPr>
-          <a:lstStyle/>
-          <a:p>
-            <a:r>
-              <a:rPr sz="1400" b="1">
-                <a:solidFill>
-                  <a:srgbClr val="DE911D"/>
-                </a:solidFill>
-                <a:latin typeface="Calibri"/>
-              </a:rPr>
-              <a:t>CASO 4 · ¿QUÉ DECIDE LA PERSONA ÁRBITRA?</a:t>
-            </a:r>
-          </a:p>
-        </p:txBody>
-      </p:sp>
-      <p:sp>
-        <p:nvSpPr>
-          <p:cNvPr id="5" name="TextBox 4"/>
-          <p:cNvSpPr txBox="1"/>
-          <p:nvPr/>
-        </p:nvSpPr>
-        <p:spPr>
-          <a:xfrm>
-            <a:off x="548640" y="1051560"/>
-            <a:ext cx="11064240" cy="822960"/>
-          </a:xfrm>
-          <a:prstGeom prst="rect">
-            <a:avLst/>
-          </a:prstGeom>
-          <a:noFill/>
-        </p:spPr>
-        <p:txBody>
-          <a:bodyPr wrap="square">
-            <a:spAutoFit/>
-          </a:bodyPr>
-          <a:lstStyle/>
-          <a:p>
-            <a:r>
-              <a:rPr sz="2600" b="1">
-                <a:solidFill>
-                  <a:srgbClr val="0A1F33"/>
-                </a:solidFill>
-                <a:latin typeface="Cambria"/>
-              </a:rPr>
-              <a:t>Guion D: el público que ayuda</a:t>
-            </a:r>
-          </a:p>
-        </p:txBody>
-      </p:sp>
-      <p:sp>
-        <p:nvSpPr>
-          <p:cNvPr id="6" name="Rectangle 5"/>
+            <a:pPr algn="ctr">
+              <a:spcAft>
+                <a:spcPts val="1530"/>
+              </a:spcAft>
+            </a:pPr>
+            <a:r>
+              <a:rPr sz="3400" b="1">
+                <a:solidFill>
+                  <a:srgbClr val="FFFFFF"/>
+                </a:solidFill>
+                <a:latin typeface="Calibri"/>
+              </a:rPr>
+              <a:t>Caso 3 · Decisión</a:t>
+            </a:r>
+          </a:p>
+        </p:txBody>
+      </p:sp>
+      <p:sp>
+        <p:nvSpPr>
+          <p:cNvPr id="4" name="Rectangle 3"/>
           <p:cNvSpPr/>
           <p:nvPr/>
         </p:nvSpPr>
         <p:spPr>
           <a:xfrm>
-            <a:off x="548640" y="1965960"/>
-            <a:ext cx="11064240" cy="4206240"/>
+            <a:off x="0" y="960120"/>
+            <a:ext cx="12191695" cy="548640"/>
           </a:xfrm>
           <a:prstGeom prst="rect">
             <a:avLst/>
           </a:prstGeom>
           <a:solidFill>
-            <a:srgbClr val="F0F4F8"/>
+            <a:srgbClr val="4E6178"/>
           </a:solidFill>
           <a:ln>
             <a:noFill/>
@@ -4337,14 +5269,92 @@
       </p:sp>
       <p:sp>
         <p:nvSpPr>
+          <p:cNvPr id="5" name="TextBox 4"/>
+          <p:cNvSpPr txBox="1"/>
+          <p:nvPr/>
+        </p:nvSpPr>
+        <p:spPr>
+          <a:xfrm>
+            <a:off x="457200" y="987552"/>
+            <a:ext cx="11277295" cy="502920"/>
+          </a:xfrm>
+          <a:prstGeom prst="rect">
+            <a:avLst/>
+          </a:prstGeom>
+          <a:noFill/>
+        </p:spPr>
+        <p:txBody>
+          <a:bodyPr wrap="square" lIns="45720" rIns="45720" anchor="ctr">
+            <a:spAutoFit/>
+          </a:bodyPr>
+          <a:lstStyle/>
+          <a:p>
+            <a:pPr algn="ctr">
+              <a:spcAft>
+                <a:spcPts val="945"/>
+              </a:spcAft>
+            </a:pPr>
+            <a:r>
+              <a:rPr sz="2100" b="0">
+                <a:solidFill>
+                  <a:srgbClr val="FFFFFF"/>
+                </a:solidFill>
+                <a:latin typeface="Calibri"/>
+              </a:rPr>
+              <a:t>Guion C: la oferta de tablas en el turno del rival</a:t>
+            </a:r>
+          </a:p>
+        </p:txBody>
+      </p:sp>
+      <p:sp>
+        <p:nvSpPr>
+          <p:cNvPr id="6" name="TextBox 5"/>
+          <p:cNvSpPr txBox="1"/>
+          <p:nvPr/>
+        </p:nvSpPr>
+        <p:spPr>
+          <a:xfrm>
+            <a:off x="457200" y="6419088"/>
+            <a:ext cx="10180015" cy="365760"/>
+          </a:xfrm>
+          <a:prstGeom prst="rect">
+            <a:avLst/>
+          </a:prstGeom>
+          <a:noFill/>
+        </p:spPr>
+        <p:txBody>
+          <a:bodyPr wrap="square" lIns="45720" rIns="45720">
+            <a:spAutoFit/>
+          </a:bodyPr>
+          <a:lstStyle/>
+          <a:p>
+            <a:pPr>
+              <a:spcAft>
+                <a:spcPts val="540"/>
+              </a:spcAft>
+            </a:pPr>
+            <a:r>
+              <a:rPr sz="1200" b="0">
+                <a:solidFill>
+                  <a:srgbClr val="627D98"/>
+                </a:solidFill>
+                <a:latin typeface="Calibri"/>
+              </a:rPr>
+              <a:t>Fuente: Leyes del Ajedrez 2023 (Handbook E.I.01), art. 9.1.2 y 11.5</a:t>
+            </a:r>
+          </a:p>
+        </p:txBody>
+      </p:sp>
+      <p:sp>
+        <p:nvSpPr>
           <p:cNvPr id="7" name="TextBox 6"/>
           <p:cNvSpPr txBox="1"/>
           <p:nvPr/>
         </p:nvSpPr>
         <p:spPr>
           <a:xfrm>
-            <a:off x="914400" y="2240280"/>
-            <a:ext cx="10332720" cy="3749039"/>
+            <a:off x="10728655" y="6419088"/>
+            <a:ext cx="1097280" cy="365760"/>
           </a:xfrm>
           <a:prstGeom prst="rect">
             <a:avLst/>
@@ -4352,19 +5362,109 @@
           <a:noFill/>
         </p:spPr>
         <p:txBody>
-          <a:bodyPr wrap="square">
+          <a:bodyPr wrap="square" lIns="45720" rIns="45720">
             <a:spAutoFit/>
           </a:bodyPr>
           <a:lstStyle/>
           <a:p>
-            <a:r>
-              <a:rPr sz="2000" b="0">
-                <a:solidFill>
-                  <a:srgbClr val="334E68"/>
-                </a:solidFill>
-                <a:latin typeface="Calibri"/>
-              </a:rPr>
-              <a:t>Un docente acompañante comenta en voz baja con su estudiante una partida en curso.</a:t>
+            <a:pPr algn="ctr">
+              <a:spcAft>
+                <a:spcPts val="540"/>
+              </a:spcAft>
+            </a:pPr>
+            <a:r>
+              <a:rPr sz="1200" b="0">
+                <a:solidFill>
+                  <a:srgbClr val="627D98"/>
+                </a:solidFill>
+                <a:latin typeface="Calibri"/>
+              </a:rPr>
+              <a:t>13</a:t>
+            </a:r>
+          </a:p>
+        </p:txBody>
+      </p:sp>
+      <p:sp>
+        <p:nvSpPr>
+          <p:cNvPr id="8" name="Rectangle 7"/>
+          <p:cNvSpPr/>
+          <p:nvPr/>
+        </p:nvSpPr>
+        <p:spPr>
+          <a:xfrm>
+            <a:off x="457200" y="1783080"/>
+            <a:ext cx="11277295" cy="4389120"/>
+          </a:xfrm>
+          <a:prstGeom prst="rect">
+            <a:avLst/>
+          </a:prstGeom>
+          <a:solidFill>
+            <a:srgbClr val="EEF7EE"/>
+          </a:solidFill>
+          <a:ln w="19050">
+            <a:solidFill>
+              <a:srgbClr val="15803D"/>
+            </a:solidFill>
+          </a:ln>
+          <a:effectLst/>
+        </p:spPr>
+        <p:style>
+          <a:lnRef idx="1">
+            <a:schemeClr val="accent1"/>
+          </a:lnRef>
+          <a:fillRef idx="3">
+            <a:schemeClr val="accent1"/>
+          </a:fillRef>
+          <a:effectRef idx="2">
+            <a:schemeClr val="accent1"/>
+          </a:effectRef>
+          <a:fontRef idx="minor">
+            <a:schemeClr val="lt1"/>
+          </a:fontRef>
+        </p:style>
+        <p:txBody>
+          <a:bodyPr rtlCol="0" anchor="ctr"/>
+          <a:lstStyle/>
+          <a:p>
+            <a:pPr algn="ctr"/>
+          </a:p>
+        </p:txBody>
+      </p:sp>
+      <p:sp>
+        <p:nvSpPr>
+          <p:cNvPr id="9" name="TextBox 8"/>
+          <p:cNvSpPr txBox="1"/>
+          <p:nvPr/>
+        </p:nvSpPr>
+        <p:spPr>
+          <a:xfrm>
+            <a:off x="822960" y="2011680"/>
+            <a:ext cx="10545775" cy="3931920"/>
+          </a:xfrm>
+          <a:prstGeom prst="rect">
+            <a:avLst/>
+          </a:prstGeom>
+          <a:noFill/>
+        </p:spPr>
+        <p:txBody>
+          <a:bodyPr wrap="square" lIns="45720" rIns="45720" anchor="ctr">
+            <a:spAutoFit/>
+          </a:bodyPr>
+          <a:lstStyle/>
+          <a:p>
+            <a:pPr>
+              <a:spcAft>
+                <a:spcPts val="1350"/>
+              </a:spcAft>
+            </a:pPr>
+            <a:r>
+              <a:rPr sz="3000" b="0">
+                <a:solidFill>
+                  <a:srgbClr val="102A43"/>
+                </a:solidFill>
+                <a:latin typeface="Calibri"/>
+              </a:rPr>
+              <a:t>La oferta es válida, pero hacerla en el turno del rival es una molestia: se le recuerda el procedimiento correcto (jugada, oferta y reloj) y, si se repite, se sanciona según el art. 12.9.</a:t>
             </a:r>
           </a:p>
         </p:txBody>
@@ -4396,13 +5496,13 @@
         <p:spPr>
           <a:xfrm>
             <a:off x="0" y="0"/>
-            <a:ext cx="12191695" cy="6858000"/>
+            <a:ext cx="12191695" cy="960120"/>
           </a:xfrm>
           <a:prstGeom prst="rect">
             <a:avLst/>
           </a:prstGeom>
           <a:solidFill>
-            <a:srgbClr val="102A43"/>
+            <a:srgbClr val="3172AC"/>
           </a:solidFill>
           <a:ln>
             <a:noFill/>
@@ -4439,8 +5539,8 @@
         </p:nvSpPr>
         <p:spPr>
           <a:xfrm>
-            <a:off x="548640" y="548640"/>
-            <a:ext cx="11064240" cy="457200"/>
+            <a:off x="457200" y="109728"/>
+            <a:ext cx="11277295" cy="777240"/>
           </a:xfrm>
           <a:prstGeom prst="rect">
             <a:avLst/>
@@ -4448,33 +5548,82 @@
           <a:noFill/>
         </p:spPr>
         <p:txBody>
-          <a:bodyPr wrap="square">
+          <a:bodyPr wrap="square" lIns="45720" rIns="45720" anchor="ctr">
             <a:spAutoFit/>
           </a:bodyPr>
           <a:lstStyle/>
           <a:p>
-            <a:r>
-              <a:rPr sz="1400" b="1">
-                <a:solidFill>
-                  <a:srgbClr val="F0B429"/>
-                </a:solidFill>
-                <a:latin typeface="Calibri"/>
-              </a:rPr>
-              <a:t>CASO 4 · DECISIÓN</a:t>
-            </a:r>
-          </a:p>
-        </p:txBody>
-      </p:sp>
-      <p:sp>
-        <p:nvSpPr>
-          <p:cNvPr id="4" name="TextBox 3"/>
+            <a:pPr algn="ctr">
+              <a:spcAft>
+                <a:spcPts val="1530"/>
+              </a:spcAft>
+            </a:pPr>
+            <a:r>
+              <a:rPr sz="3400" b="1">
+                <a:solidFill>
+                  <a:srgbClr val="FFFFFF"/>
+                </a:solidFill>
+                <a:latin typeface="Calibri"/>
+              </a:rPr>
+              <a:t>Caso 4 · ¿Qué decide la persona árbitra?</a:t>
+            </a:r>
+          </a:p>
+        </p:txBody>
+      </p:sp>
+      <p:sp>
+        <p:nvSpPr>
+          <p:cNvPr id="4" name="Rectangle 3"/>
+          <p:cNvSpPr/>
+          <p:nvPr/>
+        </p:nvSpPr>
+        <p:spPr>
+          <a:xfrm>
+            <a:off x="0" y="960120"/>
+            <a:ext cx="12191695" cy="548640"/>
+          </a:xfrm>
+          <a:prstGeom prst="rect">
+            <a:avLst/>
+          </a:prstGeom>
+          <a:solidFill>
+            <a:srgbClr val="4E6178"/>
+          </a:solidFill>
+          <a:ln>
+            <a:noFill/>
+          </a:ln>
+          <a:effectLst/>
+        </p:spPr>
+        <p:style>
+          <a:lnRef idx="1">
+            <a:schemeClr val="accent1"/>
+          </a:lnRef>
+          <a:fillRef idx="3">
+            <a:schemeClr val="accent1"/>
+          </a:fillRef>
+          <a:effectRef idx="2">
+            <a:schemeClr val="accent1"/>
+          </a:effectRef>
+          <a:fontRef idx="minor">
+            <a:schemeClr val="lt1"/>
+          </a:fontRef>
+        </p:style>
+        <p:txBody>
+          <a:bodyPr rtlCol="0" anchor="ctr"/>
+          <a:lstStyle/>
+          <a:p>
+            <a:pPr algn="ctr"/>
+          </a:p>
+        </p:txBody>
+      </p:sp>
+      <p:sp>
+        <p:nvSpPr>
+          <p:cNvPr id="5" name="TextBox 4"/>
           <p:cNvSpPr txBox="1"/>
           <p:nvPr/>
         </p:nvSpPr>
         <p:spPr>
           <a:xfrm>
-            <a:off x="548640" y="1051560"/>
-            <a:ext cx="11064240" cy="822960"/>
+            <a:off x="457200" y="987552"/>
+            <a:ext cx="11277295" cy="502920"/>
           </a:xfrm>
           <a:prstGeom prst="rect">
             <a:avLst/>
@@ -4482,17 +5631,22 @@
           <a:noFill/>
         </p:spPr>
         <p:txBody>
-          <a:bodyPr wrap="square">
+          <a:bodyPr wrap="square" lIns="45720" rIns="45720" anchor="ctr">
             <a:spAutoFit/>
           </a:bodyPr>
           <a:lstStyle/>
           <a:p>
-            <a:r>
-              <a:rPr sz="2600" b="1">
+            <a:pPr algn="ctr">
+              <a:spcAft>
+                <a:spcPts val="945"/>
+              </a:spcAft>
+            </a:pPr>
+            <a:r>
+              <a:rPr sz="2100" b="0">
                 <a:solidFill>
                   <a:srgbClr val="FFFFFF"/>
                 </a:solidFill>
-                <a:latin typeface="Cambria"/>
+                <a:latin typeface="Calibri"/>
               </a:rPr>
               <a:t>Guion D: el público que ayuda</a:t>
             </a:r>
@@ -4501,14 +5655,14 @@
       </p:sp>
       <p:sp>
         <p:nvSpPr>
-          <p:cNvPr id="5" name="TextBox 4"/>
+          <p:cNvPr id="6" name="TextBox 5"/>
           <p:cNvSpPr txBox="1"/>
           <p:nvPr/>
         </p:nvSpPr>
         <p:spPr>
           <a:xfrm>
-            <a:off x="548640" y="2103120"/>
-            <a:ext cx="11064240" cy="3931920"/>
+            <a:off x="10728655" y="6419088"/>
+            <a:ext cx="1097280" cy="365760"/>
           </a:xfrm>
           <a:prstGeom prst="rect">
             <a:avLst/>
@@ -4516,33 +5670,82 @@
           <a:noFill/>
         </p:spPr>
         <p:txBody>
-          <a:bodyPr wrap="square">
+          <a:bodyPr wrap="square" lIns="45720" rIns="45720">
             <a:spAutoFit/>
           </a:bodyPr>
           <a:lstStyle/>
           <a:p>
-            <a:r>
-              <a:rPr sz="2000" b="0">
-                <a:solidFill>
-                  <a:srgbClr val="CADCFC"/>
-                </a:solidFill>
-                <a:latin typeface="Calibri"/>
-              </a:rPr>
-              <a:t>Se retira al docente de la zona de juego; si hubo ayuda, se sanciona al estudiante según el art. 12.9. Se registra la incidencia.</a:t>
-            </a:r>
-          </a:p>
-        </p:txBody>
-      </p:sp>
-      <p:sp>
-        <p:nvSpPr>
-          <p:cNvPr id="6" name="TextBox 5"/>
+            <a:pPr algn="ctr">
+              <a:spcAft>
+                <a:spcPts val="540"/>
+              </a:spcAft>
+            </a:pPr>
+            <a:r>
+              <a:rPr sz="1200" b="0">
+                <a:solidFill>
+                  <a:srgbClr val="627D98"/>
+                </a:solidFill>
+                <a:latin typeface="Calibri"/>
+              </a:rPr>
+              <a:t>14</a:t>
+            </a:r>
+          </a:p>
+        </p:txBody>
+      </p:sp>
+      <p:sp>
+        <p:nvSpPr>
+          <p:cNvPr id="7" name="Rectangle 6"/>
+          <p:cNvSpPr/>
+          <p:nvPr/>
+        </p:nvSpPr>
+        <p:spPr>
+          <a:xfrm>
+            <a:off x="457200" y="1783080"/>
+            <a:ext cx="11277295" cy="4389120"/>
+          </a:xfrm>
+          <a:prstGeom prst="rect">
+            <a:avLst/>
+          </a:prstGeom>
+          <a:solidFill>
+            <a:srgbClr val="F0F4F8"/>
+          </a:solidFill>
+          <a:ln>
+            <a:noFill/>
+          </a:ln>
+          <a:effectLst/>
+        </p:spPr>
+        <p:style>
+          <a:lnRef idx="1">
+            <a:schemeClr val="accent1"/>
+          </a:lnRef>
+          <a:fillRef idx="3">
+            <a:schemeClr val="accent1"/>
+          </a:fillRef>
+          <a:effectRef idx="2">
+            <a:schemeClr val="accent1"/>
+          </a:effectRef>
+          <a:fontRef idx="minor">
+            <a:schemeClr val="lt1"/>
+          </a:fontRef>
+        </p:style>
+        <p:txBody>
+          <a:bodyPr rtlCol="0" anchor="ctr"/>
+          <a:lstStyle/>
+          <a:p>
+            <a:pPr algn="ctr"/>
+          </a:p>
+        </p:txBody>
+      </p:sp>
+      <p:sp>
+        <p:nvSpPr>
+          <p:cNvPr id="8" name="TextBox 7"/>
           <p:cNvSpPr txBox="1"/>
           <p:nvPr/>
         </p:nvSpPr>
         <p:spPr>
           <a:xfrm>
-            <a:off x="548640" y="6263640"/>
-            <a:ext cx="11064240" cy="365760"/>
+            <a:off x="822960" y="2011680"/>
+            <a:ext cx="10545775" cy="3931920"/>
           </a:xfrm>
           <a:prstGeom prst="rect">
             <a:avLst/>
@@ -4550,19 +5753,24 @@
           <a:noFill/>
         </p:spPr>
         <p:txBody>
-          <a:bodyPr wrap="square">
+          <a:bodyPr wrap="square" lIns="45720" rIns="45720" anchor="ctr">
             <a:spAutoFit/>
           </a:bodyPr>
           <a:lstStyle/>
           <a:p>
-            <a:r>
-              <a:rPr sz="1100" b="0">
-                <a:solidFill>
-                  <a:srgbClr val="9FB3C8"/>
-                </a:solidFill>
-                <a:latin typeface="Calibri"/>
-              </a:rPr>
-              <a:t>Fuente: Leyes del Ajedrez 2023 (Handbook E.I.01), art. 11.3.1 y 12.7</a:t>
+            <a:pPr>
+              <a:spcAft>
+                <a:spcPts val="1530"/>
+              </a:spcAft>
+            </a:pPr>
+            <a:r>
+              <a:rPr sz="3400" b="0">
+                <a:solidFill>
+                  <a:srgbClr val="102A43"/>
+                </a:solidFill>
+                <a:latin typeface="Calibri"/>
+              </a:rPr>
+              <a:t>Un docente acompañante comenta en voz baja con su estudiante una partida en curso.</a:t>
             </a:r>
           </a:p>
         </p:txBody>
@@ -4594,13 +5802,13 @@
         <p:spPr>
           <a:xfrm>
             <a:off x="0" y="0"/>
-            <a:ext cx="12191695" cy="6858000"/>
+            <a:ext cx="12191695" cy="960120"/>
           </a:xfrm>
           <a:prstGeom prst="rect">
             <a:avLst/>
           </a:prstGeom>
           <a:solidFill>
-            <a:srgbClr val="102A43"/>
+            <a:srgbClr val="3172AC"/>
           </a:solidFill>
           <a:ln>
             <a:noFill/>
@@ -4631,20 +5839,59 @@
       </p:sp>
       <p:sp>
         <p:nvSpPr>
-          <p:cNvPr id="3" name="Oval 2"/>
+          <p:cNvPr id="3" name="TextBox 2"/>
+          <p:cNvSpPr txBox="1"/>
+          <p:nvPr/>
+        </p:nvSpPr>
+        <p:spPr>
+          <a:xfrm>
+            <a:off x="457200" y="109728"/>
+            <a:ext cx="11277295" cy="777240"/>
+          </a:xfrm>
+          <a:prstGeom prst="rect">
+            <a:avLst/>
+          </a:prstGeom>
+          <a:noFill/>
+        </p:spPr>
+        <p:txBody>
+          <a:bodyPr wrap="square" lIns="45720" rIns="45720" anchor="ctr">
+            <a:spAutoFit/>
+          </a:bodyPr>
+          <a:lstStyle/>
+          <a:p>
+            <a:pPr algn="ctr">
+              <a:spcAft>
+                <a:spcPts val="1530"/>
+              </a:spcAft>
+            </a:pPr>
+            <a:r>
+              <a:rPr sz="3400" b="1">
+                <a:solidFill>
+                  <a:srgbClr val="FFFFFF"/>
+                </a:solidFill>
+                <a:latin typeface="Calibri"/>
+              </a:rPr>
+              <a:t>Caso 4 · Decisión</a:t>
+            </a:r>
+          </a:p>
+        </p:txBody>
+      </p:sp>
+      <p:sp>
+        <p:nvSpPr>
+          <p:cNvPr id="4" name="Rectangle 3"/>
           <p:cNvSpPr/>
           <p:nvPr/>
         </p:nvSpPr>
         <p:spPr>
           <a:xfrm>
-            <a:off x="-1280160" y="-1463040"/>
-            <a:ext cx="4114800" cy="4114800"/>
-          </a:xfrm>
-          <a:prstGeom prst="ellipse">
+            <a:off x="0" y="960120"/>
+            <a:ext cx="12191695" cy="548640"/>
+          </a:xfrm>
+          <a:prstGeom prst="rect">
             <a:avLst/>
           </a:prstGeom>
           <a:solidFill>
-            <a:srgbClr val="0A1F33"/>
+            <a:srgbClr val="4E6178"/>
           </a:solidFill>
           <a:ln>
             <a:noFill/>
@@ -4675,23 +5922,142 @@
       </p:sp>
       <p:sp>
         <p:nvSpPr>
-          <p:cNvPr id="4" name="Oval 3"/>
+          <p:cNvPr id="5" name="TextBox 4"/>
+          <p:cNvSpPr txBox="1"/>
+          <p:nvPr/>
+        </p:nvSpPr>
+        <p:spPr>
+          <a:xfrm>
+            <a:off x="457200" y="987552"/>
+            <a:ext cx="11277295" cy="502920"/>
+          </a:xfrm>
+          <a:prstGeom prst="rect">
+            <a:avLst/>
+          </a:prstGeom>
+          <a:noFill/>
+        </p:spPr>
+        <p:txBody>
+          <a:bodyPr wrap="square" lIns="45720" rIns="45720" anchor="ctr">
+            <a:spAutoFit/>
+          </a:bodyPr>
+          <a:lstStyle/>
+          <a:p>
+            <a:pPr algn="ctr">
+              <a:spcAft>
+                <a:spcPts val="945"/>
+              </a:spcAft>
+            </a:pPr>
+            <a:r>
+              <a:rPr sz="2100" b="0">
+                <a:solidFill>
+                  <a:srgbClr val="FFFFFF"/>
+                </a:solidFill>
+                <a:latin typeface="Calibri"/>
+              </a:rPr>
+              <a:t>Guion D: el público que ayuda</a:t>
+            </a:r>
+          </a:p>
+        </p:txBody>
+      </p:sp>
+      <p:sp>
+        <p:nvSpPr>
+          <p:cNvPr id="6" name="TextBox 5"/>
+          <p:cNvSpPr txBox="1"/>
+          <p:nvPr/>
+        </p:nvSpPr>
+        <p:spPr>
+          <a:xfrm>
+            <a:off x="457200" y="6419088"/>
+            <a:ext cx="10180015" cy="365760"/>
+          </a:xfrm>
+          <a:prstGeom prst="rect">
+            <a:avLst/>
+          </a:prstGeom>
+          <a:noFill/>
+        </p:spPr>
+        <p:txBody>
+          <a:bodyPr wrap="square" lIns="45720" rIns="45720">
+            <a:spAutoFit/>
+          </a:bodyPr>
+          <a:lstStyle/>
+          <a:p>
+            <a:pPr>
+              <a:spcAft>
+                <a:spcPts val="540"/>
+              </a:spcAft>
+            </a:pPr>
+            <a:r>
+              <a:rPr sz="1200" b="0">
+                <a:solidFill>
+                  <a:srgbClr val="627D98"/>
+                </a:solidFill>
+                <a:latin typeface="Calibri"/>
+              </a:rPr>
+              <a:t>Fuente: Leyes del Ajedrez 2023 (Handbook E.I.01), art. 11.3.1 y 12.7</a:t>
+            </a:r>
+          </a:p>
+        </p:txBody>
+      </p:sp>
+      <p:sp>
+        <p:nvSpPr>
+          <p:cNvPr id="7" name="TextBox 6"/>
+          <p:cNvSpPr txBox="1"/>
+          <p:nvPr/>
+        </p:nvSpPr>
+        <p:spPr>
+          <a:xfrm>
+            <a:off x="10728655" y="6419088"/>
+            <a:ext cx="1097280" cy="365760"/>
+          </a:xfrm>
+          <a:prstGeom prst="rect">
+            <a:avLst/>
+          </a:prstGeom>
+          <a:noFill/>
+        </p:spPr>
+        <p:txBody>
+          <a:bodyPr wrap="square" lIns="45720" rIns="45720">
+            <a:spAutoFit/>
+          </a:bodyPr>
+          <a:lstStyle/>
+          <a:p>
+            <a:pPr algn="ctr">
+              <a:spcAft>
+                <a:spcPts val="540"/>
+              </a:spcAft>
+            </a:pPr>
+            <a:r>
+              <a:rPr sz="1200" b="0">
+                <a:solidFill>
+                  <a:srgbClr val="627D98"/>
+                </a:solidFill>
+                <a:latin typeface="Calibri"/>
+              </a:rPr>
+              <a:t>15</a:t>
+            </a:r>
+          </a:p>
+        </p:txBody>
+      </p:sp>
+      <p:sp>
+        <p:nvSpPr>
+          <p:cNvPr id="8" name="Rectangle 7"/>
           <p:cNvSpPr/>
           <p:nvPr/>
         </p:nvSpPr>
         <p:spPr>
           <a:xfrm>
-            <a:off x="5175504" y="822960"/>
-            <a:ext cx="1828800" cy="1828800"/>
-          </a:xfrm>
-          <a:prstGeom prst="ellipse">
+            <a:off x="457200" y="1783080"/>
+            <a:ext cx="11277295" cy="4389120"/>
+          </a:xfrm>
+          <a:prstGeom prst="rect">
             <a:avLst/>
           </a:prstGeom>
           <a:solidFill>
-            <a:srgbClr val="DE911D"/>
+            <a:srgbClr val="EEF7EE"/>
           </a:solidFill>
-          <a:ln>
-            <a:noFill/>
+          <a:ln w="19050">
+            <a:solidFill>
+              <a:srgbClr val="15803D"/>
+            </a:solidFill>
           </a:ln>
           <a:effectLst/>
         </p:spPr>
@@ -4719,14 +6085,14 @@
       </p:sp>
       <p:sp>
         <p:nvSpPr>
-          <p:cNvPr id="5" name="TextBox 4"/>
+          <p:cNvPr id="9" name="TextBox 8"/>
           <p:cNvSpPr txBox="1"/>
           <p:nvPr/>
         </p:nvSpPr>
         <p:spPr>
           <a:xfrm>
-            <a:off x="5175504" y="822960"/>
-            <a:ext cx="1828800" cy="1828800"/>
+            <a:off x="822960" y="2011680"/>
+            <a:ext cx="10545775" cy="3931920"/>
           </a:xfrm>
           <a:prstGeom prst="rect">
             <a:avLst/>
@@ -4734,125 +6100,24 @@
           <a:noFill/>
         </p:spPr>
         <p:txBody>
-          <a:bodyPr wrap="square">
+          <a:bodyPr wrap="square" lIns="45720" rIns="45720" anchor="ctr">
             <a:spAutoFit/>
           </a:bodyPr>
           <a:lstStyle/>
           <a:p>
-            <a:pPr algn="ctr"/>
-            <a:r>
-              <a:rPr sz="4400" b="1">
-                <a:solidFill>
-                  <a:srgbClr val="0A1F33"/>
-                </a:solidFill>
-                <a:latin typeface="Calibri"/>
-              </a:rPr>
-              <a:t>✔</a:t>
-            </a:r>
-          </a:p>
-        </p:txBody>
-      </p:sp>
-      <p:sp>
-        <p:nvSpPr>
-          <p:cNvPr id="6" name="TextBox 5"/>
-          <p:cNvSpPr txBox="1"/>
-          <p:nvPr/>
-        </p:nvSpPr>
-        <p:spPr>
-          <a:xfrm>
-            <a:off x="548640" y="2880360"/>
-            <a:ext cx="11064240" cy="457200"/>
-          </a:xfrm>
-          <a:prstGeom prst="rect">
-            <a:avLst/>
-          </a:prstGeom>
-          <a:noFill/>
-        </p:spPr>
-        <p:txBody>
-          <a:bodyPr wrap="square">
-            <a:spAutoFit/>
-          </a:bodyPr>
-          <a:lstStyle/>
-          <a:p>
-            <a:pPr algn="ctr"/>
-            <a:r>
-              <a:rPr sz="1400" b="1">
-                <a:solidFill>
-                  <a:srgbClr val="F0B429"/>
-                </a:solidFill>
-                <a:latin typeface="Calibri"/>
-              </a:rPr>
-              <a:t>PRÁCTICA — SIMULACRO DE ARBITRAJE CON OBSERVACIÓN ENTRE PARES</a:t>
-            </a:r>
-          </a:p>
-        </p:txBody>
-      </p:sp>
-      <p:sp>
-        <p:nvSpPr>
-          <p:cNvPr id="7" name="TextBox 6"/>
-          <p:cNvSpPr txBox="1"/>
-          <p:nvPr/>
-        </p:nvSpPr>
-        <p:spPr>
-          <a:xfrm>
-            <a:off x="1280160" y="3383280"/>
-            <a:ext cx="9601200" cy="2377440"/>
-          </a:xfrm>
-          <a:prstGeom prst="rect">
-            <a:avLst/>
-          </a:prstGeom>
-          <a:noFill/>
-        </p:spPr>
-        <p:txBody>
-          <a:bodyPr wrap="square">
-            <a:spAutoFit/>
-          </a:bodyPr>
-          <a:lstStyle/>
-          <a:p>
-            <a:pPr algn="ctr"/>
-            <a:r>
-              <a:rPr sz="2000" b="0">
-                <a:solidFill>
-                  <a:srgbClr val="FFFFFF"/>
-                </a:solidFill>
-                <a:latin typeface="Cambria"/>
-              </a:rPr>
-              <a:t>Cada participante arbitra una partida simulada mientras otra persona observa y completa la lista de cotejo; luego se intercambian los roles.</a:t>
-            </a:r>
-          </a:p>
-        </p:txBody>
-      </p:sp>
-      <p:sp>
-        <p:nvSpPr>
-          <p:cNvPr id="8" name="TextBox 7"/>
-          <p:cNvSpPr txBox="1"/>
-          <p:nvPr/>
-        </p:nvSpPr>
-        <p:spPr>
-          <a:xfrm>
-            <a:off x="548640" y="6263640"/>
-            <a:ext cx="11064240" cy="365760"/>
-          </a:xfrm>
-          <a:prstGeom prst="rect">
-            <a:avLst/>
-          </a:prstGeom>
-          <a:noFill/>
-        </p:spPr>
-        <p:txBody>
-          <a:bodyPr wrap="square">
-            <a:spAutoFit/>
-          </a:bodyPr>
-          <a:lstStyle/>
-          <a:p>
-            <a:pPr algn="ctr"/>
-            <a:r>
-              <a:rPr sz="1200" b="0">
-                <a:solidFill>
-                  <a:srgbClr val="9FB3C8"/>
-                </a:solidFill>
-                <a:latin typeface="Calibri"/>
-              </a:rPr>
-              <a:t>Formación Ajedrez · Sesión 7</a:t>
+            <a:pPr>
+              <a:spcAft>
+                <a:spcPts val="1350"/>
+              </a:spcAft>
+            </a:pPr>
+            <a:r>
+              <a:rPr sz="3000" b="0">
+                <a:solidFill>
+                  <a:srgbClr val="102A43"/>
+                </a:solidFill>
+                <a:latin typeface="Calibri"/>
+              </a:rPr>
+              <a:t>Se retira al docente de la zona de juego; si hubo ayuda, se sanciona al estudiante según el art. 12.9. Se registra la incidencia.</a:t>
             </a:r>
           </a:p>
         </p:txBody>
@@ -4877,20 +6142,20 @@
       <p:grpSpPr/>
       <p:sp>
         <p:nvSpPr>
-          <p:cNvPr id="2" name="Oval 1"/>
+          <p:cNvPr id="2" name="Rectangle 1"/>
           <p:cNvSpPr/>
           <p:nvPr/>
         </p:nvSpPr>
         <p:spPr>
           <a:xfrm>
-            <a:off x="548640" y="502920"/>
-            <a:ext cx="502920" cy="502920"/>
-          </a:xfrm>
-          <a:prstGeom prst="ellipse">
+            <a:off x="0" y="0"/>
+            <a:ext cx="12191695" cy="6858000"/>
+          </a:xfrm>
+          <a:prstGeom prst="rect">
             <a:avLst/>
           </a:prstGeom>
           <a:solidFill>
-            <a:srgbClr val="DE911D"/>
+            <a:srgbClr val="102A43"/>
           </a:solidFill>
           <a:ln>
             <a:noFill/>
@@ -4927,8 +6192,8 @@
         </p:nvSpPr>
         <p:spPr>
           <a:xfrm>
-            <a:off x="548640" y="502920"/>
-            <a:ext cx="502920" cy="502920"/>
+            <a:off x="10728655" y="6419088"/>
+            <a:ext cx="1097280" cy="365760"/>
           </a:xfrm>
           <a:prstGeom prst="rect">
             <a:avLst/>
@@ -4936,20 +6201,24 @@
           <a:noFill/>
         </p:spPr>
         <p:txBody>
-          <a:bodyPr wrap="square">
+          <a:bodyPr wrap="square" lIns="45720" rIns="45720">
             <a:spAutoFit/>
           </a:bodyPr>
           <a:lstStyle/>
           <a:p>
-            <a:pPr algn="ctr"/>
-            <a:r>
-              <a:rPr sz="2000" b="0">
-                <a:solidFill>
-                  <a:srgbClr val="0A1F33"/>
-                </a:solidFill>
-                <a:latin typeface="Calibri"/>
-              </a:rPr>
-              <a:t>✎</a:t>
+            <a:pPr algn="ctr">
+              <a:spcAft>
+                <a:spcPts val="540"/>
+              </a:spcAft>
+            </a:pPr>
+            <a:r>
+              <a:rPr sz="1200" b="0">
+                <a:solidFill>
+                  <a:srgbClr val="9FB3C8"/>
+                </a:solidFill>
+                <a:latin typeface="Calibri"/>
+              </a:rPr>
+              <a:t>16</a:t>
             </a:r>
           </a:p>
         </p:txBody>
@@ -4962,8 +6231,8 @@
         </p:nvSpPr>
         <p:spPr>
           <a:xfrm>
-            <a:off x="1234440" y="530352"/>
-            <a:ext cx="9144000" cy="457200"/>
+            <a:off x="457200" y="2103120"/>
+            <a:ext cx="11277295" cy="1280160"/>
           </a:xfrm>
           <a:prstGeom prst="rect">
             <a:avLst/>
@@ -4971,77 +6240,38 @@
           <a:noFill/>
         </p:spPr>
         <p:txBody>
-          <a:bodyPr wrap="square">
+          <a:bodyPr wrap="square" lIns="45720" rIns="45720">
             <a:spAutoFit/>
           </a:bodyPr>
           <a:lstStyle/>
           <a:p>
-            <a:r>
-              <a:rPr sz="1400" b="1">
-                <a:solidFill>
-                  <a:srgbClr val="DE911D"/>
-                </a:solidFill>
-                <a:latin typeface="Calibri"/>
-              </a:rPr>
-              <a:t>EJERCICIO 1 DE 2</a:t>
-            </a:r>
-          </a:p>
-        </p:txBody>
-      </p:sp>
-      <p:sp>
-        <p:nvSpPr>
-          <p:cNvPr id="5" name="Rectangle 4"/>
-          <p:cNvSpPr/>
-          <p:nvPr/>
-        </p:nvSpPr>
-        <p:spPr>
-          <a:xfrm>
-            <a:off x="548640" y="1188720"/>
-            <a:ext cx="11064240" cy="5029200"/>
-          </a:xfrm>
-          <a:prstGeom prst="rect">
-            <a:avLst/>
-          </a:prstGeom>
-          <a:solidFill>
-            <a:srgbClr val="F0F4F8"/>
-          </a:solidFill>
-          <a:ln>
-            <a:noFill/>
-          </a:ln>
-          <a:effectLst/>
-        </p:spPr>
-        <p:style>
-          <a:lnRef idx="1">
-            <a:schemeClr val="accent1"/>
-          </a:lnRef>
-          <a:fillRef idx="3">
-            <a:schemeClr val="accent1"/>
-          </a:fillRef>
-          <a:effectRef idx="2">
-            <a:schemeClr val="accent1"/>
-          </a:effectRef>
-          <a:fontRef idx="minor">
-            <a:schemeClr val="lt1"/>
-          </a:fontRef>
-        </p:style>
-        <p:txBody>
-          <a:bodyPr rtlCol="0" anchor="ctr"/>
-          <a:lstStyle/>
-          <a:p>
-            <a:pPr algn="ctr"/>
-          </a:p>
-        </p:txBody>
-      </p:sp>
-      <p:sp>
-        <p:nvSpPr>
-          <p:cNvPr id="6" name="TextBox 5"/>
+            <a:pPr algn="ctr">
+              <a:spcAft>
+                <a:spcPts val="3240"/>
+              </a:spcAft>
+            </a:pPr>
+            <a:r>
+              <a:rPr sz="7200" b="1">
+                <a:solidFill>
+                  <a:srgbClr val="FFFFFF"/>
+                </a:solidFill>
+                <a:latin typeface="Calibri"/>
+              </a:rPr>
+              <a:t>Receso</a:t>
+            </a:r>
+          </a:p>
+        </p:txBody>
+      </p:sp>
+      <p:sp>
+        <p:nvSpPr>
+          <p:cNvPr id="5" name="TextBox 4"/>
           <p:cNvSpPr txBox="1"/>
           <p:nvPr/>
         </p:nvSpPr>
         <p:spPr>
           <a:xfrm>
-            <a:off x="914400" y="1554480"/>
-            <a:ext cx="10332720" cy="4480560"/>
+            <a:off x="457200" y="3566160"/>
+            <a:ext cx="11277295" cy="1097280"/>
           </a:xfrm>
           <a:prstGeom prst="rect">
             <a:avLst/>
@@ -5049,19 +6279,40 @@
           <a:noFill/>
         </p:spPr>
         <p:txBody>
-          <a:bodyPr wrap="square">
+          <a:bodyPr wrap="square" lIns="45720" rIns="45720">
             <a:spAutoFit/>
           </a:bodyPr>
           <a:lstStyle/>
           <a:p>
-            <a:r>
-              <a:rPr sz="2200" b="0">
-                <a:solidFill>
-                  <a:srgbClr val="0A1F33"/>
-                </a:solidFill>
-                <a:latin typeface="Calibri"/>
-              </a:rPr>
-              <a:t>Durante el simulacro, la persona árbitra resolvió bien un reclamo, pero no lo anotó en el acta. ¿Cómo lo marcas en la lista de cotejo?</a:t>
+            <a:pPr algn="ctr">
+              <a:spcAft>
+                <a:spcPts val="1260"/>
+              </a:spcAft>
+            </a:pPr>
+            <a:r>
+              <a:rPr sz="2800" b="0">
+                <a:solidFill>
+                  <a:srgbClr val="CADCFC"/>
+                </a:solidFill>
+                <a:latin typeface="Calibri"/>
+              </a:rPr>
+              <a:t>15 minutos</a:t>
+            </a:r>
+          </a:p>
+          <a:p>
+            <a:pPr algn="ctr">
+              <a:spcAft>
+                <a:spcPts val="1260"/>
+              </a:spcAft>
+            </a:pPr>
+            <a:r>
+              <a:rPr sz="2800" b="0">
+                <a:solidFill>
+                  <a:srgbClr val="CADCFC"/>
+                </a:solidFill>
+                <a:latin typeface="Calibri"/>
+              </a:rPr>
+              <a:t>Pausa los relojes: seguimos en breve.</a:t>
             </a:r>
           </a:p>
         </p:txBody>
@@ -5086,20 +6337,20 @@
       <p:grpSpPr/>
       <p:sp>
         <p:nvSpPr>
-          <p:cNvPr id="2" name="Oval 1"/>
+          <p:cNvPr id="2" name="Rectangle 1"/>
           <p:cNvSpPr/>
           <p:nvPr/>
         </p:nvSpPr>
         <p:spPr>
           <a:xfrm>
-            <a:off x="548640" y="502920"/>
-            <a:ext cx="502920" cy="502920"/>
-          </a:xfrm>
-          <a:prstGeom prst="ellipse">
+            <a:off x="0" y="0"/>
+            <a:ext cx="12191695" cy="960120"/>
+          </a:xfrm>
+          <a:prstGeom prst="rect">
             <a:avLst/>
           </a:prstGeom>
           <a:solidFill>
-            <a:srgbClr val="DE911D"/>
+            <a:srgbClr val="3172AC"/>
           </a:solidFill>
           <a:ln>
             <a:noFill/>
@@ -5136,8 +6387,8 @@
         </p:nvSpPr>
         <p:spPr>
           <a:xfrm>
-            <a:off x="548640" y="502920"/>
-            <a:ext cx="502920" cy="502920"/>
+            <a:off x="457200" y="109728"/>
+            <a:ext cx="11277295" cy="777240"/>
           </a:xfrm>
           <a:prstGeom prst="rect">
             <a:avLst/>
@@ -5145,20 +6396,24 @@
           <a:noFill/>
         </p:spPr>
         <p:txBody>
-          <a:bodyPr wrap="square">
+          <a:bodyPr wrap="square" lIns="45720" rIns="45720" anchor="ctr">
             <a:spAutoFit/>
           </a:bodyPr>
           <a:lstStyle/>
           <a:p>
-            <a:pPr algn="ctr"/>
-            <a:r>
-              <a:rPr sz="2000" b="0">
-                <a:solidFill>
-                  <a:srgbClr val="0A1F33"/>
-                </a:solidFill>
-                <a:latin typeface="Calibri"/>
-              </a:rPr>
-              <a:t>✎</a:t>
+            <a:pPr algn="ctr">
+              <a:spcAft>
+                <a:spcPts val="1530"/>
+              </a:spcAft>
+            </a:pPr>
+            <a:r>
+              <a:rPr sz="3400" b="1">
+                <a:solidFill>
+                  <a:srgbClr val="FFFFFF"/>
+                </a:solidFill>
+                <a:latin typeface="Calibri"/>
+              </a:rPr>
+              <a:t>Práctica · Simulacro de arbitraje con observación entre pares</a:t>
             </a:r>
           </a:p>
         </p:txBody>
@@ -5171,8 +6426,8 @@
         </p:nvSpPr>
         <p:spPr>
           <a:xfrm>
-            <a:off x="1234440" y="530352"/>
-            <a:ext cx="9144000" cy="457200"/>
+            <a:off x="10728655" y="6419088"/>
+            <a:ext cx="1097280" cy="365760"/>
           </a:xfrm>
           <a:prstGeom prst="rect">
             <a:avLst/>
@@ -5180,19 +6435,24 @@
           <a:noFill/>
         </p:spPr>
         <p:txBody>
-          <a:bodyPr wrap="square">
+          <a:bodyPr wrap="square" lIns="45720" rIns="45720">
             <a:spAutoFit/>
           </a:bodyPr>
           <a:lstStyle/>
           <a:p>
-            <a:r>
-              <a:rPr sz="1400" b="1">
-                <a:solidFill>
-                  <a:srgbClr val="DE911D"/>
-                </a:solidFill>
-                <a:latin typeface="Calibri"/>
-              </a:rPr>
-              <a:t>EJERCICIO 2 DE 2</a:t>
+            <a:pPr algn="ctr">
+              <a:spcAft>
+                <a:spcPts val="540"/>
+              </a:spcAft>
+            </a:pPr>
+            <a:r>
+              <a:rPr sz="1200" b="0">
+                <a:solidFill>
+                  <a:srgbClr val="627D98"/>
+                </a:solidFill>
+                <a:latin typeface="Calibri"/>
+              </a:rPr>
+              <a:t>17</a:t>
             </a:r>
           </a:p>
         </p:txBody>
@@ -5205,8 +6465,8 @@
         </p:nvSpPr>
         <p:spPr>
           <a:xfrm>
-            <a:off x="548640" y="1188720"/>
-            <a:ext cx="11064240" cy="5029200"/>
+            <a:off x="457200" y="1280160"/>
+            <a:ext cx="11277295" cy="4892040"/>
           </a:xfrm>
           <a:prstGeom prst="rect">
             <a:avLst/>
@@ -5249,8 +6509,8 @@
         </p:nvSpPr>
         <p:spPr>
           <a:xfrm>
-            <a:off x="914400" y="1554480"/>
-            <a:ext cx="10332720" cy="4480560"/>
+            <a:off x="822960" y="1463040"/>
+            <a:ext cx="10545775" cy="4480560"/>
           </a:xfrm>
           <a:prstGeom prst="rect">
             <a:avLst/>
@@ -5258,19 +6518,24 @@
           <a:noFill/>
         </p:spPr>
         <p:txBody>
-          <a:bodyPr wrap="square">
+          <a:bodyPr wrap="square" lIns="45720" rIns="45720" anchor="ctr">
             <a:spAutoFit/>
           </a:bodyPr>
           <a:lstStyle/>
           <a:p>
-            <a:r>
-              <a:rPr sz="2200" b="0">
-                <a:solidFill>
-                  <a:srgbClr val="0A1F33"/>
-                </a:solidFill>
-                <a:latin typeface="Calibri"/>
-              </a:rPr>
-              <a:t>Escribe una retroalimentación útil para una persona que aplicó la sanción máxima a una primera falta leve.</a:t>
+            <a:pPr>
+              <a:spcAft>
+                <a:spcPts val="1440"/>
+              </a:spcAft>
+            </a:pPr>
+            <a:r>
+              <a:rPr sz="3200" b="0">
+                <a:solidFill>
+                  <a:srgbClr val="102A43"/>
+                </a:solidFill>
+                <a:latin typeface="Calibri"/>
+              </a:rPr>
+              <a:t>Cada participante arbitra una partida simulada mientras otra persona observa y completa la lista de cotejo; luego se intercambian los roles.</a:t>
             </a:r>
           </a:p>
         </p:txBody>
@@ -5295,20 +6560,20 @@
       <p:grpSpPr/>
       <p:sp>
         <p:nvSpPr>
-          <p:cNvPr id="2" name="Oval 1"/>
+          <p:cNvPr id="2" name="Rectangle 1"/>
           <p:cNvSpPr/>
           <p:nvPr/>
         </p:nvSpPr>
         <p:spPr>
           <a:xfrm>
-            <a:off x="548640" y="502920"/>
-            <a:ext cx="502920" cy="502920"/>
-          </a:xfrm>
-          <a:prstGeom prst="ellipse">
+            <a:off x="0" y="0"/>
+            <a:ext cx="12191695" cy="960120"/>
+          </a:xfrm>
+          <a:prstGeom prst="rect">
             <a:avLst/>
           </a:prstGeom>
           <a:solidFill>
-            <a:srgbClr val="DE911D"/>
+            <a:srgbClr val="3172AC"/>
           </a:solidFill>
           <a:ln>
             <a:noFill/>
@@ -5345,8 +6610,8 @@
         </p:nvSpPr>
         <p:spPr>
           <a:xfrm>
-            <a:off x="548640" y="502920"/>
-            <a:ext cx="502920" cy="502920"/>
+            <a:off x="457200" y="109728"/>
+            <a:ext cx="11277295" cy="777240"/>
           </a:xfrm>
           <a:prstGeom prst="rect">
             <a:avLst/>
@@ -5354,20 +6619,24 @@
           <a:noFill/>
         </p:spPr>
         <p:txBody>
-          <a:bodyPr wrap="square">
+          <a:bodyPr wrap="square" lIns="45720" rIns="45720" anchor="ctr">
             <a:spAutoFit/>
           </a:bodyPr>
           <a:lstStyle/>
           <a:p>
-            <a:pPr algn="ctr"/>
-            <a:r>
-              <a:rPr sz="2000" b="0">
-                <a:solidFill>
-                  <a:srgbClr val="0A1F33"/>
-                </a:solidFill>
-                <a:latin typeface="Calibri"/>
-              </a:rPr>
-              <a:t>?</a:t>
+            <a:pPr algn="ctr">
+              <a:spcAft>
+                <a:spcPts val="1530"/>
+              </a:spcAft>
+            </a:pPr>
+            <a:r>
+              <a:rPr sz="3400" b="1">
+                <a:solidFill>
+                  <a:srgbClr val="FFFFFF"/>
+                </a:solidFill>
+                <a:latin typeface="Calibri"/>
+              </a:rPr>
+              <a:t>Ejercicio 1 de 2</a:t>
             </a:r>
           </a:p>
         </p:txBody>
@@ -5380,8 +6649,8 @@
         </p:nvSpPr>
         <p:spPr>
           <a:xfrm>
-            <a:off x="1234440" y="530352"/>
-            <a:ext cx="9144000" cy="457200"/>
+            <a:off x="10728655" y="6419088"/>
+            <a:ext cx="1097280" cy="365760"/>
           </a:xfrm>
           <a:prstGeom prst="rect">
             <a:avLst/>
@@ -5389,19 +6658,24 @@
           <a:noFill/>
         </p:spPr>
         <p:txBody>
-          <a:bodyPr wrap="square">
+          <a:bodyPr wrap="square" lIns="45720" rIns="45720">
             <a:spAutoFit/>
           </a:bodyPr>
           <a:lstStyle/>
           <a:p>
-            <a:r>
-              <a:rPr sz="1400" b="1">
-                <a:solidFill>
-                  <a:srgbClr val="DE911D"/>
-                </a:solidFill>
-                <a:latin typeface="Calibri"/>
-              </a:rPr>
-              <a:t>QUIZ DE LA SESIÓN</a:t>
+            <a:pPr algn="ctr">
+              <a:spcAft>
+                <a:spcPts val="540"/>
+              </a:spcAft>
+            </a:pPr>
+            <a:r>
+              <a:rPr sz="1200" b="0">
+                <a:solidFill>
+                  <a:srgbClr val="627D98"/>
+                </a:solidFill>
+                <a:latin typeface="Calibri"/>
+              </a:rPr>
+              <a:t>18</a:t>
             </a:r>
           </a:p>
         </p:txBody>
@@ -5414,8 +6688,8 @@
         </p:nvSpPr>
         <p:spPr>
           <a:xfrm>
-            <a:off x="548640" y="1188720"/>
-            <a:ext cx="11064240" cy="5029200"/>
+            <a:off x="457200" y="1280160"/>
+            <a:ext cx="11277295" cy="4892040"/>
           </a:xfrm>
           <a:prstGeom prst="rect">
             <a:avLst/>
@@ -5458,8 +6732,8 @@
         </p:nvSpPr>
         <p:spPr>
           <a:xfrm>
-            <a:off x="914400" y="1371600"/>
-            <a:ext cx="10332720" cy="4754880"/>
+            <a:off x="822960" y="1463040"/>
+            <a:ext cx="10545775" cy="4480560"/>
           </a:xfrm>
           <a:prstGeom prst="rect">
             <a:avLst/>
@@ -5467,136 +6741,24 @@
           <a:noFill/>
         </p:spPr>
         <p:txBody>
-          <a:bodyPr wrap="square">
+          <a:bodyPr wrap="square" lIns="45720" rIns="45720" anchor="ctr">
             <a:spAutoFit/>
           </a:bodyPr>
           <a:lstStyle/>
           <a:p>
             <a:pPr>
               <a:spcAft>
-                <a:spcPts val="600"/>
-              </a:spcAft>
-            </a:pPr>
-            <a:r>
-              <a:rPr sz="1200">
-                <a:solidFill>
-                  <a:srgbClr val="334E68"/>
-                </a:solidFill>
-                <a:latin typeface="Calibri"/>
-              </a:rPr>
-              <a:t>1. Durante un simulacro, no se aplicó la sanción por uso de dispositivo electrónico. ¿Qué instrumento documenta esa observación?</a:t>
-            </a:r>
-          </a:p>
-          <a:p>
-            <a:pPr>
-              <a:spcAft>
-                <a:spcPts val="600"/>
-              </a:spcAft>
-            </a:pPr>
-            <a:r>
-              <a:rPr sz="1200">
-                <a:solidFill>
-                  <a:srgbClr val="334E68"/>
-                </a:solidFill>
-                <a:latin typeface="Calibri"/>
-              </a:rPr>
-              <a:t>2. ¿Cuál es el propósito principal de asignar roles antes de la sesión presencial?</a:t>
-            </a:r>
-          </a:p>
-          <a:p>
-            <a:pPr>
-              <a:spcAft>
-                <a:spcPts val="600"/>
-              </a:spcAft>
-            </a:pPr>
-            <a:r>
-              <a:rPr sz="1200">
-                <a:solidFill>
-                  <a:srgbClr val="334E68"/>
-                </a:solidFill>
-                <a:latin typeface="Calibri"/>
-              </a:rPr>
-              <a:t>3. Un reclamo de triple repetición resulta incorrecto. ¿Qué efecto tiene además?</a:t>
-            </a:r>
-          </a:p>
-          <a:p>
-            <a:pPr>
-              <a:spcAft>
-                <a:spcPts val="600"/>
-              </a:spcAft>
-            </a:pPr>
-            <a:r>
-              <a:rPr sz="1200">
-                <a:solidFill>
-                  <a:srgbClr val="334E68"/>
-                </a:solidFill>
-                <a:latin typeface="Calibri"/>
-              </a:rPr>
-              <a:t>4. ¿En qué orden se ofrecen tablas correctamente?</a:t>
-            </a:r>
-          </a:p>
-          <a:p>
-            <a:pPr>
-              <a:spcAft>
-                <a:spcPts val="600"/>
-              </a:spcAft>
-            </a:pPr>
-            <a:r>
-              <a:rPr sz="1200">
-                <a:solidFill>
-                  <a:srgbClr val="334E68"/>
-                </a:solidFill>
-                <a:latin typeface="Calibri"/>
-              </a:rPr>
-              <a:t>5. En el simulacro, ¿conoce la persona árbitra de antemano la incidencia que va a arbitrar?</a:t>
-            </a:r>
-          </a:p>
-          <a:p>
-            <a:pPr>
-              <a:spcAft>
-                <a:spcPts val="600"/>
-              </a:spcAft>
-            </a:pPr>
-            <a:r>
-              <a:rPr sz="1200">
-                <a:solidFill>
-                  <a:srgbClr val="334E68"/>
-                </a:solidFill>
-                <a:latin typeface="Calibri"/>
-              </a:rPr>
-              <a:t>6. Según la lista de cotejo, ¿qué debe verificar la persona árbitra antes de iniciar la ronda?</a:t>
-            </a:r>
-          </a:p>
-          <a:p>
-            <a:pPr>
-              <a:spcAft>
-                <a:spcPts val="600"/>
-              </a:spcAft>
-            </a:pPr>
-            <a:r>
-              <a:rPr sz="1200">
-                <a:solidFill>
-                  <a:srgbClr val="334E68"/>
-                </a:solidFill>
-                <a:latin typeface="Calibri"/>
-              </a:rPr>
-              <a:t>7. ¿Qué función cumple la mesa de control en el torneo presencial?</a:t>
-            </a:r>
-          </a:p>
-          <a:p>
-            <a:pPr>
-              <a:spcAft>
-                <a:spcPts val="600"/>
-              </a:spcAft>
-            </a:pPr>
-            <a:r>
-              <a:rPr sz="1200">
-                <a:solidFill>
-                  <a:srgbClr val="334E68"/>
-                </a:solidFill>
-                <a:latin typeface="Calibri"/>
-              </a:rPr>
-              <a:t>8. ¿Qué hace un árbitro auxiliar cuando no puede resolver una incidencia?</a:t>
+                <a:spcPts val="1440"/>
+              </a:spcAft>
+            </a:pPr>
+            <a:r>
+              <a:rPr sz="3200" b="0">
+                <a:solidFill>
+                  <a:srgbClr val="102A43"/>
+                </a:solidFill>
+                <a:latin typeface="Calibri"/>
+              </a:rPr>
+              <a:t>Durante el simulacro, la persona árbitra resolvió bien un reclamo, pero no lo anotó en el acta. ¿Cómo lo marcas en la lista de cotejo?</a:t>
             </a:r>
           </a:p>
         </p:txBody>
@@ -5628,13 +6790,13 @@
         <p:spPr>
           <a:xfrm>
             <a:off x="0" y="0"/>
-            <a:ext cx="12191695" cy="6858000"/>
+            <a:ext cx="12191695" cy="960120"/>
           </a:xfrm>
           <a:prstGeom prst="rect">
             <a:avLst/>
           </a:prstGeom>
           <a:solidFill>
-            <a:srgbClr val="0A1F33"/>
+            <a:srgbClr val="3172AC"/>
           </a:solidFill>
           <a:ln>
             <a:noFill/>
@@ -5671,8 +6833,8 @@
         </p:nvSpPr>
         <p:spPr>
           <a:xfrm>
-            <a:off x="548640" y="731520"/>
-            <a:ext cx="11064240" cy="457200"/>
+            <a:off x="457200" y="109728"/>
+            <a:ext cx="11277295" cy="777240"/>
           </a:xfrm>
           <a:prstGeom prst="rect">
             <a:avLst/>
@@ -5680,19 +6842,24 @@
           <a:noFill/>
         </p:spPr>
         <p:txBody>
-          <a:bodyPr wrap="square">
+          <a:bodyPr wrap="square" lIns="45720" rIns="45720" anchor="ctr">
             <a:spAutoFit/>
           </a:bodyPr>
           <a:lstStyle/>
           <a:p>
-            <a:r>
-              <a:rPr sz="1400" b="1">
-                <a:solidFill>
-                  <a:srgbClr val="F0B429"/>
-                </a:solidFill>
-                <a:latin typeface="Calibri"/>
-              </a:rPr>
-              <a:t>TAREA PARA LA PRÓXIMA SESIÓN</a:t>
+            <a:pPr algn="ctr">
+              <a:spcAft>
+                <a:spcPts val="1530"/>
+              </a:spcAft>
+            </a:pPr>
+            <a:r>
+              <a:rPr sz="3400" b="1">
+                <a:solidFill>
+                  <a:srgbClr val="FFFFFF"/>
+                </a:solidFill>
+                <a:latin typeface="Calibri"/>
+              </a:rPr>
+              <a:t>Ejercicio 2 de 2</a:t>
             </a:r>
           </a:p>
         </p:txBody>
@@ -5705,8 +6872,8 @@
         </p:nvSpPr>
         <p:spPr>
           <a:xfrm>
-            <a:off x="548640" y="1371600"/>
-            <a:ext cx="11064240" cy="2926080"/>
+            <a:off x="10728655" y="6419088"/>
+            <a:ext cx="1097280" cy="365760"/>
           </a:xfrm>
           <a:prstGeom prst="rect">
             <a:avLst/>
@@ -5714,33 +6881,82 @@
           <a:noFill/>
         </p:spPr>
         <p:txBody>
-          <a:bodyPr wrap="square">
+          <a:bodyPr wrap="square" lIns="45720" rIns="45720">
             <a:spAutoFit/>
           </a:bodyPr>
           <a:lstStyle/>
           <a:p>
-            <a:r>
-              <a:rPr sz="2400" b="0">
-                <a:solidFill>
-                  <a:srgbClr val="FFFFFF"/>
-                </a:solidFill>
-                <a:latin typeface="Cambria"/>
-              </a:rPr>
-              <a:t>Confirmar el rol asignado, revisar la lista de cotejo y reunir los materiales solicitados para el día presencial.</a:t>
-            </a:r>
-          </a:p>
-        </p:txBody>
-      </p:sp>
-      <p:sp>
-        <p:nvSpPr>
-          <p:cNvPr id="5" name="TextBox 4"/>
+            <a:pPr algn="ctr">
+              <a:spcAft>
+                <a:spcPts val="540"/>
+              </a:spcAft>
+            </a:pPr>
+            <a:r>
+              <a:rPr sz="1200" b="0">
+                <a:solidFill>
+                  <a:srgbClr val="627D98"/>
+                </a:solidFill>
+                <a:latin typeface="Calibri"/>
+              </a:rPr>
+              <a:t>19</a:t>
+            </a:r>
+          </a:p>
+        </p:txBody>
+      </p:sp>
+      <p:sp>
+        <p:nvSpPr>
+          <p:cNvPr id="5" name="Rectangle 4"/>
+          <p:cNvSpPr/>
+          <p:nvPr/>
+        </p:nvSpPr>
+        <p:spPr>
+          <a:xfrm>
+            <a:off x="457200" y="1280160"/>
+            <a:ext cx="11277295" cy="4892040"/>
+          </a:xfrm>
+          <a:prstGeom prst="rect">
+            <a:avLst/>
+          </a:prstGeom>
+          <a:solidFill>
+            <a:srgbClr val="F0F4F8"/>
+          </a:solidFill>
+          <a:ln>
+            <a:noFill/>
+          </a:ln>
+          <a:effectLst/>
+        </p:spPr>
+        <p:style>
+          <a:lnRef idx="1">
+            <a:schemeClr val="accent1"/>
+          </a:lnRef>
+          <a:fillRef idx="3">
+            <a:schemeClr val="accent1"/>
+          </a:fillRef>
+          <a:effectRef idx="2">
+            <a:schemeClr val="accent1"/>
+          </a:effectRef>
+          <a:fontRef idx="minor">
+            <a:schemeClr val="lt1"/>
+          </a:fontRef>
+        </p:style>
+        <p:txBody>
+          <a:bodyPr rtlCol="0" anchor="ctr"/>
+          <a:lstStyle/>
+          <a:p>
+            <a:pPr algn="ctr"/>
+          </a:p>
+        </p:txBody>
+      </p:sp>
+      <p:sp>
+        <p:nvSpPr>
+          <p:cNvPr id="6" name="TextBox 5"/>
           <p:cNvSpPr txBox="1"/>
           <p:nvPr/>
         </p:nvSpPr>
         <p:spPr>
           <a:xfrm>
-            <a:off x="548640" y="4754880"/>
-            <a:ext cx="11064240" cy="914400"/>
+            <a:off x="822960" y="1463040"/>
+            <a:ext cx="10545775" cy="4480560"/>
           </a:xfrm>
           <a:prstGeom prst="rect">
             <a:avLst/>
@@ -5748,53 +6964,24 @@
           <a:noFill/>
         </p:spPr>
         <p:txBody>
-          <a:bodyPr wrap="square">
+          <a:bodyPr wrap="square" lIns="45720" rIns="45720" anchor="ctr">
             <a:spAutoFit/>
           </a:bodyPr>
           <a:lstStyle/>
           <a:p>
-            <a:r>
-              <a:rPr sz="1800" b="0">
-                <a:solidFill>
-                  <a:srgbClr val="CADCFC"/>
-                </a:solidFill>
-                <a:latin typeface="Calibri"/>
-              </a:rPr>
-              <a:t>¿Dudas? Este es el momento. Gracias por tu participación.</a:t>
-            </a:r>
-          </a:p>
-        </p:txBody>
-      </p:sp>
-      <p:sp>
-        <p:nvSpPr>
-          <p:cNvPr id="6" name="TextBox 5"/>
-          <p:cNvSpPr txBox="1"/>
-          <p:nvPr/>
-        </p:nvSpPr>
-        <p:spPr>
-          <a:xfrm>
-            <a:off x="548640" y="6263640"/>
-            <a:ext cx="11064240" cy="365760"/>
-          </a:xfrm>
-          <a:prstGeom prst="rect">
-            <a:avLst/>
-          </a:prstGeom>
-          <a:noFill/>
-        </p:spPr>
-        <p:txBody>
-          <a:bodyPr wrap="square">
-            <a:spAutoFit/>
-          </a:bodyPr>
-          <a:lstStyle/>
-          <a:p>
-            <a:r>
-              <a:rPr sz="1200" b="0">
-                <a:solidFill>
-                  <a:srgbClr val="9FB3C8"/>
-                </a:solidFill>
-                <a:latin typeface="Calibri"/>
-              </a:rPr>
-              <a:t>Formación Ajedrez · Sesión 7 · ajedrez-integral.com</a:t>
+            <a:pPr>
+              <a:spcAft>
+                <a:spcPts val="1440"/>
+              </a:spcAft>
+            </a:pPr>
+            <a:r>
+              <a:rPr sz="3200" b="0">
+                <a:solidFill>
+                  <a:srgbClr val="102A43"/>
+                </a:solidFill>
+                <a:latin typeface="Calibri"/>
+              </a:rPr>
+              <a:t>Escribe una retroalimentación útil para una persona que aplicó la sanción máxima a una primera falta leve.</a:t>
             </a:r>
           </a:p>
         </p:txBody>
@@ -5819,20 +7006,20 @@
       <p:grpSpPr/>
       <p:sp>
         <p:nvSpPr>
-          <p:cNvPr id="2" name="Oval 1"/>
+          <p:cNvPr id="2" name="Rectangle 1"/>
           <p:cNvSpPr/>
           <p:nvPr/>
         </p:nvSpPr>
         <p:spPr>
           <a:xfrm>
-            <a:off x="548640" y="502920"/>
-            <a:ext cx="502920" cy="502920"/>
-          </a:xfrm>
-          <a:prstGeom prst="ellipse">
+            <a:off x="0" y="0"/>
+            <a:ext cx="12191695" cy="960120"/>
+          </a:xfrm>
+          <a:prstGeom prst="rect">
             <a:avLst/>
           </a:prstGeom>
           <a:solidFill>
-            <a:srgbClr val="DE911D"/>
+            <a:srgbClr val="3172AC"/>
           </a:solidFill>
           <a:ln>
             <a:noFill/>
@@ -5869,8 +7056,8 @@
         </p:nvSpPr>
         <p:spPr>
           <a:xfrm>
-            <a:off x="548640" y="502920"/>
-            <a:ext cx="502920" cy="502920"/>
+            <a:off x="457200" y="109728"/>
+            <a:ext cx="11277295" cy="777240"/>
           </a:xfrm>
           <a:prstGeom prst="rect">
             <a:avLst/>
@@ -5878,34 +7065,82 @@
           <a:noFill/>
         </p:spPr>
         <p:txBody>
-          <a:bodyPr wrap="square">
+          <a:bodyPr wrap="square" lIns="45720" rIns="45720" anchor="ctr">
             <a:spAutoFit/>
           </a:bodyPr>
           <a:lstStyle/>
           <a:p>
+            <a:pPr algn="ctr">
+              <a:spcAft>
+                <a:spcPts val="1530"/>
+              </a:spcAft>
+            </a:pPr>
+            <a:r>
+              <a:rPr sz="3400" b="1">
+                <a:solidFill>
+                  <a:srgbClr val="FFFFFF"/>
+                </a:solidFill>
+                <a:latin typeface="Calibri"/>
+              </a:rPr>
+              <a:t>Objetivos de la sesión</a:t>
+            </a:r>
+          </a:p>
+        </p:txBody>
+      </p:sp>
+      <p:sp>
+        <p:nvSpPr>
+          <p:cNvPr id="4" name="Rectangle 3"/>
+          <p:cNvSpPr/>
+          <p:nvPr/>
+        </p:nvSpPr>
+        <p:spPr>
+          <a:xfrm>
+            <a:off x="0" y="960120"/>
+            <a:ext cx="12191695" cy="548640"/>
+          </a:xfrm>
+          <a:prstGeom prst="rect">
+            <a:avLst/>
+          </a:prstGeom>
+          <a:solidFill>
+            <a:srgbClr val="4E6178"/>
+          </a:solidFill>
+          <a:ln>
+            <a:noFill/>
+          </a:ln>
+          <a:effectLst/>
+        </p:spPr>
+        <p:style>
+          <a:lnRef idx="1">
+            <a:schemeClr val="accent1"/>
+          </a:lnRef>
+          <a:fillRef idx="3">
+            <a:schemeClr val="accent1"/>
+          </a:fillRef>
+          <a:effectRef idx="2">
+            <a:schemeClr val="accent1"/>
+          </a:effectRef>
+          <a:fontRef idx="minor">
+            <a:schemeClr val="lt1"/>
+          </a:fontRef>
+        </p:style>
+        <p:txBody>
+          <a:bodyPr rtlCol="0" anchor="ctr"/>
+          <a:lstStyle/>
+          <a:p>
             <a:pPr algn="ctr"/>
-            <a:r>
-              <a:rPr sz="2000" b="0">
-                <a:solidFill>
-                  <a:srgbClr val="0A1F33"/>
-                </a:solidFill>
-                <a:latin typeface="Calibri"/>
-              </a:rPr>
-              <a:t>◎</a:t>
-            </a:r>
-          </a:p>
-        </p:txBody>
-      </p:sp>
-      <p:sp>
-        <p:nvSpPr>
-          <p:cNvPr id="4" name="TextBox 3"/>
+          </a:p>
+        </p:txBody>
+      </p:sp>
+      <p:sp>
+        <p:nvSpPr>
+          <p:cNvPr id="5" name="TextBox 4"/>
           <p:cNvSpPr txBox="1"/>
           <p:nvPr/>
         </p:nvSpPr>
         <p:spPr>
           <a:xfrm>
-            <a:off x="1234440" y="530352"/>
-            <a:ext cx="9144000" cy="457200"/>
+            <a:off x="457200" y="987552"/>
+            <a:ext cx="11277295" cy="502920"/>
           </a:xfrm>
           <a:prstGeom prst="rect">
             <a:avLst/>
@@ -5913,33 +7148,38 @@
           <a:noFill/>
         </p:spPr>
         <p:txBody>
-          <a:bodyPr wrap="square">
+          <a:bodyPr wrap="square" lIns="45720" rIns="45720" anchor="ctr">
             <a:spAutoFit/>
           </a:bodyPr>
           <a:lstStyle/>
           <a:p>
-            <a:r>
-              <a:rPr sz="1400" b="1">
-                <a:solidFill>
-                  <a:srgbClr val="DE911D"/>
-                </a:solidFill>
-                <a:latin typeface="Calibri"/>
-              </a:rPr>
-              <a:t>OBJETIVOS DE LA SESIÓN</a:t>
-            </a:r>
-          </a:p>
-        </p:txBody>
-      </p:sp>
-      <p:sp>
-        <p:nvSpPr>
-          <p:cNvPr id="5" name="TextBox 4"/>
+            <a:pPr algn="ctr">
+              <a:spcAft>
+                <a:spcPts val="945"/>
+              </a:spcAft>
+            </a:pPr>
+            <a:r>
+              <a:rPr sz="2100" b="0">
+                <a:solidFill>
+                  <a:srgbClr val="FFFFFF"/>
+                </a:solidFill>
+                <a:latin typeface="Calibri"/>
+              </a:rPr>
+              <a:t>Al terminar esta sesión, cada participante podrá:</a:t>
+            </a:r>
+          </a:p>
+        </p:txBody>
+      </p:sp>
+      <p:sp>
+        <p:nvSpPr>
+          <p:cNvPr id="6" name="TextBox 5"/>
           <p:cNvSpPr txBox="1"/>
           <p:nvPr/>
         </p:nvSpPr>
         <p:spPr>
           <a:xfrm>
-            <a:off x="548640" y="1051560"/>
-            <a:ext cx="11064240" cy="822960"/>
+            <a:off x="10728655" y="6419088"/>
+            <a:ext cx="1097280" cy="365760"/>
           </a:xfrm>
           <a:prstGeom prst="rect">
             <a:avLst/>
@@ -5947,33 +7187,38 @@
           <a:noFill/>
         </p:spPr>
         <p:txBody>
-          <a:bodyPr wrap="square">
+          <a:bodyPr wrap="square" lIns="45720" rIns="45720">
             <a:spAutoFit/>
           </a:bodyPr>
           <a:lstStyle/>
           <a:p>
-            <a:r>
-              <a:rPr sz="2400" b="1">
-                <a:solidFill>
-                  <a:srgbClr val="0A1F33"/>
-                </a:solidFill>
-                <a:latin typeface="Cambria"/>
-              </a:rPr>
-              <a:t>Talleres prácticos y simulacros de arbitraje</a:t>
-            </a:r>
-          </a:p>
-        </p:txBody>
-      </p:sp>
-      <p:sp>
-        <p:nvSpPr>
-          <p:cNvPr id="6" name="Rectangle 5"/>
+            <a:pPr algn="ctr">
+              <a:spcAft>
+                <a:spcPts val="540"/>
+              </a:spcAft>
+            </a:pPr>
+            <a:r>
+              <a:rPr sz="1200" b="0">
+                <a:solidFill>
+                  <a:srgbClr val="627D98"/>
+                </a:solidFill>
+                <a:latin typeface="Calibri"/>
+              </a:rPr>
+              <a:t>2</a:t>
+            </a:r>
+          </a:p>
+        </p:txBody>
+      </p:sp>
+      <p:sp>
+        <p:nvSpPr>
+          <p:cNvPr id="7" name="Rectangle 6"/>
           <p:cNvSpPr/>
           <p:nvPr/>
         </p:nvSpPr>
         <p:spPr>
           <a:xfrm>
-            <a:off x="548640" y="1965960"/>
-            <a:ext cx="11064240" cy="4297680"/>
+            <a:off x="457200" y="1783080"/>
+            <a:ext cx="11277295" cy="4389120"/>
           </a:xfrm>
           <a:prstGeom prst="rect">
             <a:avLst/>
@@ -6010,14 +7255,14 @@
       </p:sp>
       <p:sp>
         <p:nvSpPr>
-          <p:cNvPr id="7" name="TextBox 6"/>
+          <p:cNvPr id="8" name="TextBox 7"/>
           <p:cNvSpPr txBox="1"/>
           <p:nvPr/>
         </p:nvSpPr>
         <p:spPr>
           <a:xfrm>
-            <a:off x="914400" y="2194560"/>
-            <a:ext cx="10332720" cy="3931920"/>
+            <a:off x="777240" y="1920240"/>
+            <a:ext cx="10637215" cy="4114800"/>
           </a:xfrm>
           <a:prstGeom prst="rect">
             <a:avLst/>
@@ -6025,20 +7270,20 @@
           <a:noFill/>
         </p:spPr>
         <p:txBody>
-          <a:bodyPr wrap="square">
+          <a:bodyPr wrap="square" lIns="45720" rIns="45720">
             <a:spAutoFit/>
           </a:bodyPr>
           <a:lstStyle/>
           <a:p>
             <a:pPr>
               <a:spcAft>
-                <a:spcPts val="800"/>
-              </a:spcAft>
-            </a:pPr>
-            <a:r>
-              <a:rPr sz="1800">
-                <a:solidFill>
-                  <a:srgbClr val="334E68"/>
+                <a:spcPts val="1350"/>
+              </a:spcAft>
+            </a:pPr>
+            <a:r>
+              <a:rPr sz="3000" b="0">
+                <a:solidFill>
+                  <a:srgbClr val="102A43"/>
                 </a:solidFill>
                 <a:latin typeface="Calibri"/>
               </a:rPr>
@@ -6048,13 +7293,13 @@
           <a:p>
             <a:pPr>
               <a:spcAft>
-                <a:spcPts val="800"/>
-              </a:spcAft>
-            </a:pPr>
-            <a:r>
-              <a:rPr sz="1800">
-                <a:solidFill>
-                  <a:srgbClr val="334E68"/>
+                <a:spcPts val="1350"/>
+              </a:spcAft>
+            </a:pPr>
+            <a:r>
+              <a:rPr sz="3000" b="0">
+                <a:solidFill>
+                  <a:srgbClr val="102A43"/>
                 </a:solidFill>
                 <a:latin typeface="Calibri"/>
               </a:rPr>
@@ -6064,13 +7309,13 @@
           <a:p>
             <a:pPr>
               <a:spcAft>
-                <a:spcPts val="800"/>
-              </a:spcAft>
-            </a:pPr>
-            <a:r>
-              <a:rPr sz="1800">
-                <a:solidFill>
-                  <a:srgbClr val="334E68"/>
+                <a:spcPts val="1350"/>
+              </a:spcAft>
+            </a:pPr>
+            <a:r>
+              <a:rPr sz="3000" b="0">
+                <a:solidFill>
+                  <a:srgbClr val="102A43"/>
                 </a:solidFill>
                 <a:latin typeface="Calibri"/>
               </a:rPr>
@@ -6080,17 +7325,1227 @@
           <a:p>
             <a:pPr>
               <a:spcAft>
-                <a:spcPts val="800"/>
-              </a:spcAft>
-            </a:pPr>
-            <a:r>
-              <a:rPr sz="1800">
-                <a:solidFill>
-                  <a:srgbClr val="334E68"/>
+                <a:spcPts val="1350"/>
+              </a:spcAft>
+            </a:pPr>
+            <a:r>
+              <a:rPr sz="3000" b="0">
+                <a:solidFill>
+                  <a:srgbClr val="102A43"/>
                 </a:solidFill>
                 <a:latin typeface="Calibri"/>
               </a:rPr>
               <a:t>•  Confirmar los roles y los materiales para el torneo real.</a:t>
+            </a:r>
+          </a:p>
+        </p:txBody>
+      </p:sp>
+    </p:spTree>
+  </p:cSld>
+  <p:clrMapOvr>
+    <a:masterClrMapping/>
+  </p:clrMapOvr>
+</p:sld>
+</file>
+
+<file path=ppt/slides/slide20.xml><?xml version="1.0" encoding="utf-8"?>
+<p:sld xmlns:a="http://schemas.openxmlformats.org/drawingml/2006/main" xmlns:p="http://schemas.openxmlformats.org/presentationml/2006/main" xmlns:r="http://schemas.openxmlformats.org/officeDocument/2006/relationships">
+  <p:cSld>
+    <p:spTree>
+      <p:nvGrpSpPr>
+        <p:cNvPr id="1" name=""/>
+        <p:cNvGrpSpPr/>
+        <p:nvPr/>
+      </p:nvGrpSpPr>
+      <p:grpSpPr/>
+      <p:sp>
+        <p:nvSpPr>
+          <p:cNvPr id="2" name="Rectangle 1"/>
+          <p:cNvSpPr/>
+          <p:nvPr/>
+        </p:nvSpPr>
+        <p:spPr>
+          <a:xfrm>
+            <a:off x="0" y="0"/>
+            <a:ext cx="12191695" cy="960120"/>
+          </a:xfrm>
+          <a:prstGeom prst="rect">
+            <a:avLst/>
+          </a:prstGeom>
+          <a:solidFill>
+            <a:srgbClr val="3172AC"/>
+          </a:solidFill>
+          <a:ln>
+            <a:noFill/>
+          </a:ln>
+          <a:effectLst/>
+        </p:spPr>
+        <p:style>
+          <a:lnRef idx="1">
+            <a:schemeClr val="accent1"/>
+          </a:lnRef>
+          <a:fillRef idx="3">
+            <a:schemeClr val="accent1"/>
+          </a:fillRef>
+          <a:effectRef idx="2">
+            <a:schemeClr val="accent1"/>
+          </a:effectRef>
+          <a:fontRef idx="minor">
+            <a:schemeClr val="lt1"/>
+          </a:fontRef>
+        </p:style>
+        <p:txBody>
+          <a:bodyPr rtlCol="0" anchor="ctr"/>
+          <a:lstStyle/>
+          <a:p>
+            <a:pPr algn="ctr"/>
+          </a:p>
+        </p:txBody>
+      </p:sp>
+      <p:sp>
+        <p:nvSpPr>
+          <p:cNvPr id="3" name="TextBox 2"/>
+          <p:cNvSpPr txBox="1"/>
+          <p:nvPr/>
+        </p:nvSpPr>
+        <p:spPr>
+          <a:xfrm>
+            <a:off x="457200" y="109728"/>
+            <a:ext cx="11277295" cy="777240"/>
+          </a:xfrm>
+          <a:prstGeom prst="rect">
+            <a:avLst/>
+          </a:prstGeom>
+          <a:noFill/>
+        </p:spPr>
+        <p:txBody>
+          <a:bodyPr wrap="square" lIns="45720" rIns="45720" anchor="ctr">
+            <a:spAutoFit/>
+          </a:bodyPr>
+          <a:lstStyle/>
+          <a:p>
+            <a:pPr algn="ctr">
+              <a:spcAft>
+                <a:spcPts val="1530"/>
+              </a:spcAft>
+            </a:pPr>
+            <a:r>
+              <a:rPr sz="3400" b="1">
+                <a:solidFill>
+                  <a:srgbClr val="FFFFFF"/>
+                </a:solidFill>
+                <a:latin typeface="Calibri"/>
+              </a:rPr>
+              <a:t>Ejercicios: respuestas</a:t>
+            </a:r>
+          </a:p>
+        </p:txBody>
+      </p:sp>
+      <p:sp>
+        <p:nvSpPr>
+          <p:cNvPr id="4" name="TextBox 3"/>
+          <p:cNvSpPr txBox="1"/>
+          <p:nvPr/>
+        </p:nvSpPr>
+        <p:spPr>
+          <a:xfrm>
+            <a:off x="10728655" y="6419088"/>
+            <a:ext cx="1097280" cy="365760"/>
+          </a:xfrm>
+          <a:prstGeom prst="rect">
+            <a:avLst/>
+          </a:prstGeom>
+          <a:noFill/>
+        </p:spPr>
+        <p:txBody>
+          <a:bodyPr wrap="square" lIns="45720" rIns="45720">
+            <a:spAutoFit/>
+          </a:bodyPr>
+          <a:lstStyle/>
+          <a:p>
+            <a:pPr algn="ctr">
+              <a:spcAft>
+                <a:spcPts val="540"/>
+              </a:spcAft>
+            </a:pPr>
+            <a:r>
+              <a:rPr sz="1200" b="0">
+                <a:solidFill>
+                  <a:srgbClr val="627D98"/>
+                </a:solidFill>
+                <a:latin typeface="Calibri"/>
+              </a:rPr>
+              <a:t>20</a:t>
+            </a:r>
+          </a:p>
+        </p:txBody>
+      </p:sp>
+      <p:sp>
+        <p:nvSpPr>
+          <p:cNvPr id="5" name="Rectangle 4"/>
+          <p:cNvSpPr/>
+          <p:nvPr/>
+        </p:nvSpPr>
+        <p:spPr>
+          <a:xfrm>
+            <a:off x="457200" y="1280160"/>
+            <a:ext cx="11277295" cy="4892040"/>
+          </a:xfrm>
+          <a:prstGeom prst="rect">
+            <a:avLst/>
+          </a:prstGeom>
+          <a:solidFill>
+            <a:srgbClr val="F0F4F8"/>
+          </a:solidFill>
+          <a:ln>
+            <a:noFill/>
+          </a:ln>
+          <a:effectLst/>
+        </p:spPr>
+        <p:style>
+          <a:lnRef idx="1">
+            <a:schemeClr val="accent1"/>
+          </a:lnRef>
+          <a:fillRef idx="3">
+            <a:schemeClr val="accent1"/>
+          </a:fillRef>
+          <a:effectRef idx="2">
+            <a:schemeClr val="accent1"/>
+          </a:effectRef>
+          <a:fontRef idx="minor">
+            <a:schemeClr val="lt1"/>
+          </a:fontRef>
+        </p:style>
+        <p:txBody>
+          <a:bodyPr rtlCol="0" anchor="ctr"/>
+          <a:lstStyle/>
+          <a:p>
+            <a:pPr algn="ctr"/>
+          </a:p>
+        </p:txBody>
+      </p:sp>
+      <p:sp>
+        <p:nvSpPr>
+          <p:cNvPr id="6" name="TextBox 5"/>
+          <p:cNvSpPr txBox="1"/>
+          <p:nvPr/>
+        </p:nvSpPr>
+        <p:spPr>
+          <a:xfrm>
+            <a:off x="777240" y="1417319"/>
+            <a:ext cx="10637215" cy="4617720"/>
+          </a:xfrm>
+          <a:prstGeom prst="rect">
+            <a:avLst/>
+          </a:prstGeom>
+          <a:noFill/>
+        </p:spPr>
+        <p:txBody>
+          <a:bodyPr wrap="square" lIns="45720" rIns="45720">
+            <a:spAutoFit/>
+          </a:bodyPr>
+          <a:lstStyle/>
+          <a:p>
+            <a:pPr>
+              <a:spcAft>
+                <a:spcPts val="1350"/>
+              </a:spcAft>
+            </a:pPr>
+            <a:r>
+              <a:rPr sz="3000" b="0">
+                <a:solidFill>
+                  <a:srgbClr val="102A43"/>
+                </a:solidFill>
+                <a:latin typeface="Calibri"/>
+              </a:rPr>
+              <a:t>•  1. «Resuelve los reclamos siguiendo el procedimiento»: Sí. «Documenta cada incidencia en la planilla o en el acta»: No, con una observación concreta (qué incidencia faltó registrar).</a:t>
+            </a:r>
+          </a:p>
+          <a:p>
+            <a:pPr>
+              <a:spcAft>
+                <a:spcPts val="1350"/>
+              </a:spcAft>
+            </a:pPr>
+            <a:r>
+              <a:rPr sz="3000" b="0">
+                <a:solidFill>
+                  <a:srgbClr val="102A43"/>
+                </a:solidFill>
+                <a:latin typeface="Calibri"/>
+              </a:rPr>
+              <a:t>•  2. Por ejemplo: «La decisión tuvo base en el art. 12.9, pero la sanción no fue proporcionada: para una primera falta leve correspondía una advertencia. Te sugiero empezar por la sanción más baja de la lista y subir si la falta se repite».</a:t>
+            </a:r>
+          </a:p>
+        </p:txBody>
+      </p:sp>
+    </p:spTree>
+  </p:cSld>
+  <p:clrMapOvr>
+    <a:masterClrMapping/>
+  </p:clrMapOvr>
+</p:sld>
+</file>
+
+<file path=ppt/slides/slide21.xml><?xml version="1.0" encoding="utf-8"?>
+<p:sld xmlns:a="http://schemas.openxmlformats.org/drawingml/2006/main" xmlns:p="http://schemas.openxmlformats.org/presentationml/2006/main" xmlns:r="http://schemas.openxmlformats.org/officeDocument/2006/relationships">
+  <p:cSld>
+    <p:spTree>
+      <p:nvGrpSpPr>
+        <p:cNvPr id="1" name=""/>
+        <p:cNvGrpSpPr/>
+        <p:nvPr/>
+      </p:nvGrpSpPr>
+      <p:grpSpPr/>
+      <p:sp>
+        <p:nvSpPr>
+          <p:cNvPr id="2" name="Rectangle 1"/>
+          <p:cNvSpPr/>
+          <p:nvPr/>
+        </p:nvSpPr>
+        <p:spPr>
+          <a:xfrm>
+            <a:off x="0" y="0"/>
+            <a:ext cx="12191695" cy="960120"/>
+          </a:xfrm>
+          <a:prstGeom prst="rect">
+            <a:avLst/>
+          </a:prstGeom>
+          <a:solidFill>
+            <a:srgbClr val="3172AC"/>
+          </a:solidFill>
+          <a:ln>
+            <a:noFill/>
+          </a:ln>
+          <a:effectLst/>
+        </p:spPr>
+        <p:style>
+          <a:lnRef idx="1">
+            <a:schemeClr val="accent1"/>
+          </a:lnRef>
+          <a:fillRef idx="3">
+            <a:schemeClr val="accent1"/>
+          </a:fillRef>
+          <a:effectRef idx="2">
+            <a:schemeClr val="accent1"/>
+          </a:effectRef>
+          <a:fontRef idx="minor">
+            <a:schemeClr val="lt1"/>
+          </a:fontRef>
+        </p:style>
+        <p:txBody>
+          <a:bodyPr rtlCol="0" anchor="ctr"/>
+          <a:lstStyle/>
+          <a:p>
+            <a:pPr algn="ctr"/>
+          </a:p>
+        </p:txBody>
+      </p:sp>
+      <p:sp>
+        <p:nvSpPr>
+          <p:cNvPr id="3" name="TextBox 2"/>
+          <p:cNvSpPr txBox="1"/>
+          <p:nvPr/>
+        </p:nvSpPr>
+        <p:spPr>
+          <a:xfrm>
+            <a:off x="457200" y="109728"/>
+            <a:ext cx="11277295" cy="777240"/>
+          </a:xfrm>
+          <a:prstGeom prst="rect">
+            <a:avLst/>
+          </a:prstGeom>
+          <a:noFill/>
+        </p:spPr>
+        <p:txBody>
+          <a:bodyPr wrap="square" lIns="45720" rIns="45720" anchor="ctr">
+            <a:spAutoFit/>
+          </a:bodyPr>
+          <a:lstStyle/>
+          <a:p>
+            <a:pPr algn="ctr">
+              <a:spcAft>
+                <a:spcPts val="1530"/>
+              </a:spcAft>
+            </a:pPr>
+            <a:r>
+              <a:rPr sz="3400" b="1">
+                <a:solidFill>
+                  <a:srgbClr val="FFFFFF"/>
+                </a:solidFill>
+                <a:latin typeface="Calibri"/>
+              </a:rPr>
+              <a:t>Quiz de la sesión</a:t>
+            </a:r>
+          </a:p>
+        </p:txBody>
+      </p:sp>
+      <p:sp>
+        <p:nvSpPr>
+          <p:cNvPr id="4" name="Rectangle 3"/>
+          <p:cNvSpPr/>
+          <p:nvPr/>
+        </p:nvSpPr>
+        <p:spPr>
+          <a:xfrm>
+            <a:off x="0" y="960120"/>
+            <a:ext cx="12191695" cy="548640"/>
+          </a:xfrm>
+          <a:prstGeom prst="rect">
+            <a:avLst/>
+          </a:prstGeom>
+          <a:solidFill>
+            <a:srgbClr val="4E6178"/>
+          </a:solidFill>
+          <a:ln>
+            <a:noFill/>
+          </a:ln>
+          <a:effectLst/>
+        </p:spPr>
+        <p:style>
+          <a:lnRef idx="1">
+            <a:schemeClr val="accent1"/>
+          </a:lnRef>
+          <a:fillRef idx="3">
+            <a:schemeClr val="accent1"/>
+          </a:fillRef>
+          <a:effectRef idx="2">
+            <a:schemeClr val="accent1"/>
+          </a:effectRef>
+          <a:fontRef idx="minor">
+            <a:schemeClr val="lt1"/>
+          </a:fontRef>
+        </p:style>
+        <p:txBody>
+          <a:bodyPr rtlCol="0" anchor="ctr"/>
+          <a:lstStyle/>
+          <a:p>
+            <a:pPr algn="ctr"/>
+          </a:p>
+        </p:txBody>
+      </p:sp>
+      <p:sp>
+        <p:nvSpPr>
+          <p:cNvPr id="5" name="TextBox 4"/>
+          <p:cNvSpPr txBox="1"/>
+          <p:nvPr/>
+        </p:nvSpPr>
+        <p:spPr>
+          <a:xfrm>
+            <a:off x="457200" y="987552"/>
+            <a:ext cx="11277295" cy="502920"/>
+          </a:xfrm>
+          <a:prstGeom prst="rect">
+            <a:avLst/>
+          </a:prstGeom>
+          <a:noFill/>
+        </p:spPr>
+        <p:txBody>
+          <a:bodyPr wrap="square" lIns="45720" rIns="45720" anchor="ctr">
+            <a:spAutoFit/>
+          </a:bodyPr>
+          <a:lstStyle/>
+          <a:p>
+            <a:pPr algn="ctr">
+              <a:spcAft>
+                <a:spcPts val="945"/>
+              </a:spcAft>
+            </a:pPr>
+            <a:r>
+              <a:rPr sz="2100" b="0">
+                <a:solidFill>
+                  <a:srgbClr val="FFFFFF"/>
+                </a:solidFill>
+                <a:latin typeface="Calibri"/>
+              </a:rPr>
+              <a:t>Responde de forma individual</a:t>
+            </a:r>
+          </a:p>
+        </p:txBody>
+      </p:sp>
+      <p:sp>
+        <p:nvSpPr>
+          <p:cNvPr id="6" name="TextBox 5"/>
+          <p:cNvSpPr txBox="1"/>
+          <p:nvPr/>
+        </p:nvSpPr>
+        <p:spPr>
+          <a:xfrm>
+            <a:off x="10728655" y="6419088"/>
+            <a:ext cx="1097280" cy="365760"/>
+          </a:xfrm>
+          <a:prstGeom prst="rect">
+            <a:avLst/>
+          </a:prstGeom>
+          <a:noFill/>
+        </p:spPr>
+        <p:txBody>
+          <a:bodyPr wrap="square" lIns="45720" rIns="45720">
+            <a:spAutoFit/>
+          </a:bodyPr>
+          <a:lstStyle/>
+          <a:p>
+            <a:pPr algn="ctr">
+              <a:spcAft>
+                <a:spcPts val="540"/>
+              </a:spcAft>
+            </a:pPr>
+            <a:r>
+              <a:rPr sz="1200" b="0">
+                <a:solidFill>
+                  <a:srgbClr val="627D98"/>
+                </a:solidFill>
+                <a:latin typeface="Calibri"/>
+              </a:rPr>
+              <a:t>21</a:t>
+            </a:r>
+          </a:p>
+        </p:txBody>
+      </p:sp>
+      <p:sp>
+        <p:nvSpPr>
+          <p:cNvPr id="7" name="Rectangle 6"/>
+          <p:cNvSpPr/>
+          <p:nvPr/>
+        </p:nvSpPr>
+        <p:spPr>
+          <a:xfrm>
+            <a:off x="457200" y="1783080"/>
+            <a:ext cx="11277295" cy="4389120"/>
+          </a:xfrm>
+          <a:prstGeom prst="rect">
+            <a:avLst/>
+          </a:prstGeom>
+          <a:solidFill>
+            <a:srgbClr val="F0F4F8"/>
+          </a:solidFill>
+          <a:ln>
+            <a:noFill/>
+          </a:ln>
+          <a:effectLst/>
+        </p:spPr>
+        <p:style>
+          <a:lnRef idx="1">
+            <a:schemeClr val="accent1"/>
+          </a:lnRef>
+          <a:fillRef idx="3">
+            <a:schemeClr val="accent1"/>
+          </a:fillRef>
+          <a:effectRef idx="2">
+            <a:schemeClr val="accent1"/>
+          </a:effectRef>
+          <a:fontRef idx="minor">
+            <a:schemeClr val="lt1"/>
+          </a:fontRef>
+        </p:style>
+        <p:txBody>
+          <a:bodyPr rtlCol="0" anchor="ctr"/>
+          <a:lstStyle/>
+          <a:p>
+            <a:pPr algn="ctr"/>
+          </a:p>
+        </p:txBody>
+      </p:sp>
+      <p:sp>
+        <p:nvSpPr>
+          <p:cNvPr id="8" name="TextBox 7"/>
+          <p:cNvSpPr txBox="1"/>
+          <p:nvPr/>
+        </p:nvSpPr>
+        <p:spPr>
+          <a:xfrm>
+            <a:off x="777240" y="1920240"/>
+            <a:ext cx="10637215" cy="4114800"/>
+          </a:xfrm>
+          <a:prstGeom prst="rect">
+            <a:avLst/>
+          </a:prstGeom>
+          <a:noFill/>
+        </p:spPr>
+        <p:txBody>
+          <a:bodyPr wrap="square" lIns="45720" rIns="45720">
+            <a:spAutoFit/>
+          </a:bodyPr>
+          <a:lstStyle/>
+          <a:p>
+            <a:pPr>
+              <a:spcAft>
+                <a:spcPts val="990"/>
+              </a:spcAft>
+            </a:pPr>
+            <a:r>
+              <a:rPr sz="2200" b="0">
+                <a:solidFill>
+                  <a:srgbClr val="102A43"/>
+                </a:solidFill>
+                <a:latin typeface="Calibri"/>
+              </a:rPr>
+              <a:t>•  1. Durante un simulacro, no se aplicó la sanción por uso de dispositivo electrónico. ¿Qué instrumento documenta esa observación?</a:t>
+            </a:r>
+          </a:p>
+          <a:p>
+            <a:pPr>
+              <a:spcAft>
+                <a:spcPts val="990"/>
+              </a:spcAft>
+            </a:pPr>
+            <a:r>
+              <a:rPr sz="2200" b="0">
+                <a:solidFill>
+                  <a:srgbClr val="102A43"/>
+                </a:solidFill>
+                <a:latin typeface="Calibri"/>
+              </a:rPr>
+              <a:t>•  2. ¿Cuál es el propósito principal de asignar roles antes de la sesión presencial?</a:t>
+            </a:r>
+          </a:p>
+          <a:p>
+            <a:pPr>
+              <a:spcAft>
+                <a:spcPts val="990"/>
+              </a:spcAft>
+            </a:pPr>
+            <a:r>
+              <a:rPr sz="2200" b="0">
+                <a:solidFill>
+                  <a:srgbClr val="102A43"/>
+                </a:solidFill>
+                <a:latin typeface="Calibri"/>
+              </a:rPr>
+              <a:t>•  3. Un reclamo de triple repetición resulta incorrecto. ¿Qué efecto tiene además?</a:t>
+            </a:r>
+          </a:p>
+          <a:p>
+            <a:pPr>
+              <a:spcAft>
+                <a:spcPts val="990"/>
+              </a:spcAft>
+            </a:pPr>
+            <a:r>
+              <a:rPr sz="2200" b="0">
+                <a:solidFill>
+                  <a:srgbClr val="102A43"/>
+                </a:solidFill>
+                <a:latin typeface="Calibri"/>
+              </a:rPr>
+              <a:t>•  4. ¿En qué orden se ofrecen tablas correctamente?</a:t>
+            </a:r>
+          </a:p>
+          <a:p>
+            <a:pPr>
+              <a:spcAft>
+                <a:spcPts val="990"/>
+              </a:spcAft>
+            </a:pPr>
+            <a:r>
+              <a:rPr sz="2200" b="0">
+                <a:solidFill>
+                  <a:srgbClr val="102A43"/>
+                </a:solidFill>
+                <a:latin typeface="Calibri"/>
+              </a:rPr>
+              <a:t>•  5. En el simulacro, ¿conoce la persona árbitra de antemano la incidencia que va a arbitrar?</a:t>
+            </a:r>
+          </a:p>
+          <a:p>
+            <a:pPr>
+              <a:spcAft>
+                <a:spcPts val="990"/>
+              </a:spcAft>
+            </a:pPr>
+            <a:r>
+              <a:rPr sz="2200" b="0">
+                <a:solidFill>
+                  <a:srgbClr val="102A43"/>
+                </a:solidFill>
+                <a:latin typeface="Calibri"/>
+              </a:rPr>
+              <a:t>•  6. Según la lista de cotejo, ¿qué debe verificar la persona árbitra antes de iniciar la ronda?</a:t>
+            </a:r>
+          </a:p>
+          <a:p>
+            <a:pPr>
+              <a:spcAft>
+                <a:spcPts val="990"/>
+              </a:spcAft>
+            </a:pPr>
+            <a:r>
+              <a:rPr sz="2200" b="0">
+                <a:solidFill>
+                  <a:srgbClr val="102A43"/>
+                </a:solidFill>
+                <a:latin typeface="Calibri"/>
+              </a:rPr>
+              <a:t>•  7. ¿Qué función cumple la mesa de control en el torneo presencial?</a:t>
+            </a:r>
+          </a:p>
+          <a:p>
+            <a:pPr>
+              <a:spcAft>
+                <a:spcPts val="990"/>
+              </a:spcAft>
+            </a:pPr>
+            <a:r>
+              <a:rPr sz="2200" b="0">
+                <a:solidFill>
+                  <a:srgbClr val="102A43"/>
+                </a:solidFill>
+                <a:latin typeface="Calibri"/>
+              </a:rPr>
+              <a:t>•  8. ¿Qué hace un árbitro auxiliar cuando no puede resolver una incidencia?</a:t>
+            </a:r>
+          </a:p>
+        </p:txBody>
+      </p:sp>
+    </p:spTree>
+  </p:cSld>
+  <p:clrMapOvr>
+    <a:masterClrMapping/>
+  </p:clrMapOvr>
+</p:sld>
+</file>
+
+<file path=ppt/slides/slide22.xml><?xml version="1.0" encoding="utf-8"?>
+<p:sld xmlns:a="http://schemas.openxmlformats.org/drawingml/2006/main" xmlns:p="http://schemas.openxmlformats.org/presentationml/2006/main" xmlns:r="http://schemas.openxmlformats.org/officeDocument/2006/relationships">
+  <p:cSld>
+    <p:spTree>
+      <p:nvGrpSpPr>
+        <p:cNvPr id="1" name=""/>
+        <p:cNvGrpSpPr/>
+        <p:nvPr/>
+      </p:nvGrpSpPr>
+      <p:grpSpPr/>
+      <p:sp>
+        <p:nvSpPr>
+          <p:cNvPr id="2" name="Rectangle 1"/>
+          <p:cNvSpPr/>
+          <p:nvPr/>
+        </p:nvSpPr>
+        <p:spPr>
+          <a:xfrm>
+            <a:off x="0" y="0"/>
+            <a:ext cx="12191695" cy="960120"/>
+          </a:xfrm>
+          <a:prstGeom prst="rect">
+            <a:avLst/>
+          </a:prstGeom>
+          <a:solidFill>
+            <a:srgbClr val="3172AC"/>
+          </a:solidFill>
+          <a:ln>
+            <a:noFill/>
+          </a:ln>
+          <a:effectLst/>
+        </p:spPr>
+        <p:style>
+          <a:lnRef idx="1">
+            <a:schemeClr val="accent1"/>
+          </a:lnRef>
+          <a:fillRef idx="3">
+            <a:schemeClr val="accent1"/>
+          </a:fillRef>
+          <a:effectRef idx="2">
+            <a:schemeClr val="accent1"/>
+          </a:effectRef>
+          <a:fontRef idx="minor">
+            <a:schemeClr val="lt1"/>
+          </a:fontRef>
+        </p:style>
+        <p:txBody>
+          <a:bodyPr rtlCol="0" anchor="ctr"/>
+          <a:lstStyle/>
+          <a:p>
+            <a:pPr algn="ctr"/>
+          </a:p>
+        </p:txBody>
+      </p:sp>
+      <p:sp>
+        <p:nvSpPr>
+          <p:cNvPr id="3" name="TextBox 2"/>
+          <p:cNvSpPr txBox="1"/>
+          <p:nvPr/>
+        </p:nvSpPr>
+        <p:spPr>
+          <a:xfrm>
+            <a:off x="457200" y="109728"/>
+            <a:ext cx="11277295" cy="777240"/>
+          </a:xfrm>
+          <a:prstGeom prst="rect">
+            <a:avLst/>
+          </a:prstGeom>
+          <a:noFill/>
+        </p:spPr>
+        <p:txBody>
+          <a:bodyPr wrap="square" lIns="45720" rIns="45720" anchor="ctr">
+            <a:spAutoFit/>
+          </a:bodyPr>
+          <a:lstStyle/>
+          <a:p>
+            <a:pPr algn="ctr">
+              <a:spcAft>
+                <a:spcPts val="1530"/>
+              </a:spcAft>
+            </a:pPr>
+            <a:r>
+              <a:rPr sz="3400" b="1">
+                <a:solidFill>
+                  <a:srgbClr val="FFFFFF"/>
+                </a:solidFill>
+                <a:latin typeface="Calibri"/>
+              </a:rPr>
+              <a:t>Quiz: respuestas</a:t>
+            </a:r>
+          </a:p>
+        </p:txBody>
+      </p:sp>
+      <p:sp>
+        <p:nvSpPr>
+          <p:cNvPr id="4" name="TextBox 3"/>
+          <p:cNvSpPr txBox="1"/>
+          <p:nvPr/>
+        </p:nvSpPr>
+        <p:spPr>
+          <a:xfrm>
+            <a:off x="10728655" y="6419088"/>
+            <a:ext cx="1097280" cy="365760"/>
+          </a:xfrm>
+          <a:prstGeom prst="rect">
+            <a:avLst/>
+          </a:prstGeom>
+          <a:noFill/>
+        </p:spPr>
+        <p:txBody>
+          <a:bodyPr wrap="square" lIns="45720" rIns="45720">
+            <a:spAutoFit/>
+          </a:bodyPr>
+          <a:lstStyle/>
+          <a:p>
+            <a:pPr algn="ctr">
+              <a:spcAft>
+                <a:spcPts val="540"/>
+              </a:spcAft>
+            </a:pPr>
+            <a:r>
+              <a:rPr sz="1200" b="0">
+                <a:solidFill>
+                  <a:srgbClr val="627D98"/>
+                </a:solidFill>
+                <a:latin typeface="Calibri"/>
+              </a:rPr>
+              <a:t>22</a:t>
+            </a:r>
+          </a:p>
+        </p:txBody>
+      </p:sp>
+      <p:sp>
+        <p:nvSpPr>
+          <p:cNvPr id="5" name="Rectangle 4"/>
+          <p:cNvSpPr/>
+          <p:nvPr/>
+        </p:nvSpPr>
+        <p:spPr>
+          <a:xfrm>
+            <a:off x="457200" y="1280160"/>
+            <a:ext cx="11277295" cy="4892040"/>
+          </a:xfrm>
+          <a:prstGeom prst="rect">
+            <a:avLst/>
+          </a:prstGeom>
+          <a:solidFill>
+            <a:srgbClr val="F0F4F8"/>
+          </a:solidFill>
+          <a:ln>
+            <a:noFill/>
+          </a:ln>
+          <a:effectLst/>
+        </p:spPr>
+        <p:style>
+          <a:lnRef idx="1">
+            <a:schemeClr val="accent1"/>
+          </a:lnRef>
+          <a:fillRef idx="3">
+            <a:schemeClr val="accent1"/>
+          </a:fillRef>
+          <a:effectRef idx="2">
+            <a:schemeClr val="accent1"/>
+          </a:effectRef>
+          <a:fontRef idx="minor">
+            <a:schemeClr val="lt1"/>
+          </a:fontRef>
+        </p:style>
+        <p:txBody>
+          <a:bodyPr rtlCol="0" anchor="ctr"/>
+          <a:lstStyle/>
+          <a:p>
+            <a:pPr algn="ctr"/>
+          </a:p>
+        </p:txBody>
+      </p:sp>
+      <p:sp>
+        <p:nvSpPr>
+          <p:cNvPr id="6" name="TextBox 5"/>
+          <p:cNvSpPr txBox="1"/>
+          <p:nvPr/>
+        </p:nvSpPr>
+        <p:spPr>
+          <a:xfrm>
+            <a:off x="777240" y="1417319"/>
+            <a:ext cx="10637215" cy="4617720"/>
+          </a:xfrm>
+          <a:prstGeom prst="rect">
+            <a:avLst/>
+          </a:prstGeom>
+          <a:noFill/>
+        </p:spPr>
+        <p:txBody>
+          <a:bodyPr wrap="square" lIns="45720" rIns="45720">
+            <a:spAutoFit/>
+          </a:bodyPr>
+          <a:lstStyle/>
+          <a:p>
+            <a:pPr>
+              <a:spcAft>
+                <a:spcPts val="1215"/>
+              </a:spcAft>
+            </a:pPr>
+            <a:r>
+              <a:rPr sz="2700" b="0">
+                <a:solidFill>
+                  <a:srgbClr val="102A43"/>
+                </a:solidFill>
+                <a:latin typeface="Calibri"/>
+              </a:rPr>
+              <a:t>•  1. La lista de cotejo.</a:t>
+            </a:r>
+          </a:p>
+          <a:p>
+            <a:pPr>
+              <a:spcAft>
+                <a:spcPts val="1215"/>
+              </a:spcAft>
+            </a:pPr>
+            <a:r>
+              <a:rPr sz="2700" b="0">
+                <a:solidFill>
+                  <a:srgbClr val="102A43"/>
+                </a:solidFill>
+                <a:latin typeface="Calibri"/>
+              </a:rPr>
+              <a:t>•  2. Garantizar una organización clara y una evaluación práctica ordenada.</a:t>
+            </a:r>
+          </a:p>
+          <a:p>
+            <a:pPr>
+              <a:spcAft>
+                <a:spcPts val="1215"/>
+              </a:spcAft>
+            </a:pPr>
+            <a:r>
+              <a:rPr sz="2700" b="0">
+                <a:solidFill>
+                  <a:srgbClr val="102A43"/>
+                </a:solidFill>
+                <a:latin typeface="Calibri"/>
+              </a:rPr>
+              <a:t>•  3. Cuenta como una oferta de tablas.</a:t>
+            </a:r>
+          </a:p>
+          <a:p>
+            <a:pPr>
+              <a:spcAft>
+                <a:spcPts val="1215"/>
+              </a:spcAft>
+            </a:pPr>
+            <a:r>
+              <a:rPr sz="2700" b="0">
+                <a:solidFill>
+                  <a:srgbClr val="102A43"/>
+                </a:solidFill>
+                <a:latin typeface="Calibri"/>
+              </a:rPr>
+              <a:t>•  4. Primero la jugada, después la oferta y por último presionar el reloj.</a:t>
+            </a:r>
+          </a:p>
+          <a:p>
+            <a:pPr>
+              <a:spcAft>
+                <a:spcPts val="1215"/>
+              </a:spcAft>
+            </a:pPr>
+            <a:r>
+              <a:rPr sz="2700" b="0">
+                <a:solidFill>
+                  <a:srgbClr val="102A43"/>
+                </a:solidFill>
+                <a:latin typeface="Calibri"/>
+              </a:rPr>
+              <a:t>•  5. No.</a:t>
+            </a:r>
+          </a:p>
+          <a:p>
+            <a:pPr>
+              <a:spcAft>
+                <a:spcPts val="1215"/>
+              </a:spcAft>
+            </a:pPr>
+            <a:r>
+              <a:rPr sz="2700" b="0">
+                <a:solidFill>
+                  <a:srgbClr val="102A43"/>
+                </a:solidFill>
+                <a:latin typeface="Calibri"/>
+              </a:rPr>
+              <a:t>•  6. La acreditación y el emparejamiento.</a:t>
+            </a:r>
+          </a:p>
+          <a:p>
+            <a:pPr>
+              <a:spcAft>
+                <a:spcPts val="1215"/>
+              </a:spcAft>
+            </a:pPr>
+            <a:r>
+              <a:rPr sz="2700" b="0">
+                <a:solidFill>
+                  <a:srgbClr val="102A43"/>
+                </a:solidFill>
+                <a:latin typeface="Calibri"/>
+              </a:rPr>
+              <a:t>•  7. Inscripción, emparejamientos, resultados y desempates.</a:t>
+            </a:r>
+          </a:p>
+          <a:p>
+            <a:pPr>
+              <a:spcAft>
+                <a:spcPts val="1215"/>
+              </a:spcAft>
+            </a:pPr>
+            <a:r>
+              <a:rPr sz="2700" b="0">
+                <a:solidFill>
+                  <a:srgbClr val="102A43"/>
+                </a:solidFill>
+                <a:latin typeface="Calibri"/>
+              </a:rPr>
+              <a:t>•  8. Informa al árbitro principal y aplica lo que se acuerde.</a:t>
+            </a:r>
+          </a:p>
+        </p:txBody>
+      </p:sp>
+    </p:spTree>
+  </p:cSld>
+  <p:clrMapOvr>
+    <a:masterClrMapping/>
+  </p:clrMapOvr>
+</p:sld>
+</file>
+
+<file path=ppt/slides/slide23.xml><?xml version="1.0" encoding="utf-8"?>
+<p:sld xmlns:a="http://schemas.openxmlformats.org/drawingml/2006/main" xmlns:p="http://schemas.openxmlformats.org/presentationml/2006/main" xmlns:r="http://schemas.openxmlformats.org/officeDocument/2006/relationships">
+  <p:cSld>
+    <p:spTree>
+      <p:nvGrpSpPr>
+        <p:cNvPr id="1" name=""/>
+        <p:cNvGrpSpPr/>
+        <p:nvPr/>
+      </p:nvGrpSpPr>
+      <p:grpSpPr/>
+      <p:sp>
+        <p:nvSpPr>
+          <p:cNvPr id="2" name="Rectangle 1"/>
+          <p:cNvSpPr/>
+          <p:nvPr/>
+        </p:nvSpPr>
+        <p:spPr>
+          <a:xfrm>
+            <a:off x="0" y="0"/>
+            <a:ext cx="12191695" cy="6858000"/>
+          </a:xfrm>
+          <a:prstGeom prst="rect">
+            <a:avLst/>
+          </a:prstGeom>
+          <a:solidFill>
+            <a:srgbClr val="102A43"/>
+          </a:solidFill>
+          <a:ln>
+            <a:noFill/>
+          </a:ln>
+          <a:effectLst/>
+        </p:spPr>
+        <p:style>
+          <a:lnRef idx="1">
+            <a:schemeClr val="accent1"/>
+          </a:lnRef>
+          <a:fillRef idx="3">
+            <a:schemeClr val="accent1"/>
+          </a:fillRef>
+          <a:effectRef idx="2">
+            <a:schemeClr val="accent1"/>
+          </a:effectRef>
+          <a:fontRef idx="minor">
+            <a:schemeClr val="lt1"/>
+          </a:fontRef>
+        </p:style>
+        <p:txBody>
+          <a:bodyPr rtlCol="0" anchor="ctr"/>
+          <a:lstStyle/>
+          <a:p>
+            <a:pPr algn="ctr"/>
+          </a:p>
+        </p:txBody>
+      </p:sp>
+      <p:sp>
+        <p:nvSpPr>
+          <p:cNvPr id="3" name="TextBox 2"/>
+          <p:cNvSpPr txBox="1"/>
+          <p:nvPr/>
+        </p:nvSpPr>
+        <p:spPr>
+          <a:xfrm>
+            <a:off x="10728655" y="6419088"/>
+            <a:ext cx="1097280" cy="365760"/>
+          </a:xfrm>
+          <a:prstGeom prst="rect">
+            <a:avLst/>
+          </a:prstGeom>
+          <a:noFill/>
+        </p:spPr>
+        <p:txBody>
+          <a:bodyPr wrap="square" lIns="45720" rIns="45720">
+            <a:spAutoFit/>
+          </a:bodyPr>
+          <a:lstStyle/>
+          <a:p>
+            <a:pPr algn="ctr">
+              <a:spcAft>
+                <a:spcPts val="540"/>
+              </a:spcAft>
+            </a:pPr>
+            <a:r>
+              <a:rPr sz="1200" b="0">
+                <a:solidFill>
+                  <a:srgbClr val="9FB3C8"/>
+                </a:solidFill>
+                <a:latin typeface="Calibri"/>
+              </a:rPr>
+              <a:t>23</a:t>
+            </a:r>
+          </a:p>
+        </p:txBody>
+      </p:sp>
+      <p:sp>
+        <p:nvSpPr>
+          <p:cNvPr id="4" name="TextBox 3"/>
+          <p:cNvSpPr txBox="1"/>
+          <p:nvPr/>
+        </p:nvSpPr>
+        <p:spPr>
+          <a:xfrm>
+            <a:off x="731520" y="640080"/>
+            <a:ext cx="10728655" cy="548640"/>
+          </a:xfrm>
+          <a:prstGeom prst="rect">
+            <a:avLst/>
+          </a:prstGeom>
+          <a:noFill/>
+        </p:spPr>
+        <p:txBody>
+          <a:bodyPr wrap="square" lIns="45720" rIns="45720">
+            <a:spAutoFit/>
+          </a:bodyPr>
+          <a:lstStyle/>
+          <a:p>
+            <a:pPr>
+              <a:spcAft>
+                <a:spcPts val="900"/>
+              </a:spcAft>
+            </a:pPr>
+            <a:r>
+              <a:rPr sz="2000" b="1">
+                <a:solidFill>
+                  <a:srgbClr val="F4C430"/>
+                </a:solidFill>
+                <a:latin typeface="Calibri"/>
+              </a:rPr>
+              <a:t>TAREA PARA LA PRÓXIMA SESIÓN</a:t>
+            </a:r>
+          </a:p>
+        </p:txBody>
+      </p:sp>
+      <p:sp>
+        <p:nvSpPr>
+          <p:cNvPr id="5" name="TextBox 4"/>
+          <p:cNvSpPr txBox="1"/>
+          <p:nvPr/>
+        </p:nvSpPr>
+        <p:spPr>
+          <a:xfrm>
+            <a:off x="731520" y="1371600"/>
+            <a:ext cx="10728655" cy="3108960"/>
+          </a:xfrm>
+          <a:prstGeom prst="rect">
+            <a:avLst/>
+          </a:prstGeom>
+          <a:noFill/>
+        </p:spPr>
+        <p:txBody>
+          <a:bodyPr wrap="square" lIns="45720" rIns="45720">
+            <a:spAutoFit/>
+          </a:bodyPr>
+          <a:lstStyle/>
+          <a:p>
+            <a:pPr>
+              <a:spcAft>
+                <a:spcPts val="1440"/>
+              </a:spcAft>
+            </a:pPr>
+            <a:r>
+              <a:rPr sz="3200" b="0">
+                <a:solidFill>
+                  <a:srgbClr val="FFFFFF"/>
+                </a:solidFill>
+                <a:latin typeface="Calibri"/>
+              </a:rPr>
+              <a:t>Confirmar el rol asignado, revisar la lista de cotejo y reunir los materiales solicitados para el día presencial.</a:t>
+            </a:r>
+          </a:p>
+        </p:txBody>
+      </p:sp>
+      <p:sp>
+        <p:nvSpPr>
+          <p:cNvPr id="6" name="TextBox 5"/>
+          <p:cNvSpPr txBox="1"/>
+          <p:nvPr/>
+        </p:nvSpPr>
+        <p:spPr>
+          <a:xfrm>
+            <a:off x="731520" y="4846320"/>
+            <a:ext cx="10728655" cy="731520"/>
+          </a:xfrm>
+          <a:prstGeom prst="rect">
+            <a:avLst/>
+          </a:prstGeom>
+          <a:noFill/>
+        </p:spPr>
+        <p:txBody>
+          <a:bodyPr wrap="square" lIns="45720" rIns="45720">
+            <a:spAutoFit/>
+          </a:bodyPr>
+          <a:lstStyle/>
+          <a:p>
+            <a:pPr>
+              <a:spcAft>
+                <a:spcPts val="1080"/>
+              </a:spcAft>
+            </a:pPr>
+            <a:r>
+              <a:rPr sz="2400" b="0">
+                <a:solidFill>
+                  <a:srgbClr val="CADCFC"/>
+                </a:solidFill>
+                <a:latin typeface="Calibri"/>
+              </a:rPr>
+              <a:t>¿Dudas? Este es el momento. Gracias por tu participación.</a:t>
             </a:r>
           </a:p>
         </p:txBody>
@@ -6115,20 +8570,20 @@
       <p:grpSpPr/>
       <p:sp>
         <p:nvSpPr>
-          <p:cNvPr id="2" name="Oval 1"/>
+          <p:cNvPr id="2" name="Rectangle 1"/>
           <p:cNvSpPr/>
           <p:nvPr/>
         </p:nvSpPr>
         <p:spPr>
           <a:xfrm>
-            <a:off x="548640" y="502920"/>
-            <a:ext cx="502920" cy="502920"/>
-          </a:xfrm>
-          <a:prstGeom prst="ellipse">
+            <a:off x="0" y="0"/>
+            <a:ext cx="12191695" cy="960120"/>
+          </a:xfrm>
+          <a:prstGeom prst="rect">
             <a:avLst/>
           </a:prstGeom>
           <a:solidFill>
-            <a:srgbClr val="DE911D"/>
+            <a:srgbClr val="3172AC"/>
           </a:solidFill>
           <a:ln>
             <a:noFill/>
@@ -6165,8 +8620,8 @@
         </p:nvSpPr>
         <p:spPr>
           <a:xfrm>
-            <a:off x="548640" y="502920"/>
-            <a:ext cx="502920" cy="502920"/>
+            <a:off x="457200" y="109728"/>
+            <a:ext cx="11277295" cy="777240"/>
           </a:xfrm>
           <a:prstGeom prst="rect">
             <a:avLst/>
@@ -6174,34 +8629,82 @@
           <a:noFill/>
         </p:spPr>
         <p:txBody>
-          <a:bodyPr wrap="square">
+          <a:bodyPr wrap="square" lIns="45720" rIns="45720" anchor="ctr">
             <a:spAutoFit/>
           </a:bodyPr>
           <a:lstStyle/>
           <a:p>
+            <a:pPr algn="ctr">
+              <a:spcAft>
+                <a:spcPts val="1530"/>
+              </a:spcAft>
+            </a:pPr>
+            <a:r>
+              <a:rPr sz="3400" b="1">
+                <a:solidFill>
+                  <a:srgbClr val="FFFFFF"/>
+                </a:solidFill>
+                <a:latin typeface="Calibri"/>
+              </a:rPr>
+              <a:t>Cronograma de la sesión</a:t>
+            </a:r>
+          </a:p>
+        </p:txBody>
+      </p:sp>
+      <p:sp>
+        <p:nvSpPr>
+          <p:cNvPr id="4" name="Rectangle 3"/>
+          <p:cNvSpPr/>
+          <p:nvPr/>
+        </p:nvSpPr>
+        <p:spPr>
+          <a:xfrm>
+            <a:off x="0" y="960120"/>
+            <a:ext cx="12191695" cy="548640"/>
+          </a:xfrm>
+          <a:prstGeom prst="rect">
+            <a:avLst/>
+          </a:prstGeom>
+          <a:solidFill>
+            <a:srgbClr val="4E6178"/>
+          </a:solidFill>
+          <a:ln>
+            <a:noFill/>
+          </a:ln>
+          <a:effectLst/>
+        </p:spPr>
+        <p:style>
+          <a:lnRef idx="1">
+            <a:schemeClr val="accent1"/>
+          </a:lnRef>
+          <a:fillRef idx="3">
+            <a:schemeClr val="accent1"/>
+          </a:fillRef>
+          <a:effectRef idx="2">
+            <a:schemeClr val="accent1"/>
+          </a:effectRef>
+          <a:fontRef idx="minor">
+            <a:schemeClr val="lt1"/>
+          </a:fontRef>
+        </p:style>
+        <p:txBody>
+          <a:bodyPr rtlCol="0" anchor="ctr"/>
+          <a:lstStyle/>
+          <a:p>
             <a:pPr algn="ctr"/>
-            <a:r>
-              <a:rPr sz="2000" b="0">
-                <a:solidFill>
-                  <a:srgbClr val="0A1F33"/>
-                </a:solidFill>
-                <a:latin typeface="Calibri"/>
-              </a:rPr>
-              <a:t>◷</a:t>
-            </a:r>
-          </a:p>
-        </p:txBody>
-      </p:sp>
-      <p:sp>
-        <p:nvSpPr>
-          <p:cNvPr id="4" name="TextBox 3"/>
+          </a:p>
+        </p:txBody>
+      </p:sp>
+      <p:sp>
+        <p:nvSpPr>
+          <p:cNvPr id="5" name="TextBox 4"/>
           <p:cNvSpPr txBox="1"/>
           <p:nvPr/>
         </p:nvSpPr>
         <p:spPr>
           <a:xfrm>
-            <a:off x="1234440" y="530352"/>
-            <a:ext cx="9144000" cy="457200"/>
+            <a:off x="457200" y="987552"/>
+            <a:ext cx="11277295" cy="502920"/>
           </a:xfrm>
           <a:prstGeom prst="rect">
             <a:avLst/>
@@ -6209,34 +8712,78 @@
           <a:noFill/>
         </p:spPr>
         <p:txBody>
-          <a:bodyPr wrap="square">
+          <a:bodyPr wrap="square" lIns="45720" rIns="45720" anchor="ctr">
             <a:spAutoFit/>
           </a:bodyPr>
           <a:lstStyle/>
           <a:p>
-            <a:r>
-              <a:rPr sz="1400" b="1">
-                <a:solidFill>
-                  <a:srgbClr val="DE911D"/>
-                </a:solidFill>
-                <a:latin typeface="Calibri"/>
-              </a:rPr>
-              <a:t>CRONOGRAMA DE LA SESIÓN · 5 HORAS</a:t>
+            <a:pPr algn="ctr">
+              <a:spcAft>
+                <a:spcPts val="945"/>
+              </a:spcAft>
+            </a:pPr>
+            <a:r>
+              <a:rPr sz="2100" b="0">
+                <a:solidFill>
+                  <a:srgbClr val="FFFFFF"/>
+                </a:solidFill>
+                <a:latin typeface="Calibri"/>
+              </a:rPr>
+              <a:t>Sesión 7 · 5 horas (300 minutos)</a:t>
+            </a:r>
+          </a:p>
+        </p:txBody>
+      </p:sp>
+      <p:sp>
+        <p:nvSpPr>
+          <p:cNvPr id="6" name="TextBox 5"/>
+          <p:cNvSpPr txBox="1"/>
+          <p:nvPr/>
+        </p:nvSpPr>
+        <p:spPr>
+          <a:xfrm>
+            <a:off x="10728655" y="6419088"/>
+            <a:ext cx="1097280" cy="365760"/>
+          </a:xfrm>
+          <a:prstGeom prst="rect">
+            <a:avLst/>
+          </a:prstGeom>
+          <a:noFill/>
+        </p:spPr>
+        <p:txBody>
+          <a:bodyPr wrap="square" lIns="45720" rIns="45720">
+            <a:spAutoFit/>
+          </a:bodyPr>
+          <a:lstStyle/>
+          <a:p>
+            <a:pPr algn="ctr">
+              <a:spcAft>
+                <a:spcPts val="540"/>
+              </a:spcAft>
+            </a:pPr>
+            <a:r>
+              <a:rPr sz="1200" b="0">
+                <a:solidFill>
+                  <a:srgbClr val="627D98"/>
+                </a:solidFill>
+                <a:latin typeface="Calibri"/>
+              </a:rPr>
+              <a:t>3</a:t>
             </a:r>
           </a:p>
         </p:txBody>
       </p:sp>
       <p:graphicFrame>
         <p:nvGraphicFramePr>
-          <p:cNvPr id="5" name="Table 4"/>
+          <p:cNvPr id="7" name="Table 6"/>
           <p:cNvGraphicFramePr>
             <a:graphicFrameLocks noGrp="1"/>
           </p:cNvGraphicFramePr>
           <p:nvPr/>
         </p:nvGraphicFramePr>
         <p:xfrm>
-          <a:off x="548640" y="1143000"/>
-          <a:ext cx="11064240" cy="5029200"/>
+          <a:off x="731520" y="1783080"/>
+          <a:ext cx="10728655" cy="4572000"/>
         </p:xfrm>
         <a:graphic>
           <a:graphicData uri="http://schemas.openxmlformats.org/drawingml/2006/table">
@@ -6245,29 +8792,30 @@
                 <a:tableStyleId>{5C22544A-7EE6-4342-B048-85BDC9FD1C3A}</a:tableStyleId>
               </a:tblPr>
               <a:tblGrid>
-                <a:gridCol w="1737360"/>
-                <a:gridCol w="1188720"/>
-                <a:gridCol w="8138160"/>
+                <a:gridCol w="2103120"/>
+                <a:gridCol w="1463040"/>
+                <a:gridCol w="7162495"/>
               </a:tblGrid>
-              <a:tr h="457200">
+              <a:tr h="415636">
                 <a:tc>
                   <a:txBody>
                     <a:bodyPr/>
                     <a:lstStyle/>
                     <a:p>
                       <a:r>
-                        <a:rPr sz="1300" b="1">
+                        <a:rPr sz="1800" b="1">
                           <a:solidFill>
                             <a:srgbClr val="FFFFFF"/>
                           </a:solidFill>
+                          <a:latin typeface="Calibri"/>
                         </a:rPr>
-                        <a:t>Tiempo</a:t>
+                        <a:t>Horario</a:t>
                       </a:r>
                     </a:p>
                   </a:txBody>
                   <a:tcPr>
                     <a:solidFill>
-                      <a:srgbClr val="102A43"/>
+                      <a:srgbClr val="3172AC"/>
                     </a:solidFill>
                   </a:tcPr>
                 </a:tc>
@@ -6277,10 +8825,11 @@
                     <a:lstStyle/>
                     <a:p>
                       <a:r>
-                        <a:rPr sz="1300" b="1">
+                        <a:rPr sz="1800" b="1">
                           <a:solidFill>
                             <a:srgbClr val="FFFFFF"/>
                           </a:solidFill>
+                          <a:latin typeface="Calibri"/>
                         </a:rPr>
                         <a:t>Duración</a:t>
                       </a:r>
@@ -6288,7 +8837,7 @@
                   </a:txBody>
                   <a:tcPr>
                     <a:solidFill>
-                      <a:srgbClr val="102A43"/>
+                      <a:srgbClr val="3172AC"/>
                     </a:solidFill>
                   </a:tcPr>
                 </a:tc>
@@ -6298,33 +8847,35 @@
                     <a:lstStyle/>
                     <a:p>
                       <a:r>
-                        <a:rPr sz="1300" b="1">
+                        <a:rPr sz="1800" b="1">
                           <a:solidFill>
                             <a:srgbClr val="FFFFFF"/>
                           </a:solidFill>
+                          <a:latin typeface="Calibri"/>
                         </a:rPr>
-                        <a:t>Actividad</a:t>
+                        <a:t>Bloque</a:t>
                       </a:r>
                     </a:p>
                   </a:txBody>
                   <a:tcPr>
                     <a:solidFill>
-                      <a:srgbClr val="102A43"/>
+                      <a:srgbClr val="3172AC"/>
                     </a:solidFill>
                   </a:tcPr>
                 </a:tc>
               </a:tr>
-              <a:tr h="457200">
+              <a:tr h="415636">
                 <a:tc>
                   <a:txBody>
                     <a:bodyPr/>
                     <a:lstStyle/>
                     <a:p>
                       <a:r>
-                        <a:rPr sz="1200" b="0">
+                        <a:rPr sz="1600" b="0">
                           <a:solidFill>
-                            <a:srgbClr val="334E68"/>
+                            <a:srgbClr val="102A43"/>
                           </a:solidFill>
+                          <a:latin typeface="Calibri"/>
                         </a:rPr>
                         <a:t>0:00 – 0:15</a:t>
                       </a:r>
@@ -6342,10 +8893,11 @@
                     <a:lstStyle/>
                     <a:p>
                       <a:r>
-                        <a:rPr sz="1200" b="0">
+                        <a:rPr sz="1600" b="0">
                           <a:solidFill>
-                            <a:srgbClr val="334E68"/>
+                            <a:srgbClr val="102A43"/>
                           </a:solidFill>
+                          <a:latin typeface="Calibri"/>
                         </a:rPr>
                         <a:t>15 min</a:t>
                       </a:r>
@@ -6363,10 +8915,11 @@
                     <a:lstStyle/>
                     <a:p>
                       <a:r>
-                        <a:rPr sz="1200" b="0">
+                        <a:rPr sz="1600" b="0">
                           <a:solidFill>
-                            <a:srgbClr val="334E68"/>
+                            <a:srgbClr val="102A43"/>
                           </a:solidFill>
+                          <a:latin typeface="Calibri"/>
                         </a:rPr>
                         <a:t>Repaso y revisión de la tarea</a:t>
                       </a:r>
@@ -6379,17 +8932,18 @@
                   </a:tcPr>
                 </a:tc>
               </a:tr>
-              <a:tr h="457200">
+              <a:tr h="415636">
                 <a:tc>
                   <a:txBody>
                     <a:bodyPr/>
                     <a:lstStyle/>
                     <a:p>
                       <a:r>
-                        <a:rPr sz="1200" b="0">
+                        <a:rPr sz="1600" b="0">
                           <a:solidFill>
-                            <a:srgbClr val="334E68"/>
+                            <a:srgbClr val="102A43"/>
                           </a:solidFill>
+                          <a:latin typeface="Calibri"/>
                         </a:rPr>
                         <a:t>0:15 – 0:45</a:t>
                       </a:r>
@@ -6407,10 +8961,11 @@
                     <a:lstStyle/>
                     <a:p>
                       <a:r>
-                        <a:rPr sz="1200" b="0">
+                        <a:rPr sz="1600" b="0">
                           <a:solidFill>
-                            <a:srgbClr val="334E68"/>
+                            <a:srgbClr val="102A43"/>
                           </a:solidFill>
+                          <a:latin typeface="Calibri"/>
                         </a:rPr>
                         <a:t>30 min</a:t>
                       </a:r>
@@ -6428,10 +8983,11 @@
                     <a:lstStyle/>
                     <a:p>
                       <a:r>
-                        <a:rPr sz="1200" b="0">
+                        <a:rPr sz="1600" b="0">
                           <a:solidFill>
-                            <a:srgbClr val="334E68"/>
+                            <a:srgbClr val="102A43"/>
                           </a:solidFill>
+                          <a:latin typeface="Calibri"/>
                         </a:rPr>
                         <a:t>Guía del simulacro y roles</a:t>
                       </a:r>
@@ -6444,17 +9000,18 @@
                   </a:tcPr>
                 </a:tc>
               </a:tr>
-              <a:tr h="457200">
+              <a:tr h="415636">
                 <a:tc>
                   <a:txBody>
                     <a:bodyPr/>
                     <a:lstStyle/>
                     <a:p>
                       <a:r>
-                        <a:rPr sz="1200" b="0">
+                        <a:rPr sz="1600" b="0">
                           <a:solidFill>
-                            <a:srgbClr val="334E68"/>
+                            <a:srgbClr val="102A43"/>
                           </a:solidFill>
+                          <a:latin typeface="Calibri"/>
                         </a:rPr>
                         <a:t>0:45 – 1:15</a:t>
                       </a:r>
@@ -6472,10 +9029,11 @@
                     <a:lstStyle/>
                     <a:p>
                       <a:r>
-                        <a:rPr sz="1200" b="0">
+                        <a:rPr sz="1600" b="0">
                           <a:solidFill>
-                            <a:srgbClr val="334E68"/>
+                            <a:srgbClr val="102A43"/>
                           </a:solidFill>
+                          <a:latin typeface="Calibri"/>
                         </a:rPr>
                         <a:t>30 min</a:t>
                       </a:r>
@@ -6493,10 +9051,11 @@
                     <a:lstStyle/>
                     <a:p>
                       <a:r>
-                        <a:rPr sz="1200" b="0">
+                        <a:rPr sz="1600" b="0">
                           <a:solidFill>
-                            <a:srgbClr val="334E68"/>
+                            <a:srgbClr val="102A43"/>
                           </a:solidFill>
+                          <a:latin typeface="Calibri"/>
                         </a:rPr>
                         <a:t>La lista de cotejo y los formularios</a:t>
                       </a:r>
@@ -6509,17 +9068,18 @@
                   </a:tcPr>
                 </a:tc>
               </a:tr>
-              <a:tr h="457200">
+              <a:tr h="415636">
                 <a:tc>
                   <a:txBody>
                     <a:bodyPr/>
                     <a:lstStyle/>
                     <a:p>
                       <a:r>
-                        <a:rPr sz="1200" b="1">
+                        <a:rPr sz="1600" b="1">
                           <a:solidFill>
-                            <a:srgbClr val="DE911D"/>
+                            <a:srgbClr val="102A43"/>
                           </a:solidFill>
+                          <a:latin typeface="Calibri"/>
                         </a:rPr>
                         <a:t>1:15 – 1:30</a:t>
                       </a:r>
@@ -6527,7 +9087,7 @@
                   </a:txBody>
                   <a:tcPr>
                     <a:solidFill>
-                      <a:srgbClr val="FFFFFF"/>
+                      <a:srgbClr val="FDF3D7"/>
                     </a:solidFill>
                   </a:tcPr>
                 </a:tc>
@@ -6537,10 +9097,11 @@
                     <a:lstStyle/>
                     <a:p>
                       <a:r>
-                        <a:rPr sz="1200" b="1">
+                        <a:rPr sz="1600" b="1">
                           <a:solidFill>
-                            <a:srgbClr val="DE911D"/>
+                            <a:srgbClr val="102A43"/>
                           </a:solidFill>
+                          <a:latin typeface="Calibri"/>
                         </a:rPr>
                         <a:t>15 min</a:t>
                       </a:r>
@@ -6548,7 +9109,7 @@
                   </a:txBody>
                   <a:tcPr>
                     <a:solidFill>
-                      <a:srgbClr val="FFFFFF"/>
+                      <a:srgbClr val="FDF3D7"/>
                     </a:solidFill>
                   </a:tcPr>
                 </a:tc>
@@ -6558,10 +9119,11 @@
                     <a:lstStyle/>
                     <a:p>
                       <a:r>
-                        <a:rPr sz="1200" b="1">
+                        <a:rPr sz="1600" b="1">
                           <a:solidFill>
-                            <a:srgbClr val="DE911D"/>
+                            <a:srgbClr val="102A43"/>
                           </a:solidFill>
+                          <a:latin typeface="Calibri"/>
                         </a:rPr>
                         <a:t>Receso</a:t>
                       </a:r>
@@ -6569,22 +9131,23 @@
                   </a:txBody>
                   <a:tcPr>
                     <a:solidFill>
-                      <a:srgbClr val="FFFFFF"/>
+                      <a:srgbClr val="FDF3D7"/>
                     </a:solidFill>
                   </a:tcPr>
                 </a:tc>
               </a:tr>
-              <a:tr h="457200">
+              <a:tr h="415636">
                 <a:tc>
                   <a:txBody>
                     <a:bodyPr/>
                     <a:lstStyle/>
                     <a:p>
                       <a:r>
-                        <a:rPr sz="1200" b="0">
+                        <a:rPr sz="1600" b="0">
                           <a:solidFill>
-                            <a:srgbClr val="334E68"/>
+                            <a:srgbClr val="102A43"/>
                           </a:solidFill>
+                          <a:latin typeface="Calibri"/>
                         </a:rPr>
                         <a:t>1:30 – 2:30</a:t>
                       </a:r>
@@ -6602,10 +9165,11 @@
                     <a:lstStyle/>
                     <a:p>
                       <a:r>
-                        <a:rPr sz="1200" b="0">
+                        <a:rPr sz="1600" b="0">
                           <a:solidFill>
-                            <a:srgbClr val="334E68"/>
+                            <a:srgbClr val="102A43"/>
                           </a:solidFill>
+                          <a:latin typeface="Calibri"/>
                         </a:rPr>
                         <a:t>60 min</a:t>
                       </a:r>
@@ -6623,10 +9187,11 @@
                     <a:lstStyle/>
                     <a:p>
                       <a:r>
-                        <a:rPr sz="1200" b="0">
+                        <a:rPr sz="1600" b="0">
                           <a:solidFill>
-                            <a:srgbClr val="334E68"/>
+                            <a:srgbClr val="102A43"/>
                           </a:solidFill>
+                          <a:latin typeface="Calibri"/>
                         </a:rPr>
                         <a:t>Simulacro 1 en salas de trabajo</a:t>
                       </a:r>
@@ -6639,17 +9204,18 @@
                   </a:tcPr>
                 </a:tc>
               </a:tr>
-              <a:tr h="457200">
+              <a:tr h="415636">
                 <a:tc>
                   <a:txBody>
                     <a:bodyPr/>
                     <a:lstStyle/>
                     <a:p>
                       <a:r>
-                        <a:rPr sz="1200" b="0">
+                        <a:rPr sz="1600" b="0">
                           <a:solidFill>
-                            <a:srgbClr val="334E68"/>
+                            <a:srgbClr val="102A43"/>
                           </a:solidFill>
+                          <a:latin typeface="Calibri"/>
                         </a:rPr>
                         <a:t>2:30 – 3:00</a:t>
                       </a:r>
@@ -6667,10 +9233,11 @@
                     <a:lstStyle/>
                     <a:p>
                       <a:r>
-                        <a:rPr sz="1200" b="0">
+                        <a:rPr sz="1600" b="0">
                           <a:solidFill>
-                            <a:srgbClr val="334E68"/>
+                            <a:srgbClr val="102A43"/>
                           </a:solidFill>
+                          <a:latin typeface="Calibri"/>
                         </a:rPr>
                         <a:t>30 min</a:t>
                       </a:r>
@@ -6688,10 +9255,11 @@
                     <a:lstStyle/>
                     <a:p>
                       <a:r>
-                        <a:rPr sz="1200" b="0">
+                        <a:rPr sz="1600" b="0">
                           <a:solidFill>
-                            <a:srgbClr val="334E68"/>
+                            <a:srgbClr val="102A43"/>
                           </a:solidFill>
+                          <a:latin typeface="Calibri"/>
                         </a:rPr>
                         <a:t>Retroalimentación del simulacro 1</a:t>
                       </a:r>
@@ -6704,17 +9272,18 @@
                   </a:tcPr>
                 </a:tc>
               </a:tr>
-              <a:tr h="457200">
+              <a:tr h="415636">
                 <a:tc>
                   <a:txBody>
                     <a:bodyPr/>
                     <a:lstStyle/>
                     <a:p>
                       <a:r>
-                        <a:rPr sz="1200" b="1">
+                        <a:rPr sz="1600" b="1">
                           <a:solidFill>
-                            <a:srgbClr val="DE911D"/>
+                            <a:srgbClr val="102A43"/>
                           </a:solidFill>
+                          <a:latin typeface="Calibri"/>
                         </a:rPr>
                         <a:t>3:00 – 3:15</a:t>
                       </a:r>
@@ -6722,7 +9291,7 @@
                   </a:txBody>
                   <a:tcPr>
                     <a:solidFill>
-                      <a:srgbClr val="F0F4F8"/>
+                      <a:srgbClr val="FDF3D7"/>
                     </a:solidFill>
                   </a:tcPr>
                 </a:tc>
@@ -6732,10 +9301,11 @@
                     <a:lstStyle/>
                     <a:p>
                       <a:r>
-                        <a:rPr sz="1200" b="1">
+                        <a:rPr sz="1600" b="1">
                           <a:solidFill>
-                            <a:srgbClr val="DE911D"/>
+                            <a:srgbClr val="102A43"/>
                           </a:solidFill>
+                          <a:latin typeface="Calibri"/>
                         </a:rPr>
                         <a:t>15 min</a:t>
                       </a:r>
@@ -6743,7 +9313,7 @@
                   </a:txBody>
                   <a:tcPr>
                     <a:solidFill>
-                      <a:srgbClr val="F0F4F8"/>
+                      <a:srgbClr val="FDF3D7"/>
                     </a:solidFill>
                   </a:tcPr>
                 </a:tc>
@@ -6753,10 +9323,11 @@
                     <a:lstStyle/>
                     <a:p>
                       <a:r>
-                        <a:rPr sz="1200" b="1">
+                        <a:rPr sz="1600" b="1">
                           <a:solidFill>
-                            <a:srgbClr val="DE911D"/>
+                            <a:srgbClr val="102A43"/>
                           </a:solidFill>
+                          <a:latin typeface="Calibri"/>
                         </a:rPr>
                         <a:t>Receso</a:t>
                       </a:r>
@@ -6764,22 +9335,23 @@
                   </a:txBody>
                   <a:tcPr>
                     <a:solidFill>
-                      <a:srgbClr val="F0F4F8"/>
+                      <a:srgbClr val="FDF3D7"/>
                     </a:solidFill>
                   </a:tcPr>
                 </a:tc>
               </a:tr>
-              <a:tr h="457200">
+              <a:tr h="415636">
                 <a:tc>
                   <a:txBody>
                     <a:bodyPr/>
                     <a:lstStyle/>
                     <a:p>
                       <a:r>
-                        <a:rPr sz="1200" b="0">
+                        <a:rPr sz="1600" b="0">
                           <a:solidFill>
-                            <a:srgbClr val="334E68"/>
+                            <a:srgbClr val="102A43"/>
                           </a:solidFill>
+                          <a:latin typeface="Calibri"/>
                         </a:rPr>
                         <a:t>3:15 – 4:15</a:t>
                       </a:r>
@@ -6797,10 +9369,11 @@
                     <a:lstStyle/>
                     <a:p>
                       <a:r>
-                        <a:rPr sz="1200" b="0">
+                        <a:rPr sz="1600" b="0">
                           <a:solidFill>
-                            <a:srgbClr val="334E68"/>
+                            <a:srgbClr val="102A43"/>
                           </a:solidFill>
+                          <a:latin typeface="Calibri"/>
                         </a:rPr>
                         <a:t>60 min</a:t>
                       </a:r>
@@ -6818,10 +9391,11 @@
                     <a:lstStyle/>
                     <a:p>
                       <a:r>
-                        <a:rPr sz="1200" b="0">
+                        <a:rPr sz="1600" b="0">
                           <a:solidFill>
-                            <a:srgbClr val="334E68"/>
+                            <a:srgbClr val="102A43"/>
                           </a:solidFill>
+                          <a:latin typeface="Calibri"/>
                         </a:rPr>
                         <a:t>Simulacro 2 con rotación de roles</a:t>
                       </a:r>
@@ -6834,17 +9408,18 @@
                   </a:tcPr>
                 </a:tc>
               </a:tr>
-              <a:tr h="457200">
+              <a:tr h="415636">
                 <a:tc>
                   <a:txBody>
                     <a:bodyPr/>
                     <a:lstStyle/>
                     <a:p>
                       <a:r>
-                        <a:rPr sz="1200" b="0">
+                        <a:rPr sz="1600" b="0">
                           <a:solidFill>
-                            <a:srgbClr val="334E68"/>
+                            <a:srgbClr val="102A43"/>
                           </a:solidFill>
+                          <a:latin typeface="Calibri"/>
                         </a:rPr>
                         <a:t>4:15 – 4:40</a:t>
                       </a:r>
@@ -6862,10 +9437,11 @@
                     <a:lstStyle/>
                     <a:p>
                       <a:r>
-                        <a:rPr sz="1200" b="0">
+                        <a:rPr sz="1600" b="0">
                           <a:solidFill>
-                            <a:srgbClr val="334E68"/>
+                            <a:srgbClr val="102A43"/>
                           </a:solidFill>
+                          <a:latin typeface="Calibri"/>
                         </a:rPr>
                         <a:t>25 min</a:t>
                       </a:r>
@@ -6883,10 +9459,11 @@
                     <a:lstStyle/>
                     <a:p>
                       <a:r>
-                        <a:rPr sz="1200" b="0">
+                        <a:rPr sz="1600" b="0">
                           <a:solidFill>
-                            <a:srgbClr val="334E68"/>
+                            <a:srgbClr val="102A43"/>
                           </a:solidFill>
+                          <a:latin typeface="Calibri"/>
                         </a:rPr>
                         <a:t>Asignación de roles para la sesión presencial</a:t>
                       </a:r>
@@ -6899,17 +9476,18 @@
                   </a:tcPr>
                 </a:tc>
               </a:tr>
-              <a:tr h="457200">
+              <a:tr h="415640">
                 <a:tc>
                   <a:txBody>
                     <a:bodyPr/>
                     <a:lstStyle/>
                     <a:p>
                       <a:r>
-                        <a:rPr sz="1200" b="0">
+                        <a:rPr sz="1600" b="0">
                           <a:solidFill>
-                            <a:srgbClr val="334E68"/>
+                            <a:srgbClr val="102A43"/>
                           </a:solidFill>
+                          <a:latin typeface="Calibri"/>
                         </a:rPr>
                         <a:t>4:40 – 5:00</a:t>
                       </a:r>
@@ -6927,10 +9505,11 @@
                     <a:lstStyle/>
                     <a:p>
                       <a:r>
-                        <a:rPr sz="1200" b="0">
+                        <a:rPr sz="1600" b="0">
                           <a:solidFill>
-                            <a:srgbClr val="334E68"/>
+                            <a:srgbClr val="102A43"/>
                           </a:solidFill>
+                          <a:latin typeface="Calibri"/>
                         </a:rPr>
                         <a:t>20 min</a:t>
                       </a:r>
@@ -6948,10 +9527,11 @@
                     <a:lstStyle/>
                     <a:p>
                       <a:r>
-                        <a:rPr sz="1200" b="0">
+                        <a:rPr sz="1600" b="0">
                           <a:solidFill>
-                            <a:srgbClr val="334E68"/>
+                            <a:srgbClr val="102A43"/>
                           </a:solidFill>
+                          <a:latin typeface="Calibri"/>
                         </a:rPr>
                         <a:t>Cierre</a:t>
                       </a:r>
@@ -6988,20 +9568,20 @@
       <p:grpSpPr/>
       <p:sp>
         <p:nvSpPr>
-          <p:cNvPr id="2" name="Oval 1"/>
+          <p:cNvPr id="2" name="Rectangle 1"/>
           <p:cNvSpPr/>
           <p:nvPr/>
         </p:nvSpPr>
         <p:spPr>
           <a:xfrm>
-            <a:off x="548640" y="502920"/>
-            <a:ext cx="502920" cy="502920"/>
-          </a:xfrm>
-          <a:prstGeom prst="ellipse">
+            <a:off x="0" y="0"/>
+            <a:ext cx="12191695" cy="960120"/>
+          </a:xfrm>
+          <a:prstGeom prst="rect">
             <a:avLst/>
           </a:prstGeom>
           <a:solidFill>
-            <a:srgbClr val="DE911D"/>
+            <a:srgbClr val="3172AC"/>
           </a:solidFill>
           <a:ln>
             <a:noFill/>
@@ -7038,8 +9618,8 @@
         </p:nvSpPr>
         <p:spPr>
           <a:xfrm>
-            <a:off x="548640" y="502920"/>
-            <a:ext cx="502920" cy="502920"/>
+            <a:off x="457200" y="109728"/>
+            <a:ext cx="11277295" cy="777240"/>
           </a:xfrm>
           <a:prstGeom prst="rect">
             <a:avLst/>
@@ -7047,20 +9627,24 @@
           <a:noFill/>
         </p:spPr>
         <p:txBody>
-          <a:bodyPr wrap="square">
+          <a:bodyPr wrap="square" lIns="45720" rIns="45720" anchor="ctr">
             <a:spAutoFit/>
           </a:bodyPr>
           <a:lstStyle/>
           <a:p>
-            <a:pPr algn="ctr"/>
-            <a:r>
-              <a:rPr sz="2000" b="0">
-                <a:solidFill>
-                  <a:srgbClr val="0A1F33"/>
-                </a:solidFill>
-                <a:latin typeface="Calibri"/>
-              </a:rPr>
-              <a:t>⚖</a:t>
+            <a:pPr algn="ctr">
+              <a:spcAft>
+                <a:spcPts val="1530"/>
+              </a:spcAft>
+            </a:pPr>
+            <a:r>
+              <a:rPr sz="3400" b="1">
+                <a:solidFill>
+                  <a:srgbClr val="FFFFFF"/>
+                </a:solidFill>
+                <a:latin typeface="Calibri"/>
+              </a:rPr>
+              <a:t>Cómo funciona el simulacro</a:t>
             </a:r>
           </a:p>
         </p:txBody>
@@ -7073,8 +9657,8 @@
         </p:nvSpPr>
         <p:spPr>
           <a:xfrm>
-            <a:off x="1234440" y="530352"/>
-            <a:ext cx="9144000" cy="457200"/>
+            <a:off x="457200" y="6419088"/>
+            <a:ext cx="10180015" cy="365760"/>
           </a:xfrm>
           <a:prstGeom prst="rect">
             <a:avLst/>
@@ -7082,19 +9666,24 @@
           <a:noFill/>
         </p:spPr>
         <p:txBody>
-          <a:bodyPr wrap="square">
+          <a:bodyPr wrap="square" lIns="45720" rIns="45720">
             <a:spAutoFit/>
           </a:bodyPr>
           <a:lstStyle/>
           <a:p>
-            <a:r>
-              <a:rPr sz="1400" b="1">
-                <a:solidFill>
-                  <a:srgbClr val="DE911D"/>
-                </a:solidFill>
-                <a:latin typeface="Calibri"/>
-              </a:rPr>
-              <a:t>CONTENIDO PARA VER EN CLASE</a:t>
+            <a:pPr>
+              <a:spcAft>
+                <a:spcPts val="540"/>
+              </a:spcAft>
+            </a:pPr>
+            <a:r>
+              <a:rPr sz="1200" b="0">
+                <a:solidFill>
+                  <a:srgbClr val="627D98"/>
+                </a:solidFill>
+                <a:latin typeface="Calibri"/>
+              </a:rPr>
+              <a:t>Fuente: Metodología del curso</a:t>
             </a:r>
           </a:p>
         </p:txBody>
@@ -7107,8 +9696,8 @@
         </p:nvSpPr>
         <p:spPr>
           <a:xfrm>
-            <a:off x="548640" y="1051560"/>
-            <a:ext cx="11064240" cy="822960"/>
+            <a:off x="10728655" y="6419088"/>
+            <a:ext cx="1097280" cy="365760"/>
           </a:xfrm>
           <a:prstGeom prst="rect">
             <a:avLst/>
@@ -7116,19 +9705,24 @@
           <a:noFill/>
         </p:spPr>
         <p:txBody>
-          <a:bodyPr wrap="square">
+          <a:bodyPr wrap="square" lIns="45720" rIns="45720">
             <a:spAutoFit/>
           </a:bodyPr>
           <a:lstStyle/>
           <a:p>
-            <a:r>
-              <a:rPr sz="2600" b="1">
-                <a:solidFill>
-                  <a:srgbClr val="0A1F33"/>
-                </a:solidFill>
-                <a:latin typeface="Cambria"/>
-              </a:rPr>
-              <a:t>Cómo funciona el simulacro</a:t>
+            <a:pPr algn="ctr">
+              <a:spcAft>
+                <a:spcPts val="540"/>
+              </a:spcAft>
+            </a:pPr>
+            <a:r>
+              <a:rPr sz="1200" b="0">
+                <a:solidFill>
+                  <a:srgbClr val="627D98"/>
+                </a:solidFill>
+                <a:latin typeface="Calibri"/>
+              </a:rPr>
+              <a:t>4</a:t>
             </a:r>
           </a:p>
         </p:txBody>
@@ -7141,8 +9735,8 @@
         </p:nvSpPr>
         <p:spPr>
           <a:xfrm>
-            <a:off x="548640" y="1874519"/>
-            <a:ext cx="11064240" cy="4389120"/>
+            <a:off x="457200" y="1280160"/>
+            <a:ext cx="11277295" cy="4892040"/>
           </a:xfrm>
           <a:prstGeom prst="rect">
             <a:avLst/>
@@ -7185,8 +9779,8 @@
         </p:nvSpPr>
         <p:spPr>
           <a:xfrm>
-            <a:off x="914400" y="2011680"/>
-            <a:ext cx="10332720" cy="1371600"/>
+            <a:off x="777240" y="1417319"/>
+            <a:ext cx="10637215" cy="4617720"/>
           </a:xfrm>
           <a:prstGeom prst="rect">
             <a:avLst/>
@@ -7194,54 +9788,36 @@
           <a:noFill/>
         </p:spPr>
         <p:txBody>
-          <a:bodyPr wrap="square">
+          <a:bodyPr wrap="square" lIns="45720" rIns="45720">
             <a:spAutoFit/>
           </a:bodyPr>
           <a:lstStyle/>
           <a:p>
-            <a:r>
-              <a:rPr sz="1500" b="0">
-                <a:solidFill>
-                  <a:srgbClr val="0A1F33"/>
+            <a:pPr>
+              <a:spcAft>
+                <a:spcPts val="1035"/>
+              </a:spcAft>
+            </a:pPr>
+            <a:r>
+              <a:rPr sz="2300" b="0">
+                <a:solidFill>
+                  <a:srgbClr val="3172AC"/>
                 </a:solidFill>
                 <a:latin typeface="Calibri"/>
               </a:rPr>
               <a:t>En cada sala de trabajo hay tres roles: la persona árbitra, dos personas que representan a los jugadores y actúan una incidencia de la guía, y una persona observadora con la lista de cotejo. La persona árbitra no conoce la incidencia de antemano.</a:t>
             </a:r>
           </a:p>
-        </p:txBody>
-      </p:sp>
-      <p:sp>
-        <p:nvSpPr>
-          <p:cNvPr id="8" name="TextBox 7"/>
-          <p:cNvSpPr txBox="1"/>
-          <p:nvPr/>
-        </p:nvSpPr>
-        <p:spPr>
-          <a:xfrm>
-            <a:off x="914400" y="3429000"/>
-            <a:ext cx="10332720" cy="2743200"/>
-          </a:xfrm>
-          <a:prstGeom prst="rect">
-            <a:avLst/>
-          </a:prstGeom>
-          <a:noFill/>
-        </p:spPr>
-        <p:txBody>
-          <a:bodyPr wrap="square">
-            <a:spAutoFit/>
-          </a:bodyPr>
-          <a:lstStyle/>
           <a:p>
             <a:pPr>
               <a:spcAft>
-                <a:spcPts val="800"/>
-              </a:spcAft>
-            </a:pPr>
-            <a:r>
-              <a:rPr sz="1500">
-                <a:solidFill>
-                  <a:srgbClr val="334E68"/>
+                <a:spcPts val="1035"/>
+              </a:spcAft>
+            </a:pPr>
+            <a:r>
+              <a:rPr sz="2300" b="0">
+                <a:solidFill>
+                  <a:srgbClr val="102A43"/>
                 </a:solidFill>
                 <a:latin typeface="Calibri"/>
               </a:rPr>
@@ -7251,13 +9827,13 @@
           <a:p>
             <a:pPr>
               <a:spcAft>
-                <a:spcPts val="800"/>
-              </a:spcAft>
-            </a:pPr>
-            <a:r>
-              <a:rPr sz="1500">
-                <a:solidFill>
-                  <a:srgbClr val="334E68"/>
+                <a:spcPts val="1035"/>
+              </a:spcAft>
+            </a:pPr>
+            <a:r>
+              <a:rPr sz="2300" b="0">
+                <a:solidFill>
+                  <a:srgbClr val="102A43"/>
                 </a:solidFill>
                 <a:latin typeface="Calibri"/>
               </a:rPr>
@@ -7267,13 +9843,13 @@
           <a:p>
             <a:pPr>
               <a:spcAft>
-                <a:spcPts val="800"/>
-              </a:spcAft>
-            </a:pPr>
-            <a:r>
-              <a:rPr sz="1500">
-                <a:solidFill>
-                  <a:srgbClr val="334E68"/>
+                <a:spcPts val="1035"/>
+              </a:spcAft>
+            </a:pPr>
+            <a:r>
+              <a:rPr sz="2300" b="0">
+                <a:solidFill>
+                  <a:srgbClr val="102A43"/>
                 </a:solidFill>
                 <a:latin typeface="Calibri"/>
               </a:rPr>
@@ -7283,51 +9859,17 @@
           <a:p>
             <a:pPr>
               <a:spcAft>
-                <a:spcPts val="800"/>
-              </a:spcAft>
-            </a:pPr>
-            <a:r>
-              <a:rPr sz="1500">
-                <a:solidFill>
-                  <a:srgbClr val="334E68"/>
+                <a:spcPts val="1035"/>
+              </a:spcAft>
+            </a:pPr>
+            <a:r>
+              <a:rPr sz="2300" b="0">
+                <a:solidFill>
+                  <a:srgbClr val="102A43"/>
                 </a:solidFill>
                 <a:latin typeface="Calibri"/>
               </a:rPr>
               <a:t>•  Al final de cada incidencia se rotan los roles.</a:t>
-            </a:r>
-          </a:p>
-        </p:txBody>
-      </p:sp>
-      <p:sp>
-        <p:nvSpPr>
-          <p:cNvPr id="9" name="TextBox 8"/>
-          <p:cNvSpPr txBox="1"/>
-          <p:nvPr/>
-        </p:nvSpPr>
-        <p:spPr>
-          <a:xfrm>
-            <a:off x="548640" y="6355080"/>
-            <a:ext cx="11064240" cy="365760"/>
-          </a:xfrm>
-          <a:prstGeom prst="rect">
-            <a:avLst/>
-          </a:prstGeom>
-          <a:noFill/>
-        </p:spPr>
-        <p:txBody>
-          <a:bodyPr wrap="square">
-            <a:spAutoFit/>
-          </a:bodyPr>
-          <a:lstStyle/>
-          <a:p>
-            <a:r>
-              <a:rPr sz="1100" b="0">
-                <a:solidFill>
-                  <a:srgbClr val="627D98"/>
-                </a:solidFill>
-                <a:latin typeface="Calibri"/>
-              </a:rPr>
-              <a:t>Fuente: Metodología del curso</a:t>
             </a:r>
           </a:p>
         </p:txBody>
@@ -7352,20 +9894,20 @@
       <p:grpSpPr/>
       <p:sp>
         <p:nvSpPr>
-          <p:cNvPr id="2" name="Oval 1"/>
+          <p:cNvPr id="2" name="Rectangle 1"/>
           <p:cNvSpPr/>
           <p:nvPr/>
         </p:nvSpPr>
         <p:spPr>
           <a:xfrm>
-            <a:off x="548640" y="502920"/>
-            <a:ext cx="502920" cy="502920"/>
-          </a:xfrm>
-          <a:prstGeom prst="ellipse">
+            <a:off x="0" y="0"/>
+            <a:ext cx="12191695" cy="960120"/>
+          </a:xfrm>
+          <a:prstGeom prst="rect">
             <a:avLst/>
           </a:prstGeom>
           <a:solidFill>
-            <a:srgbClr val="DE911D"/>
+            <a:srgbClr val="3172AC"/>
           </a:solidFill>
           <a:ln>
             <a:noFill/>
@@ -7402,8 +9944,8 @@
         </p:nvSpPr>
         <p:spPr>
           <a:xfrm>
-            <a:off x="548640" y="502920"/>
-            <a:ext cx="502920" cy="502920"/>
+            <a:off x="457200" y="109728"/>
+            <a:ext cx="11277295" cy="777240"/>
           </a:xfrm>
           <a:prstGeom prst="rect">
             <a:avLst/>
@@ -7411,20 +9953,24 @@
           <a:noFill/>
         </p:spPr>
         <p:txBody>
-          <a:bodyPr wrap="square">
+          <a:bodyPr wrap="square" lIns="45720" rIns="45720" anchor="ctr">
             <a:spAutoFit/>
           </a:bodyPr>
           <a:lstStyle/>
           <a:p>
-            <a:pPr algn="ctr"/>
-            <a:r>
-              <a:rPr sz="2000" b="0">
-                <a:solidFill>
-                  <a:srgbClr val="0A1F33"/>
-                </a:solidFill>
-                <a:latin typeface="Calibri"/>
-              </a:rPr>
-              <a:t>⚖</a:t>
+            <a:pPr algn="ctr">
+              <a:spcAft>
+                <a:spcPts val="1530"/>
+              </a:spcAft>
+            </a:pPr>
+            <a:r>
+              <a:rPr sz="3400" b="1">
+                <a:solidFill>
+                  <a:srgbClr val="FFFFFF"/>
+                </a:solidFill>
+                <a:latin typeface="Calibri"/>
+              </a:rPr>
+              <a:t>La lista de cotejo de desempeño arbitral</a:t>
             </a:r>
           </a:p>
         </p:txBody>
@@ -7437,8 +9983,8 @@
         </p:nvSpPr>
         <p:spPr>
           <a:xfrm>
-            <a:off x="1234440" y="530352"/>
-            <a:ext cx="9144000" cy="457200"/>
+            <a:off x="457200" y="6419088"/>
+            <a:ext cx="10180015" cy="365760"/>
           </a:xfrm>
           <a:prstGeom prst="rect">
             <a:avLst/>
@@ -7446,19 +9992,24 @@
           <a:noFill/>
         </p:spPr>
         <p:txBody>
-          <a:bodyPr wrap="square">
+          <a:bodyPr wrap="square" lIns="45720" rIns="45720">
             <a:spAutoFit/>
           </a:bodyPr>
           <a:lstStyle/>
           <a:p>
-            <a:r>
-              <a:rPr sz="1400" b="1">
-                <a:solidFill>
-                  <a:srgbClr val="DE911D"/>
-                </a:solidFill>
-                <a:latin typeface="Calibri"/>
-              </a:rPr>
-              <a:t>CONTENIDO PARA VER EN CLASE</a:t>
+            <a:pPr>
+              <a:spcAft>
+                <a:spcPts val="540"/>
+              </a:spcAft>
+            </a:pPr>
+            <a:r>
+              <a:rPr sz="1200" b="0">
+                <a:solidFill>
+                  <a:srgbClr val="627D98"/>
+                </a:solidFill>
+                <a:latin typeface="Calibri"/>
+              </a:rPr>
+              <a:t>Fuente: Lista de cotejo oficial del curso (formularios de la Sesión 8)</a:t>
             </a:r>
           </a:p>
         </p:txBody>
@@ -7471,8 +10022,8 @@
         </p:nvSpPr>
         <p:spPr>
           <a:xfrm>
-            <a:off x="548640" y="1051560"/>
-            <a:ext cx="11064240" cy="822960"/>
+            <a:off x="10728655" y="6419088"/>
+            <a:ext cx="1097280" cy="365760"/>
           </a:xfrm>
           <a:prstGeom prst="rect">
             <a:avLst/>
@@ -7480,19 +10031,24 @@
           <a:noFill/>
         </p:spPr>
         <p:txBody>
-          <a:bodyPr wrap="square">
+          <a:bodyPr wrap="square" lIns="45720" rIns="45720">
             <a:spAutoFit/>
           </a:bodyPr>
           <a:lstStyle/>
           <a:p>
-            <a:r>
-              <a:rPr sz="2600" b="1">
-                <a:solidFill>
-                  <a:srgbClr val="0A1F33"/>
-                </a:solidFill>
-                <a:latin typeface="Cambria"/>
-              </a:rPr>
-              <a:t>La lista de cotejo de desempeño arbitral</a:t>
+            <a:pPr algn="ctr">
+              <a:spcAft>
+                <a:spcPts val="540"/>
+              </a:spcAft>
+            </a:pPr>
+            <a:r>
+              <a:rPr sz="1200" b="0">
+                <a:solidFill>
+                  <a:srgbClr val="627D98"/>
+                </a:solidFill>
+                <a:latin typeface="Calibri"/>
+              </a:rPr>
+              <a:t>5</a:t>
             </a:r>
           </a:p>
         </p:txBody>
@@ -7505,8 +10061,8 @@
         </p:nvSpPr>
         <p:spPr>
           <a:xfrm>
-            <a:off x="548640" y="1874519"/>
-            <a:ext cx="11064240" cy="4389120"/>
+            <a:off x="457200" y="1280160"/>
+            <a:ext cx="11277295" cy="4892040"/>
           </a:xfrm>
           <a:prstGeom prst="rect">
             <a:avLst/>
@@ -7549,8 +10105,8 @@
         </p:nvSpPr>
         <p:spPr>
           <a:xfrm>
-            <a:off x="914400" y="2011680"/>
-            <a:ext cx="10332720" cy="1371600"/>
+            <a:off x="777240" y="1417319"/>
+            <a:ext cx="10637215" cy="4617720"/>
           </a:xfrm>
           <a:prstGeom prst="rect">
             <a:avLst/>
@@ -7558,54 +10114,36 @@
           <a:noFill/>
         </p:spPr>
         <p:txBody>
-          <a:bodyPr wrap="square">
+          <a:bodyPr wrap="square" lIns="45720" rIns="45720">
             <a:spAutoFit/>
           </a:bodyPr>
           <a:lstStyle/>
           <a:p>
-            <a:r>
-              <a:rPr sz="1500" b="0">
-                <a:solidFill>
-                  <a:srgbClr val="0A1F33"/>
+            <a:pPr>
+              <a:spcAft>
+                <a:spcPts val="1080"/>
+              </a:spcAft>
+            </a:pPr>
+            <a:r>
+              <a:rPr sz="2400" b="0">
+                <a:solidFill>
+                  <a:srgbClr val="3172AC"/>
                 </a:solidFill>
                 <a:latin typeface="Calibri"/>
               </a:rPr>
               <a:t>La lista de cotejo es el instrumento con el que se evalúa el desempeño en el torneo real de la sesión presencial. Conocerla de antemano permite prepararse para cada ítem.</a:t>
             </a:r>
           </a:p>
-        </p:txBody>
-      </p:sp>
-      <p:sp>
-        <p:nvSpPr>
-          <p:cNvPr id="8" name="TextBox 7"/>
-          <p:cNvSpPr txBox="1"/>
-          <p:nvPr/>
-        </p:nvSpPr>
-        <p:spPr>
-          <a:xfrm>
-            <a:off x="914400" y="3429000"/>
-            <a:ext cx="10332720" cy="2743200"/>
-          </a:xfrm>
-          <a:prstGeom prst="rect">
-            <a:avLst/>
-          </a:prstGeom>
-          <a:noFill/>
-        </p:spPr>
-        <p:txBody>
-          <a:bodyPr wrap="square">
-            <a:spAutoFit/>
-          </a:bodyPr>
-          <a:lstStyle/>
           <a:p>
             <a:pPr>
               <a:spcAft>
-                <a:spcPts val="800"/>
-              </a:spcAft>
-            </a:pPr>
-            <a:r>
-              <a:rPr sz="1300">
-                <a:solidFill>
-                  <a:srgbClr val="334E68"/>
+                <a:spcPts val="1080"/>
+              </a:spcAft>
+            </a:pPr>
+            <a:r>
+              <a:rPr sz="2400" b="0">
+                <a:solidFill>
+                  <a:srgbClr val="102A43"/>
                 </a:solidFill>
                 <a:latin typeface="Calibri"/>
               </a:rPr>
@@ -7615,13 +10153,13 @@
           <a:p>
             <a:pPr>
               <a:spcAft>
-                <a:spcPts val="800"/>
-              </a:spcAft>
-            </a:pPr>
-            <a:r>
-              <a:rPr sz="1300">
-                <a:solidFill>
-                  <a:srgbClr val="334E68"/>
+                <a:spcPts val="1080"/>
+              </a:spcAft>
+            </a:pPr>
+            <a:r>
+              <a:rPr sz="2400" b="0">
+                <a:solidFill>
+                  <a:srgbClr val="102A43"/>
                 </a:solidFill>
                 <a:latin typeface="Calibri"/>
               </a:rPr>
@@ -7631,13 +10169,13 @@
           <a:p>
             <a:pPr>
               <a:spcAft>
-                <a:spcPts val="800"/>
-              </a:spcAft>
-            </a:pPr>
-            <a:r>
-              <a:rPr sz="1300">
-                <a:solidFill>
-                  <a:srgbClr val="334E68"/>
+                <a:spcPts val="1080"/>
+              </a:spcAft>
+            </a:pPr>
+            <a:r>
+              <a:rPr sz="2400" b="0">
+                <a:solidFill>
+                  <a:srgbClr val="102A43"/>
                 </a:solidFill>
                 <a:latin typeface="Calibri"/>
               </a:rPr>
@@ -7647,13 +10185,13 @@
           <a:p>
             <a:pPr>
               <a:spcAft>
-                <a:spcPts val="800"/>
-              </a:spcAft>
-            </a:pPr>
-            <a:r>
-              <a:rPr sz="1300">
-                <a:solidFill>
-                  <a:srgbClr val="334E68"/>
+                <a:spcPts val="1080"/>
+              </a:spcAft>
+            </a:pPr>
+            <a:r>
+              <a:rPr sz="2400" b="0">
+                <a:solidFill>
+                  <a:srgbClr val="102A43"/>
                 </a:solidFill>
                 <a:latin typeface="Calibri"/>
               </a:rPr>
@@ -7663,13 +10201,13 @@
           <a:p>
             <a:pPr>
               <a:spcAft>
-                <a:spcPts val="800"/>
-              </a:spcAft>
-            </a:pPr>
-            <a:r>
-              <a:rPr sz="1300">
-                <a:solidFill>
-                  <a:srgbClr val="334E68"/>
+                <a:spcPts val="1080"/>
+              </a:spcAft>
+            </a:pPr>
+            <a:r>
+              <a:rPr sz="2400" b="0">
+                <a:solidFill>
+                  <a:srgbClr val="102A43"/>
                 </a:solidFill>
                 <a:latin typeface="Calibri"/>
               </a:rPr>
@@ -7679,51 +10217,17 @@
           <a:p>
             <a:pPr>
               <a:spcAft>
-                <a:spcPts val="800"/>
-              </a:spcAft>
-            </a:pPr>
-            <a:r>
-              <a:rPr sz="1300">
-                <a:solidFill>
-                  <a:srgbClr val="334E68"/>
+                <a:spcPts val="1080"/>
+              </a:spcAft>
+            </a:pPr>
+            <a:r>
+              <a:rPr sz="2400" b="0">
+                <a:solidFill>
+                  <a:srgbClr val="102A43"/>
                 </a:solidFill>
                 <a:latin typeface="Calibri"/>
               </a:rPr>
               <a:t>•  Mantiene un trato respetuoso e imparcial y documenta cada incidencia.</a:t>
-            </a:r>
-          </a:p>
-        </p:txBody>
-      </p:sp>
-      <p:sp>
-        <p:nvSpPr>
-          <p:cNvPr id="9" name="TextBox 8"/>
-          <p:cNvSpPr txBox="1"/>
-          <p:nvPr/>
-        </p:nvSpPr>
-        <p:spPr>
-          <a:xfrm>
-            <a:off x="548640" y="6355080"/>
-            <a:ext cx="11064240" cy="365760"/>
-          </a:xfrm>
-          <a:prstGeom prst="rect">
-            <a:avLst/>
-          </a:prstGeom>
-          <a:noFill/>
-        </p:spPr>
-        <p:txBody>
-          <a:bodyPr wrap="square">
-            <a:spAutoFit/>
-          </a:bodyPr>
-          <a:lstStyle/>
-          <a:p>
-            <a:r>
-              <a:rPr sz="1100" b="0">
-                <a:solidFill>
-                  <a:srgbClr val="627D98"/>
-                </a:solidFill>
-                <a:latin typeface="Calibri"/>
-              </a:rPr>
-              <a:t>Fuente: Lista de cotejo oficial del curso (formularios de la Sesión 8)</a:t>
             </a:r>
           </a:p>
         </p:txBody>
@@ -7748,20 +10252,20 @@
       <p:grpSpPr/>
       <p:sp>
         <p:nvSpPr>
-          <p:cNvPr id="2" name="Oval 1"/>
+          <p:cNvPr id="2" name="Rectangle 1"/>
           <p:cNvSpPr/>
           <p:nvPr/>
         </p:nvSpPr>
         <p:spPr>
           <a:xfrm>
-            <a:off x="548640" y="502920"/>
-            <a:ext cx="502920" cy="502920"/>
-          </a:xfrm>
-          <a:prstGeom prst="ellipse">
+            <a:off x="0" y="0"/>
+            <a:ext cx="12191695" cy="6858000"/>
+          </a:xfrm>
+          <a:prstGeom prst="rect">
             <a:avLst/>
           </a:prstGeom>
           <a:solidFill>
-            <a:srgbClr val="DE911D"/>
+            <a:srgbClr val="102A43"/>
           </a:solidFill>
           <a:ln>
             <a:noFill/>
@@ -7798,8 +10302,8 @@
         </p:nvSpPr>
         <p:spPr>
           <a:xfrm>
-            <a:off x="548640" y="502920"/>
-            <a:ext cx="502920" cy="502920"/>
+            <a:off x="10728655" y="6419088"/>
+            <a:ext cx="1097280" cy="365760"/>
           </a:xfrm>
           <a:prstGeom prst="rect">
             <a:avLst/>
@@ -7807,20 +10311,24 @@
           <a:noFill/>
         </p:spPr>
         <p:txBody>
-          <a:bodyPr wrap="square">
+          <a:bodyPr wrap="square" lIns="45720" rIns="45720">
             <a:spAutoFit/>
           </a:bodyPr>
           <a:lstStyle/>
           <a:p>
-            <a:pPr algn="ctr"/>
-            <a:r>
-              <a:rPr sz="2000" b="0">
-                <a:solidFill>
-                  <a:srgbClr val="0A1F33"/>
-                </a:solidFill>
-                <a:latin typeface="Calibri"/>
-              </a:rPr>
-              <a:t>⚖</a:t>
+            <a:pPr algn="ctr">
+              <a:spcAft>
+                <a:spcPts val="540"/>
+              </a:spcAft>
+            </a:pPr>
+            <a:r>
+              <a:rPr sz="1200" b="0">
+                <a:solidFill>
+                  <a:srgbClr val="9FB3C8"/>
+                </a:solidFill>
+                <a:latin typeface="Calibri"/>
+              </a:rPr>
+              <a:t>6</a:t>
             </a:r>
           </a:p>
         </p:txBody>
@@ -7833,8 +10341,8 @@
         </p:nvSpPr>
         <p:spPr>
           <a:xfrm>
-            <a:off x="1234440" y="530352"/>
-            <a:ext cx="9144000" cy="457200"/>
+            <a:off x="457200" y="2103120"/>
+            <a:ext cx="11277295" cy="1280160"/>
           </a:xfrm>
           <a:prstGeom prst="rect">
             <a:avLst/>
@@ -7842,19 +10350,24 @@
           <a:noFill/>
         </p:spPr>
         <p:txBody>
-          <a:bodyPr wrap="square">
+          <a:bodyPr wrap="square" lIns="45720" rIns="45720">
             <a:spAutoFit/>
           </a:bodyPr>
           <a:lstStyle/>
           <a:p>
-            <a:r>
-              <a:rPr sz="1400" b="1">
-                <a:solidFill>
-                  <a:srgbClr val="DE911D"/>
-                </a:solidFill>
-                <a:latin typeface="Calibri"/>
-              </a:rPr>
-              <a:t>CONTENIDO PARA VER EN CLASE</a:t>
+            <a:pPr algn="ctr">
+              <a:spcAft>
+                <a:spcPts val="3240"/>
+              </a:spcAft>
+            </a:pPr>
+            <a:r>
+              <a:rPr sz="7200" b="1">
+                <a:solidFill>
+                  <a:srgbClr val="FFFFFF"/>
+                </a:solidFill>
+                <a:latin typeface="Calibri"/>
+              </a:rPr>
+              <a:t>Receso</a:t>
             </a:r>
           </a:p>
         </p:txBody>
@@ -7867,8 +10380,8 @@
         </p:nvSpPr>
         <p:spPr>
           <a:xfrm>
-            <a:off x="548640" y="1051560"/>
-            <a:ext cx="11064240" cy="822960"/>
+            <a:off x="457200" y="3566160"/>
+            <a:ext cx="11277295" cy="1097280"/>
           </a:xfrm>
           <a:prstGeom prst="rect">
             <a:avLst/>
@@ -7876,218 +10389,40 @@
           <a:noFill/>
         </p:spPr>
         <p:txBody>
-          <a:bodyPr wrap="square">
+          <a:bodyPr wrap="square" lIns="45720" rIns="45720">
             <a:spAutoFit/>
           </a:bodyPr>
           <a:lstStyle/>
           <a:p>
-            <a:r>
-              <a:rPr sz="2600" b="1">
-                <a:solidFill>
-                  <a:srgbClr val="0A1F33"/>
-                </a:solidFill>
-                <a:latin typeface="Cambria"/>
-              </a:rPr>
-              <a:t>Roles en el torneo presencial</a:t>
-            </a:r>
-          </a:p>
-        </p:txBody>
-      </p:sp>
-      <p:sp>
-        <p:nvSpPr>
-          <p:cNvPr id="6" name="Rectangle 5"/>
-          <p:cNvSpPr/>
-          <p:nvPr/>
-        </p:nvSpPr>
-        <p:spPr>
-          <a:xfrm>
-            <a:off x="548640" y="1874519"/>
-            <a:ext cx="11064240" cy="4389120"/>
-          </a:xfrm>
-          <a:prstGeom prst="rect">
-            <a:avLst/>
-          </a:prstGeom>
-          <a:solidFill>
-            <a:srgbClr val="F0F4F8"/>
-          </a:solidFill>
-          <a:ln>
-            <a:noFill/>
-          </a:ln>
-          <a:effectLst/>
-        </p:spPr>
-        <p:style>
-          <a:lnRef idx="1">
-            <a:schemeClr val="accent1"/>
-          </a:lnRef>
-          <a:fillRef idx="3">
-            <a:schemeClr val="accent1"/>
-          </a:fillRef>
-          <a:effectRef idx="2">
-            <a:schemeClr val="accent1"/>
-          </a:effectRef>
-          <a:fontRef idx="minor">
-            <a:schemeClr val="lt1"/>
-          </a:fontRef>
-        </p:style>
-        <p:txBody>
-          <a:bodyPr rtlCol="0" anchor="ctr"/>
-          <a:lstStyle/>
-          <a:p>
-            <a:pPr algn="ctr"/>
-          </a:p>
-        </p:txBody>
-      </p:sp>
-      <p:sp>
-        <p:nvSpPr>
-          <p:cNvPr id="7" name="TextBox 6"/>
-          <p:cNvSpPr txBox="1"/>
-          <p:nvPr/>
-        </p:nvSpPr>
-        <p:spPr>
-          <a:xfrm>
-            <a:off x="914400" y="2011680"/>
-            <a:ext cx="10332720" cy="1371600"/>
-          </a:xfrm>
-          <a:prstGeom prst="rect">
-            <a:avLst/>
-          </a:prstGeom>
-          <a:noFill/>
-        </p:spPr>
-        <p:txBody>
-          <a:bodyPr wrap="square">
-            <a:spAutoFit/>
-          </a:bodyPr>
-          <a:lstStyle/>
-          <a:p>
-            <a:r>
-              <a:rPr sz="1500" b="0">
-                <a:solidFill>
-                  <a:srgbClr val="0A1F33"/>
-                </a:solidFill>
-                <a:latin typeface="Calibri"/>
-              </a:rPr>
-              <a:t>En la sesión presencial se organiza y arbitra un torneo real. Cada participante tiene un rol asignado y rota durante las rondas.</a:t>
-            </a:r>
-          </a:p>
-        </p:txBody>
-      </p:sp>
-      <p:sp>
-        <p:nvSpPr>
-          <p:cNvPr id="8" name="TextBox 7"/>
-          <p:cNvSpPr txBox="1"/>
-          <p:nvPr/>
-        </p:nvSpPr>
-        <p:spPr>
-          <a:xfrm>
-            <a:off x="914400" y="3429000"/>
-            <a:ext cx="10332720" cy="2743200"/>
-          </a:xfrm>
-          <a:prstGeom prst="rect">
-            <a:avLst/>
-          </a:prstGeom>
-          <a:noFill/>
-        </p:spPr>
-        <p:txBody>
-          <a:bodyPr wrap="square">
-            <a:spAutoFit/>
-          </a:bodyPr>
-          <a:lstStyle/>
-          <a:p>
-            <a:pPr>
-              <a:spcAft>
-                <a:spcPts val="800"/>
-              </a:spcAft>
-            </a:pPr>
-            <a:r>
-              <a:rPr sz="1500">
-                <a:solidFill>
-                  <a:srgbClr val="334E68"/>
-                </a:solidFill>
-                <a:latin typeface="Calibri"/>
-              </a:rPr>
-              <a:t>•  Árbitro principal: decide las incidencias y coordina al equipo.</a:t>
-            </a:r>
-          </a:p>
-          <a:p>
-            <a:pPr>
-              <a:spcAft>
-                <a:spcPts val="800"/>
-              </a:spcAft>
-            </a:pPr>
-            <a:r>
-              <a:rPr sz="1500">
-                <a:solidFill>
-                  <a:srgbClr val="334E68"/>
-                </a:solidFill>
-                <a:latin typeface="Calibri"/>
-              </a:rPr>
-              <a:t>•  Árbitros auxiliares: supervisan un grupo de mesas, informan y aplican lo acordado.</a:t>
-            </a:r>
-          </a:p>
-          <a:p>
-            <a:pPr>
-              <a:spcAft>
-                <a:spcPts val="800"/>
-              </a:spcAft>
-            </a:pPr>
-            <a:r>
-              <a:rPr sz="1500">
-                <a:solidFill>
-                  <a:srgbClr val="334E68"/>
-                </a:solidFill>
-                <a:latin typeface="Calibri"/>
-              </a:rPr>
-              <a:t>•  Mesa de control: inscripción, emparejamientos, resultados y desempates.</a:t>
-            </a:r>
-          </a:p>
-          <a:p>
-            <a:pPr>
-              <a:spcAft>
-                <a:spcPts val="800"/>
-              </a:spcAft>
-            </a:pPr>
-            <a:r>
-              <a:rPr sz="1500">
-                <a:solidFill>
-                  <a:srgbClr val="334E68"/>
-                </a:solidFill>
-                <a:latin typeface="Calibri"/>
-              </a:rPr>
-              <a:t>•  Todas las personas completan la lista de cotejo de otra en al menos una ronda.</a:t>
-            </a:r>
-          </a:p>
-        </p:txBody>
-      </p:sp>
-      <p:sp>
-        <p:nvSpPr>
-          <p:cNvPr id="9" name="TextBox 8"/>
-          <p:cNvSpPr txBox="1"/>
-          <p:nvPr/>
-        </p:nvSpPr>
-        <p:spPr>
-          <a:xfrm>
-            <a:off x="548640" y="6355080"/>
-            <a:ext cx="11064240" cy="365760"/>
-          </a:xfrm>
-          <a:prstGeom prst="rect">
-            <a:avLst/>
-          </a:prstGeom>
-          <a:noFill/>
-        </p:spPr>
-        <p:txBody>
-          <a:bodyPr wrap="square">
-            <a:spAutoFit/>
-          </a:bodyPr>
-          <a:lstStyle/>
-          <a:p>
-            <a:r>
-              <a:rPr sz="1100" b="0">
-                <a:solidFill>
-                  <a:srgbClr val="627D98"/>
-                </a:solidFill>
-                <a:latin typeface="Calibri"/>
-              </a:rPr>
-              <a:t>Fuente: Leyes del Ajedrez 2023 (Handbook E.I.01), art. 12.4; Manual del árbitro de la FIDE</a:t>
+            <a:pPr algn="ctr">
+              <a:spcAft>
+                <a:spcPts val="1260"/>
+              </a:spcAft>
+            </a:pPr>
+            <a:r>
+              <a:rPr sz="2800" b="0">
+                <a:solidFill>
+                  <a:srgbClr val="CADCFC"/>
+                </a:solidFill>
+                <a:latin typeface="Calibri"/>
+              </a:rPr>
+              <a:t>15 minutos</a:t>
+            </a:r>
+          </a:p>
+          <a:p>
+            <a:pPr algn="ctr">
+              <a:spcAft>
+                <a:spcPts val="1260"/>
+              </a:spcAft>
+            </a:pPr>
+            <a:r>
+              <a:rPr sz="2800" b="0">
+                <a:solidFill>
+                  <a:srgbClr val="CADCFC"/>
+                </a:solidFill>
+                <a:latin typeface="Calibri"/>
+              </a:rPr>
+              <a:t>Pausa los relojes: seguimos en breve.</a:t>
             </a:r>
           </a:p>
         </p:txBody>
@@ -8112,20 +10447,20 @@
       <p:grpSpPr/>
       <p:sp>
         <p:nvSpPr>
-          <p:cNvPr id="2" name="Oval 1"/>
+          <p:cNvPr id="2" name="Rectangle 1"/>
           <p:cNvSpPr/>
           <p:nvPr/>
         </p:nvSpPr>
         <p:spPr>
           <a:xfrm>
-            <a:off x="548640" y="502920"/>
-            <a:ext cx="502920" cy="502920"/>
-          </a:xfrm>
-          <a:prstGeom prst="ellipse">
+            <a:off x="0" y="0"/>
+            <a:ext cx="12191695" cy="960120"/>
+          </a:xfrm>
+          <a:prstGeom prst="rect">
             <a:avLst/>
           </a:prstGeom>
           <a:solidFill>
-            <a:srgbClr val="DE911D"/>
+            <a:srgbClr val="3172AC"/>
           </a:solidFill>
           <a:ln>
             <a:noFill/>
@@ -8162,8 +10497,8 @@
         </p:nvSpPr>
         <p:spPr>
           <a:xfrm>
-            <a:off x="548640" y="502920"/>
-            <a:ext cx="502920" cy="502920"/>
+            <a:off x="457200" y="109728"/>
+            <a:ext cx="11277295" cy="777240"/>
           </a:xfrm>
           <a:prstGeom prst="rect">
             <a:avLst/>
@@ -8171,20 +10506,24 @@
           <a:noFill/>
         </p:spPr>
         <p:txBody>
-          <a:bodyPr wrap="square">
+          <a:bodyPr wrap="square" lIns="45720" rIns="45720" anchor="ctr">
             <a:spAutoFit/>
           </a:bodyPr>
           <a:lstStyle/>
           <a:p>
-            <a:pPr algn="ctr"/>
-            <a:r>
-              <a:rPr sz="2000" b="0">
-                <a:solidFill>
-                  <a:srgbClr val="0A1F33"/>
-                </a:solidFill>
-                <a:latin typeface="Calibri"/>
-              </a:rPr>
-              <a:t>?</a:t>
+            <a:pPr algn="ctr">
+              <a:spcAft>
+                <a:spcPts val="1530"/>
+              </a:spcAft>
+            </a:pPr>
+            <a:r>
+              <a:rPr sz="3400" b="1">
+                <a:solidFill>
+                  <a:srgbClr val="FFFFFF"/>
+                </a:solidFill>
+                <a:latin typeface="Calibri"/>
+              </a:rPr>
+              <a:t>Roles en el torneo presencial</a:t>
             </a:r>
           </a:p>
         </p:txBody>
@@ -8197,8 +10536,8 @@
         </p:nvSpPr>
         <p:spPr>
           <a:xfrm>
-            <a:off x="1234440" y="530352"/>
-            <a:ext cx="9144000" cy="457200"/>
+            <a:off x="457200" y="6419088"/>
+            <a:ext cx="10180015" cy="365760"/>
           </a:xfrm>
           <a:prstGeom prst="rect">
             <a:avLst/>
@@ -8206,19 +10545,24 @@
           <a:noFill/>
         </p:spPr>
         <p:txBody>
-          <a:bodyPr wrap="square">
+          <a:bodyPr wrap="square" lIns="45720" rIns="45720">
             <a:spAutoFit/>
           </a:bodyPr>
           <a:lstStyle/>
           <a:p>
-            <a:r>
-              <a:rPr sz="1400" b="1">
-                <a:solidFill>
-                  <a:srgbClr val="DE911D"/>
-                </a:solidFill>
-                <a:latin typeface="Calibri"/>
-              </a:rPr>
-              <a:t>CASO 1 · ¿QUÉ DECIDE LA PERSONA ÁRBITRA?</a:t>
+            <a:pPr>
+              <a:spcAft>
+                <a:spcPts val="540"/>
+              </a:spcAft>
+            </a:pPr>
+            <a:r>
+              <a:rPr sz="1200" b="0">
+                <a:solidFill>
+                  <a:srgbClr val="627D98"/>
+                </a:solidFill>
+                <a:latin typeface="Calibri"/>
+              </a:rPr>
+              <a:t>Fuente: Leyes del Ajedrez 2023 (Handbook E.I.01), art. 12.4; Manual del árbitro de la FIDE</a:t>
             </a:r>
           </a:p>
         </p:txBody>
@@ -8231,8 +10575,8 @@
         </p:nvSpPr>
         <p:spPr>
           <a:xfrm>
-            <a:off x="548640" y="1051560"/>
-            <a:ext cx="11064240" cy="822960"/>
+            <a:off x="10728655" y="6419088"/>
+            <a:ext cx="1097280" cy="365760"/>
           </a:xfrm>
           <a:prstGeom prst="rect">
             <a:avLst/>
@@ -8240,19 +10584,24 @@
           <a:noFill/>
         </p:spPr>
         <p:txBody>
-          <a:bodyPr wrap="square">
+          <a:bodyPr wrap="square" lIns="45720" rIns="45720">
             <a:spAutoFit/>
           </a:bodyPr>
           <a:lstStyle/>
           <a:p>
-            <a:r>
-              <a:rPr sz="2600" b="1">
-                <a:solidFill>
-                  <a:srgbClr val="0A1F33"/>
-                </a:solidFill>
-                <a:latin typeface="Cambria"/>
-              </a:rPr>
-              <a:t>Guion A: el enroque dudoso</a:t>
+            <a:pPr algn="ctr">
+              <a:spcAft>
+                <a:spcPts val="540"/>
+              </a:spcAft>
+            </a:pPr>
+            <a:r>
+              <a:rPr sz="1200" b="0">
+                <a:solidFill>
+                  <a:srgbClr val="627D98"/>
+                </a:solidFill>
+                <a:latin typeface="Calibri"/>
+              </a:rPr>
+              <a:t>7</a:t>
             </a:r>
           </a:p>
         </p:txBody>
@@ -8265,8 +10614,8 @@
         </p:nvSpPr>
         <p:spPr>
           <a:xfrm>
-            <a:off x="548640" y="1965960"/>
-            <a:ext cx="11064240" cy="4206240"/>
+            <a:off x="457200" y="1280160"/>
+            <a:ext cx="11277295" cy="4892040"/>
           </a:xfrm>
           <a:prstGeom prst="rect">
             <a:avLst/>
@@ -8309,8 +10658,8 @@
         </p:nvSpPr>
         <p:spPr>
           <a:xfrm>
-            <a:off x="914400" y="2240280"/>
-            <a:ext cx="10332720" cy="3749039"/>
+            <a:off x="777240" y="1417319"/>
+            <a:ext cx="10637215" cy="4617720"/>
           </a:xfrm>
           <a:prstGeom prst="rect">
             <a:avLst/>
@@ -8318,19 +10667,88 @@
           <a:noFill/>
         </p:spPr>
         <p:txBody>
-          <a:bodyPr wrap="square">
+          <a:bodyPr wrap="square" lIns="45720" rIns="45720">
             <a:spAutoFit/>
           </a:bodyPr>
           <a:lstStyle/>
           <a:p>
-            <a:r>
-              <a:rPr sz="2000" b="0">
-                <a:solidFill>
-                  <a:srgbClr val="334E68"/>
-                </a:solidFill>
-                <a:latin typeface="Calibri"/>
-              </a:rPr>
-              <a:t>El jugador de negras enroca largo; el de blancas reclama que el rey ya se había movido en la jugada 9 y había vuelto.</a:t>
+            <a:pPr>
+              <a:spcAft>
+                <a:spcPts val="1215"/>
+              </a:spcAft>
+            </a:pPr>
+            <a:r>
+              <a:rPr sz="2700" b="0">
+                <a:solidFill>
+                  <a:srgbClr val="3172AC"/>
+                </a:solidFill>
+                <a:latin typeface="Calibri"/>
+              </a:rPr>
+              <a:t>En la sesión presencial se organiza y arbitra un torneo real. Cada participante tiene un rol asignado y rota durante las rondas.</a:t>
+            </a:r>
+          </a:p>
+          <a:p>
+            <a:pPr>
+              <a:spcAft>
+                <a:spcPts val="1215"/>
+              </a:spcAft>
+            </a:pPr>
+            <a:r>
+              <a:rPr sz="2700" b="0">
+                <a:solidFill>
+                  <a:srgbClr val="102A43"/>
+                </a:solidFill>
+                <a:latin typeface="Calibri"/>
+              </a:rPr>
+              <a:t>•  Árbitro principal: decide las incidencias y coordina al equipo.</a:t>
+            </a:r>
+          </a:p>
+          <a:p>
+            <a:pPr>
+              <a:spcAft>
+                <a:spcPts val="1215"/>
+              </a:spcAft>
+            </a:pPr>
+            <a:r>
+              <a:rPr sz="2700" b="0">
+                <a:solidFill>
+                  <a:srgbClr val="102A43"/>
+                </a:solidFill>
+                <a:latin typeface="Calibri"/>
+              </a:rPr>
+              <a:t>•  Árbitros auxiliares: supervisan un grupo de mesas, informan y aplican lo acordado.</a:t>
+            </a:r>
+          </a:p>
+          <a:p>
+            <a:pPr>
+              <a:spcAft>
+                <a:spcPts val="1215"/>
+              </a:spcAft>
+            </a:pPr>
+            <a:r>
+              <a:rPr sz="2700" b="0">
+                <a:solidFill>
+                  <a:srgbClr val="102A43"/>
+                </a:solidFill>
+                <a:latin typeface="Calibri"/>
+              </a:rPr>
+              <a:t>•  Mesa de control: inscripción, emparejamientos, resultados y desempates.</a:t>
+            </a:r>
+          </a:p>
+          <a:p>
+            <a:pPr>
+              <a:spcAft>
+                <a:spcPts val="1215"/>
+              </a:spcAft>
+            </a:pPr>
+            <a:r>
+              <a:rPr sz="2700" b="0">
+                <a:solidFill>
+                  <a:srgbClr val="102A43"/>
+                </a:solidFill>
+                <a:latin typeface="Calibri"/>
+              </a:rPr>
+              <a:t>•  Todas las personas completan la lista de cotejo de otra en al menos una ronda.</a:t>
             </a:r>
           </a:p>
         </p:txBody>
@@ -8362,13 +10780,13 @@
         <p:spPr>
           <a:xfrm>
             <a:off x="0" y="0"/>
-            <a:ext cx="12191695" cy="6858000"/>
+            <a:ext cx="12191695" cy="960120"/>
           </a:xfrm>
           <a:prstGeom prst="rect">
             <a:avLst/>
           </a:prstGeom>
           <a:solidFill>
-            <a:srgbClr val="102A43"/>
+            <a:srgbClr val="3172AC"/>
           </a:solidFill>
           <a:ln>
             <a:noFill/>
@@ -8405,8 +10823,8 @@
         </p:nvSpPr>
         <p:spPr>
           <a:xfrm>
-            <a:off x="548640" y="548640"/>
-            <a:ext cx="11064240" cy="457200"/>
+            <a:off x="457200" y="109728"/>
+            <a:ext cx="11277295" cy="777240"/>
           </a:xfrm>
           <a:prstGeom prst="rect">
             <a:avLst/>
@@ -8414,33 +10832,82 @@
           <a:noFill/>
         </p:spPr>
         <p:txBody>
-          <a:bodyPr wrap="square">
+          <a:bodyPr wrap="square" lIns="45720" rIns="45720" anchor="ctr">
             <a:spAutoFit/>
           </a:bodyPr>
           <a:lstStyle/>
           <a:p>
-            <a:r>
-              <a:rPr sz="1400" b="1">
-                <a:solidFill>
-                  <a:srgbClr val="F0B429"/>
-                </a:solidFill>
-                <a:latin typeface="Calibri"/>
-              </a:rPr>
-              <a:t>CASO 1 · DECISIÓN</a:t>
-            </a:r>
-          </a:p>
-        </p:txBody>
-      </p:sp>
-      <p:sp>
-        <p:nvSpPr>
-          <p:cNvPr id="4" name="TextBox 3"/>
+            <a:pPr algn="ctr">
+              <a:spcAft>
+                <a:spcPts val="1530"/>
+              </a:spcAft>
+            </a:pPr>
+            <a:r>
+              <a:rPr sz="3400" b="1">
+                <a:solidFill>
+                  <a:srgbClr val="FFFFFF"/>
+                </a:solidFill>
+                <a:latin typeface="Calibri"/>
+              </a:rPr>
+              <a:t>Caso 1 · ¿Qué decide la persona árbitra?</a:t>
+            </a:r>
+          </a:p>
+        </p:txBody>
+      </p:sp>
+      <p:sp>
+        <p:nvSpPr>
+          <p:cNvPr id="4" name="Rectangle 3"/>
+          <p:cNvSpPr/>
+          <p:nvPr/>
+        </p:nvSpPr>
+        <p:spPr>
+          <a:xfrm>
+            <a:off x="0" y="960120"/>
+            <a:ext cx="12191695" cy="548640"/>
+          </a:xfrm>
+          <a:prstGeom prst="rect">
+            <a:avLst/>
+          </a:prstGeom>
+          <a:solidFill>
+            <a:srgbClr val="4E6178"/>
+          </a:solidFill>
+          <a:ln>
+            <a:noFill/>
+          </a:ln>
+          <a:effectLst/>
+        </p:spPr>
+        <p:style>
+          <a:lnRef idx="1">
+            <a:schemeClr val="accent1"/>
+          </a:lnRef>
+          <a:fillRef idx="3">
+            <a:schemeClr val="accent1"/>
+          </a:fillRef>
+          <a:effectRef idx="2">
+            <a:schemeClr val="accent1"/>
+          </a:effectRef>
+          <a:fontRef idx="minor">
+            <a:schemeClr val="lt1"/>
+          </a:fontRef>
+        </p:style>
+        <p:txBody>
+          <a:bodyPr rtlCol="0" anchor="ctr"/>
+          <a:lstStyle/>
+          <a:p>
+            <a:pPr algn="ctr"/>
+          </a:p>
+        </p:txBody>
+      </p:sp>
+      <p:sp>
+        <p:nvSpPr>
+          <p:cNvPr id="5" name="TextBox 4"/>
           <p:cNvSpPr txBox="1"/>
           <p:nvPr/>
         </p:nvSpPr>
         <p:spPr>
           <a:xfrm>
-            <a:off x="548640" y="1051560"/>
-            <a:ext cx="11064240" cy="822960"/>
+            <a:off x="457200" y="987552"/>
+            <a:ext cx="11277295" cy="502920"/>
           </a:xfrm>
           <a:prstGeom prst="rect">
             <a:avLst/>
@@ -8448,17 +10915,22 @@
           <a:noFill/>
         </p:spPr>
         <p:txBody>
-          <a:bodyPr wrap="square">
+          <a:bodyPr wrap="square" lIns="45720" rIns="45720" anchor="ctr">
             <a:spAutoFit/>
           </a:bodyPr>
           <a:lstStyle/>
           <a:p>
-            <a:r>
-              <a:rPr sz="2600" b="1">
+            <a:pPr algn="ctr">
+              <a:spcAft>
+                <a:spcPts val="945"/>
+              </a:spcAft>
+            </a:pPr>
+            <a:r>
+              <a:rPr sz="2100" b="0">
                 <a:solidFill>
                   <a:srgbClr val="FFFFFF"/>
                 </a:solidFill>
-                <a:latin typeface="Cambria"/>
+                <a:latin typeface="Calibri"/>
               </a:rPr>
               <a:t>Guion A: el enroque dudoso</a:t>
             </a:r>
@@ -8467,14 +10939,14 @@
       </p:sp>
       <p:sp>
         <p:nvSpPr>
-          <p:cNvPr id="5" name="TextBox 4"/>
+          <p:cNvPr id="6" name="TextBox 5"/>
           <p:cNvSpPr txBox="1"/>
           <p:nvPr/>
         </p:nvSpPr>
         <p:spPr>
           <a:xfrm>
-            <a:off x="548640" y="2103120"/>
-            <a:ext cx="11064240" cy="3931920"/>
+            <a:off x="10728655" y="6419088"/>
+            <a:ext cx="1097280" cy="365760"/>
           </a:xfrm>
           <a:prstGeom prst="rect">
             <a:avLst/>
@@ -8482,33 +10954,82 @@
           <a:noFill/>
         </p:spPr>
         <p:txBody>
-          <a:bodyPr wrap="square">
+          <a:bodyPr wrap="square" lIns="45720" rIns="45720">
             <a:spAutoFit/>
           </a:bodyPr>
           <a:lstStyle/>
           <a:p>
-            <a:r>
-              <a:rPr sz="2000" b="0">
-                <a:solidFill>
-                  <a:srgbClr val="CADCFC"/>
-                </a:solidFill>
-                <a:latin typeface="Calibri"/>
-              </a:rPr>
-              <a:t>Se revisan las planillas. Si el rey se movió, el enroque fue una jugada ilegal: se repone la posición, el jugador debe mover el rey (pieza tocada) y el rival recibe la compensación de tiempo que corresponde al ritmo.</a:t>
-            </a:r>
-          </a:p>
-        </p:txBody>
-      </p:sp>
-      <p:sp>
-        <p:nvSpPr>
-          <p:cNvPr id="6" name="TextBox 5"/>
+            <a:pPr algn="ctr">
+              <a:spcAft>
+                <a:spcPts val="540"/>
+              </a:spcAft>
+            </a:pPr>
+            <a:r>
+              <a:rPr sz="1200" b="0">
+                <a:solidFill>
+                  <a:srgbClr val="627D98"/>
+                </a:solidFill>
+                <a:latin typeface="Calibri"/>
+              </a:rPr>
+              <a:t>8</a:t>
+            </a:r>
+          </a:p>
+        </p:txBody>
+      </p:sp>
+      <p:sp>
+        <p:nvSpPr>
+          <p:cNvPr id="7" name="Rectangle 6"/>
+          <p:cNvSpPr/>
+          <p:nvPr/>
+        </p:nvSpPr>
+        <p:spPr>
+          <a:xfrm>
+            <a:off x="457200" y="1783080"/>
+            <a:ext cx="11277295" cy="4389120"/>
+          </a:xfrm>
+          <a:prstGeom prst="rect">
+            <a:avLst/>
+          </a:prstGeom>
+          <a:solidFill>
+            <a:srgbClr val="F0F4F8"/>
+          </a:solidFill>
+          <a:ln>
+            <a:noFill/>
+          </a:ln>
+          <a:effectLst/>
+        </p:spPr>
+        <p:style>
+          <a:lnRef idx="1">
+            <a:schemeClr val="accent1"/>
+          </a:lnRef>
+          <a:fillRef idx="3">
+            <a:schemeClr val="accent1"/>
+          </a:fillRef>
+          <a:effectRef idx="2">
+            <a:schemeClr val="accent1"/>
+          </a:effectRef>
+          <a:fontRef idx="minor">
+            <a:schemeClr val="lt1"/>
+          </a:fontRef>
+        </p:style>
+        <p:txBody>
+          <a:bodyPr rtlCol="0" anchor="ctr"/>
+          <a:lstStyle/>
+          <a:p>
+            <a:pPr algn="ctr"/>
+          </a:p>
+        </p:txBody>
+      </p:sp>
+      <p:sp>
+        <p:nvSpPr>
+          <p:cNvPr id="8" name="TextBox 7"/>
           <p:cNvSpPr txBox="1"/>
           <p:nvPr/>
         </p:nvSpPr>
         <p:spPr>
           <a:xfrm>
-            <a:off x="548640" y="6263640"/>
-            <a:ext cx="11064240" cy="365760"/>
+            <a:off x="822960" y="2011680"/>
+            <a:ext cx="10545775" cy="3931920"/>
           </a:xfrm>
           <a:prstGeom prst="rect">
             <a:avLst/>
@@ -8516,19 +11037,24 @@
           <a:noFill/>
         </p:spPr>
         <p:txBody>
-          <a:bodyPr wrap="square">
+          <a:bodyPr wrap="square" lIns="45720" rIns="45720" anchor="ctr">
             <a:spAutoFit/>
           </a:bodyPr>
           <a:lstStyle/>
           <a:p>
-            <a:r>
-              <a:rPr sz="1100" b="0">
-                <a:solidFill>
-                  <a:srgbClr val="9FB3C8"/>
-                </a:solidFill>
-                <a:latin typeface="Calibri"/>
-              </a:rPr>
-              <a:t>Fuente: Leyes del Ajedrez 2023 (Handbook E.I.01), art. 3.8.2.1, 4.3 y 7.5</a:t>
+            <a:pPr>
+              <a:spcAft>
+                <a:spcPts val="1530"/>
+              </a:spcAft>
+            </a:pPr>
+            <a:r>
+              <a:rPr sz="3400" b="0">
+                <a:solidFill>
+                  <a:srgbClr val="102A43"/>
+                </a:solidFill>
+                <a:latin typeface="Calibri"/>
+              </a:rPr>
+              <a:t>El jugador de negras enroca largo; el de blancas reclama que el rey ya se había movido en la jugada 9 y había vuelto.</a:t>
             </a:r>
           </a:p>
         </p:txBody>
@@ -8553,20 +11079,20 @@
       <p:grpSpPr/>
       <p:sp>
         <p:nvSpPr>
-          <p:cNvPr id="2" name="Oval 1"/>
+          <p:cNvPr id="2" name="Rectangle 1"/>
           <p:cNvSpPr/>
           <p:nvPr/>
         </p:nvSpPr>
         <p:spPr>
           <a:xfrm>
-            <a:off x="548640" y="502920"/>
-            <a:ext cx="502920" cy="502920"/>
-          </a:xfrm>
-          <a:prstGeom prst="ellipse">
+            <a:off x="0" y="0"/>
+            <a:ext cx="12191695" cy="960120"/>
+          </a:xfrm>
+          <a:prstGeom prst="rect">
             <a:avLst/>
           </a:prstGeom>
           <a:solidFill>
-            <a:srgbClr val="DE911D"/>
+            <a:srgbClr val="3172AC"/>
           </a:solidFill>
           <a:ln>
             <a:noFill/>
@@ -8603,8 +11129,8 @@
         </p:nvSpPr>
         <p:spPr>
           <a:xfrm>
-            <a:off x="548640" y="502920"/>
-            <a:ext cx="502920" cy="502920"/>
+            <a:off x="457200" y="109728"/>
+            <a:ext cx="11277295" cy="777240"/>
           </a:xfrm>
           <a:prstGeom prst="rect">
             <a:avLst/>
@@ -8612,108 +11138,44 @@
           <a:noFill/>
         </p:spPr>
         <p:txBody>
-          <a:bodyPr wrap="square">
+          <a:bodyPr wrap="square" lIns="45720" rIns="45720" anchor="ctr">
             <a:spAutoFit/>
           </a:bodyPr>
           <a:lstStyle/>
           <a:p>
-            <a:pPr algn="ctr"/>
-            <a:r>
-              <a:rPr sz="2000" b="0">
-                <a:solidFill>
-                  <a:srgbClr val="0A1F33"/>
-                </a:solidFill>
-                <a:latin typeface="Calibri"/>
-              </a:rPr>
-              <a:t>?</a:t>
-            </a:r>
-          </a:p>
-        </p:txBody>
-      </p:sp>
-      <p:sp>
-        <p:nvSpPr>
-          <p:cNvPr id="4" name="TextBox 3"/>
-          <p:cNvSpPr txBox="1"/>
-          <p:nvPr/>
-        </p:nvSpPr>
-        <p:spPr>
-          <a:xfrm>
-            <a:off x="1234440" y="530352"/>
-            <a:ext cx="9144000" cy="457200"/>
-          </a:xfrm>
-          <a:prstGeom prst="rect">
-            <a:avLst/>
-          </a:prstGeom>
-          <a:noFill/>
-        </p:spPr>
-        <p:txBody>
-          <a:bodyPr wrap="square">
-            <a:spAutoFit/>
-          </a:bodyPr>
-          <a:lstStyle/>
-          <a:p>
-            <a:r>
-              <a:rPr sz="1400" b="1">
-                <a:solidFill>
-                  <a:srgbClr val="DE911D"/>
-                </a:solidFill>
-                <a:latin typeface="Calibri"/>
-              </a:rPr>
-              <a:t>CASO 2 · ¿QUÉ DECIDE LA PERSONA ÁRBITRA?</a:t>
-            </a:r>
-          </a:p>
-        </p:txBody>
-      </p:sp>
-      <p:sp>
-        <p:nvSpPr>
-          <p:cNvPr id="5" name="TextBox 4"/>
-          <p:cNvSpPr txBox="1"/>
-          <p:nvPr/>
-        </p:nvSpPr>
-        <p:spPr>
-          <a:xfrm>
-            <a:off x="548640" y="1051560"/>
-            <a:ext cx="11064240" cy="822960"/>
-          </a:xfrm>
-          <a:prstGeom prst="rect">
-            <a:avLst/>
-          </a:prstGeom>
-          <a:noFill/>
-        </p:spPr>
-        <p:txBody>
-          <a:bodyPr wrap="square">
-            <a:spAutoFit/>
-          </a:bodyPr>
-          <a:lstStyle/>
-          <a:p>
-            <a:r>
-              <a:rPr sz="2600" b="1">
-                <a:solidFill>
-                  <a:srgbClr val="0A1F33"/>
-                </a:solidFill>
-                <a:latin typeface="Cambria"/>
-              </a:rPr>
-              <a:t>Guion B: reclamo de triple repetición</a:t>
-            </a:r>
-          </a:p>
-        </p:txBody>
-      </p:sp>
-      <p:sp>
-        <p:nvSpPr>
-          <p:cNvPr id="6" name="Rectangle 5"/>
+            <a:pPr algn="ctr">
+              <a:spcAft>
+                <a:spcPts val="1530"/>
+              </a:spcAft>
+            </a:pPr>
+            <a:r>
+              <a:rPr sz="3400" b="1">
+                <a:solidFill>
+                  <a:srgbClr val="FFFFFF"/>
+                </a:solidFill>
+                <a:latin typeface="Calibri"/>
+              </a:rPr>
+              <a:t>Caso 1 · Decisión</a:t>
+            </a:r>
+          </a:p>
+        </p:txBody>
+      </p:sp>
+      <p:sp>
+        <p:nvSpPr>
+          <p:cNvPr id="4" name="Rectangle 3"/>
           <p:cNvSpPr/>
           <p:nvPr/>
         </p:nvSpPr>
         <p:spPr>
           <a:xfrm>
-            <a:off x="548640" y="1965960"/>
-            <a:ext cx="11064240" cy="4206240"/>
+            <a:off x="0" y="960120"/>
+            <a:ext cx="12191695" cy="548640"/>
           </a:xfrm>
           <a:prstGeom prst="rect">
             <a:avLst/>
           </a:prstGeom>
           <a:solidFill>
-            <a:srgbClr val="F0F4F8"/>
+            <a:srgbClr val="4E6178"/>
           </a:solidFill>
           <a:ln>
             <a:noFill/>
@@ -8744,14 +11206,92 @@
       </p:sp>
       <p:sp>
         <p:nvSpPr>
+          <p:cNvPr id="5" name="TextBox 4"/>
+          <p:cNvSpPr txBox="1"/>
+          <p:nvPr/>
+        </p:nvSpPr>
+        <p:spPr>
+          <a:xfrm>
+            <a:off x="457200" y="987552"/>
+            <a:ext cx="11277295" cy="502920"/>
+          </a:xfrm>
+          <a:prstGeom prst="rect">
+            <a:avLst/>
+          </a:prstGeom>
+          <a:noFill/>
+        </p:spPr>
+        <p:txBody>
+          <a:bodyPr wrap="square" lIns="45720" rIns="45720" anchor="ctr">
+            <a:spAutoFit/>
+          </a:bodyPr>
+          <a:lstStyle/>
+          <a:p>
+            <a:pPr algn="ctr">
+              <a:spcAft>
+                <a:spcPts val="945"/>
+              </a:spcAft>
+            </a:pPr>
+            <a:r>
+              <a:rPr sz="2100" b="0">
+                <a:solidFill>
+                  <a:srgbClr val="FFFFFF"/>
+                </a:solidFill>
+                <a:latin typeface="Calibri"/>
+              </a:rPr>
+              <a:t>Guion A: el enroque dudoso</a:t>
+            </a:r>
+          </a:p>
+        </p:txBody>
+      </p:sp>
+      <p:sp>
+        <p:nvSpPr>
+          <p:cNvPr id="6" name="TextBox 5"/>
+          <p:cNvSpPr txBox="1"/>
+          <p:nvPr/>
+        </p:nvSpPr>
+        <p:spPr>
+          <a:xfrm>
+            <a:off x="457200" y="6419088"/>
+            <a:ext cx="10180015" cy="365760"/>
+          </a:xfrm>
+          <a:prstGeom prst="rect">
+            <a:avLst/>
+          </a:prstGeom>
+          <a:noFill/>
+        </p:spPr>
+        <p:txBody>
+          <a:bodyPr wrap="square" lIns="45720" rIns="45720">
+            <a:spAutoFit/>
+          </a:bodyPr>
+          <a:lstStyle/>
+          <a:p>
+            <a:pPr>
+              <a:spcAft>
+                <a:spcPts val="540"/>
+              </a:spcAft>
+            </a:pPr>
+            <a:r>
+              <a:rPr sz="1200" b="0">
+                <a:solidFill>
+                  <a:srgbClr val="627D98"/>
+                </a:solidFill>
+                <a:latin typeface="Calibri"/>
+              </a:rPr>
+              <a:t>Fuente: Leyes del Ajedrez 2023 (Handbook E.I.01), art. 3.8.2.1, 4.3 y 7.5</a:t>
+            </a:r>
+          </a:p>
+        </p:txBody>
+      </p:sp>
+      <p:sp>
+        <p:nvSpPr>
           <p:cNvPr id="7" name="TextBox 6"/>
           <p:cNvSpPr txBox="1"/>
           <p:nvPr/>
         </p:nvSpPr>
         <p:spPr>
           <a:xfrm>
-            <a:off x="914400" y="2240280"/>
-            <a:ext cx="10332720" cy="3749039"/>
+            <a:off x="10728655" y="6419088"/>
+            <a:ext cx="1097280" cy="365760"/>
           </a:xfrm>
           <a:prstGeom prst="rect">
             <a:avLst/>
@@ -8759,19 +11299,109 @@
           <a:noFill/>
         </p:spPr>
         <p:txBody>
-          <a:bodyPr wrap="square">
+          <a:bodyPr wrap="square" lIns="45720" rIns="45720">
             <a:spAutoFit/>
           </a:bodyPr>
           <a:lstStyle/>
           <a:p>
-            <a:r>
-              <a:rPr sz="2000" b="0">
-                <a:solidFill>
-                  <a:srgbClr val="334E68"/>
-                </a:solidFill>
-                <a:latin typeface="Calibri"/>
-              </a:rPr>
-              <a:t>Un jugador detiene el reloj y dice que la posición se repitió tres veces. Todavía no hizo la jugada que produciría la tercera repetición.</a:t>
+            <a:pPr algn="ctr">
+              <a:spcAft>
+                <a:spcPts val="540"/>
+              </a:spcAft>
+            </a:pPr>
+            <a:r>
+              <a:rPr sz="1200" b="0">
+                <a:solidFill>
+                  <a:srgbClr val="627D98"/>
+                </a:solidFill>
+                <a:latin typeface="Calibri"/>
+              </a:rPr>
+              <a:t>9</a:t>
+            </a:r>
+          </a:p>
+        </p:txBody>
+      </p:sp>
+      <p:sp>
+        <p:nvSpPr>
+          <p:cNvPr id="8" name="Rectangle 7"/>
+          <p:cNvSpPr/>
+          <p:nvPr/>
+        </p:nvSpPr>
+        <p:spPr>
+          <a:xfrm>
+            <a:off x="457200" y="1783080"/>
+            <a:ext cx="11277295" cy="4389120"/>
+          </a:xfrm>
+          <a:prstGeom prst="rect">
+            <a:avLst/>
+          </a:prstGeom>
+          <a:solidFill>
+            <a:srgbClr val="EEF7EE"/>
+          </a:solidFill>
+          <a:ln w="19050">
+            <a:solidFill>
+              <a:srgbClr val="15803D"/>
+            </a:solidFill>
+          </a:ln>
+          <a:effectLst/>
+        </p:spPr>
+        <p:style>
+          <a:lnRef idx="1">
+            <a:schemeClr val="accent1"/>
+          </a:lnRef>
+          <a:fillRef idx="3">
+            <a:schemeClr val="accent1"/>
+          </a:fillRef>
+          <a:effectRef idx="2">
+            <a:schemeClr val="accent1"/>
+          </a:effectRef>
+          <a:fontRef idx="minor">
+            <a:schemeClr val="lt1"/>
+          </a:fontRef>
+        </p:style>
+        <p:txBody>
+          <a:bodyPr rtlCol="0" anchor="ctr"/>
+          <a:lstStyle/>
+          <a:p>
+            <a:pPr algn="ctr"/>
+          </a:p>
+        </p:txBody>
+      </p:sp>
+      <p:sp>
+        <p:nvSpPr>
+          <p:cNvPr id="9" name="TextBox 8"/>
+          <p:cNvSpPr txBox="1"/>
+          <p:nvPr/>
+        </p:nvSpPr>
+        <p:spPr>
+          <a:xfrm>
+            <a:off x="822960" y="2011680"/>
+            <a:ext cx="10545775" cy="3931920"/>
+          </a:xfrm>
+          <a:prstGeom prst="rect">
+            <a:avLst/>
+          </a:prstGeom>
+          <a:noFill/>
+        </p:spPr>
+        <p:txBody>
+          <a:bodyPr wrap="square" lIns="45720" rIns="45720" anchor="ctr">
+            <a:spAutoFit/>
+          </a:bodyPr>
+          <a:lstStyle/>
+          <a:p>
+            <a:pPr>
+              <a:spcAft>
+                <a:spcPts val="1350"/>
+              </a:spcAft>
+            </a:pPr>
+            <a:r>
+              <a:rPr sz="3000" b="0">
+                <a:solidFill>
+                  <a:srgbClr val="102A43"/>
+                </a:solidFill>
+                <a:latin typeface="Calibri"/>
+              </a:rPr>
+              <a:t>Se revisan las planillas. Si el rey se movió, el enroque fue una jugada ilegal: se repone la posición, el jugador debe mover el rey (pieza tocada) y el rival recibe la compensación de tiempo que corresponde al ritmo.</a:t>
             </a:r>
           </a:p>
         </p:txBody>
@@ -9102,4 +11732,324 @@
   </a:objectDefaults>
   <a:extraClrSchemeLst/>
 </a:theme>
+</file>
+
+<file path=ppt/theme/theme2.xml><?xml version="1.0" encoding="utf-8"?>
+<a:theme xmlns:a="http://schemas.openxmlformats.org/drawingml/2006/main" name="Office Theme">
+  <a:themeElements>
+    <a:clrScheme name="Office">
+      <a:dk1>
+        <a:sysClr val="windowText" lastClr="000000"/>
+      </a:dk1>
+      <a:lt1>
+        <a:sysClr val="window" lastClr="FFFFFF"/>
+      </a:lt1>
+      <a:dk2>
+        <a:srgbClr val="1F497D"/>
+      </a:dk2>
+      <a:lt2>
+        <a:srgbClr val="EEECE1"/>
+      </a:lt2>
+      <a:accent1>
+        <a:srgbClr val="4F81BD"/>
+      </a:accent1>
+      <a:accent2>
+        <a:srgbClr val="C0504D"/>
+      </a:accent2>
+      <a:accent3>
+        <a:srgbClr val="9BBB59"/>
+      </a:accent3>
+      <a:accent4>
+        <a:srgbClr val="8064A2"/>
+      </a:accent4>
+      <a:accent5>
+        <a:srgbClr val="4BACC6"/>
+      </a:accent5>
+      <a:accent6>
+        <a:srgbClr val="F79646"/>
+      </a:accent6>
+      <a:hlink>
+        <a:srgbClr val="0000FF"/>
+      </a:hlink>
+      <a:folHlink>
+        <a:srgbClr val="800080"/>
+      </a:folHlink>
+    </a:clrScheme>
+    <a:fontScheme name="Office">
+      <a:majorFont>
+        <a:latin typeface="Calibri"/>
+        <a:ea typeface=""/>
+        <a:cs typeface=""/>
+        <a:font script="Jpan" typeface="ＭＳ Ｐゴシック"/>
+        <a:font script="Hang" typeface="맑은 고딕"/>
+        <a:font script="Hans" typeface="宋体"/>
+        <a:font script="Hant" typeface="新細明體"/>
+        <a:font script="Arab" typeface="Times New Roman"/>
+        <a:font script="Hebr" typeface="Times New Roman"/>
+        <a:font script="Thai" typeface="Angsana New"/>
+        <a:font script="Ethi" typeface="Nyala"/>
+        <a:font script="Beng" typeface="Vrinda"/>
+        <a:font script="Gujr" typeface="Shruti"/>
+        <a:font script="Khmr" typeface="MoolBoran"/>
+        <a:font script="Knda" typeface="Tunga"/>
+        <a:font script="Guru" typeface="Raavi"/>
+        <a:font script="Cans" typeface="Euphemia"/>
+        <a:font script="Cher" typeface="Plantagenet Cherokee"/>
+        <a:font script="Yiii" typeface="Microsoft Yi Baiti"/>
+        <a:font script="Tibt" typeface="Microsoft Himalaya"/>
+        <a:font script="Thaa" typeface="MV Boli"/>
+        <a:font script="Deva" typeface="Mangal"/>
+        <a:font script="Telu" typeface="Gautami"/>
+        <a:font script="Taml" typeface="Latha"/>
+        <a:font script="Syrc" typeface="Estrangelo Edessa"/>
+        <a:font script="Orya" typeface="Kalinga"/>
+        <a:font script="Mlym" typeface="Kartika"/>
+        <a:font script="Laoo" typeface="DokChampa"/>
+        <a:font script="Sinh" typeface="Iskoola Pota"/>
+        <a:font script="Mong" typeface="Mongolian Baiti"/>
+        <a:font script="Viet" typeface="Times New Roman"/>
+        <a:font script="Uigh" typeface="Microsoft Uighur"/>
+        <a:font script="Geor" typeface="Sylfaen"/>
+      </a:majorFont>
+      <a:minorFont>
+        <a:latin typeface="Calibri"/>
+        <a:ea typeface=""/>
+        <a:cs typeface=""/>
+        <a:font script="Jpan" typeface="ＭＳ Ｐゴシック"/>
+        <a:font script="Hang" typeface="맑은 고딕"/>
+        <a:font script="Hans" typeface="宋体"/>
+        <a:font script="Hant" typeface="新細明體"/>
+        <a:font script="Arab" typeface="Arial"/>
+        <a:font script="Hebr" typeface="Arial"/>
+        <a:font script="Thai" typeface="Cordia New"/>
+        <a:font script="Ethi" typeface="Nyala"/>
+        <a:font script="Beng" typeface="Vrinda"/>
+        <a:font script="Gujr" typeface="Shruti"/>
+        <a:font script="Khmr" typeface="DaunPenh"/>
+        <a:font script="Knda" typeface="Tunga"/>
+        <a:font script="Guru" typeface="Raavi"/>
+        <a:font script="Cans" typeface="Euphemia"/>
+        <a:font script="Cher" typeface="Plantagenet Cherokee"/>
+        <a:font script="Yiii" typeface="Microsoft Yi Baiti"/>
+        <a:font script="Tibt" typeface="Microsoft Himalaya"/>
+        <a:font script="Thaa" typeface="MV Boli"/>
+        <a:font script="Deva" typeface="Mangal"/>
+        <a:font script="Telu" typeface="Gautami"/>
+        <a:font script="Taml" typeface="Latha"/>
+        <a:font script="Syrc" typeface="Estrangelo Edessa"/>
+        <a:font script="Orya" typeface="Kalinga"/>
+        <a:font script="Mlym" typeface="Kartika"/>
+        <a:font script="Laoo" typeface="DokChampa"/>
+        <a:font script="Sinh" typeface="Iskoola Pota"/>
+        <a:font script="Mong" typeface="Mongolian Baiti"/>
+        <a:font script="Viet" typeface="Arial"/>
+        <a:font script="Uigh" typeface="Microsoft Uighur"/>
+        <a:font script="Geor" typeface="Sylfaen"/>
+      </a:minorFont>
+    </a:fontScheme>
+    <a:fmtScheme name="Office">
+      <a:fillStyleLst>
+        <a:solidFill>
+          <a:schemeClr val="phClr"/>
+        </a:solidFill>
+        <a:gradFill rotWithShape="1">
+          <a:gsLst>
+            <a:gs pos="0">
+              <a:schemeClr val="phClr">
+                <a:tint val="50000"/>
+                <a:satMod val="300000"/>
+              </a:schemeClr>
+            </a:gs>
+            <a:gs pos="35000">
+              <a:schemeClr val="phClr">
+                <a:tint val="37000"/>
+                <a:satMod val="300000"/>
+              </a:schemeClr>
+            </a:gs>
+            <a:gs pos="100000">
+              <a:schemeClr val="phClr">
+                <a:tint val="15000"/>
+                <a:satMod val="350000"/>
+              </a:schemeClr>
+            </a:gs>
+          </a:gsLst>
+          <a:lin ang="16200000" scaled="1"/>
+        </a:gradFill>
+        <a:gradFill rotWithShape="1">
+          <a:gsLst>
+            <a:gs pos="0">
+              <a:schemeClr val="phClr">
+                <a:tint val="100000"/>
+                <a:shade val="100000"/>
+                <a:satMod val="130000"/>
+              </a:schemeClr>
+            </a:gs>
+            <a:gs pos="100000">
+              <a:schemeClr val="phClr">
+                <a:tint val="50000"/>
+                <a:shade val="100000"/>
+                <a:satMod val="350000"/>
+              </a:schemeClr>
+            </a:gs>
+          </a:gsLst>
+          <a:lin ang="16200000" scaled="0"/>
+        </a:gradFill>
+      </a:fillStyleLst>
+      <a:lnStyleLst>
+        <a:ln w="9525" cap="flat" cmpd="sng" algn="ctr">
+          <a:solidFill>
+            <a:schemeClr val="phClr">
+              <a:shade val="95000"/>
+              <a:satMod val="105000"/>
+            </a:schemeClr>
+          </a:solidFill>
+          <a:prstDash val="solid"/>
+        </a:ln>
+        <a:ln w="25400" cap="flat" cmpd="sng" algn="ctr">
+          <a:solidFill>
+            <a:schemeClr val="phClr"/>
+          </a:solidFill>
+          <a:prstDash val="solid"/>
+        </a:ln>
+        <a:ln w="38100" cap="flat" cmpd="sng" algn="ctr">
+          <a:solidFill>
+            <a:schemeClr val="phClr"/>
+          </a:solidFill>
+          <a:prstDash val="solid"/>
+        </a:ln>
+      </a:lnStyleLst>
+      <a:effectStyleLst>
+        <a:effectStyle>
+          <a:effectLst>
+            <a:outerShdw blurRad="40000" dist="20000" dir="5400000" rotWithShape="0">
+              <a:srgbClr val="000000">
+                <a:alpha val="38000"/>
+              </a:srgbClr>
+            </a:outerShdw>
+          </a:effectLst>
+        </a:effectStyle>
+        <a:effectStyle>
+          <a:effectLst>
+            <a:outerShdw blurRad="40000" dist="23000" dir="5400000" rotWithShape="0">
+              <a:srgbClr val="000000">
+                <a:alpha val="35000"/>
+              </a:srgbClr>
+            </a:outerShdw>
+          </a:effectLst>
+        </a:effectStyle>
+        <a:effectStyle>
+          <a:effectLst>
+            <a:outerShdw blurRad="40000" dist="23000" dir="5400000" rotWithShape="0">
+              <a:srgbClr val="000000">
+                <a:alpha val="35000"/>
+              </a:srgbClr>
+            </a:outerShdw>
+          </a:effectLst>
+          <a:scene3d>
+            <a:camera prst="orthographicFront">
+              <a:rot lat="0" lon="0" rev="0"/>
+            </a:camera>
+            <a:lightRig rig="threePt" dir="t">
+              <a:rot lat="0" lon="0" rev="1200000"/>
+            </a:lightRig>
+          </a:scene3d>
+          <a:sp3d>
+            <a:bevelT w="63500" h="25400"/>
+          </a:sp3d>
+        </a:effectStyle>
+      </a:effectStyleLst>
+      <a:bgFillStyleLst>
+        <a:solidFill>
+          <a:schemeClr val="phClr"/>
+        </a:solidFill>
+        <a:gradFill rotWithShape="1">
+          <a:gsLst>
+            <a:gs pos="0">
+              <a:schemeClr val="phClr">
+                <a:tint val="40000"/>
+                <a:satMod val="350000"/>
+              </a:schemeClr>
+            </a:gs>
+            <a:gs pos="40000">
+              <a:schemeClr val="phClr">
+                <a:tint val="45000"/>
+                <a:shade val="99000"/>
+                <a:satMod val="350000"/>
+              </a:schemeClr>
+            </a:gs>
+            <a:gs pos="100000">
+              <a:schemeClr val="phClr">
+                <a:shade val="20000"/>
+                <a:satMod val="255000"/>
+              </a:schemeClr>
+            </a:gs>
+          </a:gsLst>
+          <a:path path="circle">
+            <a:fillToRect l="50000" t="-80000" r="50000" b="180000"/>
+          </a:path>
+        </a:gradFill>
+        <a:gradFill rotWithShape="1">
+          <a:gsLst>
+            <a:gs pos="0">
+              <a:schemeClr val="phClr">
+                <a:tint val="80000"/>
+                <a:satMod val="300000"/>
+              </a:schemeClr>
+            </a:gs>
+            <a:gs pos="100000">
+              <a:schemeClr val="phClr">
+                <a:shade val="30000"/>
+                <a:satMod val="200000"/>
+              </a:schemeClr>
+            </a:gs>
+          </a:gsLst>
+          <a:path path="circle">
+            <a:fillToRect l="50000" t="50000" r="50000" b="50000"/>
+          </a:path>
+        </a:gradFill>
+      </a:bgFillStyleLst>
+    </a:fmtScheme>
+  </a:themeElements>
+  <a:objectDefaults>
+    <a:spDef>
+      <a:spPr/>
+      <a:bodyPr/>
+      <a:lstStyle/>
+      <a:style>
+        <a:lnRef idx="1">
+          <a:schemeClr val="accent1"/>
+        </a:lnRef>
+        <a:fillRef idx="3">
+          <a:schemeClr val="accent1"/>
+        </a:fillRef>
+        <a:effectRef idx="2">
+          <a:schemeClr val="accent1"/>
+        </a:effectRef>
+        <a:fontRef idx="minor">
+          <a:schemeClr val="lt1"/>
+        </a:fontRef>
+      </a:style>
+    </a:spDef>
+    <a:lnDef>
+      <a:spPr/>
+      <a:bodyPr/>
+      <a:lstStyle/>
+      <a:style>
+        <a:lnRef idx="2">
+          <a:schemeClr val="accent1"/>
+        </a:lnRef>
+        <a:fillRef idx="0">
+          <a:schemeClr val="accent1"/>
+        </a:fillRef>
+        <a:effectRef idx="1">
+          <a:schemeClr val="accent1"/>
+        </a:effectRef>
+        <a:fontRef idx="minor">
+          <a:schemeClr val="tx1"/>
+        </a:fontRef>
+      </a:style>
+    </a:lnDef>
+  </a:objectDefaults>
+  <a:extraClrSchemeLst/>
+</a:theme>
 </file>